--- a/Documentation/CDCM Diagrams .pptx
+++ b/Documentation/CDCM Diagrams .pptx
@@ -4,8 +4,13 @@
   <p:sldMasterIdLst>
     <p:sldMasterId id="2147483648" r:id="rId1"/>
   </p:sldMasterIdLst>
+  <p:notesMasterIdLst>
+    <p:notesMasterId r:id="rId5"/>
+  </p:notesMasterIdLst>
   <p:sldIdLst>
     <p:sldId id="256" r:id="rId2"/>
+    <p:sldId id="258" r:id="rId3"/>
+    <p:sldId id="257" r:id="rId4"/>
   </p:sldIdLst>
   <p:sldSz cx="12192000" cy="6858000"/>
   <p:notesSz cx="6858000" cy="9144000"/>
@@ -104,7 +109,445 @@
       </a:defRPr>
     </a:lvl9pPr>
   </p:defaultTextStyle>
+  <p:extLst>
+    <p:ext uri="{EFAFB233-063F-42B5-8137-9DF3F51BA10A}">
+      <p15:sldGuideLst xmlns:p15="http://schemas.microsoft.com/office/powerpoint/2012/main"/>
+    </p:ext>
+  </p:extLst>
 </p:presentation>
+</file>
+
+<file path=ppt/notesMasters/notesMaster1.xml><?xml version="1.0" encoding="utf-8"?>
+<p:notesMaster xmlns:a="http://schemas.openxmlformats.org/drawingml/2006/main" xmlns:r="http://schemas.openxmlformats.org/officeDocument/2006/relationships" xmlns:p="http://schemas.openxmlformats.org/presentationml/2006/main">
+  <p:cSld>
+    <p:bg>
+      <p:bgRef idx="1001">
+        <a:schemeClr val="bg1"/>
+      </p:bgRef>
+    </p:bg>
+    <p:spTree>
+      <p:nvGrpSpPr>
+        <p:cNvPr id="1" name=""/>
+        <p:cNvGrpSpPr/>
+        <p:nvPr/>
+      </p:nvGrpSpPr>
+      <p:grpSpPr>
+        <a:xfrm>
+          <a:off x="0" y="0"/>
+          <a:ext cx="0" cy="0"/>
+          <a:chOff x="0" y="0"/>
+          <a:chExt cx="0" cy="0"/>
+        </a:xfrm>
+      </p:grpSpPr>
+      <p:sp>
+        <p:nvSpPr>
+          <p:cNvPr id="2" name="Header Placeholder 1"/>
+          <p:cNvSpPr>
+            <a:spLocks noGrp="1"/>
+          </p:cNvSpPr>
+          <p:nvPr>
+            <p:ph type="hdr" sz="quarter"/>
+          </p:nvPr>
+        </p:nvSpPr>
+        <p:spPr>
+          <a:xfrm>
+            <a:off x="0" y="0"/>
+            <a:ext cx="2971800" cy="458788"/>
+          </a:xfrm>
+          <a:prstGeom prst="rect">
+            <a:avLst/>
+          </a:prstGeom>
+        </p:spPr>
+        <p:txBody>
+          <a:bodyPr vert="horz" lIns="91440" tIns="45720" rIns="91440" bIns="45720" rtlCol="0"/>
+          <a:lstStyle>
+            <a:lvl1pPr algn="l">
+              <a:defRPr sz="1200"/>
+            </a:lvl1pPr>
+          </a:lstStyle>
+          <a:p>
+            <a:endParaRPr lang="en-US"/>
+          </a:p>
+        </p:txBody>
+      </p:sp>
+      <p:sp>
+        <p:nvSpPr>
+          <p:cNvPr id="3" name="Date Placeholder 2"/>
+          <p:cNvSpPr>
+            <a:spLocks noGrp="1"/>
+          </p:cNvSpPr>
+          <p:nvPr>
+            <p:ph type="dt" idx="1"/>
+          </p:nvPr>
+        </p:nvSpPr>
+        <p:spPr>
+          <a:xfrm>
+            <a:off x="3884613" y="0"/>
+            <a:ext cx="2971800" cy="458788"/>
+          </a:xfrm>
+          <a:prstGeom prst="rect">
+            <a:avLst/>
+          </a:prstGeom>
+        </p:spPr>
+        <p:txBody>
+          <a:bodyPr vert="horz" lIns="91440" tIns="45720" rIns="91440" bIns="45720" rtlCol="0"/>
+          <a:lstStyle>
+            <a:lvl1pPr algn="r">
+              <a:defRPr sz="1200"/>
+            </a:lvl1pPr>
+          </a:lstStyle>
+          <a:p>
+            <a:fld id="{94EF214D-1F76-F841-A2D3-D2CDEC996226}" type="datetimeFigureOut">
+              <a:rPr lang="en-US" smtClean="0"/>
+              <a:t>8/11/25</a:t>
+            </a:fld>
+            <a:endParaRPr lang="en-US"/>
+          </a:p>
+        </p:txBody>
+      </p:sp>
+      <p:sp>
+        <p:nvSpPr>
+          <p:cNvPr id="4" name="Slide Image Placeholder 3"/>
+          <p:cNvSpPr>
+            <a:spLocks noGrp="1" noRot="1" noChangeAspect="1"/>
+          </p:cNvSpPr>
+          <p:nvPr>
+            <p:ph type="sldImg" idx="2"/>
+          </p:nvPr>
+        </p:nvSpPr>
+        <p:spPr>
+          <a:xfrm>
+            <a:off x="685800" y="1143000"/>
+            <a:ext cx="5486400" cy="3086100"/>
+          </a:xfrm>
+          <a:prstGeom prst="rect">
+            <a:avLst/>
+          </a:prstGeom>
+          <a:noFill/>
+          <a:ln w="12700">
+            <a:solidFill>
+              <a:prstClr val="black"/>
+            </a:solidFill>
+          </a:ln>
+        </p:spPr>
+        <p:txBody>
+          <a:bodyPr vert="horz" lIns="91440" tIns="45720" rIns="91440" bIns="45720" rtlCol="0" anchor="ctr"/>
+          <a:lstStyle/>
+          <a:p>
+            <a:endParaRPr lang="en-US"/>
+          </a:p>
+        </p:txBody>
+      </p:sp>
+      <p:sp>
+        <p:nvSpPr>
+          <p:cNvPr id="5" name="Notes Placeholder 4"/>
+          <p:cNvSpPr>
+            <a:spLocks noGrp="1"/>
+          </p:cNvSpPr>
+          <p:nvPr>
+            <p:ph type="body" sz="quarter" idx="3"/>
+          </p:nvPr>
+        </p:nvSpPr>
+        <p:spPr>
+          <a:xfrm>
+            <a:off x="685800" y="4400550"/>
+            <a:ext cx="5486400" cy="3600450"/>
+          </a:xfrm>
+          <a:prstGeom prst="rect">
+            <a:avLst/>
+          </a:prstGeom>
+        </p:spPr>
+        <p:txBody>
+          <a:bodyPr vert="horz" lIns="91440" tIns="45720" rIns="91440" bIns="45720" rtlCol="0"/>
+          <a:lstStyle/>
+          <a:p>
+            <a:pPr lvl="0"/>
+            <a:r>
+              <a:rPr lang="en-US"/>
+              <a:t>Click to edit Master text styles</a:t>
+            </a:r>
+          </a:p>
+          <a:p>
+            <a:pPr lvl="1"/>
+            <a:r>
+              <a:rPr lang="en-US"/>
+              <a:t>Second level</a:t>
+            </a:r>
+          </a:p>
+          <a:p>
+            <a:pPr lvl="2"/>
+            <a:r>
+              <a:rPr lang="en-US"/>
+              <a:t>Third level</a:t>
+            </a:r>
+          </a:p>
+          <a:p>
+            <a:pPr lvl="3"/>
+            <a:r>
+              <a:rPr lang="en-US"/>
+              <a:t>Fourth level</a:t>
+            </a:r>
+          </a:p>
+          <a:p>
+            <a:pPr lvl="4"/>
+            <a:r>
+              <a:rPr lang="en-US"/>
+              <a:t>Fifth level</a:t>
+            </a:r>
+          </a:p>
+        </p:txBody>
+      </p:sp>
+      <p:sp>
+        <p:nvSpPr>
+          <p:cNvPr id="6" name="Footer Placeholder 5"/>
+          <p:cNvSpPr>
+            <a:spLocks noGrp="1"/>
+          </p:cNvSpPr>
+          <p:nvPr>
+            <p:ph type="ftr" sz="quarter" idx="4"/>
+          </p:nvPr>
+        </p:nvSpPr>
+        <p:spPr>
+          <a:xfrm>
+            <a:off x="0" y="8685213"/>
+            <a:ext cx="2971800" cy="458787"/>
+          </a:xfrm>
+          <a:prstGeom prst="rect">
+            <a:avLst/>
+          </a:prstGeom>
+        </p:spPr>
+        <p:txBody>
+          <a:bodyPr vert="horz" lIns="91440" tIns="45720" rIns="91440" bIns="45720" rtlCol="0" anchor="b"/>
+          <a:lstStyle>
+            <a:lvl1pPr algn="l">
+              <a:defRPr sz="1200"/>
+            </a:lvl1pPr>
+          </a:lstStyle>
+          <a:p>
+            <a:endParaRPr lang="en-US"/>
+          </a:p>
+        </p:txBody>
+      </p:sp>
+      <p:sp>
+        <p:nvSpPr>
+          <p:cNvPr id="7" name="Slide Number Placeholder 6"/>
+          <p:cNvSpPr>
+            <a:spLocks noGrp="1"/>
+          </p:cNvSpPr>
+          <p:nvPr>
+            <p:ph type="sldNum" sz="quarter" idx="5"/>
+          </p:nvPr>
+        </p:nvSpPr>
+        <p:spPr>
+          <a:xfrm>
+            <a:off x="3884613" y="8685213"/>
+            <a:ext cx="2971800" cy="458787"/>
+          </a:xfrm>
+          <a:prstGeom prst="rect">
+            <a:avLst/>
+          </a:prstGeom>
+        </p:spPr>
+        <p:txBody>
+          <a:bodyPr vert="horz" lIns="91440" tIns="45720" rIns="91440" bIns="45720" rtlCol="0" anchor="b"/>
+          <a:lstStyle>
+            <a:lvl1pPr algn="r">
+              <a:defRPr sz="1200"/>
+            </a:lvl1pPr>
+          </a:lstStyle>
+          <a:p>
+            <a:fld id="{D38F2629-DFF2-3040-B162-07C266238A5B}" type="slidenum">
+              <a:rPr lang="en-US" smtClean="0"/>
+              <a:t>‹#›</a:t>
+            </a:fld>
+            <a:endParaRPr lang="en-US"/>
+          </a:p>
+        </p:txBody>
+      </p:sp>
+    </p:spTree>
+    <p:extLst>
+      <p:ext uri="{BB962C8B-B14F-4D97-AF65-F5344CB8AC3E}">
+        <p14:creationId xmlns:p14="http://schemas.microsoft.com/office/powerpoint/2010/main" val="1538957056"/>
+      </p:ext>
+    </p:extLst>
+  </p:cSld>
+  <p:clrMap bg1="lt1" tx1="dk1" bg2="lt2" tx2="dk2" accent1="accent1" accent2="accent2" accent3="accent3" accent4="accent4" accent5="accent5" accent6="accent6" hlink="hlink" folHlink="folHlink"/>
+  <p:notesStyle>
+    <a:lvl1pPr marL="0" algn="l" defTabSz="914400" rtl="0" eaLnBrk="1" latinLnBrk="0" hangingPunct="1">
+      <a:defRPr sz="1200" kern="1200">
+        <a:solidFill>
+          <a:schemeClr val="tx1"/>
+        </a:solidFill>
+        <a:latin typeface="+mn-lt"/>
+        <a:ea typeface="+mn-ea"/>
+        <a:cs typeface="+mn-cs"/>
+      </a:defRPr>
+    </a:lvl1pPr>
+    <a:lvl2pPr marL="457200" algn="l" defTabSz="914400" rtl="0" eaLnBrk="1" latinLnBrk="0" hangingPunct="1">
+      <a:defRPr sz="1200" kern="1200">
+        <a:solidFill>
+          <a:schemeClr val="tx1"/>
+        </a:solidFill>
+        <a:latin typeface="+mn-lt"/>
+        <a:ea typeface="+mn-ea"/>
+        <a:cs typeface="+mn-cs"/>
+      </a:defRPr>
+    </a:lvl2pPr>
+    <a:lvl3pPr marL="914400" algn="l" defTabSz="914400" rtl="0" eaLnBrk="1" latinLnBrk="0" hangingPunct="1">
+      <a:defRPr sz="1200" kern="1200">
+        <a:solidFill>
+          <a:schemeClr val="tx1"/>
+        </a:solidFill>
+        <a:latin typeface="+mn-lt"/>
+        <a:ea typeface="+mn-ea"/>
+        <a:cs typeface="+mn-cs"/>
+      </a:defRPr>
+    </a:lvl3pPr>
+    <a:lvl4pPr marL="1371600" algn="l" defTabSz="914400" rtl="0" eaLnBrk="1" latinLnBrk="0" hangingPunct="1">
+      <a:defRPr sz="1200" kern="1200">
+        <a:solidFill>
+          <a:schemeClr val="tx1"/>
+        </a:solidFill>
+        <a:latin typeface="+mn-lt"/>
+        <a:ea typeface="+mn-ea"/>
+        <a:cs typeface="+mn-cs"/>
+      </a:defRPr>
+    </a:lvl4pPr>
+    <a:lvl5pPr marL="1828800" algn="l" defTabSz="914400" rtl="0" eaLnBrk="1" latinLnBrk="0" hangingPunct="1">
+      <a:defRPr sz="1200" kern="1200">
+        <a:solidFill>
+          <a:schemeClr val="tx1"/>
+        </a:solidFill>
+        <a:latin typeface="+mn-lt"/>
+        <a:ea typeface="+mn-ea"/>
+        <a:cs typeface="+mn-cs"/>
+      </a:defRPr>
+    </a:lvl5pPr>
+    <a:lvl6pPr marL="2286000" algn="l" defTabSz="914400" rtl="0" eaLnBrk="1" latinLnBrk="0" hangingPunct="1">
+      <a:defRPr sz="1200" kern="1200">
+        <a:solidFill>
+          <a:schemeClr val="tx1"/>
+        </a:solidFill>
+        <a:latin typeface="+mn-lt"/>
+        <a:ea typeface="+mn-ea"/>
+        <a:cs typeface="+mn-cs"/>
+      </a:defRPr>
+    </a:lvl6pPr>
+    <a:lvl7pPr marL="2743200" algn="l" defTabSz="914400" rtl="0" eaLnBrk="1" latinLnBrk="0" hangingPunct="1">
+      <a:defRPr sz="1200" kern="1200">
+        <a:solidFill>
+          <a:schemeClr val="tx1"/>
+        </a:solidFill>
+        <a:latin typeface="+mn-lt"/>
+        <a:ea typeface="+mn-ea"/>
+        <a:cs typeface="+mn-cs"/>
+      </a:defRPr>
+    </a:lvl7pPr>
+    <a:lvl8pPr marL="3200400" algn="l" defTabSz="914400" rtl="0" eaLnBrk="1" latinLnBrk="0" hangingPunct="1">
+      <a:defRPr sz="1200" kern="1200">
+        <a:solidFill>
+          <a:schemeClr val="tx1"/>
+        </a:solidFill>
+        <a:latin typeface="+mn-lt"/>
+        <a:ea typeface="+mn-ea"/>
+        <a:cs typeface="+mn-cs"/>
+      </a:defRPr>
+    </a:lvl8pPr>
+    <a:lvl9pPr marL="3657600" algn="l" defTabSz="914400" rtl="0" eaLnBrk="1" latinLnBrk="0" hangingPunct="1">
+      <a:defRPr sz="1200" kern="1200">
+        <a:solidFill>
+          <a:schemeClr val="tx1"/>
+        </a:solidFill>
+        <a:latin typeface="+mn-lt"/>
+        <a:ea typeface="+mn-ea"/>
+        <a:cs typeface="+mn-cs"/>
+      </a:defRPr>
+    </a:lvl9pPr>
+  </p:notesStyle>
+</p:notesMaster>
+</file>
+
+<file path=ppt/notesSlides/notesSlide1.xml><?xml version="1.0" encoding="utf-8"?>
+<p:notes xmlns:a="http://schemas.openxmlformats.org/drawingml/2006/main" xmlns:r="http://schemas.openxmlformats.org/officeDocument/2006/relationships" xmlns:p="http://schemas.openxmlformats.org/presentationml/2006/main">
+  <p:cSld>
+    <p:spTree>
+      <p:nvGrpSpPr>
+        <p:cNvPr id="1" name=""/>
+        <p:cNvGrpSpPr/>
+        <p:nvPr/>
+      </p:nvGrpSpPr>
+      <p:grpSpPr>
+        <a:xfrm>
+          <a:off x="0" y="0"/>
+          <a:ext cx="0" cy="0"/>
+          <a:chOff x="0" y="0"/>
+          <a:chExt cx="0" cy="0"/>
+        </a:xfrm>
+      </p:grpSpPr>
+      <p:sp>
+        <p:nvSpPr>
+          <p:cNvPr id="2" name="Slide Image Placeholder 1"/>
+          <p:cNvSpPr>
+            <a:spLocks noGrp="1" noRot="1" noChangeAspect="1"/>
+          </p:cNvSpPr>
+          <p:nvPr>
+            <p:ph type="sldImg"/>
+          </p:nvPr>
+        </p:nvSpPr>
+        <p:spPr/>
+      </p:sp>
+      <p:sp>
+        <p:nvSpPr>
+          <p:cNvPr id="3" name="Notes Placeholder 2"/>
+          <p:cNvSpPr>
+            <a:spLocks noGrp="1"/>
+          </p:cNvSpPr>
+          <p:nvPr>
+            <p:ph type="body" idx="1"/>
+          </p:nvPr>
+        </p:nvSpPr>
+        <p:spPr/>
+        <p:txBody>
+          <a:bodyPr/>
+          <a:lstStyle/>
+          <a:p>
+            <a:endParaRPr lang="en-US" dirty="0"/>
+          </a:p>
+        </p:txBody>
+      </p:sp>
+      <p:sp>
+        <p:nvSpPr>
+          <p:cNvPr id="4" name="Slide Number Placeholder 3"/>
+          <p:cNvSpPr>
+            <a:spLocks noGrp="1"/>
+          </p:cNvSpPr>
+          <p:nvPr>
+            <p:ph type="sldNum" sz="quarter" idx="5"/>
+          </p:nvPr>
+        </p:nvSpPr>
+        <p:spPr/>
+        <p:txBody>
+          <a:bodyPr/>
+          <a:lstStyle/>
+          <a:p>
+            <a:fld id="{D38F2629-DFF2-3040-B162-07C266238A5B}" type="slidenum">
+              <a:rPr lang="en-US" smtClean="0"/>
+              <a:t>2</a:t>
+            </a:fld>
+            <a:endParaRPr lang="en-US"/>
+          </a:p>
+        </p:txBody>
+      </p:sp>
+    </p:spTree>
+    <p:extLst>
+      <p:ext uri="{BB962C8B-B14F-4D97-AF65-F5344CB8AC3E}">
+        <p14:creationId xmlns:p14="http://schemas.microsoft.com/office/powerpoint/2010/main" val="2194631338"/>
+      </p:ext>
+    </p:extLst>
+  </p:cSld>
+  <p:clrMapOvr>
+    <a:masterClrMapping/>
+  </p:clrMapOvr>
+</p:notes>
 </file>
 
 <file path=ppt/slideLayouts/slideLayout1.xml><?xml version="1.0" encoding="utf-8"?>
@@ -254,7 +697,7 @@
           <a:p>
             <a:fld id="{E90F38FF-858C-0643-98FD-89636F5F9C82}" type="datetimeFigureOut">
               <a:rPr lang="en-US" smtClean="0"/>
-              <a:t>8/8/25</a:t>
+              <a:t>8/11/25</a:t>
             </a:fld>
             <a:endParaRPr lang="en-US"/>
           </a:p>
@@ -452,7 +895,7 @@
           <a:p>
             <a:fld id="{E90F38FF-858C-0643-98FD-89636F5F9C82}" type="datetimeFigureOut">
               <a:rPr lang="en-US" smtClean="0"/>
-              <a:t>8/8/25</a:t>
+              <a:t>8/11/25</a:t>
             </a:fld>
             <a:endParaRPr lang="en-US"/>
           </a:p>
@@ -660,7 +1103,7 @@
           <a:p>
             <a:fld id="{E90F38FF-858C-0643-98FD-89636F5F9C82}" type="datetimeFigureOut">
               <a:rPr lang="en-US" smtClean="0"/>
-              <a:t>8/8/25</a:t>
+              <a:t>8/11/25</a:t>
             </a:fld>
             <a:endParaRPr lang="en-US"/>
           </a:p>
@@ -858,7 +1301,7 @@
           <a:p>
             <a:fld id="{E90F38FF-858C-0643-98FD-89636F5F9C82}" type="datetimeFigureOut">
               <a:rPr lang="en-US" smtClean="0"/>
-              <a:t>8/8/25</a:t>
+              <a:t>8/11/25</a:t>
             </a:fld>
             <a:endParaRPr lang="en-US"/>
           </a:p>
@@ -1133,7 +1576,7 @@
           <a:p>
             <a:fld id="{E90F38FF-858C-0643-98FD-89636F5F9C82}" type="datetimeFigureOut">
               <a:rPr lang="en-US" smtClean="0"/>
-              <a:t>8/8/25</a:t>
+              <a:t>8/11/25</a:t>
             </a:fld>
             <a:endParaRPr lang="en-US"/>
           </a:p>
@@ -1398,7 +1841,7 @@
           <a:p>
             <a:fld id="{E90F38FF-858C-0643-98FD-89636F5F9C82}" type="datetimeFigureOut">
               <a:rPr lang="en-US" smtClean="0"/>
-              <a:t>8/8/25</a:t>
+              <a:t>8/11/25</a:t>
             </a:fld>
             <a:endParaRPr lang="en-US"/>
           </a:p>
@@ -1810,7 +2253,7 @@
           <a:p>
             <a:fld id="{E90F38FF-858C-0643-98FD-89636F5F9C82}" type="datetimeFigureOut">
               <a:rPr lang="en-US" smtClean="0"/>
-              <a:t>8/8/25</a:t>
+              <a:t>8/11/25</a:t>
             </a:fld>
             <a:endParaRPr lang="en-US"/>
           </a:p>
@@ -1951,7 +2394,7 @@
           <a:p>
             <a:fld id="{E90F38FF-858C-0643-98FD-89636F5F9C82}" type="datetimeFigureOut">
               <a:rPr lang="en-US" smtClean="0"/>
-              <a:t>8/8/25</a:t>
+              <a:t>8/11/25</a:t>
             </a:fld>
             <a:endParaRPr lang="en-US"/>
           </a:p>
@@ -2064,7 +2507,7 @@
           <a:p>
             <a:fld id="{E90F38FF-858C-0643-98FD-89636F5F9C82}" type="datetimeFigureOut">
               <a:rPr lang="en-US" smtClean="0"/>
-              <a:t>8/8/25</a:t>
+              <a:t>8/11/25</a:t>
             </a:fld>
             <a:endParaRPr lang="en-US"/>
           </a:p>
@@ -2375,7 +2818,7 @@
           <a:p>
             <a:fld id="{E90F38FF-858C-0643-98FD-89636F5F9C82}" type="datetimeFigureOut">
               <a:rPr lang="en-US" smtClean="0"/>
-              <a:t>8/8/25</a:t>
+              <a:t>8/11/25</a:t>
             </a:fld>
             <a:endParaRPr lang="en-US"/>
           </a:p>
@@ -2663,7 +3106,7 @@
           <a:p>
             <a:fld id="{E90F38FF-858C-0643-98FD-89636F5F9C82}" type="datetimeFigureOut">
               <a:rPr lang="en-US" smtClean="0"/>
-              <a:t>8/8/25</a:t>
+              <a:t>8/11/25</a:t>
             </a:fld>
             <a:endParaRPr lang="en-US"/>
           </a:p>
@@ -2904,7 +3347,7 @@
           <a:p>
             <a:fld id="{E90F38FF-858C-0643-98FD-89636F5F9C82}" type="datetimeFigureOut">
               <a:rPr lang="en-US" smtClean="0"/>
-              <a:t>8/8/25</a:t>
+              <a:t>8/11/25</a:t>
             </a:fld>
             <a:endParaRPr lang="en-US"/>
           </a:p>
@@ -4313,10 +4756,1504 @@
           </a:p>
         </p:txBody>
       </p:sp>
+      <p:sp>
+        <p:nvSpPr>
+          <p:cNvPr id="2" name="TextBox 1">
+            <a:extLst>
+              <a:ext uri="{FF2B5EF4-FFF2-40B4-BE49-F238E27FC236}">
+                <a16:creationId xmlns:a16="http://schemas.microsoft.com/office/drawing/2014/main" id="{1AC286A1-0FB4-012E-E44B-50F564292BED}"/>
+              </a:ext>
+            </a:extLst>
+          </p:cNvPr>
+          <p:cNvSpPr txBox="1"/>
+          <p:nvPr/>
+        </p:nvSpPr>
+        <p:spPr>
+          <a:xfrm>
+            <a:off x="11440886" y="6368535"/>
+            <a:ext cx="510076" cy="369332"/>
+          </a:xfrm>
+          <a:prstGeom prst="rect">
+            <a:avLst/>
+          </a:prstGeom>
+          <a:noFill/>
+        </p:spPr>
+        <p:txBody>
+          <a:bodyPr wrap="none" rtlCol="0">
+            <a:spAutoFit/>
+          </a:bodyPr>
+          <a:lstStyle/>
+          <a:p>
+            <a:r>
+              <a:rPr lang="en-US" dirty="0"/>
+              <a:t>8/9</a:t>
+            </a:r>
+          </a:p>
+        </p:txBody>
+      </p:sp>
     </p:spTree>
     <p:extLst>
       <p:ext uri="{BB962C8B-B14F-4D97-AF65-F5344CB8AC3E}">
         <p14:creationId xmlns:p14="http://schemas.microsoft.com/office/powerpoint/2010/main" val="3483772906"/>
+      </p:ext>
+    </p:extLst>
+  </p:cSld>
+  <p:clrMapOvr>
+    <a:masterClrMapping/>
+  </p:clrMapOvr>
+</p:sld>
+</file>
+
+<file path=ppt/slides/slide2.xml><?xml version="1.0" encoding="utf-8"?>
+<p:sld xmlns:a="http://schemas.openxmlformats.org/drawingml/2006/main" xmlns:r="http://schemas.openxmlformats.org/officeDocument/2006/relationships" xmlns:p="http://schemas.openxmlformats.org/presentationml/2006/main">
+  <p:cSld>
+    <p:spTree>
+      <p:nvGrpSpPr>
+        <p:cNvPr id="1" name=""/>
+        <p:cNvGrpSpPr/>
+        <p:nvPr/>
+      </p:nvGrpSpPr>
+      <p:grpSpPr>
+        <a:xfrm>
+          <a:off x="0" y="0"/>
+          <a:ext cx="0" cy="0"/>
+          <a:chOff x="0" y="0"/>
+          <a:chExt cx="0" cy="0"/>
+        </a:xfrm>
+      </p:grpSpPr>
+      <p:sp>
+        <p:nvSpPr>
+          <p:cNvPr id="2" name="TextBox 1">
+            <a:extLst>
+              <a:ext uri="{FF2B5EF4-FFF2-40B4-BE49-F238E27FC236}">
+                <a16:creationId xmlns:a16="http://schemas.microsoft.com/office/drawing/2014/main" id="{EF7D9F39-8197-081B-A549-CF574EBC258C}"/>
+              </a:ext>
+            </a:extLst>
+          </p:cNvPr>
+          <p:cNvSpPr txBox="1"/>
+          <p:nvPr/>
+        </p:nvSpPr>
+        <p:spPr>
+          <a:xfrm>
+            <a:off x="892629" y="1317171"/>
+            <a:ext cx="2301143" cy="369332"/>
+          </a:xfrm>
+          <a:prstGeom prst="rect">
+            <a:avLst/>
+          </a:prstGeom>
+          <a:noFill/>
+        </p:spPr>
+        <p:txBody>
+          <a:bodyPr wrap="none" rtlCol="0">
+            <a:spAutoFit/>
+          </a:bodyPr>
+          <a:lstStyle/>
+          <a:p>
+            <a:r>
+              <a:rPr lang="en-US" dirty="0"/>
+              <a:t>Physical Component </a:t>
+            </a:r>
+          </a:p>
+        </p:txBody>
+      </p:sp>
+      <p:sp>
+        <p:nvSpPr>
+          <p:cNvPr id="3" name="TextBox 2">
+            <a:extLst>
+              <a:ext uri="{FF2B5EF4-FFF2-40B4-BE49-F238E27FC236}">
+                <a16:creationId xmlns:a16="http://schemas.microsoft.com/office/drawing/2014/main" id="{AFF3D70F-8E2B-BE77-AD79-2CB76195B515}"/>
+              </a:ext>
+            </a:extLst>
+          </p:cNvPr>
+          <p:cNvSpPr txBox="1"/>
+          <p:nvPr/>
+        </p:nvSpPr>
+        <p:spPr>
+          <a:xfrm>
+            <a:off x="1399763" y="3386239"/>
+            <a:ext cx="2409890" cy="369332"/>
+          </a:xfrm>
+          <a:prstGeom prst="rect">
+            <a:avLst/>
+          </a:prstGeom>
+          <a:noFill/>
+        </p:spPr>
+        <p:txBody>
+          <a:bodyPr wrap="none" rtlCol="0">
+            <a:spAutoFit/>
+          </a:bodyPr>
+          <a:lstStyle/>
+          <a:p>
+            <a:r>
+              <a:rPr lang="en-US" dirty="0"/>
+              <a:t>Electrical Component </a:t>
+            </a:r>
+          </a:p>
+        </p:txBody>
+      </p:sp>
+      <p:sp>
+        <p:nvSpPr>
+          <p:cNvPr id="5" name="TextBox 4">
+            <a:extLst>
+              <a:ext uri="{FF2B5EF4-FFF2-40B4-BE49-F238E27FC236}">
+                <a16:creationId xmlns:a16="http://schemas.microsoft.com/office/drawing/2014/main" id="{3A07B290-F50E-A476-FBB5-74C5DBE41A66}"/>
+              </a:ext>
+            </a:extLst>
+          </p:cNvPr>
+          <p:cNvSpPr txBox="1"/>
+          <p:nvPr/>
+        </p:nvSpPr>
+        <p:spPr>
+          <a:xfrm>
+            <a:off x="4634633" y="2220685"/>
+            <a:ext cx="2136932" cy="369332"/>
+          </a:xfrm>
+          <a:prstGeom prst="rect">
+            <a:avLst/>
+          </a:prstGeom>
+          <a:noFill/>
+        </p:spPr>
+        <p:txBody>
+          <a:bodyPr wrap="none" rtlCol="0">
+            <a:spAutoFit/>
+          </a:bodyPr>
+          <a:lstStyle/>
+          <a:p>
+            <a:r>
+              <a:rPr lang="en-US" dirty="0"/>
+              <a:t>Energy Component </a:t>
+            </a:r>
+          </a:p>
+        </p:txBody>
+      </p:sp>
+      <p:sp>
+        <p:nvSpPr>
+          <p:cNvPr id="6" name="TextBox 5">
+            <a:extLst>
+              <a:ext uri="{FF2B5EF4-FFF2-40B4-BE49-F238E27FC236}">
+                <a16:creationId xmlns:a16="http://schemas.microsoft.com/office/drawing/2014/main" id="{C045F551-7F0D-97A7-62E2-92025C8120AE}"/>
+              </a:ext>
+            </a:extLst>
+          </p:cNvPr>
+          <p:cNvSpPr txBox="1"/>
+          <p:nvPr/>
+        </p:nvSpPr>
+        <p:spPr>
+          <a:xfrm>
+            <a:off x="5127172" y="685800"/>
+            <a:ext cx="2192523" cy="369332"/>
+          </a:xfrm>
+          <a:prstGeom prst="rect">
+            <a:avLst/>
+          </a:prstGeom>
+          <a:noFill/>
+        </p:spPr>
+        <p:txBody>
+          <a:bodyPr wrap="none" rtlCol="0">
+            <a:spAutoFit/>
+          </a:bodyPr>
+          <a:lstStyle/>
+          <a:p>
+            <a:r>
+              <a:rPr lang="en-US" dirty="0"/>
+              <a:t>Operational Context</a:t>
+            </a:r>
+          </a:p>
+        </p:txBody>
+      </p:sp>
+      <p:cxnSp>
+        <p:nvCxnSpPr>
+          <p:cNvPr id="8" name="Straight Arrow Connector 7">
+            <a:extLst>
+              <a:ext uri="{FF2B5EF4-FFF2-40B4-BE49-F238E27FC236}">
+                <a16:creationId xmlns:a16="http://schemas.microsoft.com/office/drawing/2014/main" id="{1090F48E-BD16-A172-3C27-C42EAC36676E}"/>
+              </a:ext>
+            </a:extLst>
+          </p:cNvPr>
+          <p:cNvCxnSpPr>
+            <a:stCxn id="2" idx="2"/>
+            <a:endCxn id="3" idx="0"/>
+          </p:cNvCxnSpPr>
+          <p:nvPr/>
+        </p:nvCxnSpPr>
+        <p:spPr>
+          <a:xfrm>
+            <a:off x="2043201" y="1686503"/>
+            <a:ext cx="561507" cy="1699736"/>
+          </a:xfrm>
+          <a:prstGeom prst="straightConnector1">
+            <a:avLst/>
+          </a:prstGeom>
+          <a:ln>
+            <a:tailEnd type="triangle"/>
+          </a:ln>
+        </p:spPr>
+        <p:style>
+          <a:lnRef idx="2">
+            <a:schemeClr val="accent1"/>
+          </a:lnRef>
+          <a:fillRef idx="0">
+            <a:schemeClr val="accent1"/>
+          </a:fillRef>
+          <a:effectRef idx="1">
+            <a:schemeClr val="accent1"/>
+          </a:effectRef>
+          <a:fontRef idx="minor">
+            <a:schemeClr val="tx1"/>
+          </a:fontRef>
+        </p:style>
+      </p:cxnSp>
+      <p:cxnSp>
+        <p:nvCxnSpPr>
+          <p:cNvPr id="9" name="Straight Arrow Connector 8">
+            <a:extLst>
+              <a:ext uri="{FF2B5EF4-FFF2-40B4-BE49-F238E27FC236}">
+                <a16:creationId xmlns:a16="http://schemas.microsoft.com/office/drawing/2014/main" id="{512F751C-0897-B619-2914-6648D98DA764}"/>
+              </a:ext>
+            </a:extLst>
+          </p:cNvPr>
+          <p:cNvCxnSpPr>
+            <a:cxnSpLocks/>
+            <a:stCxn id="2" idx="3"/>
+            <a:endCxn id="5" idx="0"/>
+          </p:cNvCxnSpPr>
+          <p:nvPr/>
+        </p:nvCxnSpPr>
+        <p:spPr>
+          <a:xfrm>
+            <a:off x="3193772" y="1501837"/>
+            <a:ext cx="2509327" cy="718848"/>
+          </a:xfrm>
+          <a:prstGeom prst="straightConnector1">
+            <a:avLst/>
+          </a:prstGeom>
+          <a:ln>
+            <a:tailEnd type="triangle"/>
+          </a:ln>
+        </p:spPr>
+        <p:style>
+          <a:lnRef idx="2">
+            <a:schemeClr val="accent1"/>
+          </a:lnRef>
+          <a:fillRef idx="0">
+            <a:schemeClr val="accent1"/>
+          </a:fillRef>
+          <a:effectRef idx="1">
+            <a:schemeClr val="accent1"/>
+          </a:effectRef>
+          <a:fontRef idx="minor">
+            <a:schemeClr val="tx1"/>
+          </a:fontRef>
+        </p:style>
+      </p:cxnSp>
+      <p:cxnSp>
+        <p:nvCxnSpPr>
+          <p:cNvPr id="13" name="Straight Arrow Connector 12">
+            <a:extLst>
+              <a:ext uri="{FF2B5EF4-FFF2-40B4-BE49-F238E27FC236}">
+                <a16:creationId xmlns:a16="http://schemas.microsoft.com/office/drawing/2014/main" id="{BB8A8231-8D93-EF09-157F-9734825C4479}"/>
+              </a:ext>
+            </a:extLst>
+          </p:cNvPr>
+          <p:cNvCxnSpPr>
+            <a:cxnSpLocks/>
+            <a:stCxn id="3" idx="3"/>
+            <a:endCxn id="5" idx="2"/>
+          </p:cNvCxnSpPr>
+          <p:nvPr/>
+        </p:nvCxnSpPr>
+        <p:spPr>
+          <a:xfrm flipV="1">
+            <a:off x="3809653" y="2590017"/>
+            <a:ext cx="1893446" cy="980888"/>
+          </a:xfrm>
+          <a:prstGeom prst="straightConnector1">
+            <a:avLst/>
+          </a:prstGeom>
+          <a:ln>
+            <a:tailEnd type="triangle"/>
+          </a:ln>
+        </p:spPr>
+        <p:style>
+          <a:lnRef idx="2">
+            <a:schemeClr val="accent1"/>
+          </a:lnRef>
+          <a:fillRef idx="0">
+            <a:schemeClr val="accent1"/>
+          </a:fillRef>
+          <a:effectRef idx="1">
+            <a:schemeClr val="accent1"/>
+          </a:effectRef>
+          <a:fontRef idx="minor">
+            <a:schemeClr val="tx1"/>
+          </a:fontRef>
+        </p:style>
+      </p:cxnSp>
+      <p:cxnSp>
+        <p:nvCxnSpPr>
+          <p:cNvPr id="16" name="Straight Arrow Connector 15">
+            <a:extLst>
+              <a:ext uri="{FF2B5EF4-FFF2-40B4-BE49-F238E27FC236}">
+                <a16:creationId xmlns:a16="http://schemas.microsoft.com/office/drawing/2014/main" id="{C7AAC402-0D82-7543-F0D6-2EF8D43AF816}"/>
+              </a:ext>
+            </a:extLst>
+          </p:cNvPr>
+          <p:cNvCxnSpPr>
+            <a:cxnSpLocks/>
+            <a:stCxn id="6" idx="1"/>
+            <a:endCxn id="2" idx="0"/>
+          </p:cNvCxnSpPr>
+          <p:nvPr/>
+        </p:nvCxnSpPr>
+        <p:spPr>
+          <a:xfrm flipH="1">
+            <a:off x="2043201" y="870466"/>
+            <a:ext cx="3083971" cy="446705"/>
+          </a:xfrm>
+          <a:prstGeom prst="straightConnector1">
+            <a:avLst/>
+          </a:prstGeom>
+          <a:ln>
+            <a:tailEnd type="triangle"/>
+          </a:ln>
+        </p:spPr>
+        <p:style>
+          <a:lnRef idx="2">
+            <a:schemeClr val="accent1"/>
+          </a:lnRef>
+          <a:fillRef idx="0">
+            <a:schemeClr val="accent1"/>
+          </a:fillRef>
+          <a:effectRef idx="1">
+            <a:schemeClr val="accent1"/>
+          </a:effectRef>
+          <a:fontRef idx="minor">
+            <a:schemeClr val="tx1"/>
+          </a:fontRef>
+        </p:style>
+      </p:cxnSp>
+      <p:cxnSp>
+        <p:nvCxnSpPr>
+          <p:cNvPr id="19" name="Straight Arrow Connector 18">
+            <a:extLst>
+              <a:ext uri="{FF2B5EF4-FFF2-40B4-BE49-F238E27FC236}">
+                <a16:creationId xmlns:a16="http://schemas.microsoft.com/office/drawing/2014/main" id="{47A108AB-20BA-8BAC-70B9-68B65053FB37}"/>
+              </a:ext>
+            </a:extLst>
+          </p:cNvPr>
+          <p:cNvCxnSpPr>
+            <a:cxnSpLocks/>
+            <a:stCxn id="6" idx="2"/>
+            <a:endCxn id="5" idx="0"/>
+          </p:cNvCxnSpPr>
+          <p:nvPr/>
+        </p:nvCxnSpPr>
+        <p:spPr>
+          <a:xfrm flipH="1">
+            <a:off x="5703099" y="1055132"/>
+            <a:ext cx="520335" cy="1165553"/>
+          </a:xfrm>
+          <a:prstGeom prst="straightConnector1">
+            <a:avLst/>
+          </a:prstGeom>
+          <a:ln>
+            <a:tailEnd type="triangle"/>
+          </a:ln>
+        </p:spPr>
+        <p:style>
+          <a:lnRef idx="2">
+            <a:schemeClr val="accent1"/>
+          </a:lnRef>
+          <a:fillRef idx="0">
+            <a:schemeClr val="accent1"/>
+          </a:fillRef>
+          <a:effectRef idx="1">
+            <a:schemeClr val="accent1"/>
+          </a:effectRef>
+          <a:fontRef idx="minor">
+            <a:schemeClr val="tx1"/>
+          </a:fontRef>
+        </p:style>
+      </p:cxnSp>
+      <p:cxnSp>
+        <p:nvCxnSpPr>
+          <p:cNvPr id="22" name="Straight Arrow Connector 21">
+            <a:extLst>
+              <a:ext uri="{FF2B5EF4-FFF2-40B4-BE49-F238E27FC236}">
+                <a16:creationId xmlns:a16="http://schemas.microsoft.com/office/drawing/2014/main" id="{27DC8405-AE5C-434E-AF3F-8EE000F1557A}"/>
+              </a:ext>
+            </a:extLst>
+          </p:cNvPr>
+          <p:cNvCxnSpPr>
+            <a:cxnSpLocks/>
+            <a:stCxn id="6" idx="2"/>
+            <a:endCxn id="3" idx="0"/>
+          </p:cNvCxnSpPr>
+          <p:nvPr/>
+        </p:nvCxnSpPr>
+        <p:spPr>
+          <a:xfrm flipH="1">
+            <a:off x="2604708" y="1055132"/>
+            <a:ext cx="3618726" cy="2331107"/>
+          </a:xfrm>
+          <a:prstGeom prst="straightConnector1">
+            <a:avLst/>
+          </a:prstGeom>
+          <a:ln>
+            <a:tailEnd type="triangle"/>
+          </a:ln>
+        </p:spPr>
+        <p:style>
+          <a:lnRef idx="2">
+            <a:schemeClr val="accent1"/>
+          </a:lnRef>
+          <a:fillRef idx="0">
+            <a:schemeClr val="accent1"/>
+          </a:fillRef>
+          <a:effectRef idx="1">
+            <a:schemeClr val="accent1"/>
+          </a:effectRef>
+          <a:fontRef idx="minor">
+            <a:schemeClr val="tx1"/>
+          </a:fontRef>
+        </p:style>
+      </p:cxnSp>
+      <p:sp>
+        <p:nvSpPr>
+          <p:cNvPr id="52" name="TextBox 51">
+            <a:extLst>
+              <a:ext uri="{FF2B5EF4-FFF2-40B4-BE49-F238E27FC236}">
+                <a16:creationId xmlns:a16="http://schemas.microsoft.com/office/drawing/2014/main" id="{A5511CD3-68DE-B896-00E1-3554E50BBE3C}"/>
+              </a:ext>
+            </a:extLst>
+          </p:cNvPr>
+          <p:cNvSpPr txBox="1"/>
+          <p:nvPr/>
+        </p:nvSpPr>
+        <p:spPr>
+          <a:xfrm>
+            <a:off x="105513" y="4716195"/>
+            <a:ext cx="2475614" cy="923330"/>
+          </a:xfrm>
+          <a:prstGeom prst="rect">
+            <a:avLst/>
+          </a:prstGeom>
+          <a:noFill/>
+        </p:spPr>
+        <p:txBody>
+          <a:bodyPr wrap="none" rtlCol="0">
+            <a:spAutoFit/>
+          </a:bodyPr>
+          <a:lstStyle/>
+          <a:p>
+            <a:r>
+              <a:rPr lang="en-US" dirty="0"/>
+              <a:t>Electrical Component: </a:t>
+            </a:r>
+          </a:p>
+          <a:p>
+            <a:pPr marL="285750" indent="-285750">
+              <a:buFont typeface="Arial" panose="020B0604020202020204" pitchFamily="34" charset="0"/>
+              <a:buChar char="•"/>
+            </a:pPr>
+            <a:r>
+              <a:rPr lang="en-US" dirty="0">
+                <a:solidFill>
+                  <a:schemeClr val="accent6"/>
+                </a:solidFill>
+              </a:rPr>
+              <a:t>Status </a:t>
+            </a:r>
+          </a:p>
+          <a:p>
+            <a:endParaRPr lang="en-US" dirty="0"/>
+          </a:p>
+        </p:txBody>
+      </p:sp>
+      <p:sp>
+        <p:nvSpPr>
+          <p:cNvPr id="53" name="TextBox 52">
+            <a:extLst>
+              <a:ext uri="{FF2B5EF4-FFF2-40B4-BE49-F238E27FC236}">
+                <a16:creationId xmlns:a16="http://schemas.microsoft.com/office/drawing/2014/main" id="{7E6AD107-AF82-DADA-B9E0-A209B2627AB2}"/>
+              </a:ext>
+            </a:extLst>
+          </p:cNvPr>
+          <p:cNvSpPr txBox="1"/>
+          <p:nvPr/>
+        </p:nvSpPr>
+        <p:spPr>
+          <a:xfrm>
+            <a:off x="3335844" y="4716195"/>
+            <a:ext cx="2090444" cy="1754326"/>
+          </a:xfrm>
+          <a:prstGeom prst="rect">
+            <a:avLst/>
+          </a:prstGeom>
+          <a:noFill/>
+        </p:spPr>
+        <p:txBody>
+          <a:bodyPr wrap="none" rtlCol="0">
+            <a:spAutoFit/>
+          </a:bodyPr>
+          <a:lstStyle/>
+          <a:p>
+            <a:r>
+              <a:rPr lang="en-US" dirty="0"/>
+              <a:t>Energy Component</a:t>
+            </a:r>
+          </a:p>
+          <a:p>
+            <a:pPr marL="285750" indent="-285750">
+              <a:buFont typeface="Arial" panose="020B0604020202020204" pitchFamily="34" charset="0"/>
+              <a:buChar char="•"/>
+            </a:pPr>
+            <a:r>
+              <a:rPr lang="en-US" dirty="0">
+                <a:solidFill>
+                  <a:schemeClr val="accent6"/>
+                </a:solidFill>
+              </a:rPr>
+              <a:t>Initial Charge</a:t>
+            </a:r>
+          </a:p>
+          <a:p>
+            <a:pPr marL="285750" indent="-285750">
+              <a:buFont typeface="Arial" panose="020B0604020202020204" pitchFamily="34" charset="0"/>
+              <a:buChar char="•"/>
+            </a:pPr>
+            <a:r>
+              <a:rPr lang="en-US" dirty="0"/>
+              <a:t>Charge Rate</a:t>
+            </a:r>
+          </a:p>
+          <a:p>
+            <a:pPr marL="285750" indent="-285750">
+              <a:buFont typeface="Arial" panose="020B0604020202020204" pitchFamily="34" charset="0"/>
+              <a:buChar char="•"/>
+            </a:pPr>
+            <a:r>
+              <a:rPr lang="en-US" dirty="0">
+                <a:solidFill>
+                  <a:schemeClr val="accent6"/>
+                </a:solidFill>
+              </a:rPr>
+              <a:t>Discharge Rate </a:t>
+            </a:r>
+          </a:p>
+          <a:p>
+            <a:endParaRPr lang="en-US" dirty="0"/>
+          </a:p>
+          <a:p>
+            <a:endParaRPr lang="en-US" dirty="0"/>
+          </a:p>
+        </p:txBody>
+      </p:sp>
+      <p:sp>
+        <p:nvSpPr>
+          <p:cNvPr id="56" name="TextBox 55">
+            <a:extLst>
+              <a:ext uri="{FF2B5EF4-FFF2-40B4-BE49-F238E27FC236}">
+                <a16:creationId xmlns:a16="http://schemas.microsoft.com/office/drawing/2014/main" id="{3ABE2E0C-2E02-B485-5A84-D11E8BA711A8}"/>
+              </a:ext>
+            </a:extLst>
+          </p:cNvPr>
+          <p:cNvSpPr txBox="1"/>
+          <p:nvPr/>
+        </p:nvSpPr>
+        <p:spPr>
+          <a:xfrm>
+            <a:off x="6732709" y="4716195"/>
+            <a:ext cx="2192523" cy="1477328"/>
+          </a:xfrm>
+          <a:prstGeom prst="rect">
+            <a:avLst/>
+          </a:prstGeom>
+          <a:noFill/>
+        </p:spPr>
+        <p:txBody>
+          <a:bodyPr wrap="none" rtlCol="0">
+            <a:spAutoFit/>
+          </a:bodyPr>
+          <a:lstStyle/>
+          <a:p>
+            <a:r>
+              <a:rPr lang="en-US" dirty="0"/>
+              <a:t>Operational Context</a:t>
+            </a:r>
+          </a:p>
+          <a:p>
+            <a:pPr marL="285750" indent="-285750">
+              <a:buFont typeface="Arial" panose="020B0604020202020204" pitchFamily="34" charset="0"/>
+              <a:buChar char="•"/>
+            </a:pPr>
+            <a:r>
+              <a:rPr lang="en-US" dirty="0"/>
+              <a:t>Initial Charge</a:t>
+            </a:r>
+          </a:p>
+          <a:p>
+            <a:pPr marL="285750" indent="-285750">
+              <a:buFont typeface="Arial" panose="020B0604020202020204" pitchFamily="34" charset="0"/>
+              <a:buChar char="•"/>
+            </a:pPr>
+            <a:r>
+              <a:rPr lang="en-US" dirty="0">
+                <a:solidFill>
+                  <a:schemeClr val="bg1">
+                    <a:lumMod val="85000"/>
+                  </a:schemeClr>
+                </a:solidFill>
+              </a:rPr>
+              <a:t>Charge Rate</a:t>
+            </a:r>
+          </a:p>
+          <a:p>
+            <a:pPr marL="285750" indent="-285750">
+              <a:buFont typeface="Arial" panose="020B0604020202020204" pitchFamily="34" charset="0"/>
+              <a:buChar char="•"/>
+            </a:pPr>
+            <a:r>
+              <a:rPr lang="en-US" dirty="0"/>
+              <a:t>Discharge Rate </a:t>
+            </a:r>
+          </a:p>
+          <a:p>
+            <a:endParaRPr lang="en-US" dirty="0"/>
+          </a:p>
+        </p:txBody>
+      </p:sp>
+      <p:sp>
+        <p:nvSpPr>
+          <p:cNvPr id="57" name="TextBox 56">
+            <a:extLst>
+              <a:ext uri="{FF2B5EF4-FFF2-40B4-BE49-F238E27FC236}">
+                <a16:creationId xmlns:a16="http://schemas.microsoft.com/office/drawing/2014/main" id="{86F31D8E-88A5-2B66-A9CC-6A525B193ECD}"/>
+              </a:ext>
+            </a:extLst>
+          </p:cNvPr>
+          <p:cNvSpPr txBox="1"/>
+          <p:nvPr/>
+        </p:nvSpPr>
+        <p:spPr>
+          <a:xfrm>
+            <a:off x="11353801" y="6368535"/>
+            <a:ext cx="633507" cy="369332"/>
+          </a:xfrm>
+          <a:prstGeom prst="rect">
+            <a:avLst/>
+          </a:prstGeom>
+          <a:noFill/>
+        </p:spPr>
+        <p:txBody>
+          <a:bodyPr wrap="none" rtlCol="0">
+            <a:spAutoFit/>
+          </a:bodyPr>
+          <a:lstStyle/>
+          <a:p>
+            <a:r>
+              <a:rPr lang="en-US" dirty="0"/>
+              <a:t>8/11</a:t>
+            </a:r>
+          </a:p>
+        </p:txBody>
+      </p:sp>
+    </p:spTree>
+    <p:extLst>
+      <p:ext uri="{BB962C8B-B14F-4D97-AF65-F5344CB8AC3E}">
+        <p14:creationId xmlns:p14="http://schemas.microsoft.com/office/powerpoint/2010/main" val="398408516"/>
+      </p:ext>
+    </p:extLst>
+  </p:cSld>
+  <p:clrMapOvr>
+    <a:masterClrMapping/>
+  </p:clrMapOvr>
+</p:sld>
+</file>
+
+<file path=ppt/slides/slide3.xml><?xml version="1.0" encoding="utf-8"?>
+<p:sld xmlns:a="http://schemas.openxmlformats.org/drawingml/2006/main" xmlns:r="http://schemas.openxmlformats.org/officeDocument/2006/relationships" xmlns:p="http://schemas.openxmlformats.org/presentationml/2006/main">
+  <p:cSld>
+    <p:spTree>
+      <p:nvGrpSpPr>
+        <p:cNvPr id="1" name=""/>
+        <p:cNvGrpSpPr/>
+        <p:nvPr/>
+      </p:nvGrpSpPr>
+      <p:grpSpPr>
+        <a:xfrm>
+          <a:off x="0" y="0"/>
+          <a:ext cx="0" cy="0"/>
+          <a:chOff x="0" y="0"/>
+          <a:chExt cx="0" cy="0"/>
+        </a:xfrm>
+      </p:grpSpPr>
+      <mc:AlternateContent xmlns:mc="http://schemas.openxmlformats.org/markup-compatibility/2006">
+        <mc:Choice xmlns:a14="http://schemas.microsoft.com/office/drawing/2010/main" Requires="a14">
+          <p:sp>
+            <p:nvSpPr>
+              <p:cNvPr id="5" name="Oval 4">
+                <a:extLst>
+                  <a:ext uri="{FF2B5EF4-FFF2-40B4-BE49-F238E27FC236}">
+                    <a16:creationId xmlns:a16="http://schemas.microsoft.com/office/drawing/2014/main" id="{56B47806-8DD3-D6EF-52BC-51985F431706}"/>
+                  </a:ext>
+                </a:extLst>
+              </p:cNvPr>
+              <p:cNvSpPr/>
+              <p:nvPr/>
+            </p:nvSpPr>
+            <p:spPr>
+              <a:xfrm>
+                <a:off x="7059735" y="3918857"/>
+                <a:ext cx="1475014" cy="1475014"/>
+              </a:xfrm>
+              <a:prstGeom prst="ellipse">
+                <a:avLst/>
+              </a:prstGeom>
+              <a:solidFill>
+                <a:schemeClr val="bg1">
+                  <a:lumMod val="85000"/>
+                </a:schemeClr>
+              </a:solidFill>
+            </p:spPr>
+            <p:style>
+              <a:lnRef idx="1">
+                <a:schemeClr val="dk1"/>
+              </a:lnRef>
+              <a:fillRef idx="2">
+                <a:schemeClr val="dk1"/>
+              </a:fillRef>
+              <a:effectRef idx="1">
+                <a:schemeClr val="dk1"/>
+              </a:effectRef>
+              <a:fontRef idx="minor">
+                <a:schemeClr val="dk1"/>
+              </a:fontRef>
+            </p:style>
+            <p:txBody>
+              <a:bodyPr rtlCol="0" anchor="ctr"/>
+              <a:lstStyle/>
+              <a:p>
+                <a:pPr algn="ctr"/>
+                <a14:m>
+                  <m:oMathPara xmlns:m="http://schemas.openxmlformats.org/officeDocument/2006/math">
+                    <m:oMathParaPr>
+                      <m:jc m:val="centerGroup"/>
+                    </m:oMathParaPr>
+                    <m:oMath xmlns:m="http://schemas.openxmlformats.org/officeDocument/2006/math">
+                      <m:r>
+                        <a:rPr lang="en-US" b="0" i="1" smtClean="0">
+                          <a:latin typeface="Cambria Math" panose="02040503050406030204" pitchFamily="18" charset="0"/>
+                        </a:rPr>
+                        <m:t>𝐵𝑎𝑡𝑡𝑒𝑟𝑦</m:t>
+                      </m:r>
+                    </m:oMath>
+                  </m:oMathPara>
+                </a14:m>
+                <a:endParaRPr lang="en-US" dirty="0"/>
+              </a:p>
+            </p:txBody>
+          </p:sp>
+        </mc:Choice>
+        <mc:Fallback>
+          <p:sp>
+            <p:nvSpPr>
+              <p:cNvPr id="5" name="Oval 4">
+                <a:extLst>
+                  <a:ext uri="{FF2B5EF4-FFF2-40B4-BE49-F238E27FC236}">
+                    <a16:creationId xmlns:a16="http://schemas.microsoft.com/office/drawing/2014/main" id="{56B47806-8DD3-D6EF-52BC-51985F431706}"/>
+                  </a:ext>
+                </a:extLst>
+              </p:cNvPr>
+              <p:cNvSpPr>
+                <a:spLocks noRot="1" noChangeAspect="1" noMove="1" noResize="1" noEditPoints="1" noAdjustHandles="1" noChangeArrowheads="1" noChangeShapeType="1" noTextEdit="1"/>
+              </p:cNvSpPr>
+              <p:nvPr/>
+            </p:nvSpPr>
+            <p:spPr>
+              <a:xfrm>
+                <a:off x="7059735" y="3918857"/>
+                <a:ext cx="1475014" cy="1475014"/>
+              </a:xfrm>
+              <a:prstGeom prst="ellipse">
+                <a:avLst/>
+              </a:prstGeom>
+              <a:blipFill>
+                <a:blip r:embed="rId2"/>
+                <a:stretch>
+                  <a:fillRect/>
+                </a:stretch>
+              </a:blipFill>
+            </p:spPr>
+            <p:txBody>
+              <a:bodyPr/>
+              <a:lstStyle/>
+              <a:p>
+                <a:r>
+                  <a:rPr lang="en-US">
+                    <a:noFill/>
+                  </a:rPr>
+                  <a:t> </a:t>
+                </a:r>
+              </a:p>
+            </p:txBody>
+          </p:sp>
+        </mc:Fallback>
+      </mc:AlternateContent>
+      <mc:AlternateContent xmlns:mc="http://schemas.openxmlformats.org/markup-compatibility/2006">
+        <mc:Choice xmlns:a14="http://schemas.microsoft.com/office/drawing/2010/main" Requires="a14">
+          <p:sp>
+            <p:nvSpPr>
+              <p:cNvPr id="6" name="Oval 5">
+                <a:extLst>
+                  <a:ext uri="{FF2B5EF4-FFF2-40B4-BE49-F238E27FC236}">
+                    <a16:creationId xmlns:a16="http://schemas.microsoft.com/office/drawing/2014/main" id="{C602610C-48C6-9A7F-6764-3DF54170D940}"/>
+                  </a:ext>
+                </a:extLst>
+              </p:cNvPr>
+              <p:cNvSpPr/>
+              <p:nvPr/>
+            </p:nvSpPr>
+            <p:spPr>
+              <a:xfrm>
+                <a:off x="9034843" y="2151101"/>
+                <a:ext cx="1475014" cy="1475014"/>
+              </a:xfrm>
+              <a:prstGeom prst="ellipse">
+                <a:avLst/>
+              </a:prstGeom>
+              <a:solidFill>
+                <a:srgbClr val="9BCCF7"/>
+              </a:solidFill>
+            </p:spPr>
+            <p:style>
+              <a:lnRef idx="1">
+                <a:schemeClr val="dk1"/>
+              </a:lnRef>
+              <a:fillRef idx="2">
+                <a:schemeClr val="dk1"/>
+              </a:fillRef>
+              <a:effectRef idx="1">
+                <a:schemeClr val="dk1"/>
+              </a:effectRef>
+              <a:fontRef idx="minor">
+                <a:schemeClr val="dk1"/>
+              </a:fontRef>
+            </p:style>
+            <p:txBody>
+              <a:bodyPr rtlCol="0" anchor="ctr"/>
+              <a:lstStyle/>
+              <a:p>
+                <a:pPr algn="ctr"/>
+                <a14:m>
+                  <m:oMathPara xmlns:m="http://schemas.openxmlformats.org/officeDocument/2006/math">
+                    <m:oMathParaPr>
+                      <m:jc m:val="centerGroup"/>
+                    </m:oMathParaPr>
+                    <m:oMath xmlns:m="http://schemas.openxmlformats.org/officeDocument/2006/math">
+                      <m:sSub>
+                        <m:sSubPr>
+                          <m:ctrlPr>
+                            <a:rPr lang="en-US" b="0" i="1" smtClean="0">
+                              <a:latin typeface="Cambria Math" panose="02040503050406030204" pitchFamily="18" charset="0"/>
+                            </a:rPr>
+                          </m:ctrlPr>
+                        </m:sSubPr>
+                        <m:e>
+                          <m:r>
+                            <a:rPr lang="en-US" b="0" i="1" smtClean="0">
+                              <a:latin typeface="Cambria Math" panose="02040503050406030204" pitchFamily="18" charset="0"/>
+                            </a:rPr>
+                            <m:t>𝐹</m:t>
+                          </m:r>
+                        </m:e>
+                        <m:sub>
+                          <m:eqArr>
+                            <m:eqArrPr>
+                              <m:ctrlPr>
+                                <a:rPr lang="en-US" b="0" i="1" smtClean="0">
+                                  <a:latin typeface="Cambria Math" panose="02040503050406030204" pitchFamily="18" charset="0"/>
+                                </a:rPr>
+                              </m:ctrlPr>
+                            </m:eqArrPr>
+                            <m:e>
+                              <m:r>
+                                <a:rPr lang="en-US" b="0" i="1" smtClean="0">
+                                  <a:latin typeface="Cambria Math" panose="02040503050406030204" pitchFamily="18" charset="0"/>
+                                </a:rPr>
+                                <m:t>𝑝𝑟𝑜𝑣𝑖𝑑𝑒𝑠</m:t>
+                              </m:r>
+                              <m:r>
+                                <a:rPr lang="en-US" b="0" i="1" smtClean="0">
+                                  <a:latin typeface="Cambria Math" panose="02040503050406030204" pitchFamily="18" charset="0"/>
+                                </a:rPr>
+                                <m:t> </m:t>
+                              </m:r>
+                            </m:e>
+                            <m:e>
+                              <m:r>
+                                <a:rPr lang="en-US" b="0" i="1" smtClean="0">
+                                  <a:latin typeface="Cambria Math" panose="02040503050406030204" pitchFamily="18" charset="0"/>
+                                </a:rPr>
+                                <m:t>𝑐h𝑎𝑟𝑔𝑒</m:t>
+                              </m:r>
+                            </m:e>
+                          </m:eqArr>
+                        </m:sub>
+                      </m:sSub>
+                    </m:oMath>
+                  </m:oMathPara>
+                </a14:m>
+                <a:endParaRPr lang="en-US" dirty="0"/>
+              </a:p>
+            </p:txBody>
+          </p:sp>
+        </mc:Choice>
+        <mc:Fallback>
+          <p:sp>
+            <p:nvSpPr>
+              <p:cNvPr id="6" name="Oval 5">
+                <a:extLst>
+                  <a:ext uri="{FF2B5EF4-FFF2-40B4-BE49-F238E27FC236}">
+                    <a16:creationId xmlns:a16="http://schemas.microsoft.com/office/drawing/2014/main" id="{C602610C-48C6-9A7F-6764-3DF54170D940}"/>
+                  </a:ext>
+                </a:extLst>
+              </p:cNvPr>
+              <p:cNvSpPr>
+                <a:spLocks noRot="1" noChangeAspect="1" noMove="1" noResize="1" noEditPoints="1" noAdjustHandles="1" noChangeArrowheads="1" noChangeShapeType="1" noTextEdit="1"/>
+              </p:cNvSpPr>
+              <p:nvPr/>
+            </p:nvSpPr>
+            <p:spPr>
+              <a:xfrm>
+                <a:off x="9034843" y="2151101"/>
+                <a:ext cx="1475014" cy="1475014"/>
+              </a:xfrm>
+              <a:prstGeom prst="ellipse">
+                <a:avLst/>
+              </a:prstGeom>
+              <a:blipFill>
+                <a:blip r:embed="rId3"/>
+                <a:stretch>
+                  <a:fillRect/>
+                </a:stretch>
+              </a:blipFill>
+            </p:spPr>
+            <p:txBody>
+              <a:bodyPr/>
+              <a:lstStyle/>
+              <a:p>
+                <a:r>
+                  <a:rPr lang="en-US">
+                    <a:noFill/>
+                  </a:rPr>
+                  <a:t> </a:t>
+                </a:r>
+              </a:p>
+            </p:txBody>
+          </p:sp>
+        </mc:Fallback>
+      </mc:AlternateContent>
+      <mc:AlternateContent xmlns:mc="http://schemas.openxmlformats.org/markup-compatibility/2006">
+        <mc:Choice xmlns:a14="http://schemas.microsoft.com/office/drawing/2010/main" Requires="a14">
+          <p:sp>
+            <p:nvSpPr>
+              <p:cNvPr id="7" name="Oval 6">
+                <a:extLst>
+                  <a:ext uri="{FF2B5EF4-FFF2-40B4-BE49-F238E27FC236}">
+                    <a16:creationId xmlns:a16="http://schemas.microsoft.com/office/drawing/2014/main" id="{8B9EF884-8B3D-F4A9-6A30-CAC5D0667234}"/>
+                  </a:ext>
+                </a:extLst>
+              </p:cNvPr>
+              <p:cNvSpPr/>
+              <p:nvPr/>
+            </p:nvSpPr>
+            <p:spPr>
+              <a:xfrm>
+                <a:off x="4448435" y="3940237"/>
+                <a:ext cx="1475014" cy="1475014"/>
+              </a:xfrm>
+              <a:prstGeom prst="ellipse">
+                <a:avLst/>
+              </a:prstGeom>
+              <a:solidFill>
+                <a:srgbClr val="FFC000"/>
+              </a:solidFill>
+            </p:spPr>
+            <p:style>
+              <a:lnRef idx="1">
+                <a:schemeClr val="dk1"/>
+              </a:lnRef>
+              <a:fillRef idx="2">
+                <a:schemeClr val="dk1"/>
+              </a:fillRef>
+              <a:effectRef idx="1">
+                <a:schemeClr val="dk1"/>
+              </a:effectRef>
+              <a:fontRef idx="minor">
+                <a:schemeClr val="dk1"/>
+              </a:fontRef>
+            </p:style>
+            <p:txBody>
+              <a:bodyPr rtlCol="0" anchor="ctr"/>
+              <a:lstStyle/>
+              <a:p>
+                <a:pPr algn="ctr"/>
+                <a14:m>
+                  <m:oMathPara xmlns:m="http://schemas.openxmlformats.org/officeDocument/2006/math">
+                    <m:oMathParaPr>
+                      <m:jc m:val="centerGroup"/>
+                    </m:oMathParaPr>
+                    <m:oMath xmlns:m="http://schemas.openxmlformats.org/officeDocument/2006/math">
+                      <m:sSub>
+                        <m:sSubPr>
+                          <m:ctrlPr>
+                            <a:rPr lang="en-US" b="0" i="1" smtClean="0">
+                              <a:latin typeface="Cambria Math" panose="02040503050406030204" pitchFamily="18" charset="0"/>
+                            </a:rPr>
+                          </m:ctrlPr>
+                        </m:sSubPr>
+                        <m:e>
+                          <m:r>
+                            <a:rPr lang="en-US" b="0" i="1" smtClean="0">
+                              <a:latin typeface="Cambria Math" panose="02040503050406030204" pitchFamily="18" charset="0"/>
+                            </a:rPr>
+                            <m:t>𝐻</m:t>
+                          </m:r>
+                        </m:e>
+                        <m:sub>
+                          <m:r>
+                            <a:rPr lang="en-US" b="0" i="1" smtClean="0">
+                              <a:latin typeface="Cambria Math" panose="02040503050406030204" pitchFamily="18" charset="0"/>
+                            </a:rPr>
+                            <m:t>𝑏𝑎𝑡𝑡𝑒𝑟𝑦</m:t>
+                          </m:r>
+                        </m:sub>
+                      </m:sSub>
+                    </m:oMath>
+                  </m:oMathPara>
+                </a14:m>
+                <a:endParaRPr lang="en-US" dirty="0"/>
+              </a:p>
+            </p:txBody>
+          </p:sp>
+        </mc:Choice>
+        <mc:Fallback>
+          <p:sp>
+            <p:nvSpPr>
+              <p:cNvPr id="7" name="Oval 6">
+                <a:extLst>
+                  <a:ext uri="{FF2B5EF4-FFF2-40B4-BE49-F238E27FC236}">
+                    <a16:creationId xmlns:a16="http://schemas.microsoft.com/office/drawing/2014/main" id="{8B9EF884-8B3D-F4A9-6A30-CAC5D0667234}"/>
+                  </a:ext>
+                </a:extLst>
+              </p:cNvPr>
+              <p:cNvSpPr>
+                <a:spLocks noRot="1" noChangeAspect="1" noMove="1" noResize="1" noEditPoints="1" noAdjustHandles="1" noChangeArrowheads="1" noChangeShapeType="1" noTextEdit="1"/>
+              </p:cNvSpPr>
+              <p:nvPr/>
+            </p:nvSpPr>
+            <p:spPr>
+              <a:xfrm>
+                <a:off x="4448435" y="3940237"/>
+                <a:ext cx="1475014" cy="1475014"/>
+              </a:xfrm>
+              <a:prstGeom prst="ellipse">
+                <a:avLst/>
+              </a:prstGeom>
+              <a:blipFill>
+                <a:blip r:embed="rId4"/>
+                <a:stretch>
+                  <a:fillRect/>
+                </a:stretch>
+              </a:blipFill>
+            </p:spPr>
+            <p:txBody>
+              <a:bodyPr/>
+              <a:lstStyle/>
+              <a:p>
+                <a:r>
+                  <a:rPr lang="en-US">
+                    <a:noFill/>
+                  </a:rPr>
+                  <a:t> </a:t>
+                </a:r>
+              </a:p>
+            </p:txBody>
+          </p:sp>
+        </mc:Fallback>
+      </mc:AlternateContent>
+      <mc:AlternateContent xmlns:mc="http://schemas.openxmlformats.org/markup-compatibility/2006">
+        <mc:Choice xmlns:a14="http://schemas.microsoft.com/office/drawing/2010/main" Requires="a14">
+          <p:sp>
+            <p:nvSpPr>
+              <p:cNvPr id="8" name="Oval 7">
+                <a:extLst>
+                  <a:ext uri="{FF2B5EF4-FFF2-40B4-BE49-F238E27FC236}">
+                    <a16:creationId xmlns:a16="http://schemas.microsoft.com/office/drawing/2014/main" id="{BC029B68-B306-4DBE-1369-750AA06186EC}"/>
+                  </a:ext>
+                </a:extLst>
+              </p:cNvPr>
+              <p:cNvSpPr/>
+              <p:nvPr/>
+            </p:nvSpPr>
+            <p:spPr>
+              <a:xfrm>
+                <a:off x="8933528" y="5252217"/>
+                <a:ext cx="1475014" cy="1475014"/>
+              </a:xfrm>
+              <a:prstGeom prst="ellipse">
+                <a:avLst/>
+              </a:prstGeom>
+              <a:solidFill>
+                <a:srgbClr val="FFC000"/>
+              </a:solidFill>
+            </p:spPr>
+            <p:style>
+              <a:lnRef idx="1">
+                <a:schemeClr val="dk1"/>
+              </a:lnRef>
+              <a:fillRef idx="2">
+                <a:schemeClr val="dk1"/>
+              </a:fillRef>
+              <a:effectRef idx="1">
+                <a:schemeClr val="dk1"/>
+              </a:effectRef>
+              <a:fontRef idx="minor">
+                <a:schemeClr val="dk1"/>
+              </a:fontRef>
+            </p:style>
+            <p:txBody>
+              <a:bodyPr rtlCol="0" anchor="ctr"/>
+              <a:lstStyle/>
+              <a:p>
+                <a:pPr algn="ctr"/>
+                <a14:m>
+                  <m:oMathPara xmlns:m="http://schemas.openxmlformats.org/officeDocument/2006/math">
+                    <m:oMathParaPr>
+                      <m:jc m:val="centerGroup"/>
+                    </m:oMathParaPr>
+                    <m:oMath xmlns:m="http://schemas.openxmlformats.org/officeDocument/2006/math">
+                      <m:sSub>
+                        <m:sSubPr>
+                          <m:ctrlPr>
+                            <a:rPr lang="en-US" b="0" i="1" smtClean="0">
+                              <a:latin typeface="Cambria Math" panose="02040503050406030204" pitchFamily="18" charset="0"/>
+                            </a:rPr>
+                          </m:ctrlPr>
+                        </m:sSubPr>
+                        <m:e>
+                          <m:r>
+                            <a:rPr lang="en-US" b="0" i="1" smtClean="0">
+                              <a:latin typeface="Cambria Math" panose="02040503050406030204" pitchFamily="18" charset="0"/>
+                            </a:rPr>
+                            <m:t>𝐶</m:t>
+                          </m:r>
+                        </m:e>
+                        <m:sub>
+                          <m:r>
+                            <a:rPr lang="en-US" b="0" i="1" smtClean="0">
+                              <a:latin typeface="Cambria Math" panose="02040503050406030204" pitchFamily="18" charset="0"/>
+                            </a:rPr>
+                            <m:t>𝑏𝑎𝑡𝑡𝑒𝑟𝑦</m:t>
+                          </m:r>
+                        </m:sub>
+                      </m:sSub>
+                    </m:oMath>
+                  </m:oMathPara>
+                </a14:m>
+                <a:endParaRPr lang="en-US" dirty="0"/>
+              </a:p>
+            </p:txBody>
+          </p:sp>
+        </mc:Choice>
+        <mc:Fallback>
+          <p:sp>
+            <p:nvSpPr>
+              <p:cNvPr id="8" name="Oval 7">
+                <a:extLst>
+                  <a:ext uri="{FF2B5EF4-FFF2-40B4-BE49-F238E27FC236}">
+                    <a16:creationId xmlns:a16="http://schemas.microsoft.com/office/drawing/2014/main" id="{BC029B68-B306-4DBE-1369-750AA06186EC}"/>
+                  </a:ext>
+                </a:extLst>
+              </p:cNvPr>
+              <p:cNvSpPr>
+                <a:spLocks noRot="1" noChangeAspect="1" noMove="1" noResize="1" noEditPoints="1" noAdjustHandles="1" noChangeArrowheads="1" noChangeShapeType="1" noTextEdit="1"/>
+              </p:cNvSpPr>
+              <p:nvPr/>
+            </p:nvSpPr>
+            <p:spPr>
+              <a:xfrm>
+                <a:off x="8933528" y="5252217"/>
+                <a:ext cx="1475014" cy="1475014"/>
+              </a:xfrm>
+              <a:prstGeom prst="ellipse">
+                <a:avLst/>
+              </a:prstGeom>
+              <a:blipFill>
+                <a:blip r:embed="rId5"/>
+                <a:stretch>
+                  <a:fillRect/>
+                </a:stretch>
+              </a:blipFill>
+            </p:spPr>
+            <p:txBody>
+              <a:bodyPr/>
+              <a:lstStyle/>
+              <a:p>
+                <a:r>
+                  <a:rPr lang="en-US">
+                    <a:noFill/>
+                  </a:rPr>
+                  <a:t> </a:t>
+                </a:r>
+              </a:p>
+            </p:txBody>
+          </p:sp>
+        </mc:Fallback>
+      </mc:AlternateContent>
+      <p:cxnSp>
+        <p:nvCxnSpPr>
+          <p:cNvPr id="9" name="Straight Arrow Connector 8">
+            <a:extLst>
+              <a:ext uri="{FF2B5EF4-FFF2-40B4-BE49-F238E27FC236}">
+                <a16:creationId xmlns:a16="http://schemas.microsoft.com/office/drawing/2014/main" id="{83599C2D-7487-F199-EC96-17CF6E322C91}"/>
+              </a:ext>
+            </a:extLst>
+          </p:cNvPr>
+          <p:cNvCxnSpPr/>
+          <p:nvPr/>
+        </p:nvCxnSpPr>
+        <p:spPr>
+          <a:xfrm flipV="1">
+            <a:off x="8318738" y="3410104"/>
+            <a:ext cx="932116" cy="724764"/>
+          </a:xfrm>
+          <a:prstGeom prst="straightConnector1">
+            <a:avLst/>
+          </a:prstGeom>
+          <a:ln>
+            <a:tailEnd type="triangle"/>
+          </a:ln>
+        </p:spPr>
+        <p:style>
+          <a:lnRef idx="2">
+            <a:schemeClr val="dk1"/>
+          </a:lnRef>
+          <a:fillRef idx="0">
+            <a:schemeClr val="dk1"/>
+          </a:fillRef>
+          <a:effectRef idx="1">
+            <a:schemeClr val="dk1"/>
+          </a:effectRef>
+          <a:fontRef idx="minor">
+            <a:schemeClr val="tx1"/>
+          </a:fontRef>
+        </p:style>
+      </p:cxnSp>
+      <p:cxnSp>
+        <p:nvCxnSpPr>
+          <p:cNvPr id="10" name="Straight Arrow Connector 9">
+            <a:extLst>
+              <a:ext uri="{FF2B5EF4-FFF2-40B4-BE49-F238E27FC236}">
+                <a16:creationId xmlns:a16="http://schemas.microsoft.com/office/drawing/2014/main" id="{9444DF66-BB3C-BA03-3535-92191DACDB4B}"/>
+              </a:ext>
+            </a:extLst>
+          </p:cNvPr>
+          <p:cNvCxnSpPr>
+            <a:cxnSpLocks/>
+          </p:cNvCxnSpPr>
+          <p:nvPr/>
+        </p:nvCxnSpPr>
+        <p:spPr>
+          <a:xfrm flipH="1">
+            <a:off x="5923449" y="4656364"/>
+            <a:ext cx="1136286" cy="21380"/>
+          </a:xfrm>
+          <a:prstGeom prst="straightConnector1">
+            <a:avLst/>
+          </a:prstGeom>
+          <a:ln>
+            <a:tailEnd type="triangle"/>
+          </a:ln>
+        </p:spPr>
+        <p:style>
+          <a:lnRef idx="2">
+            <a:schemeClr val="dk1"/>
+          </a:lnRef>
+          <a:fillRef idx="0">
+            <a:schemeClr val="dk1"/>
+          </a:fillRef>
+          <a:effectRef idx="1">
+            <a:schemeClr val="dk1"/>
+          </a:effectRef>
+          <a:fontRef idx="minor">
+            <a:schemeClr val="tx1"/>
+          </a:fontRef>
+        </p:style>
+      </p:cxnSp>
+      <p:cxnSp>
+        <p:nvCxnSpPr>
+          <p:cNvPr id="11" name="Straight Arrow Connector 10">
+            <a:extLst>
+              <a:ext uri="{FF2B5EF4-FFF2-40B4-BE49-F238E27FC236}">
+                <a16:creationId xmlns:a16="http://schemas.microsoft.com/office/drawing/2014/main" id="{E52F613A-8543-3F7A-5276-8147085FA0AA}"/>
+              </a:ext>
+            </a:extLst>
+          </p:cNvPr>
+          <p:cNvCxnSpPr>
+            <a:cxnSpLocks/>
+          </p:cNvCxnSpPr>
+          <p:nvPr/>
+        </p:nvCxnSpPr>
+        <p:spPr>
+          <a:xfrm flipV="1">
+            <a:off x="5707438" y="2888608"/>
+            <a:ext cx="3327405" cy="1267640"/>
+          </a:xfrm>
+          <a:prstGeom prst="straightConnector1">
+            <a:avLst/>
+          </a:prstGeom>
+          <a:ln>
+            <a:tailEnd type="triangle"/>
+          </a:ln>
+        </p:spPr>
+        <p:style>
+          <a:lnRef idx="2">
+            <a:schemeClr val="dk1"/>
+          </a:lnRef>
+          <a:fillRef idx="0">
+            <a:schemeClr val="dk1"/>
+          </a:fillRef>
+          <a:effectRef idx="1">
+            <a:schemeClr val="dk1"/>
+          </a:effectRef>
+          <a:fontRef idx="minor">
+            <a:schemeClr val="tx1"/>
+          </a:fontRef>
+        </p:style>
+      </p:cxnSp>
+      <p:cxnSp>
+        <p:nvCxnSpPr>
+          <p:cNvPr id="12" name="Straight Arrow Connector 11">
+            <a:extLst>
+              <a:ext uri="{FF2B5EF4-FFF2-40B4-BE49-F238E27FC236}">
+                <a16:creationId xmlns:a16="http://schemas.microsoft.com/office/drawing/2014/main" id="{AA6DCEF7-E600-F3DF-FED0-1C3757FC6585}"/>
+              </a:ext>
+            </a:extLst>
+          </p:cNvPr>
+          <p:cNvCxnSpPr>
+            <a:cxnSpLocks/>
+          </p:cNvCxnSpPr>
+          <p:nvPr/>
+        </p:nvCxnSpPr>
+        <p:spPr>
+          <a:xfrm>
+            <a:off x="8318738" y="5177860"/>
+            <a:ext cx="830801" cy="290368"/>
+          </a:xfrm>
+          <a:prstGeom prst="straightConnector1">
+            <a:avLst/>
+          </a:prstGeom>
+          <a:ln>
+            <a:tailEnd type="triangle"/>
+          </a:ln>
+        </p:spPr>
+        <p:style>
+          <a:lnRef idx="2">
+            <a:schemeClr val="dk1"/>
+          </a:lnRef>
+          <a:fillRef idx="0">
+            <a:schemeClr val="dk1"/>
+          </a:fillRef>
+          <a:effectRef idx="1">
+            <a:schemeClr val="dk1"/>
+          </a:effectRef>
+          <a:fontRef idx="minor">
+            <a:schemeClr val="tx1"/>
+          </a:fontRef>
+        </p:style>
+      </p:cxnSp>
+      <p:cxnSp>
+        <p:nvCxnSpPr>
+          <p:cNvPr id="13" name="Straight Arrow Connector 12">
+            <a:extLst>
+              <a:ext uri="{FF2B5EF4-FFF2-40B4-BE49-F238E27FC236}">
+                <a16:creationId xmlns:a16="http://schemas.microsoft.com/office/drawing/2014/main" id="{26A9BBC5-7015-BEDB-BB38-7D6FA15C062A}"/>
+              </a:ext>
+            </a:extLst>
+          </p:cNvPr>
+          <p:cNvCxnSpPr>
+            <a:cxnSpLocks/>
+          </p:cNvCxnSpPr>
+          <p:nvPr/>
+        </p:nvCxnSpPr>
+        <p:spPr>
+          <a:xfrm flipV="1">
+            <a:off x="9671035" y="3626115"/>
+            <a:ext cx="101315" cy="1626102"/>
+          </a:xfrm>
+          <a:prstGeom prst="straightConnector1">
+            <a:avLst/>
+          </a:prstGeom>
+          <a:ln>
+            <a:tailEnd type="triangle"/>
+          </a:ln>
+        </p:spPr>
+        <p:style>
+          <a:lnRef idx="2">
+            <a:schemeClr val="dk1"/>
+          </a:lnRef>
+          <a:fillRef idx="0">
+            <a:schemeClr val="dk1"/>
+          </a:fillRef>
+          <a:effectRef idx="1">
+            <a:schemeClr val="dk1"/>
+          </a:effectRef>
+          <a:fontRef idx="minor">
+            <a:schemeClr val="tx1"/>
+          </a:fontRef>
+        </p:style>
+      </p:cxnSp>
+      <p:sp>
+        <p:nvSpPr>
+          <p:cNvPr id="14" name="TextBox 13">
+            <a:extLst>
+              <a:ext uri="{FF2B5EF4-FFF2-40B4-BE49-F238E27FC236}">
+                <a16:creationId xmlns:a16="http://schemas.microsoft.com/office/drawing/2014/main" id="{FC997330-C90B-E474-A861-D9272D2E4F07}"/>
+              </a:ext>
+            </a:extLst>
+          </p:cNvPr>
+          <p:cNvSpPr txBox="1"/>
+          <p:nvPr/>
+        </p:nvSpPr>
+        <p:spPr>
+          <a:xfrm>
+            <a:off x="11353801" y="6368535"/>
+            <a:ext cx="633507" cy="369332"/>
+          </a:xfrm>
+          <a:prstGeom prst="rect">
+            <a:avLst/>
+          </a:prstGeom>
+          <a:noFill/>
+        </p:spPr>
+        <p:txBody>
+          <a:bodyPr wrap="none" rtlCol="0">
+            <a:spAutoFit/>
+          </a:bodyPr>
+          <a:lstStyle/>
+          <a:p>
+            <a:r>
+              <a:rPr lang="en-US" dirty="0"/>
+              <a:t>8/11</a:t>
+            </a:r>
+          </a:p>
+        </p:txBody>
+      </p:sp>
+    </p:spTree>
+    <p:extLst>
+      <p:ext uri="{BB962C8B-B14F-4D97-AF65-F5344CB8AC3E}">
+        <p14:creationId xmlns:p14="http://schemas.microsoft.com/office/powerpoint/2010/main" val="3639069372"/>
       </p:ext>
     </p:extLst>
   </p:cSld>
@@ -4639,4 +6576,319 @@
     </a:ext>
   </a:extLst>
 </a:theme>
+</file>
+
+<file path=ppt/theme/theme2.xml><?xml version="1.0" encoding="utf-8"?>
+<a:theme xmlns:a="http://schemas.openxmlformats.org/drawingml/2006/main" name="Office Theme">
+  <a:themeElements>
+    <a:clrScheme name="Office">
+      <a:dk1>
+        <a:sysClr val="windowText" lastClr="000000"/>
+      </a:dk1>
+      <a:lt1>
+        <a:sysClr val="window" lastClr="FFFFFF"/>
+      </a:lt1>
+      <a:dk2>
+        <a:srgbClr val="0E2841"/>
+      </a:dk2>
+      <a:lt2>
+        <a:srgbClr val="E8E8E8"/>
+      </a:lt2>
+      <a:accent1>
+        <a:srgbClr val="156082"/>
+      </a:accent1>
+      <a:accent2>
+        <a:srgbClr val="E97132"/>
+      </a:accent2>
+      <a:accent3>
+        <a:srgbClr val="196B24"/>
+      </a:accent3>
+      <a:accent4>
+        <a:srgbClr val="0F9ED5"/>
+      </a:accent4>
+      <a:accent5>
+        <a:srgbClr val="A02B93"/>
+      </a:accent5>
+      <a:accent6>
+        <a:srgbClr val="4EA72E"/>
+      </a:accent6>
+      <a:hlink>
+        <a:srgbClr val="467886"/>
+      </a:hlink>
+      <a:folHlink>
+        <a:srgbClr val="96607D"/>
+      </a:folHlink>
+    </a:clrScheme>
+    <a:fontScheme name="Office">
+      <a:majorFont>
+        <a:latin typeface="Aptos Display" panose="02110004020202020204"/>
+        <a:ea typeface=""/>
+        <a:cs typeface=""/>
+        <a:font script="Jpan" typeface="游ゴシック Light"/>
+        <a:font script="Hang" typeface="맑은 고딕"/>
+        <a:font script="Hans" typeface="等线 Light"/>
+        <a:font script="Hant" typeface="新細明體"/>
+        <a:font script="Arab" typeface="Times New Roman"/>
+        <a:font script="Hebr" typeface="Times New Roman"/>
+        <a:font script="Thai" typeface="Angsana New"/>
+        <a:font script="Ethi" typeface="Nyala"/>
+        <a:font script="Beng" typeface="Vrinda"/>
+        <a:font script="Gujr" typeface="Shruti"/>
+        <a:font script="Khmr" typeface="MoolBoran"/>
+        <a:font script="Knda" typeface="Tunga"/>
+        <a:font script="Guru" typeface="Raavi"/>
+        <a:font script="Cans" typeface="Euphemia"/>
+        <a:font script="Cher" typeface="Plantagenet Cherokee"/>
+        <a:font script="Yiii" typeface="Microsoft Yi Baiti"/>
+        <a:font script="Tibt" typeface="Microsoft Himalaya"/>
+        <a:font script="Thaa" typeface="MV Boli"/>
+        <a:font script="Deva" typeface="Mangal"/>
+        <a:font script="Telu" typeface="Gautami"/>
+        <a:font script="Taml" typeface="Latha"/>
+        <a:font script="Syrc" typeface="Estrangelo Edessa"/>
+        <a:font script="Orya" typeface="Kalinga"/>
+        <a:font script="Mlym" typeface="Kartika"/>
+        <a:font script="Laoo" typeface="DokChampa"/>
+        <a:font script="Sinh" typeface="Iskoola Pota"/>
+        <a:font script="Mong" typeface="Mongolian Baiti"/>
+        <a:font script="Viet" typeface="Times New Roman"/>
+        <a:font script="Uigh" typeface="Microsoft Uighur"/>
+        <a:font script="Geor" typeface="Sylfaen"/>
+        <a:font script="Armn" typeface="Arial"/>
+        <a:font script="Bugi" typeface="Leelawadee UI"/>
+        <a:font script="Bopo" typeface="Microsoft JhengHei"/>
+        <a:font script="Java" typeface="Javanese Text"/>
+        <a:font script="Lisu" typeface="Segoe UI"/>
+        <a:font script="Mymr" typeface="Myanmar Text"/>
+        <a:font script="Nkoo" typeface="Ebrima"/>
+        <a:font script="Olck" typeface="Nirmala UI"/>
+        <a:font script="Osma" typeface="Ebrima"/>
+        <a:font script="Phag" typeface="Phagspa"/>
+        <a:font script="Syrn" typeface="Estrangelo Edessa"/>
+        <a:font script="Syrj" typeface="Estrangelo Edessa"/>
+        <a:font script="Syre" typeface="Estrangelo Edessa"/>
+        <a:font script="Sora" typeface="Nirmala UI"/>
+        <a:font script="Tale" typeface="Microsoft Tai Le"/>
+        <a:font script="Talu" typeface="Microsoft New Tai Lue"/>
+        <a:font script="Tfng" typeface="Ebrima"/>
+      </a:majorFont>
+      <a:minorFont>
+        <a:latin typeface="Aptos" panose="02110004020202020204"/>
+        <a:ea typeface=""/>
+        <a:cs typeface=""/>
+        <a:font script="Jpan" typeface="游ゴシック"/>
+        <a:font script="Hang" typeface="맑은 고딕"/>
+        <a:font script="Hans" typeface="等线"/>
+        <a:font script="Hant" typeface="新細明體"/>
+        <a:font script="Arab" typeface="Arial"/>
+        <a:font script="Hebr" typeface="Arial"/>
+        <a:font script="Thai" typeface="Cordia New"/>
+        <a:font script="Ethi" typeface="Nyala"/>
+        <a:font script="Beng" typeface="Vrinda"/>
+        <a:font script="Gujr" typeface="Shruti"/>
+        <a:font script="Khmr" typeface="DaunPenh"/>
+        <a:font script="Knda" typeface="Tunga"/>
+        <a:font script="Guru" typeface="Raavi"/>
+        <a:font script="Cans" typeface="Euphemia"/>
+        <a:font script="Cher" typeface="Plantagenet Cherokee"/>
+        <a:font script="Yiii" typeface="Microsoft Yi Baiti"/>
+        <a:font script="Tibt" typeface="Microsoft Himalaya"/>
+        <a:font script="Thaa" typeface="MV Boli"/>
+        <a:font script="Deva" typeface="Mangal"/>
+        <a:font script="Telu" typeface="Gautami"/>
+        <a:font script="Taml" typeface="Latha"/>
+        <a:font script="Syrc" typeface="Estrangelo Edessa"/>
+        <a:font script="Orya" typeface="Kalinga"/>
+        <a:font script="Mlym" typeface="Kartika"/>
+        <a:font script="Laoo" typeface="DokChampa"/>
+        <a:font script="Sinh" typeface="Iskoola Pota"/>
+        <a:font script="Mong" typeface="Mongolian Baiti"/>
+        <a:font script="Viet" typeface="Arial"/>
+        <a:font script="Uigh" typeface="Microsoft Uighur"/>
+        <a:font script="Geor" typeface="Sylfaen"/>
+        <a:font script="Armn" typeface="Arial"/>
+        <a:font script="Bugi" typeface="Leelawadee UI"/>
+        <a:font script="Bopo" typeface="Microsoft JhengHei"/>
+        <a:font script="Java" typeface="Javanese Text"/>
+        <a:font script="Lisu" typeface="Segoe UI"/>
+        <a:font script="Mymr" typeface="Myanmar Text"/>
+        <a:font script="Nkoo" typeface="Ebrima"/>
+        <a:font script="Olck" typeface="Nirmala UI"/>
+        <a:font script="Osma" typeface="Ebrima"/>
+        <a:font script="Phag" typeface="Phagspa"/>
+        <a:font script="Syrn" typeface="Estrangelo Edessa"/>
+        <a:font script="Syrj" typeface="Estrangelo Edessa"/>
+        <a:font script="Syre" typeface="Estrangelo Edessa"/>
+        <a:font script="Sora" typeface="Nirmala UI"/>
+        <a:font script="Tale" typeface="Microsoft Tai Le"/>
+        <a:font script="Talu" typeface="Microsoft New Tai Lue"/>
+        <a:font script="Tfng" typeface="Ebrima"/>
+      </a:minorFont>
+    </a:fontScheme>
+    <a:fmtScheme name="Office">
+      <a:fillStyleLst>
+        <a:solidFill>
+          <a:schemeClr val="phClr"/>
+        </a:solidFill>
+        <a:gradFill rotWithShape="1">
+          <a:gsLst>
+            <a:gs pos="0">
+              <a:schemeClr val="phClr">
+                <a:lumMod val="110000"/>
+                <a:satMod val="105000"/>
+                <a:tint val="67000"/>
+              </a:schemeClr>
+            </a:gs>
+            <a:gs pos="50000">
+              <a:schemeClr val="phClr">
+                <a:lumMod val="105000"/>
+                <a:satMod val="103000"/>
+                <a:tint val="73000"/>
+              </a:schemeClr>
+            </a:gs>
+            <a:gs pos="100000">
+              <a:schemeClr val="phClr">
+                <a:lumMod val="105000"/>
+                <a:satMod val="109000"/>
+                <a:tint val="81000"/>
+              </a:schemeClr>
+            </a:gs>
+          </a:gsLst>
+          <a:lin ang="5400000" scaled="0"/>
+        </a:gradFill>
+        <a:gradFill rotWithShape="1">
+          <a:gsLst>
+            <a:gs pos="0">
+              <a:schemeClr val="phClr">
+                <a:satMod val="103000"/>
+                <a:lumMod val="102000"/>
+                <a:tint val="94000"/>
+              </a:schemeClr>
+            </a:gs>
+            <a:gs pos="50000">
+              <a:schemeClr val="phClr">
+                <a:satMod val="110000"/>
+                <a:lumMod val="100000"/>
+                <a:shade val="100000"/>
+              </a:schemeClr>
+            </a:gs>
+            <a:gs pos="100000">
+              <a:schemeClr val="phClr">
+                <a:lumMod val="99000"/>
+                <a:satMod val="120000"/>
+                <a:shade val="78000"/>
+              </a:schemeClr>
+            </a:gs>
+          </a:gsLst>
+          <a:lin ang="5400000" scaled="0"/>
+        </a:gradFill>
+      </a:fillStyleLst>
+      <a:lnStyleLst>
+        <a:ln w="12700" cap="flat" cmpd="sng" algn="ctr">
+          <a:solidFill>
+            <a:schemeClr val="phClr"/>
+          </a:solidFill>
+          <a:prstDash val="solid"/>
+          <a:miter lim="800000"/>
+        </a:ln>
+        <a:ln w="19050" cap="flat" cmpd="sng" algn="ctr">
+          <a:solidFill>
+            <a:schemeClr val="phClr"/>
+          </a:solidFill>
+          <a:prstDash val="solid"/>
+          <a:miter lim="800000"/>
+        </a:ln>
+        <a:ln w="25400" cap="flat" cmpd="sng" algn="ctr">
+          <a:solidFill>
+            <a:schemeClr val="phClr"/>
+          </a:solidFill>
+          <a:prstDash val="solid"/>
+          <a:miter lim="800000"/>
+        </a:ln>
+      </a:lnStyleLst>
+      <a:effectStyleLst>
+        <a:effectStyle>
+          <a:effectLst/>
+        </a:effectStyle>
+        <a:effectStyle>
+          <a:effectLst/>
+        </a:effectStyle>
+        <a:effectStyle>
+          <a:effectLst>
+            <a:outerShdw blurRad="57150" dist="19050" dir="5400000" algn="ctr" rotWithShape="0">
+              <a:srgbClr val="000000">
+                <a:alpha val="63000"/>
+              </a:srgbClr>
+            </a:outerShdw>
+          </a:effectLst>
+        </a:effectStyle>
+      </a:effectStyleLst>
+      <a:bgFillStyleLst>
+        <a:solidFill>
+          <a:schemeClr val="phClr"/>
+        </a:solidFill>
+        <a:solidFill>
+          <a:schemeClr val="phClr">
+            <a:tint val="95000"/>
+            <a:satMod val="170000"/>
+          </a:schemeClr>
+        </a:solidFill>
+        <a:gradFill rotWithShape="1">
+          <a:gsLst>
+            <a:gs pos="0">
+              <a:schemeClr val="phClr">
+                <a:tint val="93000"/>
+                <a:satMod val="150000"/>
+                <a:shade val="98000"/>
+                <a:lumMod val="102000"/>
+              </a:schemeClr>
+            </a:gs>
+            <a:gs pos="50000">
+              <a:schemeClr val="phClr">
+                <a:tint val="98000"/>
+                <a:satMod val="130000"/>
+                <a:shade val="90000"/>
+                <a:lumMod val="103000"/>
+              </a:schemeClr>
+            </a:gs>
+            <a:gs pos="100000">
+              <a:schemeClr val="phClr">
+                <a:shade val="63000"/>
+                <a:satMod val="120000"/>
+              </a:schemeClr>
+            </a:gs>
+          </a:gsLst>
+          <a:lin ang="5400000" scaled="0"/>
+        </a:gradFill>
+      </a:bgFillStyleLst>
+    </a:fmtScheme>
+  </a:themeElements>
+  <a:objectDefaults>
+    <a:lnDef>
+      <a:spPr/>
+      <a:bodyPr/>
+      <a:lstStyle/>
+      <a:style>
+        <a:lnRef idx="2">
+          <a:schemeClr val="accent1"/>
+        </a:lnRef>
+        <a:fillRef idx="0">
+          <a:schemeClr val="accent1"/>
+        </a:fillRef>
+        <a:effectRef idx="1">
+          <a:schemeClr val="accent1"/>
+        </a:effectRef>
+        <a:fontRef idx="minor">
+          <a:schemeClr val="tx1"/>
+        </a:fontRef>
+      </a:style>
+    </a:lnDef>
+  </a:objectDefaults>
+  <a:extraClrSchemeLst/>
+  <a:extLst>
+    <a:ext uri="{05A4C25C-085E-4340-85A3-A5531E510DB2}">
+      <thm15:themeFamily xmlns:thm15="http://schemas.microsoft.com/office/thememl/2012/main" name="Office Theme" id="{2E142A2C-CD16-42D6-873A-C26D2A0506FA}" vid="{1BDDFF52-6CD6-40A5-AB3C-68EB2F1E4D0A}"/>
+    </a:ext>
+  </a:extLst>
+</a:theme>
 </file>
--- a/Documentation/CDCM Diagrams .pptx
+++ b/Documentation/CDCM Diagrams .pptx
@@ -5,12 +5,13 @@
     <p:sldMasterId id="2147483648" r:id="rId1"/>
   </p:sldMasterIdLst>
   <p:notesMasterIdLst>
-    <p:notesMasterId r:id="rId5"/>
+    <p:notesMasterId r:id="rId6"/>
   </p:notesMasterIdLst>
   <p:sldIdLst>
     <p:sldId id="256" r:id="rId2"/>
     <p:sldId id="258" r:id="rId3"/>
     <p:sldId id="257" r:id="rId4"/>
+    <p:sldId id="259" r:id="rId5"/>
   </p:sldIdLst>
   <p:sldSz cx="12192000" cy="6858000"/>
   <p:notesSz cx="6858000" cy="9144000"/>
@@ -199,7 +200,7 @@
           <a:p>
             <a:fld id="{94EF214D-1F76-F841-A2D3-D2CDEC996226}" type="datetimeFigureOut">
               <a:rPr lang="en-US" smtClean="0"/>
-              <a:t>8/11/25</a:t>
+              <a:t>8/26/25</a:t>
             </a:fld>
             <a:endParaRPr lang="en-US"/>
           </a:p>
@@ -697,7 +698,7 @@
           <a:p>
             <a:fld id="{E90F38FF-858C-0643-98FD-89636F5F9C82}" type="datetimeFigureOut">
               <a:rPr lang="en-US" smtClean="0"/>
-              <a:t>8/11/25</a:t>
+              <a:t>8/26/25</a:t>
             </a:fld>
             <a:endParaRPr lang="en-US"/>
           </a:p>
@@ -895,7 +896,7 @@
           <a:p>
             <a:fld id="{E90F38FF-858C-0643-98FD-89636F5F9C82}" type="datetimeFigureOut">
               <a:rPr lang="en-US" smtClean="0"/>
-              <a:t>8/11/25</a:t>
+              <a:t>8/26/25</a:t>
             </a:fld>
             <a:endParaRPr lang="en-US"/>
           </a:p>
@@ -1103,7 +1104,7 @@
           <a:p>
             <a:fld id="{E90F38FF-858C-0643-98FD-89636F5F9C82}" type="datetimeFigureOut">
               <a:rPr lang="en-US" smtClean="0"/>
-              <a:t>8/11/25</a:t>
+              <a:t>8/26/25</a:t>
             </a:fld>
             <a:endParaRPr lang="en-US"/>
           </a:p>
@@ -1301,7 +1302,7 @@
           <a:p>
             <a:fld id="{E90F38FF-858C-0643-98FD-89636F5F9C82}" type="datetimeFigureOut">
               <a:rPr lang="en-US" smtClean="0"/>
-              <a:t>8/11/25</a:t>
+              <a:t>8/26/25</a:t>
             </a:fld>
             <a:endParaRPr lang="en-US"/>
           </a:p>
@@ -1576,7 +1577,7 @@
           <a:p>
             <a:fld id="{E90F38FF-858C-0643-98FD-89636F5F9C82}" type="datetimeFigureOut">
               <a:rPr lang="en-US" smtClean="0"/>
-              <a:t>8/11/25</a:t>
+              <a:t>8/26/25</a:t>
             </a:fld>
             <a:endParaRPr lang="en-US"/>
           </a:p>
@@ -1841,7 +1842,7 @@
           <a:p>
             <a:fld id="{E90F38FF-858C-0643-98FD-89636F5F9C82}" type="datetimeFigureOut">
               <a:rPr lang="en-US" smtClean="0"/>
-              <a:t>8/11/25</a:t>
+              <a:t>8/26/25</a:t>
             </a:fld>
             <a:endParaRPr lang="en-US"/>
           </a:p>
@@ -2253,7 +2254,7 @@
           <a:p>
             <a:fld id="{E90F38FF-858C-0643-98FD-89636F5F9C82}" type="datetimeFigureOut">
               <a:rPr lang="en-US" smtClean="0"/>
-              <a:t>8/11/25</a:t>
+              <a:t>8/26/25</a:t>
             </a:fld>
             <a:endParaRPr lang="en-US"/>
           </a:p>
@@ -2394,7 +2395,7 @@
           <a:p>
             <a:fld id="{E90F38FF-858C-0643-98FD-89636F5F9C82}" type="datetimeFigureOut">
               <a:rPr lang="en-US" smtClean="0"/>
-              <a:t>8/11/25</a:t>
+              <a:t>8/26/25</a:t>
             </a:fld>
             <a:endParaRPr lang="en-US"/>
           </a:p>
@@ -2507,7 +2508,7 @@
           <a:p>
             <a:fld id="{E90F38FF-858C-0643-98FD-89636F5F9C82}" type="datetimeFigureOut">
               <a:rPr lang="en-US" smtClean="0"/>
-              <a:t>8/11/25</a:t>
+              <a:t>8/26/25</a:t>
             </a:fld>
             <a:endParaRPr lang="en-US"/>
           </a:p>
@@ -2818,7 +2819,7 @@
           <a:p>
             <a:fld id="{E90F38FF-858C-0643-98FD-89636F5F9C82}" type="datetimeFigureOut">
               <a:rPr lang="en-US" smtClean="0"/>
-              <a:t>8/11/25</a:t>
+              <a:t>8/26/25</a:t>
             </a:fld>
             <a:endParaRPr lang="en-US"/>
           </a:p>
@@ -3106,7 +3107,7 @@
           <a:p>
             <a:fld id="{E90F38FF-858C-0643-98FD-89636F5F9C82}" type="datetimeFigureOut">
               <a:rPr lang="en-US" smtClean="0"/>
-              <a:t>8/11/25</a:t>
+              <a:t>8/26/25</a:t>
             </a:fld>
             <a:endParaRPr lang="en-US"/>
           </a:p>
@@ -3347,7 +3348,7 @@
           <a:p>
             <a:fld id="{E90F38FF-858C-0643-98FD-89636F5F9C82}" type="datetimeFigureOut">
               <a:rPr lang="en-US" smtClean="0"/>
-              <a:t>8/11/25</a:t>
+              <a:t>8/26/25</a:t>
             </a:fld>
             <a:endParaRPr lang="en-US"/>
           </a:p>
@@ -5488,8 +5489,8 @@
           <a:chExt cx="0" cy="0"/>
         </a:xfrm>
       </p:grpSpPr>
-      <mc:AlternateContent xmlns:mc="http://schemas.openxmlformats.org/markup-compatibility/2006">
-        <mc:Choice xmlns:a14="http://schemas.microsoft.com/office/drawing/2010/main" Requires="a14">
+      <mc:AlternateContent xmlns:mc="http://schemas.openxmlformats.org/markup-compatibility/2006" xmlns:a14="http://schemas.microsoft.com/office/drawing/2010/main">
+        <mc:Choice Requires="a14">
           <p:sp>
             <p:nvSpPr>
               <p:cNvPr id="5" name="Oval 4">
@@ -5555,7 +5556,7 @@
             </p:txBody>
           </p:sp>
         </mc:Choice>
-        <mc:Fallback>
+        <mc:Fallback xmlns="">
           <p:sp>
             <p:nvSpPr>
               <p:cNvPr id="5" name="Oval 4">
@@ -5600,8 +5601,8 @@
           </p:sp>
         </mc:Fallback>
       </mc:AlternateContent>
-      <mc:AlternateContent xmlns:mc="http://schemas.openxmlformats.org/markup-compatibility/2006">
-        <mc:Choice xmlns:a14="http://schemas.microsoft.com/office/drawing/2010/main" Requires="a14">
+      <mc:AlternateContent xmlns:mc="http://schemas.openxmlformats.org/markup-compatibility/2006" xmlns:a14="http://schemas.microsoft.com/office/drawing/2010/main">
+        <mc:Choice Requires="a14">
           <p:sp>
             <p:nvSpPr>
               <p:cNvPr id="6" name="Oval 5">
@@ -5709,7 +5710,7 @@
             </p:txBody>
           </p:sp>
         </mc:Choice>
-        <mc:Fallback>
+        <mc:Fallback xmlns="">
           <p:sp>
             <p:nvSpPr>
               <p:cNvPr id="6" name="Oval 5">
@@ -5754,8 +5755,8 @@
           </p:sp>
         </mc:Fallback>
       </mc:AlternateContent>
-      <mc:AlternateContent xmlns:mc="http://schemas.openxmlformats.org/markup-compatibility/2006">
-        <mc:Choice xmlns:a14="http://schemas.microsoft.com/office/drawing/2010/main" Requires="a14">
+      <mc:AlternateContent xmlns:mc="http://schemas.openxmlformats.org/markup-compatibility/2006" xmlns:a14="http://schemas.microsoft.com/office/drawing/2010/main">
+        <mc:Choice Requires="a14">
           <p:sp>
             <p:nvSpPr>
               <p:cNvPr id="7" name="Oval 6">
@@ -5838,7 +5839,7 @@
             </p:txBody>
           </p:sp>
         </mc:Choice>
-        <mc:Fallback>
+        <mc:Fallback xmlns="">
           <p:sp>
             <p:nvSpPr>
               <p:cNvPr id="7" name="Oval 6">
@@ -5883,8 +5884,8 @@
           </p:sp>
         </mc:Fallback>
       </mc:AlternateContent>
-      <mc:AlternateContent xmlns:mc="http://schemas.openxmlformats.org/markup-compatibility/2006">
-        <mc:Choice xmlns:a14="http://schemas.microsoft.com/office/drawing/2010/main" Requires="a14">
+      <mc:AlternateContent xmlns:mc="http://schemas.openxmlformats.org/markup-compatibility/2006" xmlns:a14="http://schemas.microsoft.com/office/drawing/2010/main">
+        <mc:Choice Requires="a14">
           <p:sp>
             <p:nvSpPr>
               <p:cNvPr id="8" name="Oval 7">
@@ -5967,7 +5968,7 @@
             </p:txBody>
           </p:sp>
         </mc:Choice>
-        <mc:Fallback>
+        <mc:Fallback xmlns="">
           <p:sp>
             <p:nvSpPr>
               <p:cNvPr id="8" name="Oval 7">
@@ -6254,6 +6255,72 @@
     <p:extLst>
       <p:ext uri="{BB962C8B-B14F-4D97-AF65-F5344CB8AC3E}">
         <p14:creationId xmlns:p14="http://schemas.microsoft.com/office/powerpoint/2010/main" val="3639069372"/>
+      </p:ext>
+    </p:extLst>
+  </p:cSld>
+  <p:clrMapOvr>
+    <a:masterClrMapping/>
+  </p:clrMapOvr>
+</p:sld>
+</file>
+
+<file path=ppt/slides/slide4.xml><?xml version="1.0" encoding="utf-8"?>
+<p:sld xmlns:a="http://schemas.openxmlformats.org/drawingml/2006/main" xmlns:r="http://schemas.openxmlformats.org/officeDocument/2006/relationships" xmlns:p="http://schemas.openxmlformats.org/presentationml/2006/main">
+  <p:cSld>
+    <p:spTree>
+      <p:nvGrpSpPr>
+        <p:cNvPr id="1" name=""/>
+        <p:cNvGrpSpPr/>
+        <p:nvPr/>
+      </p:nvGrpSpPr>
+      <p:grpSpPr>
+        <a:xfrm>
+          <a:off x="0" y="0"/>
+          <a:ext cx="0" cy="0"/>
+          <a:chOff x="0" y="0"/>
+          <a:chExt cx="0" cy="0"/>
+        </a:xfrm>
+      </p:grpSpPr>
+      <p:sp>
+        <p:nvSpPr>
+          <p:cNvPr id="14" name="TextBox 13">
+            <a:extLst>
+              <a:ext uri="{FF2B5EF4-FFF2-40B4-BE49-F238E27FC236}">
+                <a16:creationId xmlns:a16="http://schemas.microsoft.com/office/drawing/2014/main" id="{FC997330-C90B-E474-A861-D9272D2E4F07}"/>
+              </a:ext>
+            </a:extLst>
+          </p:cNvPr>
+          <p:cNvSpPr txBox="1"/>
+          <p:nvPr/>
+        </p:nvSpPr>
+        <p:spPr>
+          <a:xfrm>
+            <a:off x="11353801" y="6368535"/>
+            <a:ext cx="633507" cy="369332"/>
+          </a:xfrm>
+          <a:prstGeom prst="rect">
+            <a:avLst/>
+          </a:prstGeom>
+          <a:noFill/>
+        </p:spPr>
+        <p:txBody>
+          <a:bodyPr wrap="none" rtlCol="0">
+            <a:spAutoFit/>
+          </a:bodyPr>
+          <a:lstStyle/>
+          <a:p>
+            <a:r>
+              <a:rPr lang="en-US"/>
+              <a:t>8/26</a:t>
+            </a:r>
+            <a:endParaRPr lang="en-US" dirty="0"/>
+          </a:p>
+        </p:txBody>
+      </p:sp>
+    </p:spTree>
+    <p:extLst>
+      <p:ext uri="{BB962C8B-B14F-4D97-AF65-F5344CB8AC3E}">
+        <p14:creationId xmlns:p14="http://schemas.microsoft.com/office/powerpoint/2010/main" val="300857298"/>
       </p:ext>
     </p:extLst>
   </p:cSld>

--- a/Documentation/CDCM Diagrams .pptx
+++ b/Documentation/CDCM Diagrams .pptx
@@ -6251,6 +6251,41 @@
           </a:p>
         </p:txBody>
       </p:sp>
+      <p:sp>
+        <p:nvSpPr>
+          <p:cNvPr id="2" name="TextBox 1">
+            <a:extLst>
+              <a:ext uri="{FF2B5EF4-FFF2-40B4-BE49-F238E27FC236}">
+                <a16:creationId xmlns:a16="http://schemas.microsoft.com/office/drawing/2014/main" id="{6F81E029-D0A5-3A9B-53FC-D9CCB023D9CD}"/>
+              </a:ext>
+            </a:extLst>
+          </p:cNvPr>
+          <p:cNvSpPr txBox="1"/>
+          <p:nvPr/>
+        </p:nvSpPr>
+        <p:spPr>
+          <a:xfrm>
+            <a:off x="870857" y="1001486"/>
+            <a:ext cx="1015278" cy="369332"/>
+          </a:xfrm>
+          <a:prstGeom prst="rect">
+            <a:avLst/>
+          </a:prstGeom>
+          <a:noFill/>
+        </p:spPr>
+        <p:txBody>
+          <a:bodyPr wrap="none" rtlCol="0">
+            <a:spAutoFit/>
+          </a:bodyPr>
+          <a:lstStyle/>
+          <a:p>
+            <a:r>
+              <a:rPr lang="en-US" dirty="0"/>
+              <a:t>Battery! </a:t>
+            </a:r>
+          </a:p>
+        </p:txBody>
+      </p:sp>
     </p:spTree>
     <p:extLst>
       <p:ext uri="{BB962C8B-B14F-4D97-AF65-F5344CB8AC3E}">
@@ -6310,13 +6345,3539 @@
           <a:lstStyle/>
           <a:p>
             <a:r>
-              <a:rPr lang="en-US"/>
+              <a:rPr lang="en-US" dirty="0"/>
               <a:t>8/26</a:t>
             </a:r>
+          </a:p>
+        </p:txBody>
+      </p:sp>
+      <p:grpSp>
+        <p:nvGrpSpPr>
+          <p:cNvPr id="2" name="Group 1">
+            <a:extLst>
+              <a:ext uri="{FF2B5EF4-FFF2-40B4-BE49-F238E27FC236}">
+                <a16:creationId xmlns:a16="http://schemas.microsoft.com/office/drawing/2014/main" id="{DF989BED-9E81-E18E-5038-7B7568B6C42A}"/>
+              </a:ext>
+            </a:extLst>
+          </p:cNvPr>
+          <p:cNvGrpSpPr/>
+          <p:nvPr/>
+        </p:nvGrpSpPr>
+        <p:grpSpPr>
+          <a:xfrm>
+            <a:off x="2986095" y="2266630"/>
+            <a:ext cx="3874244" cy="1857888"/>
+            <a:chOff x="2986095" y="2266630"/>
+            <a:chExt cx="3874244" cy="1857888"/>
+          </a:xfrm>
+        </p:grpSpPr>
+        <p:sp>
+          <p:nvSpPr>
+            <p:cNvPr id="3" name="Rectangle 2">
+              <a:extLst>
+                <a:ext uri="{FF2B5EF4-FFF2-40B4-BE49-F238E27FC236}">
+                  <a16:creationId xmlns:a16="http://schemas.microsoft.com/office/drawing/2014/main" id="{97C088A9-D156-282D-77D8-B984204F0691}"/>
+                </a:ext>
+              </a:extLst>
+            </p:cNvPr>
+            <p:cNvSpPr/>
+            <p:nvPr/>
+          </p:nvSpPr>
+          <p:spPr>
+            <a:xfrm>
+              <a:off x="3931434" y="2884106"/>
+              <a:ext cx="1202163" cy="622939"/>
+            </a:xfrm>
+            <a:prstGeom prst="rect">
+              <a:avLst/>
+            </a:prstGeom>
+            <a:solidFill>
+              <a:schemeClr val="bg1">
+                <a:lumMod val="95000"/>
+              </a:schemeClr>
+            </a:solidFill>
+            <a:ln w="28575">
+              <a:solidFill>
+                <a:schemeClr val="tx1"/>
+              </a:solidFill>
+            </a:ln>
+          </p:spPr>
+          <p:style>
+            <a:lnRef idx="2">
+              <a:schemeClr val="dk1"/>
+            </a:lnRef>
+            <a:fillRef idx="1">
+              <a:schemeClr val="lt1"/>
+            </a:fillRef>
+            <a:effectRef idx="0">
+              <a:schemeClr val="dk1"/>
+            </a:effectRef>
+            <a:fontRef idx="minor">
+              <a:schemeClr val="dk1"/>
+            </a:fontRef>
+          </p:style>
+          <p:txBody>
+            <a:bodyPr rtlCol="0" anchor="ctr"/>
+            <a:lstStyle/>
+            <a:p>
+              <a:pPr algn="ctr"/>
+              <a:endParaRPr lang="en-US"/>
+            </a:p>
+          </p:txBody>
+        </p:sp>
+        <p:sp>
+          <p:nvSpPr>
+            <p:cNvPr id="4" name="Oval 3">
+              <a:extLst>
+                <a:ext uri="{FF2B5EF4-FFF2-40B4-BE49-F238E27FC236}">
+                  <a16:creationId xmlns:a16="http://schemas.microsoft.com/office/drawing/2014/main" id="{FB5DE4C5-4445-B2FD-4471-D049C0B3CC69}"/>
+                </a:ext>
+              </a:extLst>
+            </p:cNvPr>
+            <p:cNvSpPr/>
+            <p:nvPr/>
+          </p:nvSpPr>
+          <p:spPr>
+            <a:xfrm>
+              <a:off x="5002452" y="2266630"/>
+              <a:ext cx="1857887" cy="1857888"/>
+            </a:xfrm>
+            <a:prstGeom prst="ellipse">
+              <a:avLst/>
+            </a:prstGeom>
+            <a:solidFill>
+              <a:schemeClr val="bg1">
+                <a:lumMod val="95000"/>
+              </a:schemeClr>
+            </a:solidFill>
+            <a:ln w="28575"/>
+          </p:spPr>
+          <p:style>
+            <a:lnRef idx="2">
+              <a:schemeClr val="dk1"/>
+            </a:lnRef>
+            <a:fillRef idx="1">
+              <a:schemeClr val="lt1"/>
+            </a:fillRef>
+            <a:effectRef idx="0">
+              <a:schemeClr val="dk1"/>
+            </a:effectRef>
+            <a:fontRef idx="minor">
+              <a:schemeClr val="dk1"/>
+            </a:fontRef>
+          </p:style>
+          <p:txBody>
+            <a:bodyPr rtlCol="0" anchor="ctr"/>
+            <a:lstStyle/>
+            <a:p>
+              <a:pPr algn="ctr"/>
+              <a:endParaRPr lang="en-US" dirty="0"/>
+            </a:p>
+          </p:txBody>
+        </p:sp>
+        <p:sp>
+          <p:nvSpPr>
+            <p:cNvPr id="15" name="Oval 14">
+              <a:extLst>
+                <a:ext uri="{FF2B5EF4-FFF2-40B4-BE49-F238E27FC236}">
+                  <a16:creationId xmlns:a16="http://schemas.microsoft.com/office/drawing/2014/main" id="{928861F3-C0EC-72D4-2B66-A2A6D1641106}"/>
+                </a:ext>
+              </a:extLst>
+            </p:cNvPr>
+            <p:cNvSpPr/>
+            <p:nvPr/>
+          </p:nvSpPr>
+          <p:spPr>
+            <a:xfrm>
+              <a:off x="2986095" y="2643673"/>
+              <a:ext cx="1103804" cy="1103804"/>
+            </a:xfrm>
+            <a:prstGeom prst="ellipse">
+              <a:avLst/>
+            </a:prstGeom>
+            <a:solidFill>
+              <a:schemeClr val="bg1">
+                <a:lumMod val="95000"/>
+              </a:schemeClr>
+            </a:solidFill>
+            <a:ln w="28575"/>
+          </p:spPr>
+          <p:style>
+            <a:lnRef idx="2">
+              <a:schemeClr val="dk1"/>
+            </a:lnRef>
+            <a:fillRef idx="1">
+              <a:schemeClr val="lt1"/>
+            </a:fillRef>
+            <a:effectRef idx="0">
+              <a:schemeClr val="dk1"/>
+            </a:effectRef>
+            <a:fontRef idx="minor">
+              <a:schemeClr val="dk1"/>
+            </a:fontRef>
+          </p:style>
+          <p:txBody>
+            <a:bodyPr rtlCol="0" anchor="ctr"/>
+            <a:lstStyle/>
+            <a:p>
+              <a:pPr algn="ctr"/>
+              <a:endParaRPr lang="en-US"/>
+            </a:p>
+          </p:txBody>
+        </p:sp>
+        <p:sp>
+          <p:nvSpPr>
+            <p:cNvPr id="16" name="Oval 15">
+              <a:extLst>
+                <a:ext uri="{FF2B5EF4-FFF2-40B4-BE49-F238E27FC236}">
+                  <a16:creationId xmlns:a16="http://schemas.microsoft.com/office/drawing/2014/main" id="{3783249A-C1BE-C07E-A6AD-2D5B4120FA3C}"/>
+                </a:ext>
+              </a:extLst>
+            </p:cNvPr>
+            <p:cNvSpPr/>
+            <p:nvPr/>
+          </p:nvSpPr>
+          <p:spPr>
+            <a:xfrm>
+              <a:off x="5398596" y="2626334"/>
+              <a:ext cx="1080081" cy="1080081"/>
+            </a:xfrm>
+            <a:prstGeom prst="ellipse">
+              <a:avLst/>
+            </a:prstGeom>
+            <a:noFill/>
+            <a:ln w="28575">
+              <a:prstDash val="dash"/>
+            </a:ln>
+          </p:spPr>
+          <p:style>
+            <a:lnRef idx="2">
+              <a:schemeClr val="dk1"/>
+            </a:lnRef>
+            <a:fillRef idx="1">
+              <a:schemeClr val="lt1"/>
+            </a:fillRef>
+            <a:effectRef idx="0">
+              <a:schemeClr val="dk1"/>
+            </a:effectRef>
+            <a:fontRef idx="minor">
+              <a:schemeClr val="dk1"/>
+            </a:fontRef>
+          </p:style>
+          <p:txBody>
+            <a:bodyPr rtlCol="0" anchor="ctr"/>
+            <a:lstStyle/>
+            <a:p>
+              <a:pPr algn="ctr"/>
+              <a:endParaRPr lang="en-US" dirty="0"/>
+            </a:p>
+          </p:txBody>
+        </p:sp>
+      </p:grpSp>
+      <p:grpSp>
+        <p:nvGrpSpPr>
+          <p:cNvPr id="17" name="Group 16">
+            <a:extLst>
+              <a:ext uri="{FF2B5EF4-FFF2-40B4-BE49-F238E27FC236}">
+                <a16:creationId xmlns:a16="http://schemas.microsoft.com/office/drawing/2014/main" id="{6B97180B-ECE1-4093-B6EB-073D5626A84A}"/>
+              </a:ext>
+            </a:extLst>
+          </p:cNvPr>
+          <p:cNvGrpSpPr/>
+          <p:nvPr/>
+        </p:nvGrpSpPr>
+        <p:grpSpPr>
+          <a:xfrm>
+            <a:off x="9391510" y="673194"/>
+            <a:ext cx="952751" cy="843907"/>
+            <a:chOff x="8915529" y="5428527"/>
+            <a:chExt cx="864091" cy="765376"/>
+          </a:xfrm>
+          <a:solidFill>
+            <a:srgbClr val="FDE2E0"/>
+          </a:solidFill>
+        </p:grpSpPr>
+        <p:sp>
+          <p:nvSpPr>
+            <p:cNvPr id="18" name="Rectangle 17">
+              <a:extLst>
+                <a:ext uri="{FF2B5EF4-FFF2-40B4-BE49-F238E27FC236}">
+                  <a16:creationId xmlns:a16="http://schemas.microsoft.com/office/drawing/2014/main" id="{E6D7AE69-00D2-0D5C-C48C-30B4B0BB761E}"/>
+                </a:ext>
+              </a:extLst>
+            </p:cNvPr>
+            <p:cNvSpPr/>
+            <p:nvPr/>
+          </p:nvSpPr>
+          <p:spPr>
+            <a:xfrm>
+              <a:off x="8915531" y="5428527"/>
+              <a:ext cx="856527" cy="765376"/>
+            </a:xfrm>
+            <a:prstGeom prst="rect">
+              <a:avLst/>
+            </a:prstGeom>
+            <a:grpFill/>
+          </p:spPr>
+          <p:style>
+            <a:lnRef idx="2">
+              <a:schemeClr val="accent1">
+                <a:shade val="15000"/>
+              </a:schemeClr>
+            </a:lnRef>
+            <a:fillRef idx="1">
+              <a:schemeClr val="accent1"/>
+            </a:fillRef>
+            <a:effectRef idx="0">
+              <a:schemeClr val="accent1"/>
+            </a:effectRef>
+            <a:fontRef idx="minor">
+              <a:schemeClr val="lt1"/>
+            </a:fontRef>
+          </p:style>
+          <p:txBody>
+            <a:bodyPr rtlCol="0" anchor="ctr"/>
+            <a:lstStyle/>
+            <a:p>
+              <a:pPr algn="ctr"/>
+              <a:endParaRPr lang="en-US"/>
+            </a:p>
+          </p:txBody>
+        </p:sp>
+        <p:sp>
+          <p:nvSpPr>
+            <p:cNvPr id="19" name="Rectangle 18">
+              <a:extLst>
+                <a:ext uri="{FF2B5EF4-FFF2-40B4-BE49-F238E27FC236}">
+                  <a16:creationId xmlns:a16="http://schemas.microsoft.com/office/drawing/2014/main" id="{47A9A980-FC63-B4D7-B3A4-45F9DBCFAD47}"/>
+                </a:ext>
+              </a:extLst>
+            </p:cNvPr>
+            <p:cNvSpPr/>
+            <p:nvPr/>
+          </p:nvSpPr>
+          <p:spPr>
+            <a:xfrm>
+              <a:off x="9183679" y="5685099"/>
+              <a:ext cx="323558" cy="287438"/>
+            </a:xfrm>
+            <a:prstGeom prst="rect">
+              <a:avLst/>
+            </a:prstGeom>
+            <a:grpFill/>
+          </p:spPr>
+          <p:style>
+            <a:lnRef idx="2">
+              <a:schemeClr val="accent1">
+                <a:shade val="15000"/>
+              </a:schemeClr>
+            </a:lnRef>
+            <a:fillRef idx="1">
+              <a:schemeClr val="accent1"/>
+            </a:fillRef>
+            <a:effectRef idx="0">
+              <a:schemeClr val="accent1"/>
+            </a:effectRef>
+            <a:fontRef idx="minor">
+              <a:schemeClr val="lt1"/>
+            </a:fontRef>
+          </p:style>
+          <p:txBody>
+            <a:bodyPr rtlCol="0" anchor="ctr"/>
+            <a:lstStyle/>
+            <a:p>
+              <a:pPr algn="ctr"/>
+              <a:endParaRPr lang="en-US"/>
+            </a:p>
+          </p:txBody>
+        </p:sp>
+        <p:cxnSp>
+          <p:nvCxnSpPr>
+            <p:cNvPr id="20" name="Straight Connector 19">
+              <a:extLst>
+                <a:ext uri="{FF2B5EF4-FFF2-40B4-BE49-F238E27FC236}">
+                  <a16:creationId xmlns:a16="http://schemas.microsoft.com/office/drawing/2014/main" id="{C654AE33-BC6A-A7E4-EA8D-0553D96B8937}"/>
+                </a:ext>
+              </a:extLst>
+            </p:cNvPr>
+            <p:cNvCxnSpPr>
+              <a:cxnSpLocks/>
+            </p:cNvCxnSpPr>
+            <p:nvPr/>
+          </p:nvCxnSpPr>
+          <p:spPr>
+            <a:xfrm flipV="1">
+              <a:off x="9514800" y="5440629"/>
+              <a:ext cx="264820" cy="256572"/>
+            </a:xfrm>
+            <a:prstGeom prst="line">
+              <a:avLst/>
+            </a:prstGeom>
+            <a:grpFill/>
+            <a:ln w="12700"/>
+          </p:spPr>
+          <p:style>
+            <a:lnRef idx="1">
+              <a:schemeClr val="dk1"/>
+            </a:lnRef>
+            <a:fillRef idx="0">
+              <a:schemeClr val="dk1"/>
+            </a:fillRef>
+            <a:effectRef idx="0">
+              <a:schemeClr val="dk1"/>
+            </a:effectRef>
+            <a:fontRef idx="minor">
+              <a:schemeClr val="tx1"/>
+            </a:fontRef>
+          </p:style>
+        </p:cxnSp>
+        <p:cxnSp>
+          <p:nvCxnSpPr>
+            <p:cNvPr id="21" name="Straight Connector 20">
+              <a:extLst>
+                <a:ext uri="{FF2B5EF4-FFF2-40B4-BE49-F238E27FC236}">
+                  <a16:creationId xmlns:a16="http://schemas.microsoft.com/office/drawing/2014/main" id="{67301ED9-A418-2D82-E758-53E0D263D473}"/>
+                </a:ext>
+              </a:extLst>
+            </p:cNvPr>
+            <p:cNvCxnSpPr>
+              <a:cxnSpLocks/>
+            </p:cNvCxnSpPr>
+            <p:nvPr/>
+          </p:nvCxnSpPr>
+          <p:spPr>
+            <a:xfrm>
+              <a:off x="9504591" y="5972537"/>
+              <a:ext cx="264820" cy="221366"/>
+            </a:xfrm>
+            <a:prstGeom prst="line">
+              <a:avLst/>
+            </a:prstGeom>
+            <a:grpFill/>
+            <a:ln w="12700"/>
+          </p:spPr>
+          <p:style>
+            <a:lnRef idx="1">
+              <a:schemeClr val="dk1"/>
+            </a:lnRef>
+            <a:fillRef idx="0">
+              <a:schemeClr val="dk1"/>
+            </a:fillRef>
+            <a:effectRef idx="0">
+              <a:schemeClr val="dk1"/>
+            </a:effectRef>
+            <a:fontRef idx="minor">
+              <a:schemeClr val="tx1"/>
+            </a:fontRef>
+          </p:style>
+        </p:cxnSp>
+        <p:cxnSp>
+          <p:nvCxnSpPr>
+            <p:cNvPr id="22" name="Straight Connector 21">
+              <a:extLst>
+                <a:ext uri="{FF2B5EF4-FFF2-40B4-BE49-F238E27FC236}">
+                  <a16:creationId xmlns:a16="http://schemas.microsoft.com/office/drawing/2014/main" id="{846DC680-1C03-0F09-F93D-384D21AF5A86}"/>
+                </a:ext>
+              </a:extLst>
+            </p:cNvPr>
+            <p:cNvCxnSpPr>
+              <a:cxnSpLocks/>
+            </p:cNvCxnSpPr>
+            <p:nvPr/>
+          </p:nvCxnSpPr>
+          <p:spPr>
+            <a:xfrm flipH="1" flipV="1">
+              <a:off x="8936069" y="5445019"/>
+              <a:ext cx="268149" cy="256572"/>
+            </a:xfrm>
+            <a:prstGeom prst="line">
+              <a:avLst/>
+            </a:prstGeom>
+            <a:grpFill/>
+            <a:ln w="12700"/>
+          </p:spPr>
+          <p:style>
+            <a:lnRef idx="1">
+              <a:schemeClr val="dk1"/>
+            </a:lnRef>
+            <a:fillRef idx="0">
+              <a:schemeClr val="dk1"/>
+            </a:fillRef>
+            <a:effectRef idx="0">
+              <a:schemeClr val="dk1"/>
+            </a:effectRef>
+            <a:fontRef idx="minor">
+              <a:schemeClr val="tx1"/>
+            </a:fontRef>
+          </p:style>
+        </p:cxnSp>
+        <p:cxnSp>
+          <p:nvCxnSpPr>
+            <p:cNvPr id="23" name="Straight Connector 22">
+              <a:extLst>
+                <a:ext uri="{FF2B5EF4-FFF2-40B4-BE49-F238E27FC236}">
+                  <a16:creationId xmlns:a16="http://schemas.microsoft.com/office/drawing/2014/main" id="{97A7B1D3-BC17-18B1-F2EF-61025FD91802}"/>
+                </a:ext>
+              </a:extLst>
+            </p:cNvPr>
+            <p:cNvCxnSpPr>
+              <a:cxnSpLocks/>
+            </p:cNvCxnSpPr>
+            <p:nvPr/>
+          </p:nvCxnSpPr>
+          <p:spPr>
+            <a:xfrm flipH="1">
+              <a:off x="8915529" y="5972537"/>
+              <a:ext cx="268149" cy="221366"/>
+            </a:xfrm>
+            <a:prstGeom prst="line">
+              <a:avLst/>
+            </a:prstGeom>
+            <a:grpFill/>
+            <a:ln w="12700"/>
+          </p:spPr>
+          <p:style>
+            <a:lnRef idx="1">
+              <a:schemeClr val="dk1"/>
+            </a:lnRef>
+            <a:fillRef idx="0">
+              <a:schemeClr val="dk1"/>
+            </a:fillRef>
+            <a:effectRef idx="0">
+              <a:schemeClr val="dk1"/>
+            </a:effectRef>
+            <a:fontRef idx="minor">
+              <a:schemeClr val="tx1"/>
+            </a:fontRef>
+          </p:style>
+        </p:cxnSp>
+      </p:grpSp>
+      <p:sp>
+        <p:nvSpPr>
+          <p:cNvPr id="24" name="Oval 23">
+            <a:extLst>
+              <a:ext uri="{FF2B5EF4-FFF2-40B4-BE49-F238E27FC236}">
+                <a16:creationId xmlns:a16="http://schemas.microsoft.com/office/drawing/2014/main" id="{266CA1E9-04C4-F280-BA10-E1EEF438CC01}"/>
+              </a:ext>
+            </a:extLst>
+          </p:cNvPr>
+          <p:cNvSpPr/>
+          <p:nvPr/>
+        </p:nvSpPr>
+        <p:spPr>
+          <a:xfrm>
+            <a:off x="10479002" y="1053537"/>
+            <a:ext cx="427355" cy="438968"/>
+          </a:xfrm>
+          <a:prstGeom prst="ellipse">
+            <a:avLst/>
+          </a:prstGeom>
+          <a:solidFill>
+            <a:srgbClr val="DAE3F3"/>
+          </a:solidFill>
+        </p:spPr>
+        <p:style>
+          <a:lnRef idx="2">
+            <a:schemeClr val="accent3">
+              <a:shade val="15000"/>
+            </a:schemeClr>
+          </a:lnRef>
+          <a:fillRef idx="1">
+            <a:schemeClr val="accent3"/>
+          </a:fillRef>
+          <a:effectRef idx="0">
+            <a:schemeClr val="accent3"/>
+          </a:effectRef>
+          <a:fontRef idx="minor">
+            <a:schemeClr val="lt1"/>
+          </a:fontRef>
+        </p:style>
+        <p:txBody>
+          <a:bodyPr rtlCol="0" anchor="ctr"/>
+          <a:lstStyle/>
+          <a:p>
+            <a:pPr algn="ctr"/>
             <a:endParaRPr lang="en-US" dirty="0"/>
           </a:p>
         </p:txBody>
       </p:sp>
+      <p:sp>
+        <p:nvSpPr>
+          <p:cNvPr id="25" name="Rectangle 24">
+            <a:extLst>
+              <a:ext uri="{FF2B5EF4-FFF2-40B4-BE49-F238E27FC236}">
+                <a16:creationId xmlns:a16="http://schemas.microsoft.com/office/drawing/2014/main" id="{455D0B8A-89BF-81DD-BFC7-379092A4F866}"/>
+              </a:ext>
+            </a:extLst>
+          </p:cNvPr>
+          <p:cNvSpPr/>
+          <p:nvPr/>
+        </p:nvSpPr>
+        <p:spPr>
+          <a:xfrm>
+            <a:off x="1494058" y="4886581"/>
+            <a:ext cx="1580779" cy="843908"/>
+          </a:xfrm>
+          <a:prstGeom prst="rect">
+            <a:avLst/>
+          </a:prstGeom>
+          <a:solidFill>
+            <a:srgbClr val="FDE2E0"/>
+          </a:solidFill>
+        </p:spPr>
+        <p:style>
+          <a:lnRef idx="2">
+            <a:schemeClr val="accent1">
+              <a:shade val="15000"/>
+            </a:schemeClr>
+          </a:lnRef>
+          <a:fillRef idx="1">
+            <a:schemeClr val="accent1"/>
+          </a:fillRef>
+          <a:effectRef idx="0">
+            <a:schemeClr val="accent1"/>
+          </a:effectRef>
+          <a:fontRef idx="minor">
+            <a:schemeClr val="lt1"/>
+          </a:fontRef>
+        </p:style>
+        <p:txBody>
+          <a:bodyPr rtlCol="0" anchor="ctr"/>
+          <a:lstStyle/>
+          <a:p>
+            <a:pPr algn="ctr"/>
+            <a:endParaRPr lang="en-US"/>
+          </a:p>
+        </p:txBody>
+      </p:sp>
+      <p:sp>
+        <p:nvSpPr>
+          <p:cNvPr id="26" name="Oval 25">
+            <a:extLst>
+              <a:ext uri="{FF2B5EF4-FFF2-40B4-BE49-F238E27FC236}">
+                <a16:creationId xmlns:a16="http://schemas.microsoft.com/office/drawing/2014/main" id="{52659048-FF9C-0E4D-89C9-21716D78FA37}"/>
+              </a:ext>
+            </a:extLst>
+          </p:cNvPr>
+          <p:cNvSpPr/>
+          <p:nvPr/>
+        </p:nvSpPr>
+        <p:spPr>
+          <a:xfrm>
+            <a:off x="3181804" y="5260737"/>
+            <a:ext cx="427355" cy="438968"/>
+          </a:xfrm>
+          <a:prstGeom prst="ellipse">
+            <a:avLst/>
+          </a:prstGeom>
+          <a:solidFill>
+            <a:srgbClr val="DAE3F3"/>
+          </a:solidFill>
+        </p:spPr>
+        <p:style>
+          <a:lnRef idx="2">
+            <a:schemeClr val="accent3">
+              <a:shade val="15000"/>
+            </a:schemeClr>
+          </a:lnRef>
+          <a:fillRef idx="1">
+            <a:schemeClr val="accent3"/>
+          </a:fillRef>
+          <a:effectRef idx="0">
+            <a:schemeClr val="accent3"/>
+          </a:effectRef>
+          <a:fontRef idx="minor">
+            <a:schemeClr val="lt1"/>
+          </a:fontRef>
+        </p:style>
+        <p:txBody>
+          <a:bodyPr rtlCol="0" anchor="ctr"/>
+          <a:lstStyle/>
+          <a:p>
+            <a:pPr algn="ctr"/>
+            <a:endParaRPr lang="en-US" dirty="0"/>
+          </a:p>
+        </p:txBody>
+      </p:sp>
+      <p:sp>
+        <p:nvSpPr>
+          <p:cNvPr id="27" name="TextBox 26">
+            <a:extLst>
+              <a:ext uri="{FF2B5EF4-FFF2-40B4-BE49-F238E27FC236}">
+                <a16:creationId xmlns:a16="http://schemas.microsoft.com/office/drawing/2014/main" id="{6677C8D7-C4BF-FE65-4B9E-F84FEA65D997}"/>
+              </a:ext>
+            </a:extLst>
+          </p:cNvPr>
+          <p:cNvSpPr txBox="1"/>
+          <p:nvPr/>
+        </p:nvSpPr>
+        <p:spPr>
+          <a:xfrm>
+            <a:off x="5263984" y="1952004"/>
+            <a:ext cx="1359545" cy="373291"/>
+          </a:xfrm>
+          <a:prstGeom prst="rect">
+            <a:avLst/>
+          </a:prstGeom>
+          <a:noFill/>
+        </p:spPr>
+        <p:txBody>
+          <a:bodyPr wrap="none" rtlCol="0">
+            <a:spAutoFit/>
+          </a:bodyPr>
+          <a:lstStyle/>
+          <a:p>
+            <a:r>
+              <a:rPr lang="en-US" sz="1600" dirty="0"/>
+              <a:t>Main Dome</a:t>
+            </a:r>
+          </a:p>
+        </p:txBody>
+      </p:sp>
+      <p:sp>
+        <p:nvSpPr>
+          <p:cNvPr id="28" name="TextBox 27">
+            <a:extLst>
+              <a:ext uri="{FF2B5EF4-FFF2-40B4-BE49-F238E27FC236}">
+                <a16:creationId xmlns:a16="http://schemas.microsoft.com/office/drawing/2014/main" id="{883E3B6B-2778-253A-E0C8-FA8D73B30A32}"/>
+              </a:ext>
+            </a:extLst>
+          </p:cNvPr>
+          <p:cNvSpPr txBox="1"/>
+          <p:nvPr/>
+        </p:nvSpPr>
+        <p:spPr>
+          <a:xfrm>
+            <a:off x="3973474" y="2442848"/>
+            <a:ext cx="892930" cy="373291"/>
+          </a:xfrm>
+          <a:prstGeom prst="rect">
+            <a:avLst/>
+          </a:prstGeom>
+          <a:noFill/>
+        </p:spPr>
+        <p:txBody>
+          <a:bodyPr wrap="none" rtlCol="0">
+            <a:spAutoFit/>
+          </a:bodyPr>
+          <a:lstStyle/>
+          <a:p>
+            <a:r>
+              <a:rPr lang="en-US" sz="1600" dirty="0"/>
+              <a:t>Tunnel</a:t>
+            </a:r>
+          </a:p>
+        </p:txBody>
+      </p:sp>
+      <p:sp>
+        <p:nvSpPr>
+          <p:cNvPr id="29" name="TextBox 28">
+            <a:extLst>
+              <a:ext uri="{FF2B5EF4-FFF2-40B4-BE49-F238E27FC236}">
+                <a16:creationId xmlns:a16="http://schemas.microsoft.com/office/drawing/2014/main" id="{46859536-48AE-A00A-43F0-558A8475EA74}"/>
+              </a:ext>
+            </a:extLst>
+          </p:cNvPr>
+          <p:cNvSpPr txBox="1"/>
+          <p:nvPr/>
+        </p:nvSpPr>
+        <p:spPr>
+          <a:xfrm>
+            <a:off x="2788276" y="3706415"/>
+            <a:ext cx="1710596" cy="338554"/>
+          </a:xfrm>
+          <a:prstGeom prst="rect">
+            <a:avLst/>
+          </a:prstGeom>
+          <a:noFill/>
+        </p:spPr>
+        <p:txBody>
+          <a:bodyPr wrap="none" rtlCol="0">
+            <a:spAutoFit/>
+          </a:bodyPr>
+          <a:lstStyle/>
+          <a:p>
+            <a:r>
+              <a:rPr lang="en-US" sz="1600" dirty="0"/>
+              <a:t>Secondary Dome</a:t>
+            </a:r>
+          </a:p>
+        </p:txBody>
+      </p:sp>
+      <p:sp>
+        <p:nvSpPr>
+          <p:cNvPr id="30" name="TextBox 29">
+            <a:extLst>
+              <a:ext uri="{FF2B5EF4-FFF2-40B4-BE49-F238E27FC236}">
+                <a16:creationId xmlns:a16="http://schemas.microsoft.com/office/drawing/2014/main" id="{FD830D9A-A9DD-99E6-66D3-7F9C5090D2E0}"/>
+              </a:ext>
+            </a:extLst>
+          </p:cNvPr>
+          <p:cNvSpPr txBox="1"/>
+          <p:nvPr/>
+        </p:nvSpPr>
+        <p:spPr>
+          <a:xfrm>
+            <a:off x="1670663" y="5121890"/>
+            <a:ext cx="1238352" cy="338554"/>
+          </a:xfrm>
+          <a:prstGeom prst="rect">
+            <a:avLst/>
+          </a:prstGeom>
+          <a:noFill/>
+        </p:spPr>
+        <p:txBody>
+          <a:bodyPr wrap="none" rtlCol="0">
+            <a:spAutoFit/>
+          </a:bodyPr>
+          <a:lstStyle/>
+          <a:p>
+            <a:r>
+              <a:rPr lang="en-US" sz="1600" dirty="0"/>
+              <a:t>Solar Arrays</a:t>
+            </a:r>
+          </a:p>
+        </p:txBody>
+      </p:sp>
+      <p:sp>
+        <p:nvSpPr>
+          <p:cNvPr id="31" name="TextBox 30">
+            <a:extLst>
+              <a:ext uri="{FF2B5EF4-FFF2-40B4-BE49-F238E27FC236}">
+                <a16:creationId xmlns:a16="http://schemas.microsoft.com/office/drawing/2014/main" id="{DFB6FDC0-5AD4-C6BC-F583-05C6747ADB01}"/>
+              </a:ext>
+            </a:extLst>
+          </p:cNvPr>
+          <p:cNvSpPr txBox="1"/>
+          <p:nvPr/>
+        </p:nvSpPr>
+        <p:spPr>
+          <a:xfrm>
+            <a:off x="9163435" y="1561549"/>
+            <a:ext cx="1383046" cy="584775"/>
+          </a:xfrm>
+          <a:prstGeom prst="rect">
+            <a:avLst/>
+          </a:prstGeom>
+          <a:noFill/>
+        </p:spPr>
+        <p:txBody>
+          <a:bodyPr wrap="square" rtlCol="0">
+            <a:spAutoFit/>
+          </a:bodyPr>
+          <a:lstStyle/>
+          <a:p>
+            <a:pPr algn="ctr"/>
+            <a:r>
+              <a:rPr lang="en-US" sz="1600" dirty="0"/>
+              <a:t>Nuclear Reactor </a:t>
+            </a:r>
+          </a:p>
+        </p:txBody>
+      </p:sp>
+      <p:pic>
+        <p:nvPicPr>
+          <p:cNvPr id="32" name="Picture 31">
+            <a:extLst>
+              <a:ext uri="{FF2B5EF4-FFF2-40B4-BE49-F238E27FC236}">
+                <a16:creationId xmlns:a16="http://schemas.microsoft.com/office/drawing/2014/main" id="{FB4F1C1F-A8A4-7A23-C6AF-9EDF98A1F5BD}"/>
+              </a:ext>
+            </a:extLst>
+          </p:cNvPr>
+          <p:cNvPicPr>
+            <a:picLocks noChangeAspect="1"/>
+          </p:cNvPicPr>
+          <p:nvPr/>
+        </p:nvPicPr>
+        <p:blipFill>
+          <a:blip r:embed="rId2">
+            <a:biLevel thresh="75000"/>
+            <a:extLst>
+              <a:ext uri="{BEBA8EAE-BF5A-486C-A8C5-ECC9F3942E4B}">
+                <a14:imgProps xmlns:a14="http://schemas.microsoft.com/office/drawing/2010/main">
+                  <a14:imgLayer r:embed="rId3">
+                    <a14:imgEffect>
+                      <a14:backgroundRemoval t="10000" b="90000" l="10000" r="90000">
+                        <a14:foregroundMark x1="38500" y1="34000" x2="38500" y2="34000"/>
+                        <a14:foregroundMark x1="46750" y1="44000" x2="46750" y2="44000"/>
+                        <a14:foregroundMark x1="50000" y1="75000" x2="50000" y2="75000"/>
+                      </a14:backgroundRemoval>
+                    </a14:imgEffect>
+                    <a14:imgEffect>
+                      <a14:brightnessContrast bright="40000"/>
+                    </a14:imgEffect>
+                  </a14:imgLayer>
+                </a14:imgProps>
+              </a:ext>
+            </a:extLst>
+          </a:blip>
+          <a:stretch>
+            <a:fillRect/>
+          </a:stretch>
+        </p:blipFill>
+        <p:spPr>
+          <a:xfrm>
+            <a:off x="8598205" y="1095147"/>
+            <a:ext cx="769915" cy="769915"/>
+          </a:xfrm>
+          <a:prstGeom prst="rect">
+            <a:avLst/>
+          </a:prstGeom>
+        </p:spPr>
+      </p:pic>
+      <p:cxnSp>
+        <p:nvCxnSpPr>
+          <p:cNvPr id="33" name="Elbow Connector 32">
+            <a:extLst>
+              <a:ext uri="{FF2B5EF4-FFF2-40B4-BE49-F238E27FC236}">
+                <a16:creationId xmlns:a16="http://schemas.microsoft.com/office/drawing/2014/main" id="{468EE024-7BBF-C0D7-4BEF-E8CBFFA24C70}"/>
+              </a:ext>
+            </a:extLst>
+          </p:cNvPr>
+          <p:cNvCxnSpPr>
+            <a:stCxn id="25" idx="0"/>
+            <a:endCxn id="86" idx="4"/>
+          </p:cNvCxnSpPr>
+          <p:nvPr/>
+        </p:nvCxnSpPr>
+        <p:spPr>
+          <a:xfrm rot="5400000" flipH="1" flipV="1">
+            <a:off x="1769812" y="3437299"/>
+            <a:ext cx="1963919" cy="934647"/>
+          </a:xfrm>
+          <a:prstGeom prst="bentConnector3">
+            <a:avLst>
+              <a:gd name="adj1" fmla="val 104562"/>
+            </a:avLst>
+          </a:prstGeom>
+          <a:ln>
+            <a:solidFill>
+              <a:schemeClr val="tx1"/>
+            </a:solidFill>
+          </a:ln>
+        </p:spPr>
+        <p:style>
+          <a:lnRef idx="2">
+            <a:schemeClr val="accent1"/>
+          </a:lnRef>
+          <a:fillRef idx="0">
+            <a:schemeClr val="accent1"/>
+          </a:fillRef>
+          <a:effectRef idx="1">
+            <a:schemeClr val="accent1"/>
+          </a:effectRef>
+          <a:fontRef idx="minor">
+            <a:schemeClr val="tx1"/>
+          </a:fontRef>
+        </p:style>
+      </p:cxnSp>
+      <p:cxnSp>
+        <p:nvCxnSpPr>
+          <p:cNvPr id="34" name="Elbow Connector 33">
+            <a:extLst>
+              <a:ext uri="{FF2B5EF4-FFF2-40B4-BE49-F238E27FC236}">
+                <a16:creationId xmlns:a16="http://schemas.microsoft.com/office/drawing/2014/main" id="{88D90B0F-CFB7-6C24-1F3E-BE1FA6B25C53}"/>
+              </a:ext>
+            </a:extLst>
+          </p:cNvPr>
+          <p:cNvCxnSpPr>
+            <a:cxnSpLocks/>
+            <a:stCxn id="18" idx="1"/>
+            <a:endCxn id="86" idx="4"/>
+          </p:cNvCxnSpPr>
+          <p:nvPr/>
+        </p:nvCxnSpPr>
+        <p:spPr>
+          <a:xfrm rot="10800000" flipV="1">
+            <a:off x="3219096" y="1095148"/>
+            <a:ext cx="6172417" cy="1827514"/>
+          </a:xfrm>
+          <a:prstGeom prst="bentConnector4">
+            <a:avLst>
+              <a:gd name="adj1" fmla="val 49402"/>
+              <a:gd name="adj2" fmla="val -70"/>
+            </a:avLst>
+          </a:prstGeom>
+          <a:ln>
+            <a:solidFill>
+              <a:schemeClr val="tx1"/>
+            </a:solidFill>
+          </a:ln>
+        </p:spPr>
+        <p:style>
+          <a:lnRef idx="2">
+            <a:schemeClr val="accent1"/>
+          </a:lnRef>
+          <a:fillRef idx="0">
+            <a:schemeClr val="accent1"/>
+          </a:fillRef>
+          <a:effectRef idx="1">
+            <a:schemeClr val="accent1"/>
+          </a:effectRef>
+          <a:fontRef idx="minor">
+            <a:schemeClr val="tx1"/>
+          </a:fontRef>
+        </p:style>
+      </p:cxnSp>
+      <p:sp>
+        <p:nvSpPr>
+          <p:cNvPr id="35" name="Oval 34">
+            <a:extLst>
+              <a:ext uri="{FF2B5EF4-FFF2-40B4-BE49-F238E27FC236}">
+                <a16:creationId xmlns:a16="http://schemas.microsoft.com/office/drawing/2014/main" id="{2262EF78-E9FC-0319-1284-FDDC34D2BC68}"/>
+              </a:ext>
+            </a:extLst>
+          </p:cNvPr>
+          <p:cNvSpPr/>
+          <p:nvPr/>
+        </p:nvSpPr>
+        <p:spPr>
+          <a:xfrm>
+            <a:off x="433339" y="551503"/>
+            <a:ext cx="2529363" cy="2511426"/>
+          </a:xfrm>
+          <a:prstGeom prst="ellipse">
+            <a:avLst/>
+          </a:prstGeom>
+          <a:solidFill>
+            <a:schemeClr val="bg1"/>
+          </a:solidFill>
+          <a:ln>
+            <a:solidFill>
+              <a:schemeClr val="tx1"/>
+            </a:solidFill>
+          </a:ln>
+        </p:spPr>
+        <p:style>
+          <a:lnRef idx="2">
+            <a:schemeClr val="accent1">
+              <a:shade val="15000"/>
+            </a:schemeClr>
+          </a:lnRef>
+          <a:fillRef idx="1">
+            <a:schemeClr val="accent1"/>
+          </a:fillRef>
+          <a:effectRef idx="0">
+            <a:schemeClr val="accent1"/>
+          </a:effectRef>
+          <a:fontRef idx="minor">
+            <a:schemeClr val="lt1"/>
+          </a:fontRef>
+        </p:style>
+        <p:txBody>
+          <a:bodyPr rtlCol="0" anchor="ctr"/>
+          <a:lstStyle/>
+          <a:p>
+            <a:pPr algn="ctr"/>
+            <a:endParaRPr lang="en-US"/>
+          </a:p>
+        </p:txBody>
+      </p:sp>
+      <p:sp>
+        <p:nvSpPr>
+          <p:cNvPr id="36" name="TextBox 35">
+            <a:extLst>
+              <a:ext uri="{FF2B5EF4-FFF2-40B4-BE49-F238E27FC236}">
+                <a16:creationId xmlns:a16="http://schemas.microsoft.com/office/drawing/2014/main" id="{CFDB7D17-3EF3-048A-B88D-1F7C1075D7DD}"/>
+              </a:ext>
+            </a:extLst>
+          </p:cNvPr>
+          <p:cNvSpPr txBox="1"/>
+          <p:nvPr/>
+        </p:nvSpPr>
+        <p:spPr>
+          <a:xfrm>
+            <a:off x="657493" y="1955422"/>
+            <a:ext cx="524503" cy="246221"/>
+          </a:xfrm>
+          <a:prstGeom prst="rect">
+            <a:avLst/>
+          </a:prstGeom>
+          <a:noFill/>
+        </p:spPr>
+        <p:txBody>
+          <a:bodyPr wrap="none" rtlCol="0">
+            <a:spAutoFit/>
+          </a:bodyPr>
+          <a:lstStyle/>
+          <a:p>
+            <a:r>
+              <a:rPr lang="en-US" sz="1000" dirty="0"/>
+              <a:t>BCDU</a:t>
+            </a:r>
+          </a:p>
+        </p:txBody>
+      </p:sp>
+      <p:sp>
+        <p:nvSpPr>
+          <p:cNvPr id="37" name="TextBox 36">
+            <a:extLst>
+              <a:ext uri="{FF2B5EF4-FFF2-40B4-BE49-F238E27FC236}">
+                <a16:creationId xmlns:a16="http://schemas.microsoft.com/office/drawing/2014/main" id="{F8F7D143-4085-7D08-3249-0EA4E40BDC5D}"/>
+              </a:ext>
+            </a:extLst>
+          </p:cNvPr>
+          <p:cNvSpPr txBox="1"/>
+          <p:nvPr/>
+        </p:nvSpPr>
+        <p:spPr>
+          <a:xfrm>
+            <a:off x="1137031" y="2509842"/>
+            <a:ext cx="684803" cy="246221"/>
+          </a:xfrm>
+          <a:prstGeom prst="rect">
+            <a:avLst/>
+          </a:prstGeom>
+          <a:noFill/>
+        </p:spPr>
+        <p:txBody>
+          <a:bodyPr wrap="none" rtlCol="0">
+            <a:spAutoFit/>
+          </a:bodyPr>
+          <a:lstStyle/>
+          <a:p>
+            <a:r>
+              <a:rPr lang="en-US" sz="1000" dirty="0"/>
+              <a:t>Batteries</a:t>
+            </a:r>
+          </a:p>
+        </p:txBody>
+      </p:sp>
+      <p:grpSp>
+        <p:nvGrpSpPr>
+          <p:cNvPr id="38" name="Group 37">
+            <a:extLst>
+              <a:ext uri="{FF2B5EF4-FFF2-40B4-BE49-F238E27FC236}">
+                <a16:creationId xmlns:a16="http://schemas.microsoft.com/office/drawing/2014/main" id="{8C494933-EF8A-9D36-6E88-DC0BD7A0284E}"/>
+              </a:ext>
+            </a:extLst>
+          </p:cNvPr>
+          <p:cNvGrpSpPr/>
+          <p:nvPr/>
+        </p:nvGrpSpPr>
+        <p:grpSpPr>
+          <a:xfrm>
+            <a:off x="1175339" y="2263102"/>
+            <a:ext cx="552895" cy="240665"/>
+            <a:chOff x="4866404" y="956091"/>
+            <a:chExt cx="552895" cy="240665"/>
+          </a:xfrm>
+        </p:grpSpPr>
+        <p:sp>
+          <p:nvSpPr>
+            <p:cNvPr id="39" name="Rectangle 38">
+              <a:extLst>
+                <a:ext uri="{FF2B5EF4-FFF2-40B4-BE49-F238E27FC236}">
+                  <a16:creationId xmlns:a16="http://schemas.microsoft.com/office/drawing/2014/main" id="{D239FCF6-FE02-7BC1-AE94-4C02B34C3862}"/>
+                </a:ext>
+              </a:extLst>
+            </p:cNvPr>
+            <p:cNvSpPr/>
+            <p:nvPr/>
+          </p:nvSpPr>
+          <p:spPr>
+            <a:xfrm>
+              <a:off x="4866404" y="956091"/>
+              <a:ext cx="113558" cy="113558"/>
+            </a:xfrm>
+            <a:prstGeom prst="rect">
+              <a:avLst/>
+            </a:prstGeom>
+          </p:spPr>
+          <p:style>
+            <a:lnRef idx="2">
+              <a:schemeClr val="dk1"/>
+            </a:lnRef>
+            <a:fillRef idx="1">
+              <a:schemeClr val="lt1"/>
+            </a:fillRef>
+            <a:effectRef idx="0">
+              <a:schemeClr val="dk1"/>
+            </a:effectRef>
+            <a:fontRef idx="minor">
+              <a:schemeClr val="dk1"/>
+            </a:fontRef>
+          </p:style>
+          <p:txBody>
+            <a:bodyPr rtlCol="0" anchor="ctr"/>
+            <a:lstStyle/>
+            <a:p>
+              <a:pPr algn="ctr"/>
+              <a:endParaRPr lang="en-US" dirty="0"/>
+            </a:p>
+          </p:txBody>
+        </p:sp>
+        <p:sp>
+          <p:nvSpPr>
+            <p:cNvPr id="40" name="Rectangle 39">
+              <a:extLst>
+                <a:ext uri="{FF2B5EF4-FFF2-40B4-BE49-F238E27FC236}">
+                  <a16:creationId xmlns:a16="http://schemas.microsoft.com/office/drawing/2014/main" id="{941D1547-A646-4E29-1B55-B3040A537677}"/>
+                </a:ext>
+              </a:extLst>
+            </p:cNvPr>
+            <p:cNvSpPr/>
+            <p:nvPr/>
+          </p:nvSpPr>
+          <p:spPr>
+            <a:xfrm>
+              <a:off x="4866404" y="1082060"/>
+              <a:ext cx="113558" cy="113558"/>
+            </a:xfrm>
+            <a:prstGeom prst="rect">
+              <a:avLst/>
+            </a:prstGeom>
+          </p:spPr>
+          <p:style>
+            <a:lnRef idx="2">
+              <a:schemeClr val="dk1"/>
+            </a:lnRef>
+            <a:fillRef idx="1">
+              <a:schemeClr val="lt1"/>
+            </a:fillRef>
+            <a:effectRef idx="0">
+              <a:schemeClr val="dk1"/>
+            </a:effectRef>
+            <a:fontRef idx="minor">
+              <a:schemeClr val="dk1"/>
+            </a:fontRef>
+          </p:style>
+          <p:txBody>
+            <a:bodyPr rtlCol="0" anchor="ctr"/>
+            <a:lstStyle/>
+            <a:p>
+              <a:pPr algn="ctr"/>
+              <a:endParaRPr lang="en-US"/>
+            </a:p>
+          </p:txBody>
+        </p:sp>
+        <p:sp>
+          <p:nvSpPr>
+            <p:cNvPr id="41" name="Rectangle 40">
+              <a:extLst>
+                <a:ext uri="{FF2B5EF4-FFF2-40B4-BE49-F238E27FC236}">
+                  <a16:creationId xmlns:a16="http://schemas.microsoft.com/office/drawing/2014/main" id="{2E4AF088-72EC-F2DA-2141-89A746FB837A}"/>
+                </a:ext>
+              </a:extLst>
+            </p:cNvPr>
+            <p:cNvSpPr/>
+            <p:nvPr/>
+          </p:nvSpPr>
+          <p:spPr>
+            <a:xfrm>
+              <a:off x="5086355" y="956091"/>
+              <a:ext cx="113558" cy="113558"/>
+            </a:xfrm>
+            <a:prstGeom prst="rect">
+              <a:avLst/>
+            </a:prstGeom>
+          </p:spPr>
+          <p:style>
+            <a:lnRef idx="2">
+              <a:schemeClr val="dk1"/>
+            </a:lnRef>
+            <a:fillRef idx="1">
+              <a:schemeClr val="lt1"/>
+            </a:fillRef>
+            <a:effectRef idx="0">
+              <a:schemeClr val="dk1"/>
+            </a:effectRef>
+            <a:fontRef idx="minor">
+              <a:schemeClr val="dk1"/>
+            </a:fontRef>
+          </p:style>
+          <p:txBody>
+            <a:bodyPr rtlCol="0" anchor="ctr"/>
+            <a:lstStyle/>
+            <a:p>
+              <a:pPr algn="ctr"/>
+              <a:endParaRPr lang="en-US"/>
+            </a:p>
+          </p:txBody>
+        </p:sp>
+        <p:sp>
+          <p:nvSpPr>
+            <p:cNvPr id="42" name="Rectangle 41">
+              <a:extLst>
+                <a:ext uri="{FF2B5EF4-FFF2-40B4-BE49-F238E27FC236}">
+                  <a16:creationId xmlns:a16="http://schemas.microsoft.com/office/drawing/2014/main" id="{1C3AF4A6-99D3-5EF1-D761-E8FABD0DCD13}"/>
+                </a:ext>
+              </a:extLst>
+            </p:cNvPr>
+            <p:cNvSpPr/>
+            <p:nvPr/>
+          </p:nvSpPr>
+          <p:spPr>
+            <a:xfrm>
+              <a:off x="5086355" y="1082060"/>
+              <a:ext cx="113558" cy="113558"/>
+            </a:xfrm>
+            <a:prstGeom prst="rect">
+              <a:avLst/>
+            </a:prstGeom>
+          </p:spPr>
+          <p:style>
+            <a:lnRef idx="2">
+              <a:schemeClr val="dk1"/>
+            </a:lnRef>
+            <a:fillRef idx="1">
+              <a:schemeClr val="lt1"/>
+            </a:fillRef>
+            <a:effectRef idx="0">
+              <a:schemeClr val="dk1"/>
+            </a:effectRef>
+            <a:fontRef idx="minor">
+              <a:schemeClr val="dk1"/>
+            </a:fontRef>
+          </p:style>
+          <p:txBody>
+            <a:bodyPr rtlCol="0" anchor="ctr"/>
+            <a:lstStyle/>
+            <a:p>
+              <a:pPr algn="ctr"/>
+              <a:endParaRPr lang="en-US"/>
+            </a:p>
+          </p:txBody>
+        </p:sp>
+        <p:sp>
+          <p:nvSpPr>
+            <p:cNvPr id="43" name="Rectangle 42">
+              <a:extLst>
+                <a:ext uri="{FF2B5EF4-FFF2-40B4-BE49-F238E27FC236}">
+                  <a16:creationId xmlns:a16="http://schemas.microsoft.com/office/drawing/2014/main" id="{2F15E017-ED24-13C4-0C3A-B44690A0D463}"/>
+                </a:ext>
+              </a:extLst>
+            </p:cNvPr>
+            <p:cNvSpPr/>
+            <p:nvPr/>
+          </p:nvSpPr>
+          <p:spPr>
+            <a:xfrm>
+              <a:off x="5305741" y="957229"/>
+              <a:ext cx="113558" cy="113558"/>
+            </a:xfrm>
+            <a:prstGeom prst="rect">
+              <a:avLst/>
+            </a:prstGeom>
+          </p:spPr>
+          <p:style>
+            <a:lnRef idx="2">
+              <a:schemeClr val="dk1"/>
+            </a:lnRef>
+            <a:fillRef idx="1">
+              <a:schemeClr val="lt1"/>
+            </a:fillRef>
+            <a:effectRef idx="0">
+              <a:schemeClr val="dk1"/>
+            </a:effectRef>
+            <a:fontRef idx="minor">
+              <a:schemeClr val="dk1"/>
+            </a:fontRef>
+          </p:style>
+          <p:txBody>
+            <a:bodyPr rtlCol="0" anchor="ctr"/>
+            <a:lstStyle/>
+            <a:p>
+              <a:pPr algn="ctr"/>
+              <a:endParaRPr lang="en-US"/>
+            </a:p>
+          </p:txBody>
+        </p:sp>
+        <p:sp>
+          <p:nvSpPr>
+            <p:cNvPr id="44" name="Rectangle 43">
+              <a:extLst>
+                <a:ext uri="{FF2B5EF4-FFF2-40B4-BE49-F238E27FC236}">
+                  <a16:creationId xmlns:a16="http://schemas.microsoft.com/office/drawing/2014/main" id="{2D2D7DA0-3E9A-580A-F83A-4541796979F7}"/>
+                </a:ext>
+              </a:extLst>
+            </p:cNvPr>
+            <p:cNvSpPr/>
+            <p:nvPr/>
+          </p:nvSpPr>
+          <p:spPr>
+            <a:xfrm>
+              <a:off x="5305741" y="1083198"/>
+              <a:ext cx="113558" cy="113558"/>
+            </a:xfrm>
+            <a:prstGeom prst="rect">
+              <a:avLst/>
+            </a:prstGeom>
+          </p:spPr>
+          <p:style>
+            <a:lnRef idx="2">
+              <a:schemeClr val="dk1"/>
+            </a:lnRef>
+            <a:fillRef idx="1">
+              <a:schemeClr val="lt1"/>
+            </a:fillRef>
+            <a:effectRef idx="0">
+              <a:schemeClr val="dk1"/>
+            </a:effectRef>
+            <a:fontRef idx="minor">
+              <a:schemeClr val="dk1"/>
+            </a:fontRef>
+          </p:style>
+          <p:txBody>
+            <a:bodyPr rtlCol="0" anchor="ctr"/>
+            <a:lstStyle/>
+            <a:p>
+              <a:pPr algn="ctr"/>
+              <a:endParaRPr lang="en-US"/>
+            </a:p>
+          </p:txBody>
+        </p:sp>
+      </p:grpSp>
+      <p:sp>
+        <p:nvSpPr>
+          <p:cNvPr id="45" name="Rectangle 44">
+            <a:extLst>
+              <a:ext uri="{FF2B5EF4-FFF2-40B4-BE49-F238E27FC236}">
+                <a16:creationId xmlns:a16="http://schemas.microsoft.com/office/drawing/2014/main" id="{78F5B97B-DE9A-61D6-9FB9-4F0D30AC7C3E}"/>
+              </a:ext>
+            </a:extLst>
+          </p:cNvPr>
+          <p:cNvSpPr/>
+          <p:nvPr/>
+        </p:nvSpPr>
+        <p:spPr>
+          <a:xfrm>
+            <a:off x="1174266" y="2001477"/>
+            <a:ext cx="113558" cy="113558"/>
+          </a:xfrm>
+          <a:prstGeom prst="rect">
+            <a:avLst/>
+          </a:prstGeom>
+          <a:solidFill>
+            <a:schemeClr val="accent2"/>
+          </a:solidFill>
+        </p:spPr>
+        <p:style>
+          <a:lnRef idx="2">
+            <a:schemeClr val="dk1"/>
+          </a:lnRef>
+          <a:fillRef idx="1">
+            <a:schemeClr val="lt1"/>
+          </a:fillRef>
+          <a:effectRef idx="0">
+            <a:schemeClr val="dk1"/>
+          </a:effectRef>
+          <a:fontRef idx="minor">
+            <a:schemeClr val="dk1"/>
+          </a:fontRef>
+        </p:style>
+        <p:txBody>
+          <a:bodyPr rtlCol="0" anchor="ctr"/>
+          <a:lstStyle/>
+          <a:p>
+            <a:pPr algn="ctr"/>
+            <a:endParaRPr lang="en-US"/>
+          </a:p>
+        </p:txBody>
+      </p:sp>
+      <p:sp>
+        <p:nvSpPr>
+          <p:cNvPr id="46" name="Rectangle 45">
+            <a:extLst>
+              <a:ext uri="{FF2B5EF4-FFF2-40B4-BE49-F238E27FC236}">
+                <a16:creationId xmlns:a16="http://schemas.microsoft.com/office/drawing/2014/main" id="{BA44741B-BCC6-41F3-5C16-6B1A876E1762}"/>
+              </a:ext>
+            </a:extLst>
+          </p:cNvPr>
+          <p:cNvSpPr/>
+          <p:nvPr/>
+        </p:nvSpPr>
+        <p:spPr>
+          <a:xfrm>
+            <a:off x="1393792" y="1998974"/>
+            <a:ext cx="113558" cy="113558"/>
+          </a:xfrm>
+          <a:prstGeom prst="rect">
+            <a:avLst/>
+          </a:prstGeom>
+          <a:solidFill>
+            <a:schemeClr val="accent2"/>
+          </a:solidFill>
+        </p:spPr>
+        <p:style>
+          <a:lnRef idx="2">
+            <a:schemeClr val="dk1"/>
+          </a:lnRef>
+          <a:fillRef idx="1">
+            <a:schemeClr val="lt1"/>
+          </a:fillRef>
+          <a:effectRef idx="0">
+            <a:schemeClr val="dk1"/>
+          </a:effectRef>
+          <a:fontRef idx="minor">
+            <a:schemeClr val="dk1"/>
+          </a:fontRef>
+        </p:style>
+        <p:txBody>
+          <a:bodyPr rtlCol="0" anchor="ctr"/>
+          <a:lstStyle/>
+          <a:p>
+            <a:pPr algn="ctr"/>
+            <a:endParaRPr lang="en-US"/>
+          </a:p>
+        </p:txBody>
+      </p:sp>
+      <p:sp>
+        <p:nvSpPr>
+          <p:cNvPr id="47" name="Rectangle 46">
+            <a:extLst>
+              <a:ext uri="{FF2B5EF4-FFF2-40B4-BE49-F238E27FC236}">
+                <a16:creationId xmlns:a16="http://schemas.microsoft.com/office/drawing/2014/main" id="{CFA788EA-4898-92CC-FD2A-1F4AAA9C9830}"/>
+              </a:ext>
+            </a:extLst>
+          </p:cNvPr>
+          <p:cNvSpPr/>
+          <p:nvPr/>
+        </p:nvSpPr>
+        <p:spPr>
+          <a:xfrm>
+            <a:off x="1620854" y="1998974"/>
+            <a:ext cx="113558" cy="113558"/>
+          </a:xfrm>
+          <a:prstGeom prst="rect">
+            <a:avLst/>
+          </a:prstGeom>
+          <a:solidFill>
+            <a:schemeClr val="accent2"/>
+          </a:solidFill>
+        </p:spPr>
+        <p:style>
+          <a:lnRef idx="2">
+            <a:schemeClr val="dk1"/>
+          </a:lnRef>
+          <a:fillRef idx="1">
+            <a:schemeClr val="lt1"/>
+          </a:fillRef>
+          <a:effectRef idx="0">
+            <a:schemeClr val="dk1"/>
+          </a:effectRef>
+          <a:fontRef idx="minor">
+            <a:schemeClr val="dk1"/>
+          </a:fontRef>
+        </p:style>
+        <p:txBody>
+          <a:bodyPr rtlCol="0" anchor="ctr"/>
+          <a:lstStyle/>
+          <a:p>
+            <a:pPr algn="ctr"/>
+            <a:endParaRPr lang="en-US"/>
+          </a:p>
+        </p:txBody>
+      </p:sp>
+      <p:cxnSp>
+        <p:nvCxnSpPr>
+          <p:cNvPr id="48" name="Straight Arrow Connector 47">
+            <a:extLst>
+              <a:ext uri="{FF2B5EF4-FFF2-40B4-BE49-F238E27FC236}">
+                <a16:creationId xmlns:a16="http://schemas.microsoft.com/office/drawing/2014/main" id="{18DC4DDF-CD92-A2F9-277F-ACFD0CC5E54B}"/>
+              </a:ext>
+            </a:extLst>
+          </p:cNvPr>
+          <p:cNvCxnSpPr>
+            <a:stCxn id="45" idx="2"/>
+            <a:endCxn id="39" idx="0"/>
+          </p:cNvCxnSpPr>
+          <p:nvPr/>
+        </p:nvCxnSpPr>
+        <p:spPr>
+          <a:xfrm>
+            <a:off x="1231045" y="2115035"/>
+            <a:ext cx="1073" cy="148067"/>
+          </a:xfrm>
+          <a:prstGeom prst="straightConnector1">
+            <a:avLst/>
+          </a:prstGeom>
+          <a:ln>
+            <a:solidFill>
+              <a:schemeClr val="tx1"/>
+            </a:solidFill>
+            <a:headEnd type="triangle"/>
+            <a:tailEnd type="triangle"/>
+          </a:ln>
+        </p:spPr>
+        <p:style>
+          <a:lnRef idx="2">
+            <a:schemeClr val="accent1"/>
+          </a:lnRef>
+          <a:fillRef idx="0">
+            <a:schemeClr val="accent1"/>
+          </a:fillRef>
+          <a:effectRef idx="1">
+            <a:schemeClr val="accent1"/>
+          </a:effectRef>
+          <a:fontRef idx="minor">
+            <a:schemeClr val="tx1"/>
+          </a:fontRef>
+        </p:style>
+      </p:cxnSp>
+      <p:cxnSp>
+        <p:nvCxnSpPr>
+          <p:cNvPr id="49" name="Straight Arrow Connector 48">
+            <a:extLst>
+              <a:ext uri="{FF2B5EF4-FFF2-40B4-BE49-F238E27FC236}">
+                <a16:creationId xmlns:a16="http://schemas.microsoft.com/office/drawing/2014/main" id="{0B5EF111-7A33-A298-32FA-1553C5539474}"/>
+              </a:ext>
+            </a:extLst>
+          </p:cNvPr>
+          <p:cNvCxnSpPr/>
+          <p:nvPr/>
+        </p:nvCxnSpPr>
+        <p:spPr>
+          <a:xfrm>
+            <a:off x="1450571" y="2107975"/>
+            <a:ext cx="1073" cy="148067"/>
+          </a:xfrm>
+          <a:prstGeom prst="straightConnector1">
+            <a:avLst/>
+          </a:prstGeom>
+          <a:ln>
+            <a:solidFill>
+              <a:schemeClr val="tx1"/>
+            </a:solidFill>
+            <a:headEnd type="triangle"/>
+            <a:tailEnd type="triangle"/>
+          </a:ln>
+        </p:spPr>
+        <p:style>
+          <a:lnRef idx="2">
+            <a:schemeClr val="accent1"/>
+          </a:lnRef>
+          <a:fillRef idx="0">
+            <a:schemeClr val="accent1"/>
+          </a:fillRef>
+          <a:effectRef idx="1">
+            <a:schemeClr val="accent1"/>
+          </a:effectRef>
+          <a:fontRef idx="minor">
+            <a:schemeClr val="tx1"/>
+          </a:fontRef>
+        </p:style>
+      </p:cxnSp>
+      <p:cxnSp>
+        <p:nvCxnSpPr>
+          <p:cNvPr id="50" name="Straight Arrow Connector 49">
+            <a:extLst>
+              <a:ext uri="{FF2B5EF4-FFF2-40B4-BE49-F238E27FC236}">
+                <a16:creationId xmlns:a16="http://schemas.microsoft.com/office/drawing/2014/main" id="{46756471-FE41-368C-2DB7-02EC4AE435B3}"/>
+              </a:ext>
+            </a:extLst>
+          </p:cNvPr>
+          <p:cNvCxnSpPr/>
+          <p:nvPr/>
+        </p:nvCxnSpPr>
+        <p:spPr>
+          <a:xfrm>
+            <a:off x="1683084" y="2103303"/>
+            <a:ext cx="1073" cy="148067"/>
+          </a:xfrm>
+          <a:prstGeom prst="straightConnector1">
+            <a:avLst/>
+          </a:prstGeom>
+          <a:ln>
+            <a:solidFill>
+              <a:schemeClr val="tx1"/>
+            </a:solidFill>
+            <a:headEnd type="triangle"/>
+            <a:tailEnd type="triangle"/>
+          </a:ln>
+        </p:spPr>
+        <p:style>
+          <a:lnRef idx="2">
+            <a:schemeClr val="accent1"/>
+          </a:lnRef>
+          <a:fillRef idx="0">
+            <a:schemeClr val="accent1"/>
+          </a:fillRef>
+          <a:effectRef idx="1">
+            <a:schemeClr val="accent1"/>
+          </a:effectRef>
+          <a:fontRef idx="minor">
+            <a:schemeClr val="tx1"/>
+          </a:fontRef>
+        </p:style>
+      </p:cxnSp>
+      <p:grpSp>
+        <p:nvGrpSpPr>
+          <p:cNvPr id="51" name="Group 50">
+            <a:extLst>
+              <a:ext uri="{FF2B5EF4-FFF2-40B4-BE49-F238E27FC236}">
+                <a16:creationId xmlns:a16="http://schemas.microsoft.com/office/drawing/2014/main" id="{FE166B73-1965-D778-6C7F-FE63EA78F948}"/>
+              </a:ext>
+            </a:extLst>
+          </p:cNvPr>
+          <p:cNvGrpSpPr/>
+          <p:nvPr/>
+        </p:nvGrpSpPr>
+        <p:grpSpPr>
+          <a:xfrm>
+            <a:off x="1176395" y="1531815"/>
+            <a:ext cx="551839" cy="246221"/>
+            <a:chOff x="6805689" y="5450185"/>
+            <a:chExt cx="551839" cy="246221"/>
+          </a:xfrm>
+        </p:grpSpPr>
+        <p:sp>
+          <p:nvSpPr>
+            <p:cNvPr id="52" name="Rectangle 51">
+              <a:extLst>
+                <a:ext uri="{FF2B5EF4-FFF2-40B4-BE49-F238E27FC236}">
+                  <a16:creationId xmlns:a16="http://schemas.microsoft.com/office/drawing/2014/main" id="{1C4022F9-01F8-EB37-68EC-FCD1210720BF}"/>
+                </a:ext>
+              </a:extLst>
+            </p:cNvPr>
+            <p:cNvSpPr/>
+            <p:nvPr/>
+          </p:nvSpPr>
+          <p:spPr>
+            <a:xfrm>
+              <a:off x="6805689" y="5468246"/>
+              <a:ext cx="551839" cy="184701"/>
+            </a:xfrm>
+            <a:prstGeom prst="rect">
+              <a:avLst/>
+            </a:prstGeom>
+          </p:spPr>
+          <p:style>
+            <a:lnRef idx="2">
+              <a:schemeClr val="dk1"/>
+            </a:lnRef>
+            <a:fillRef idx="1">
+              <a:schemeClr val="lt1"/>
+            </a:fillRef>
+            <a:effectRef idx="0">
+              <a:schemeClr val="dk1"/>
+            </a:effectRef>
+            <a:fontRef idx="minor">
+              <a:schemeClr val="dk1"/>
+            </a:fontRef>
+          </p:style>
+          <p:txBody>
+            <a:bodyPr rtlCol="0" anchor="ctr"/>
+            <a:lstStyle/>
+            <a:p>
+              <a:pPr algn="ctr"/>
+              <a:endParaRPr lang="en-US"/>
+            </a:p>
+          </p:txBody>
+        </p:sp>
+        <p:sp>
+          <p:nvSpPr>
+            <p:cNvPr id="53" name="TextBox 52">
+              <a:extLst>
+                <a:ext uri="{FF2B5EF4-FFF2-40B4-BE49-F238E27FC236}">
+                  <a16:creationId xmlns:a16="http://schemas.microsoft.com/office/drawing/2014/main" id="{7A4FBFDF-9626-9B19-1099-10E65B4D50E4}"/>
+                </a:ext>
+              </a:extLst>
+            </p:cNvPr>
+            <p:cNvSpPr txBox="1"/>
+            <p:nvPr/>
+          </p:nvSpPr>
+          <p:spPr>
+            <a:xfrm>
+              <a:off x="6820435" y="5450185"/>
+              <a:ext cx="519694" cy="246221"/>
+            </a:xfrm>
+            <a:prstGeom prst="rect">
+              <a:avLst/>
+            </a:prstGeom>
+            <a:noFill/>
+          </p:spPr>
+          <p:txBody>
+            <a:bodyPr wrap="none" rtlCol="0">
+              <a:spAutoFit/>
+            </a:bodyPr>
+            <a:lstStyle/>
+            <a:p>
+              <a:r>
+                <a:rPr lang="en-US" sz="1000" dirty="0"/>
+                <a:t>DCSU</a:t>
+              </a:r>
+            </a:p>
+          </p:txBody>
+        </p:sp>
+      </p:grpSp>
+      <p:cxnSp>
+        <p:nvCxnSpPr>
+          <p:cNvPr id="54" name="Straight Arrow Connector 53">
+            <a:extLst>
+              <a:ext uri="{FF2B5EF4-FFF2-40B4-BE49-F238E27FC236}">
+                <a16:creationId xmlns:a16="http://schemas.microsoft.com/office/drawing/2014/main" id="{2E6C043F-656E-EFDD-33E0-2C4D091C8B02}"/>
+              </a:ext>
+            </a:extLst>
+          </p:cNvPr>
+          <p:cNvCxnSpPr>
+            <a:cxnSpLocks/>
+          </p:cNvCxnSpPr>
+          <p:nvPr/>
+        </p:nvCxnSpPr>
+        <p:spPr>
+          <a:xfrm>
+            <a:off x="1231045" y="1735995"/>
+            <a:ext cx="0" cy="274320"/>
+          </a:xfrm>
+          <a:prstGeom prst="straightConnector1">
+            <a:avLst/>
+          </a:prstGeom>
+          <a:ln>
+            <a:solidFill>
+              <a:schemeClr val="tx1"/>
+            </a:solidFill>
+            <a:headEnd type="triangle"/>
+            <a:tailEnd type="triangle"/>
+          </a:ln>
+        </p:spPr>
+        <p:style>
+          <a:lnRef idx="2">
+            <a:schemeClr val="accent1"/>
+          </a:lnRef>
+          <a:fillRef idx="0">
+            <a:schemeClr val="accent1"/>
+          </a:fillRef>
+          <a:effectRef idx="1">
+            <a:schemeClr val="accent1"/>
+          </a:effectRef>
+          <a:fontRef idx="minor">
+            <a:schemeClr val="tx1"/>
+          </a:fontRef>
+        </p:style>
+      </p:cxnSp>
+      <p:cxnSp>
+        <p:nvCxnSpPr>
+          <p:cNvPr id="55" name="Straight Arrow Connector 54">
+            <a:extLst>
+              <a:ext uri="{FF2B5EF4-FFF2-40B4-BE49-F238E27FC236}">
+                <a16:creationId xmlns:a16="http://schemas.microsoft.com/office/drawing/2014/main" id="{571F33F4-1A76-5E40-3691-8B555061FC3C}"/>
+              </a:ext>
+            </a:extLst>
+          </p:cNvPr>
+          <p:cNvCxnSpPr>
+            <a:cxnSpLocks/>
+          </p:cNvCxnSpPr>
+          <p:nvPr/>
+        </p:nvCxnSpPr>
+        <p:spPr>
+          <a:xfrm>
+            <a:off x="1450571" y="1724654"/>
+            <a:ext cx="0" cy="274320"/>
+          </a:xfrm>
+          <a:prstGeom prst="straightConnector1">
+            <a:avLst/>
+          </a:prstGeom>
+          <a:ln>
+            <a:solidFill>
+              <a:schemeClr val="tx1"/>
+            </a:solidFill>
+            <a:headEnd type="triangle"/>
+            <a:tailEnd type="triangle"/>
+          </a:ln>
+        </p:spPr>
+        <p:style>
+          <a:lnRef idx="2">
+            <a:schemeClr val="accent1"/>
+          </a:lnRef>
+          <a:fillRef idx="0">
+            <a:schemeClr val="accent1"/>
+          </a:fillRef>
+          <a:effectRef idx="1">
+            <a:schemeClr val="accent1"/>
+          </a:effectRef>
+          <a:fontRef idx="minor">
+            <a:schemeClr val="tx1"/>
+          </a:fontRef>
+        </p:style>
+      </p:cxnSp>
+      <p:cxnSp>
+        <p:nvCxnSpPr>
+          <p:cNvPr id="56" name="Straight Arrow Connector 55">
+            <a:extLst>
+              <a:ext uri="{FF2B5EF4-FFF2-40B4-BE49-F238E27FC236}">
+                <a16:creationId xmlns:a16="http://schemas.microsoft.com/office/drawing/2014/main" id="{03968CEE-420D-4A1E-DACF-1A7D33D27CDF}"/>
+              </a:ext>
+            </a:extLst>
+          </p:cNvPr>
+          <p:cNvCxnSpPr>
+            <a:cxnSpLocks/>
+          </p:cNvCxnSpPr>
+          <p:nvPr/>
+        </p:nvCxnSpPr>
+        <p:spPr>
+          <a:xfrm>
+            <a:off x="1683084" y="1729322"/>
+            <a:ext cx="0" cy="274320"/>
+          </a:xfrm>
+          <a:prstGeom prst="straightConnector1">
+            <a:avLst/>
+          </a:prstGeom>
+          <a:ln>
+            <a:solidFill>
+              <a:schemeClr val="tx1"/>
+            </a:solidFill>
+            <a:headEnd type="triangle"/>
+            <a:tailEnd type="triangle"/>
+          </a:ln>
+        </p:spPr>
+        <p:style>
+          <a:lnRef idx="2">
+            <a:schemeClr val="accent1"/>
+          </a:lnRef>
+          <a:fillRef idx="0">
+            <a:schemeClr val="accent1"/>
+          </a:fillRef>
+          <a:effectRef idx="1">
+            <a:schemeClr val="accent1"/>
+          </a:effectRef>
+          <a:fontRef idx="minor">
+            <a:schemeClr val="tx1"/>
+          </a:fontRef>
+        </p:style>
+      </p:cxnSp>
+      <p:grpSp>
+        <p:nvGrpSpPr>
+          <p:cNvPr id="57" name="Group 56">
+            <a:extLst>
+              <a:ext uri="{FF2B5EF4-FFF2-40B4-BE49-F238E27FC236}">
+                <a16:creationId xmlns:a16="http://schemas.microsoft.com/office/drawing/2014/main" id="{23F9D803-EAA6-5C19-ECDE-996EE7606F66}"/>
+              </a:ext>
+            </a:extLst>
+          </p:cNvPr>
+          <p:cNvGrpSpPr/>
+          <p:nvPr/>
+        </p:nvGrpSpPr>
+        <p:grpSpPr>
+          <a:xfrm>
+            <a:off x="239401" y="1498398"/>
+            <a:ext cx="577402" cy="246221"/>
+            <a:chOff x="6791470" y="5450185"/>
+            <a:chExt cx="577402" cy="246221"/>
+          </a:xfrm>
+        </p:grpSpPr>
+        <p:sp>
+          <p:nvSpPr>
+            <p:cNvPr id="58" name="Rectangle 57">
+              <a:extLst>
+                <a:ext uri="{FF2B5EF4-FFF2-40B4-BE49-F238E27FC236}">
+                  <a16:creationId xmlns:a16="http://schemas.microsoft.com/office/drawing/2014/main" id="{36591344-422A-7160-7BF7-596ED88758E1}"/>
+                </a:ext>
+              </a:extLst>
+            </p:cNvPr>
+            <p:cNvSpPr/>
+            <p:nvPr/>
+          </p:nvSpPr>
+          <p:spPr>
+            <a:xfrm>
+              <a:off x="6805689" y="5468246"/>
+              <a:ext cx="551839" cy="184701"/>
+            </a:xfrm>
+            <a:prstGeom prst="rect">
+              <a:avLst/>
+            </a:prstGeom>
+          </p:spPr>
+          <p:style>
+            <a:lnRef idx="2">
+              <a:schemeClr val="dk1"/>
+            </a:lnRef>
+            <a:fillRef idx="1">
+              <a:schemeClr val="lt1"/>
+            </a:fillRef>
+            <a:effectRef idx="0">
+              <a:schemeClr val="dk1"/>
+            </a:effectRef>
+            <a:fontRef idx="minor">
+              <a:schemeClr val="dk1"/>
+            </a:fontRef>
+          </p:style>
+          <p:txBody>
+            <a:bodyPr rtlCol="0" anchor="ctr"/>
+            <a:lstStyle/>
+            <a:p>
+              <a:pPr algn="ctr"/>
+              <a:endParaRPr lang="en-US"/>
+            </a:p>
+          </p:txBody>
+        </p:sp>
+        <p:sp>
+          <p:nvSpPr>
+            <p:cNvPr id="59" name="TextBox 58">
+              <a:extLst>
+                <a:ext uri="{FF2B5EF4-FFF2-40B4-BE49-F238E27FC236}">
+                  <a16:creationId xmlns:a16="http://schemas.microsoft.com/office/drawing/2014/main" id="{82FBED9C-5C67-699F-50F8-8E3803DD719D}"/>
+                </a:ext>
+              </a:extLst>
+            </p:cNvPr>
+            <p:cNvSpPr txBox="1"/>
+            <p:nvPr/>
+          </p:nvSpPr>
+          <p:spPr>
+            <a:xfrm>
+              <a:off x="6791470" y="5450185"/>
+              <a:ext cx="577402" cy="246221"/>
+            </a:xfrm>
+            <a:prstGeom prst="rect">
+              <a:avLst/>
+            </a:prstGeom>
+            <a:noFill/>
+          </p:spPr>
+          <p:txBody>
+            <a:bodyPr wrap="none" rtlCol="0">
+              <a:spAutoFit/>
+            </a:bodyPr>
+            <a:lstStyle/>
+            <a:p>
+              <a:r>
+                <a:rPr lang="en-US" sz="1000" dirty="0"/>
+                <a:t>Source</a:t>
+              </a:r>
+            </a:p>
+          </p:txBody>
+        </p:sp>
+      </p:grpSp>
+      <p:grpSp>
+        <p:nvGrpSpPr>
+          <p:cNvPr id="60" name="Group 59">
+            <a:extLst>
+              <a:ext uri="{FF2B5EF4-FFF2-40B4-BE49-F238E27FC236}">
+                <a16:creationId xmlns:a16="http://schemas.microsoft.com/office/drawing/2014/main" id="{D10F6865-35F1-03AA-6D6B-99F1C29AB6C2}"/>
+              </a:ext>
+            </a:extLst>
+          </p:cNvPr>
+          <p:cNvGrpSpPr/>
+          <p:nvPr/>
+        </p:nvGrpSpPr>
+        <p:grpSpPr>
+          <a:xfrm>
+            <a:off x="244430" y="1738703"/>
+            <a:ext cx="577402" cy="246221"/>
+            <a:chOff x="6792364" y="5450185"/>
+            <a:chExt cx="577402" cy="246221"/>
+          </a:xfrm>
+        </p:grpSpPr>
+        <p:sp>
+          <p:nvSpPr>
+            <p:cNvPr id="61" name="Rectangle 60">
+              <a:extLst>
+                <a:ext uri="{FF2B5EF4-FFF2-40B4-BE49-F238E27FC236}">
+                  <a16:creationId xmlns:a16="http://schemas.microsoft.com/office/drawing/2014/main" id="{4E1904F7-BDB7-963B-34ED-96D1DF2563B8}"/>
+                </a:ext>
+              </a:extLst>
+            </p:cNvPr>
+            <p:cNvSpPr/>
+            <p:nvPr/>
+          </p:nvSpPr>
+          <p:spPr>
+            <a:xfrm>
+              <a:off x="6805689" y="5468246"/>
+              <a:ext cx="551839" cy="184701"/>
+            </a:xfrm>
+            <a:prstGeom prst="rect">
+              <a:avLst/>
+            </a:prstGeom>
+          </p:spPr>
+          <p:style>
+            <a:lnRef idx="2">
+              <a:schemeClr val="dk1"/>
+            </a:lnRef>
+            <a:fillRef idx="1">
+              <a:schemeClr val="lt1"/>
+            </a:fillRef>
+            <a:effectRef idx="0">
+              <a:schemeClr val="dk1"/>
+            </a:effectRef>
+            <a:fontRef idx="minor">
+              <a:schemeClr val="dk1"/>
+            </a:fontRef>
+          </p:style>
+          <p:txBody>
+            <a:bodyPr rtlCol="0" anchor="ctr"/>
+            <a:lstStyle/>
+            <a:p>
+              <a:pPr algn="ctr"/>
+              <a:endParaRPr lang="en-US"/>
+            </a:p>
+          </p:txBody>
+        </p:sp>
+        <p:sp>
+          <p:nvSpPr>
+            <p:cNvPr id="62" name="TextBox 61">
+              <a:extLst>
+                <a:ext uri="{FF2B5EF4-FFF2-40B4-BE49-F238E27FC236}">
+                  <a16:creationId xmlns:a16="http://schemas.microsoft.com/office/drawing/2014/main" id="{511289B8-101F-324E-CCCD-86D630AF8F23}"/>
+                </a:ext>
+              </a:extLst>
+            </p:cNvPr>
+            <p:cNvSpPr txBox="1"/>
+            <p:nvPr/>
+          </p:nvSpPr>
+          <p:spPr>
+            <a:xfrm>
+              <a:off x="6792364" y="5450185"/>
+              <a:ext cx="577402" cy="246221"/>
+            </a:xfrm>
+            <a:prstGeom prst="rect">
+              <a:avLst/>
+            </a:prstGeom>
+            <a:noFill/>
+          </p:spPr>
+          <p:txBody>
+            <a:bodyPr wrap="none" rtlCol="0">
+              <a:spAutoFit/>
+            </a:bodyPr>
+            <a:lstStyle/>
+            <a:p>
+              <a:r>
+                <a:rPr lang="en-US" sz="1000" dirty="0"/>
+                <a:t>Source</a:t>
+              </a:r>
+            </a:p>
+          </p:txBody>
+        </p:sp>
+      </p:grpSp>
+      <p:sp>
+        <p:nvSpPr>
+          <p:cNvPr id="63" name="Right Brace 62">
+            <a:extLst>
+              <a:ext uri="{FF2B5EF4-FFF2-40B4-BE49-F238E27FC236}">
+                <a16:creationId xmlns:a16="http://schemas.microsoft.com/office/drawing/2014/main" id="{5F1BC8E0-6039-1EE5-A0C4-55FB6087CC42}"/>
+              </a:ext>
+            </a:extLst>
+          </p:cNvPr>
+          <p:cNvSpPr/>
+          <p:nvPr/>
+        </p:nvSpPr>
+        <p:spPr>
+          <a:xfrm>
+            <a:off x="850221" y="1291799"/>
+            <a:ext cx="173031" cy="639334"/>
+          </a:xfrm>
+          <a:prstGeom prst="rightBrace">
+            <a:avLst/>
+          </a:prstGeom>
+          <a:ln>
+            <a:solidFill>
+              <a:schemeClr val="tx1"/>
+            </a:solidFill>
+          </a:ln>
+        </p:spPr>
+        <p:style>
+          <a:lnRef idx="2">
+            <a:schemeClr val="accent1"/>
+          </a:lnRef>
+          <a:fillRef idx="0">
+            <a:schemeClr val="accent1"/>
+          </a:fillRef>
+          <a:effectRef idx="1">
+            <a:schemeClr val="accent1"/>
+          </a:effectRef>
+          <a:fontRef idx="minor">
+            <a:schemeClr val="tx1"/>
+          </a:fontRef>
+        </p:style>
+        <p:txBody>
+          <a:bodyPr rtlCol="0" anchor="ctr"/>
+          <a:lstStyle/>
+          <a:p>
+            <a:pPr algn="ctr"/>
+            <a:endParaRPr lang="en-US"/>
+          </a:p>
+        </p:txBody>
+      </p:sp>
+      <p:grpSp>
+        <p:nvGrpSpPr>
+          <p:cNvPr id="64" name="Group 63">
+            <a:extLst>
+              <a:ext uri="{FF2B5EF4-FFF2-40B4-BE49-F238E27FC236}">
+                <a16:creationId xmlns:a16="http://schemas.microsoft.com/office/drawing/2014/main" id="{B9A2BD29-7F8A-A291-AF4B-0C830FBCB8E8}"/>
+              </a:ext>
+            </a:extLst>
+          </p:cNvPr>
+          <p:cNvGrpSpPr/>
+          <p:nvPr/>
+        </p:nvGrpSpPr>
+        <p:grpSpPr>
+          <a:xfrm>
+            <a:off x="249674" y="1241305"/>
+            <a:ext cx="551839" cy="246221"/>
+            <a:chOff x="6805689" y="5450185"/>
+            <a:chExt cx="551839" cy="246221"/>
+          </a:xfrm>
+        </p:grpSpPr>
+        <p:sp>
+          <p:nvSpPr>
+            <p:cNvPr id="65" name="Rectangle 64">
+              <a:extLst>
+                <a:ext uri="{FF2B5EF4-FFF2-40B4-BE49-F238E27FC236}">
+                  <a16:creationId xmlns:a16="http://schemas.microsoft.com/office/drawing/2014/main" id="{CB31D592-A48F-C071-885F-A58D21268D35}"/>
+                </a:ext>
+              </a:extLst>
+            </p:cNvPr>
+            <p:cNvSpPr/>
+            <p:nvPr/>
+          </p:nvSpPr>
+          <p:spPr>
+            <a:xfrm>
+              <a:off x="6805689" y="5468246"/>
+              <a:ext cx="551839" cy="184701"/>
+            </a:xfrm>
+            <a:prstGeom prst="rect">
+              <a:avLst/>
+            </a:prstGeom>
+          </p:spPr>
+          <p:style>
+            <a:lnRef idx="2">
+              <a:schemeClr val="dk1"/>
+            </a:lnRef>
+            <a:fillRef idx="1">
+              <a:schemeClr val="lt1"/>
+            </a:fillRef>
+            <a:effectRef idx="0">
+              <a:schemeClr val="dk1"/>
+            </a:effectRef>
+            <a:fontRef idx="minor">
+              <a:schemeClr val="dk1"/>
+            </a:fontRef>
+          </p:style>
+          <p:txBody>
+            <a:bodyPr rtlCol="0" anchor="ctr"/>
+            <a:lstStyle/>
+            <a:p>
+              <a:pPr algn="ctr"/>
+              <a:endParaRPr lang="en-US"/>
+            </a:p>
+          </p:txBody>
+        </p:sp>
+        <p:sp>
+          <p:nvSpPr>
+            <p:cNvPr id="66" name="TextBox 65">
+              <a:extLst>
+                <a:ext uri="{FF2B5EF4-FFF2-40B4-BE49-F238E27FC236}">
+                  <a16:creationId xmlns:a16="http://schemas.microsoft.com/office/drawing/2014/main" id="{07141ECC-2021-7822-8E88-195DD61B162E}"/>
+                </a:ext>
+              </a:extLst>
+            </p:cNvPr>
+            <p:cNvSpPr txBox="1"/>
+            <p:nvPr/>
+          </p:nvSpPr>
+          <p:spPr>
+            <a:xfrm>
+              <a:off x="6920811" y="5450185"/>
+              <a:ext cx="295274" cy="246221"/>
+            </a:xfrm>
+            <a:prstGeom prst="rect">
+              <a:avLst/>
+            </a:prstGeom>
+            <a:noFill/>
+          </p:spPr>
+          <p:txBody>
+            <a:bodyPr wrap="none" rtlCol="0">
+              <a:spAutoFit/>
+            </a:bodyPr>
+            <a:lstStyle/>
+            <a:p>
+              <a:r>
+                <a:rPr lang="en-US" sz="1000" dirty="0"/>
+                <a:t>…</a:t>
+              </a:r>
+            </a:p>
+          </p:txBody>
+        </p:sp>
+      </p:grpSp>
+      <p:sp>
+        <p:nvSpPr>
+          <p:cNvPr id="67" name="TextBox 66">
+            <a:extLst>
+              <a:ext uri="{FF2B5EF4-FFF2-40B4-BE49-F238E27FC236}">
+                <a16:creationId xmlns:a16="http://schemas.microsoft.com/office/drawing/2014/main" id="{C23B4D90-2323-C34D-2BF6-300BDC0CA032}"/>
+              </a:ext>
+            </a:extLst>
+          </p:cNvPr>
+          <p:cNvSpPr txBox="1"/>
+          <p:nvPr/>
+        </p:nvSpPr>
+        <p:spPr>
+          <a:xfrm>
+            <a:off x="1487854" y="1181409"/>
+            <a:ext cx="535724" cy="246221"/>
+          </a:xfrm>
+          <a:prstGeom prst="rect">
+            <a:avLst/>
+          </a:prstGeom>
+          <a:noFill/>
+        </p:spPr>
+        <p:txBody>
+          <a:bodyPr wrap="none" rtlCol="0">
+            <a:spAutoFit/>
+          </a:bodyPr>
+          <a:lstStyle/>
+          <a:p>
+            <a:r>
+              <a:rPr lang="en-US" sz="1000" dirty="0"/>
+              <a:t>DDCU</a:t>
+            </a:r>
+          </a:p>
+        </p:txBody>
+      </p:sp>
+      <p:sp>
+        <p:nvSpPr>
+          <p:cNvPr id="68" name="Rectangle 67">
+            <a:extLst>
+              <a:ext uri="{FF2B5EF4-FFF2-40B4-BE49-F238E27FC236}">
+                <a16:creationId xmlns:a16="http://schemas.microsoft.com/office/drawing/2014/main" id="{BD1DCC53-6ED9-7EEC-BD84-02DF30E60D34}"/>
+              </a:ext>
+            </a:extLst>
+          </p:cNvPr>
+          <p:cNvSpPr/>
+          <p:nvPr/>
+        </p:nvSpPr>
+        <p:spPr>
+          <a:xfrm>
+            <a:off x="1393431" y="1304409"/>
+            <a:ext cx="113558" cy="113558"/>
+          </a:xfrm>
+          <a:prstGeom prst="rect">
+            <a:avLst/>
+          </a:prstGeom>
+          <a:solidFill>
+            <a:srgbClr val="00FA00"/>
+          </a:solidFill>
+        </p:spPr>
+        <p:style>
+          <a:lnRef idx="2">
+            <a:schemeClr val="dk1"/>
+          </a:lnRef>
+          <a:fillRef idx="1">
+            <a:schemeClr val="lt1"/>
+          </a:fillRef>
+          <a:effectRef idx="0">
+            <a:schemeClr val="dk1"/>
+          </a:effectRef>
+          <a:fontRef idx="minor">
+            <a:schemeClr val="dk1"/>
+          </a:fontRef>
+        </p:style>
+        <p:txBody>
+          <a:bodyPr rtlCol="0" anchor="ctr"/>
+          <a:lstStyle/>
+          <a:p>
+            <a:pPr algn="ctr"/>
+            <a:endParaRPr lang="en-US"/>
+          </a:p>
+        </p:txBody>
+      </p:sp>
+      <p:sp>
+        <p:nvSpPr>
+          <p:cNvPr id="69" name="Rectangle 68">
+            <a:extLst>
+              <a:ext uri="{FF2B5EF4-FFF2-40B4-BE49-F238E27FC236}">
+                <a16:creationId xmlns:a16="http://schemas.microsoft.com/office/drawing/2014/main" id="{E2B8B92A-5F0A-317A-DE52-44C212E52994}"/>
+              </a:ext>
+            </a:extLst>
+          </p:cNvPr>
+          <p:cNvSpPr/>
+          <p:nvPr/>
+        </p:nvSpPr>
+        <p:spPr>
+          <a:xfrm>
+            <a:off x="1393173" y="1083425"/>
+            <a:ext cx="113558" cy="113558"/>
+          </a:xfrm>
+          <a:prstGeom prst="rect">
+            <a:avLst/>
+          </a:prstGeom>
+          <a:solidFill>
+            <a:schemeClr val="tx1"/>
+          </a:solidFill>
+        </p:spPr>
+        <p:style>
+          <a:lnRef idx="2">
+            <a:schemeClr val="dk1"/>
+          </a:lnRef>
+          <a:fillRef idx="1">
+            <a:schemeClr val="lt1"/>
+          </a:fillRef>
+          <a:effectRef idx="0">
+            <a:schemeClr val="dk1"/>
+          </a:effectRef>
+          <a:fontRef idx="minor">
+            <a:schemeClr val="dk1"/>
+          </a:fontRef>
+        </p:style>
+        <p:txBody>
+          <a:bodyPr rtlCol="0" anchor="ctr"/>
+          <a:lstStyle/>
+          <a:p>
+            <a:pPr algn="ctr"/>
+            <a:endParaRPr lang="en-US"/>
+          </a:p>
+        </p:txBody>
+      </p:sp>
+      <p:sp>
+        <p:nvSpPr>
+          <p:cNvPr id="70" name="Rectangle 69">
+            <a:extLst>
+              <a:ext uri="{FF2B5EF4-FFF2-40B4-BE49-F238E27FC236}">
+                <a16:creationId xmlns:a16="http://schemas.microsoft.com/office/drawing/2014/main" id="{1482AA15-1DEF-52F9-5601-F81A941CF515}"/>
+              </a:ext>
+            </a:extLst>
+          </p:cNvPr>
+          <p:cNvSpPr/>
+          <p:nvPr/>
+        </p:nvSpPr>
+        <p:spPr>
+          <a:xfrm>
+            <a:off x="1586750" y="696562"/>
+            <a:ext cx="113558" cy="113558"/>
+          </a:xfrm>
+          <a:prstGeom prst="rect">
+            <a:avLst/>
+          </a:prstGeom>
+          <a:solidFill>
+            <a:schemeClr val="tx2">
+              <a:lumMod val="50000"/>
+              <a:lumOff val="50000"/>
+            </a:schemeClr>
+          </a:solidFill>
+        </p:spPr>
+        <p:style>
+          <a:lnRef idx="2">
+            <a:schemeClr val="dk1"/>
+          </a:lnRef>
+          <a:fillRef idx="1">
+            <a:schemeClr val="lt1"/>
+          </a:fillRef>
+          <a:effectRef idx="0">
+            <a:schemeClr val="dk1"/>
+          </a:effectRef>
+          <a:fontRef idx="minor">
+            <a:schemeClr val="dk1"/>
+          </a:fontRef>
+        </p:style>
+        <p:txBody>
+          <a:bodyPr rtlCol="0" anchor="ctr"/>
+          <a:lstStyle/>
+          <a:p>
+            <a:pPr algn="ctr"/>
+            <a:endParaRPr lang="en-US"/>
+          </a:p>
+        </p:txBody>
+      </p:sp>
+      <p:sp>
+        <p:nvSpPr>
+          <p:cNvPr id="71" name="Rectangle 70">
+            <a:extLst>
+              <a:ext uri="{FF2B5EF4-FFF2-40B4-BE49-F238E27FC236}">
+                <a16:creationId xmlns:a16="http://schemas.microsoft.com/office/drawing/2014/main" id="{018FADFC-CBBB-87F0-2D79-0BC55D9DC4CB}"/>
+              </a:ext>
+            </a:extLst>
+          </p:cNvPr>
+          <p:cNvSpPr/>
+          <p:nvPr/>
+        </p:nvSpPr>
+        <p:spPr>
+          <a:xfrm>
+            <a:off x="1590997" y="879121"/>
+            <a:ext cx="113558" cy="113558"/>
+          </a:xfrm>
+          <a:prstGeom prst="rect">
+            <a:avLst/>
+          </a:prstGeom>
+          <a:solidFill>
+            <a:srgbClr val="FFC000"/>
+          </a:solidFill>
+        </p:spPr>
+        <p:style>
+          <a:lnRef idx="2">
+            <a:schemeClr val="dk1"/>
+          </a:lnRef>
+          <a:fillRef idx="1">
+            <a:schemeClr val="lt1"/>
+          </a:fillRef>
+          <a:effectRef idx="0">
+            <a:schemeClr val="dk1"/>
+          </a:effectRef>
+          <a:fontRef idx="minor">
+            <a:schemeClr val="dk1"/>
+          </a:fontRef>
+        </p:style>
+        <p:txBody>
+          <a:bodyPr rtlCol="0" anchor="ctr"/>
+          <a:lstStyle/>
+          <a:p>
+            <a:pPr algn="ctr"/>
+            <a:endParaRPr lang="en-US"/>
+          </a:p>
+        </p:txBody>
+      </p:sp>
+      <p:sp>
+        <p:nvSpPr>
+          <p:cNvPr id="72" name="TextBox 71">
+            <a:extLst>
+              <a:ext uri="{FF2B5EF4-FFF2-40B4-BE49-F238E27FC236}">
+                <a16:creationId xmlns:a16="http://schemas.microsoft.com/office/drawing/2014/main" id="{8ED3088D-C5F0-D3BB-526D-8C7C69D1B6B6}"/>
+              </a:ext>
+            </a:extLst>
+          </p:cNvPr>
+          <p:cNvSpPr txBox="1"/>
+          <p:nvPr/>
+        </p:nvSpPr>
+        <p:spPr>
+          <a:xfrm>
+            <a:off x="1485126" y="1011212"/>
+            <a:ext cx="524503" cy="246221"/>
+          </a:xfrm>
+          <a:prstGeom prst="rect">
+            <a:avLst/>
+          </a:prstGeom>
+          <a:noFill/>
+        </p:spPr>
+        <p:txBody>
+          <a:bodyPr wrap="none" rtlCol="0">
+            <a:spAutoFit/>
+          </a:bodyPr>
+          <a:lstStyle/>
+          <a:p>
+            <a:r>
+              <a:rPr lang="en-US" sz="1000" dirty="0"/>
+              <a:t>RPCM</a:t>
+            </a:r>
+          </a:p>
+        </p:txBody>
+      </p:sp>
+      <p:sp>
+        <p:nvSpPr>
+          <p:cNvPr id="73" name="TextBox 72">
+            <a:extLst>
+              <a:ext uri="{FF2B5EF4-FFF2-40B4-BE49-F238E27FC236}">
+                <a16:creationId xmlns:a16="http://schemas.microsoft.com/office/drawing/2014/main" id="{845A5A0E-FE74-5DDD-A300-7DAD37714C32}"/>
+              </a:ext>
+            </a:extLst>
+          </p:cNvPr>
+          <p:cNvSpPr txBox="1"/>
+          <p:nvPr/>
+        </p:nvSpPr>
+        <p:spPr>
+          <a:xfrm>
+            <a:off x="1681137" y="631075"/>
+            <a:ext cx="486030" cy="246221"/>
+          </a:xfrm>
+          <a:prstGeom prst="rect">
+            <a:avLst/>
+          </a:prstGeom>
+          <a:noFill/>
+        </p:spPr>
+        <p:txBody>
+          <a:bodyPr wrap="none" rtlCol="0">
+            <a:spAutoFit/>
+          </a:bodyPr>
+          <a:lstStyle/>
+          <a:p>
+            <a:r>
+              <a:rPr lang="en-US" sz="1000" dirty="0"/>
+              <a:t>PFCS</a:t>
+            </a:r>
+          </a:p>
+        </p:txBody>
+      </p:sp>
+      <p:sp>
+        <p:nvSpPr>
+          <p:cNvPr id="74" name="TextBox 73">
+            <a:extLst>
+              <a:ext uri="{FF2B5EF4-FFF2-40B4-BE49-F238E27FC236}">
+                <a16:creationId xmlns:a16="http://schemas.microsoft.com/office/drawing/2014/main" id="{2C74CC19-3FBF-CE21-B984-781CEF923D5C}"/>
+              </a:ext>
+            </a:extLst>
+          </p:cNvPr>
+          <p:cNvSpPr txBox="1"/>
+          <p:nvPr/>
+        </p:nvSpPr>
+        <p:spPr>
+          <a:xfrm>
+            <a:off x="1681137" y="816303"/>
+            <a:ext cx="429926" cy="246221"/>
+          </a:xfrm>
+          <a:prstGeom prst="rect">
+            <a:avLst/>
+          </a:prstGeom>
+          <a:noFill/>
+        </p:spPr>
+        <p:txBody>
+          <a:bodyPr wrap="none" rtlCol="0">
+            <a:spAutoFit/>
+          </a:bodyPr>
+          <a:lstStyle/>
+          <a:p>
+            <a:r>
+              <a:rPr lang="en-US" sz="1000" dirty="0"/>
+              <a:t>ECU</a:t>
+            </a:r>
+          </a:p>
+        </p:txBody>
+      </p:sp>
+      <p:cxnSp>
+        <p:nvCxnSpPr>
+          <p:cNvPr id="75" name="Straight Arrow Connector 74">
+            <a:extLst>
+              <a:ext uri="{FF2B5EF4-FFF2-40B4-BE49-F238E27FC236}">
+                <a16:creationId xmlns:a16="http://schemas.microsoft.com/office/drawing/2014/main" id="{E684BA4E-11A2-8AA8-5977-209E08463E37}"/>
+              </a:ext>
+            </a:extLst>
+          </p:cNvPr>
+          <p:cNvCxnSpPr>
+            <a:cxnSpLocks/>
+            <a:stCxn id="53" idx="0"/>
+            <a:endCxn id="68" idx="2"/>
+          </p:cNvCxnSpPr>
+          <p:nvPr/>
+        </p:nvCxnSpPr>
+        <p:spPr>
+          <a:xfrm flipH="1" flipV="1">
+            <a:off x="1450210" y="1417967"/>
+            <a:ext cx="778" cy="113848"/>
+          </a:xfrm>
+          <a:prstGeom prst="straightConnector1">
+            <a:avLst/>
+          </a:prstGeom>
+          <a:ln>
+            <a:solidFill>
+              <a:schemeClr val="tx1"/>
+            </a:solidFill>
+            <a:tailEnd type="triangle"/>
+          </a:ln>
+        </p:spPr>
+        <p:style>
+          <a:lnRef idx="2">
+            <a:schemeClr val="accent1"/>
+          </a:lnRef>
+          <a:fillRef idx="0">
+            <a:schemeClr val="accent1"/>
+          </a:fillRef>
+          <a:effectRef idx="1">
+            <a:schemeClr val="accent1"/>
+          </a:effectRef>
+          <a:fontRef idx="minor">
+            <a:schemeClr val="tx1"/>
+          </a:fontRef>
+        </p:style>
+      </p:cxnSp>
+      <p:grpSp>
+        <p:nvGrpSpPr>
+          <p:cNvPr id="76" name="Group 75">
+            <a:extLst>
+              <a:ext uri="{FF2B5EF4-FFF2-40B4-BE49-F238E27FC236}">
+                <a16:creationId xmlns:a16="http://schemas.microsoft.com/office/drawing/2014/main" id="{5606A2E4-86B8-837E-1682-78935567316E}"/>
+              </a:ext>
+            </a:extLst>
+          </p:cNvPr>
+          <p:cNvGrpSpPr/>
+          <p:nvPr/>
+        </p:nvGrpSpPr>
+        <p:grpSpPr>
+          <a:xfrm>
+            <a:off x="2017544" y="1514258"/>
+            <a:ext cx="551839" cy="637481"/>
+            <a:chOff x="1176395" y="1158877"/>
+            <a:chExt cx="551839" cy="637481"/>
+          </a:xfrm>
+        </p:grpSpPr>
+        <p:grpSp>
+          <p:nvGrpSpPr>
+            <p:cNvPr id="77" name="Group 76">
+              <a:extLst>
+                <a:ext uri="{FF2B5EF4-FFF2-40B4-BE49-F238E27FC236}">
+                  <a16:creationId xmlns:a16="http://schemas.microsoft.com/office/drawing/2014/main" id="{4091DCFC-59CF-1428-53FE-0675019F412F}"/>
+                </a:ext>
+              </a:extLst>
+            </p:cNvPr>
+            <p:cNvGrpSpPr/>
+            <p:nvPr/>
+          </p:nvGrpSpPr>
+          <p:grpSpPr>
+            <a:xfrm>
+              <a:off x="1176395" y="1158877"/>
+              <a:ext cx="551839" cy="246221"/>
+              <a:chOff x="6805689" y="5450185"/>
+              <a:chExt cx="551839" cy="246221"/>
+            </a:xfrm>
+          </p:grpSpPr>
+          <p:sp>
+            <p:nvSpPr>
+              <p:cNvPr id="84" name="Rectangle 83">
+                <a:extLst>
+                  <a:ext uri="{FF2B5EF4-FFF2-40B4-BE49-F238E27FC236}">
+                    <a16:creationId xmlns:a16="http://schemas.microsoft.com/office/drawing/2014/main" id="{AEE1B1F0-4D73-16CB-F6D4-F67DB858B7C2}"/>
+                  </a:ext>
+                </a:extLst>
+              </p:cNvPr>
+              <p:cNvSpPr/>
+              <p:nvPr/>
+            </p:nvSpPr>
+            <p:spPr>
+              <a:xfrm>
+                <a:off x="6805689" y="5468246"/>
+                <a:ext cx="551839" cy="184701"/>
+              </a:xfrm>
+              <a:prstGeom prst="rect">
+                <a:avLst/>
+              </a:prstGeom>
+            </p:spPr>
+            <p:style>
+              <a:lnRef idx="2">
+                <a:schemeClr val="dk1"/>
+              </a:lnRef>
+              <a:fillRef idx="1">
+                <a:schemeClr val="lt1"/>
+              </a:fillRef>
+              <a:effectRef idx="0">
+                <a:schemeClr val="dk1"/>
+              </a:effectRef>
+              <a:fontRef idx="minor">
+                <a:schemeClr val="dk1"/>
+              </a:fontRef>
+            </p:style>
+            <p:txBody>
+              <a:bodyPr rtlCol="0" anchor="ctr"/>
+              <a:lstStyle/>
+              <a:p>
+                <a:pPr algn="ctr"/>
+                <a:endParaRPr lang="en-US"/>
+              </a:p>
+            </p:txBody>
+          </p:sp>
+          <p:sp>
+            <p:nvSpPr>
+              <p:cNvPr id="85" name="TextBox 84">
+                <a:extLst>
+                  <a:ext uri="{FF2B5EF4-FFF2-40B4-BE49-F238E27FC236}">
+                    <a16:creationId xmlns:a16="http://schemas.microsoft.com/office/drawing/2014/main" id="{0F51C7DF-4844-4852-1993-A2ADACA316AC}"/>
+                  </a:ext>
+                </a:extLst>
+              </p:cNvPr>
+              <p:cNvSpPr txBox="1"/>
+              <p:nvPr/>
+            </p:nvSpPr>
+            <p:spPr>
+              <a:xfrm>
+                <a:off x="6820435" y="5450185"/>
+                <a:ext cx="521297" cy="246221"/>
+              </a:xfrm>
+              <a:prstGeom prst="rect">
+                <a:avLst/>
+              </a:prstGeom>
+              <a:noFill/>
+            </p:spPr>
+            <p:txBody>
+              <a:bodyPr wrap="none" rtlCol="0">
+                <a:spAutoFit/>
+              </a:bodyPr>
+              <a:lstStyle/>
+              <a:p>
+                <a:r>
+                  <a:rPr lang="en-US" sz="1000" dirty="0"/>
+                  <a:t>MBSU</a:t>
+                </a:r>
+              </a:p>
+            </p:txBody>
+          </p:sp>
+        </p:grpSp>
+        <p:sp>
+          <p:nvSpPr>
+            <p:cNvPr id="78" name="Rectangle 77">
+              <a:extLst>
+                <a:ext uri="{FF2B5EF4-FFF2-40B4-BE49-F238E27FC236}">
+                  <a16:creationId xmlns:a16="http://schemas.microsoft.com/office/drawing/2014/main" id="{D351019C-1181-2D89-C0BF-4C7AB93C27DF}"/>
+                </a:ext>
+              </a:extLst>
+            </p:cNvPr>
+            <p:cNvSpPr/>
+            <p:nvPr/>
+          </p:nvSpPr>
+          <p:spPr>
+            <a:xfrm>
+              <a:off x="1204772" y="1472526"/>
+              <a:ext cx="113558" cy="113558"/>
+            </a:xfrm>
+            <a:prstGeom prst="rect">
+              <a:avLst/>
+            </a:prstGeom>
+            <a:solidFill>
+              <a:srgbClr val="00FA00"/>
+            </a:solidFill>
+          </p:spPr>
+          <p:style>
+            <a:lnRef idx="2">
+              <a:schemeClr val="dk1"/>
+            </a:lnRef>
+            <a:fillRef idx="1">
+              <a:schemeClr val="lt1"/>
+            </a:fillRef>
+            <a:effectRef idx="0">
+              <a:schemeClr val="dk1"/>
+            </a:effectRef>
+            <a:fontRef idx="minor">
+              <a:schemeClr val="dk1"/>
+            </a:fontRef>
+          </p:style>
+          <p:txBody>
+            <a:bodyPr rtlCol="0" anchor="ctr"/>
+            <a:lstStyle/>
+            <a:p>
+              <a:pPr algn="ctr"/>
+              <a:endParaRPr lang="en-US"/>
+            </a:p>
+          </p:txBody>
+        </p:sp>
+        <p:sp>
+          <p:nvSpPr>
+            <p:cNvPr id="79" name="Rectangle 78">
+              <a:extLst>
+                <a:ext uri="{FF2B5EF4-FFF2-40B4-BE49-F238E27FC236}">
+                  <a16:creationId xmlns:a16="http://schemas.microsoft.com/office/drawing/2014/main" id="{39A33767-A566-33B6-0CCE-12E984210895}"/>
+                </a:ext>
+              </a:extLst>
+            </p:cNvPr>
+            <p:cNvSpPr/>
+            <p:nvPr/>
+          </p:nvSpPr>
+          <p:spPr>
+            <a:xfrm>
+              <a:off x="1403419" y="1472526"/>
+              <a:ext cx="113558" cy="113558"/>
+            </a:xfrm>
+            <a:prstGeom prst="rect">
+              <a:avLst/>
+            </a:prstGeom>
+            <a:solidFill>
+              <a:srgbClr val="00FA00"/>
+            </a:solidFill>
+          </p:spPr>
+          <p:style>
+            <a:lnRef idx="2">
+              <a:schemeClr val="dk1"/>
+            </a:lnRef>
+            <a:fillRef idx="1">
+              <a:schemeClr val="lt1"/>
+            </a:fillRef>
+            <a:effectRef idx="0">
+              <a:schemeClr val="dk1"/>
+            </a:effectRef>
+            <a:fontRef idx="minor">
+              <a:schemeClr val="dk1"/>
+            </a:fontRef>
+          </p:style>
+          <p:txBody>
+            <a:bodyPr rtlCol="0" anchor="ctr"/>
+            <a:lstStyle/>
+            <a:p>
+              <a:pPr algn="ctr"/>
+              <a:endParaRPr lang="en-US" b="1" dirty="0"/>
+            </a:p>
+          </p:txBody>
+        </p:sp>
+        <p:sp>
+          <p:nvSpPr>
+            <p:cNvPr id="80" name="Rectangle 79">
+              <a:extLst>
+                <a:ext uri="{FF2B5EF4-FFF2-40B4-BE49-F238E27FC236}">
+                  <a16:creationId xmlns:a16="http://schemas.microsoft.com/office/drawing/2014/main" id="{F10968A4-296F-45E5-3AB5-76C87F862580}"/>
+                </a:ext>
+              </a:extLst>
+            </p:cNvPr>
+            <p:cNvSpPr/>
+            <p:nvPr/>
+          </p:nvSpPr>
+          <p:spPr>
+            <a:xfrm>
+              <a:off x="1199901" y="1682800"/>
+              <a:ext cx="113558" cy="113558"/>
+            </a:xfrm>
+            <a:prstGeom prst="rect">
+              <a:avLst/>
+            </a:prstGeom>
+            <a:solidFill>
+              <a:schemeClr val="tx1"/>
+            </a:solidFill>
+          </p:spPr>
+          <p:style>
+            <a:lnRef idx="2">
+              <a:schemeClr val="dk1"/>
+            </a:lnRef>
+            <a:fillRef idx="1">
+              <a:schemeClr val="lt1"/>
+            </a:fillRef>
+            <a:effectRef idx="0">
+              <a:schemeClr val="dk1"/>
+            </a:effectRef>
+            <a:fontRef idx="minor">
+              <a:schemeClr val="dk1"/>
+            </a:fontRef>
+          </p:style>
+          <p:txBody>
+            <a:bodyPr rtlCol="0" anchor="ctr"/>
+            <a:lstStyle/>
+            <a:p>
+              <a:pPr algn="ctr"/>
+              <a:endParaRPr lang="en-US"/>
+            </a:p>
+          </p:txBody>
+        </p:sp>
+        <p:sp>
+          <p:nvSpPr>
+            <p:cNvPr id="81" name="Rectangle 80">
+              <a:extLst>
+                <a:ext uri="{FF2B5EF4-FFF2-40B4-BE49-F238E27FC236}">
+                  <a16:creationId xmlns:a16="http://schemas.microsoft.com/office/drawing/2014/main" id="{A0A33EF4-582E-90AF-2956-B7893733B9FC}"/>
+                </a:ext>
+              </a:extLst>
+            </p:cNvPr>
+            <p:cNvSpPr/>
+            <p:nvPr/>
+          </p:nvSpPr>
+          <p:spPr>
+            <a:xfrm>
+              <a:off x="1407166" y="1681725"/>
+              <a:ext cx="113558" cy="113558"/>
+            </a:xfrm>
+            <a:prstGeom prst="rect">
+              <a:avLst/>
+            </a:prstGeom>
+            <a:solidFill>
+              <a:schemeClr val="tx1"/>
+            </a:solidFill>
+          </p:spPr>
+          <p:style>
+            <a:lnRef idx="2">
+              <a:schemeClr val="dk1"/>
+            </a:lnRef>
+            <a:fillRef idx="1">
+              <a:schemeClr val="lt1"/>
+            </a:fillRef>
+            <a:effectRef idx="0">
+              <a:schemeClr val="dk1"/>
+            </a:effectRef>
+            <a:fontRef idx="minor">
+              <a:schemeClr val="dk1"/>
+            </a:fontRef>
+          </p:style>
+          <p:txBody>
+            <a:bodyPr rtlCol="0" anchor="ctr"/>
+            <a:lstStyle/>
+            <a:p>
+              <a:pPr algn="ctr"/>
+              <a:endParaRPr lang="en-US" dirty="0"/>
+            </a:p>
+          </p:txBody>
+        </p:sp>
+        <p:cxnSp>
+          <p:nvCxnSpPr>
+            <p:cNvPr id="82" name="Straight Arrow Connector 81">
+              <a:extLst>
+                <a:ext uri="{FF2B5EF4-FFF2-40B4-BE49-F238E27FC236}">
+                  <a16:creationId xmlns:a16="http://schemas.microsoft.com/office/drawing/2014/main" id="{0FD1A0D3-F2A4-6F60-6811-4C3F55A3DC8B}"/>
+                </a:ext>
+              </a:extLst>
+            </p:cNvPr>
+            <p:cNvCxnSpPr>
+              <a:cxnSpLocks/>
+              <a:stCxn id="79" idx="2"/>
+              <a:endCxn id="81" idx="0"/>
+            </p:cNvCxnSpPr>
+            <p:nvPr/>
+          </p:nvCxnSpPr>
+          <p:spPr>
+            <a:xfrm>
+              <a:off x="1460198" y="1586084"/>
+              <a:ext cx="3747" cy="95641"/>
+            </a:xfrm>
+            <a:prstGeom prst="straightConnector1">
+              <a:avLst/>
+            </a:prstGeom>
+            <a:ln>
+              <a:solidFill>
+                <a:schemeClr val="tx1"/>
+              </a:solidFill>
+              <a:tailEnd type="triangle"/>
+            </a:ln>
+          </p:spPr>
+          <p:style>
+            <a:lnRef idx="2">
+              <a:schemeClr val="accent1"/>
+            </a:lnRef>
+            <a:fillRef idx="0">
+              <a:schemeClr val="accent1"/>
+            </a:fillRef>
+            <a:effectRef idx="1">
+              <a:schemeClr val="accent1"/>
+            </a:effectRef>
+            <a:fontRef idx="minor">
+              <a:schemeClr val="tx1"/>
+            </a:fontRef>
+          </p:style>
+        </p:cxnSp>
+        <p:cxnSp>
+          <p:nvCxnSpPr>
+            <p:cNvPr id="83" name="Straight Arrow Connector 82">
+              <a:extLst>
+                <a:ext uri="{FF2B5EF4-FFF2-40B4-BE49-F238E27FC236}">
+                  <a16:creationId xmlns:a16="http://schemas.microsoft.com/office/drawing/2014/main" id="{EB2104C3-50AA-6C0D-A629-60C97B236A86}"/>
+                </a:ext>
+              </a:extLst>
+            </p:cNvPr>
+            <p:cNvCxnSpPr>
+              <a:cxnSpLocks/>
+              <a:stCxn id="78" idx="2"/>
+              <a:endCxn id="80" idx="0"/>
+            </p:cNvCxnSpPr>
+            <p:nvPr/>
+          </p:nvCxnSpPr>
+          <p:spPr>
+            <a:xfrm flipH="1">
+              <a:off x="1256680" y="1586084"/>
+              <a:ext cx="4871" cy="96716"/>
+            </a:xfrm>
+            <a:prstGeom prst="straightConnector1">
+              <a:avLst/>
+            </a:prstGeom>
+            <a:ln>
+              <a:solidFill>
+                <a:schemeClr val="tx1"/>
+              </a:solidFill>
+              <a:tailEnd type="triangle"/>
+            </a:ln>
+          </p:spPr>
+          <p:style>
+            <a:lnRef idx="2">
+              <a:schemeClr val="accent1"/>
+            </a:lnRef>
+            <a:fillRef idx="0">
+              <a:schemeClr val="accent1"/>
+            </a:fillRef>
+            <a:effectRef idx="1">
+              <a:schemeClr val="accent1"/>
+            </a:effectRef>
+            <a:fontRef idx="minor">
+              <a:schemeClr val="tx1"/>
+            </a:fontRef>
+          </p:style>
+        </p:cxnSp>
+      </p:grpSp>
+      <p:sp>
+        <p:nvSpPr>
+          <p:cNvPr id="86" name="Oval 85">
+            <a:extLst>
+              <a:ext uri="{FF2B5EF4-FFF2-40B4-BE49-F238E27FC236}">
+                <a16:creationId xmlns:a16="http://schemas.microsoft.com/office/drawing/2014/main" id="{C065619A-BCB0-E36F-62BB-8A595A8B1D38}"/>
+              </a:ext>
+            </a:extLst>
+          </p:cNvPr>
+          <p:cNvSpPr/>
+          <p:nvPr/>
+        </p:nvSpPr>
+        <p:spPr>
+          <a:xfrm>
+            <a:off x="3145273" y="2776066"/>
+            <a:ext cx="147643" cy="146596"/>
+          </a:xfrm>
+          <a:prstGeom prst="ellipse">
+            <a:avLst/>
+          </a:prstGeom>
+          <a:solidFill>
+            <a:schemeClr val="bg1"/>
+          </a:solidFill>
+          <a:ln>
+            <a:solidFill>
+              <a:schemeClr val="tx1"/>
+            </a:solidFill>
+          </a:ln>
+        </p:spPr>
+        <p:style>
+          <a:lnRef idx="2">
+            <a:schemeClr val="accent1">
+              <a:shade val="15000"/>
+            </a:schemeClr>
+          </a:lnRef>
+          <a:fillRef idx="1">
+            <a:schemeClr val="accent1"/>
+          </a:fillRef>
+          <a:effectRef idx="0">
+            <a:schemeClr val="accent1"/>
+          </a:effectRef>
+          <a:fontRef idx="minor">
+            <a:schemeClr val="lt1"/>
+          </a:fontRef>
+        </p:style>
+        <p:txBody>
+          <a:bodyPr rtlCol="0" anchor="ctr"/>
+          <a:lstStyle/>
+          <a:p>
+            <a:pPr algn="ctr"/>
+            <a:endParaRPr lang="en-US"/>
+          </a:p>
+        </p:txBody>
+      </p:sp>
+      <p:sp>
+        <p:nvSpPr>
+          <p:cNvPr id="87" name="Arc 86">
+            <a:extLst>
+              <a:ext uri="{FF2B5EF4-FFF2-40B4-BE49-F238E27FC236}">
+                <a16:creationId xmlns:a16="http://schemas.microsoft.com/office/drawing/2014/main" id="{4915E531-AB5E-F8A0-5667-FA8F918E15F4}"/>
+              </a:ext>
+            </a:extLst>
+          </p:cNvPr>
+          <p:cNvSpPr/>
+          <p:nvPr/>
+        </p:nvSpPr>
+        <p:spPr>
+          <a:xfrm>
+            <a:off x="4805789" y="1540306"/>
+            <a:ext cx="1173028" cy="1235814"/>
+          </a:xfrm>
+          <a:prstGeom prst="arc">
+            <a:avLst>
+              <a:gd name="adj1" fmla="val 726198"/>
+              <a:gd name="adj2" fmla="val 6939568"/>
+            </a:avLst>
+          </a:prstGeom>
+          <a:ln w="38100"/>
+        </p:spPr>
+        <p:style>
+          <a:lnRef idx="1">
+            <a:schemeClr val="dk1"/>
+          </a:lnRef>
+          <a:fillRef idx="0">
+            <a:schemeClr val="dk1"/>
+          </a:fillRef>
+          <a:effectRef idx="0">
+            <a:schemeClr val="dk1"/>
+          </a:effectRef>
+          <a:fontRef idx="minor">
+            <a:schemeClr val="tx1"/>
+          </a:fontRef>
+        </p:style>
+        <p:txBody>
+          <a:bodyPr rtlCol="0" anchor="ctr"/>
+          <a:lstStyle/>
+          <a:p>
+            <a:pPr algn="ctr"/>
+            <a:endParaRPr lang="en-US"/>
+          </a:p>
+        </p:txBody>
+      </p:sp>
+      <p:sp>
+        <p:nvSpPr>
+          <p:cNvPr id="88" name="Arc 87">
+            <a:extLst>
+              <a:ext uri="{FF2B5EF4-FFF2-40B4-BE49-F238E27FC236}">
+                <a16:creationId xmlns:a16="http://schemas.microsoft.com/office/drawing/2014/main" id="{44FD9C53-AB4F-5097-A9BF-6BA3B878E1F0}"/>
+              </a:ext>
+            </a:extLst>
+          </p:cNvPr>
+          <p:cNvSpPr/>
+          <p:nvPr/>
+        </p:nvSpPr>
+        <p:spPr>
+          <a:xfrm>
+            <a:off x="5952310" y="3545262"/>
+            <a:ext cx="1173028" cy="1235814"/>
+          </a:xfrm>
+          <a:prstGeom prst="arc">
+            <a:avLst>
+              <a:gd name="adj1" fmla="val 10943355"/>
+              <a:gd name="adj2" fmla="val 17621727"/>
+            </a:avLst>
+          </a:prstGeom>
+          <a:ln w="38100"/>
+        </p:spPr>
+        <p:style>
+          <a:lnRef idx="1">
+            <a:schemeClr val="dk1"/>
+          </a:lnRef>
+          <a:fillRef idx="0">
+            <a:schemeClr val="dk1"/>
+          </a:fillRef>
+          <a:effectRef idx="0">
+            <a:schemeClr val="dk1"/>
+          </a:effectRef>
+          <a:fontRef idx="minor">
+            <a:schemeClr val="tx1"/>
+          </a:fontRef>
+        </p:style>
+        <p:txBody>
+          <a:bodyPr rtlCol="0" anchor="ctr"/>
+          <a:lstStyle/>
+          <a:p>
+            <a:pPr algn="ctr"/>
+            <a:endParaRPr lang="en-US"/>
+          </a:p>
+        </p:txBody>
+      </p:sp>
+      <p:sp>
+        <p:nvSpPr>
+          <p:cNvPr id="89" name="Arc 88">
+            <a:extLst>
+              <a:ext uri="{FF2B5EF4-FFF2-40B4-BE49-F238E27FC236}">
+                <a16:creationId xmlns:a16="http://schemas.microsoft.com/office/drawing/2014/main" id="{E66C9F95-7B49-886F-D1F4-5358DD28D782}"/>
+              </a:ext>
+            </a:extLst>
+          </p:cNvPr>
+          <p:cNvSpPr/>
+          <p:nvPr/>
+        </p:nvSpPr>
+        <p:spPr>
+          <a:xfrm>
+            <a:off x="2823880" y="537662"/>
+            <a:ext cx="1804551" cy="2402082"/>
+          </a:xfrm>
+          <a:prstGeom prst="arc">
+            <a:avLst>
+              <a:gd name="adj1" fmla="val 4648070"/>
+              <a:gd name="adj2" fmla="val 6939568"/>
+            </a:avLst>
+          </a:prstGeom>
+          <a:ln w="38100"/>
+        </p:spPr>
+        <p:style>
+          <a:lnRef idx="1">
+            <a:schemeClr val="dk1"/>
+          </a:lnRef>
+          <a:fillRef idx="0">
+            <a:schemeClr val="dk1"/>
+          </a:fillRef>
+          <a:effectRef idx="0">
+            <a:schemeClr val="dk1"/>
+          </a:effectRef>
+          <a:fontRef idx="minor">
+            <a:schemeClr val="tx1"/>
+          </a:fontRef>
+        </p:style>
+        <p:txBody>
+          <a:bodyPr rtlCol="0" anchor="ctr"/>
+          <a:lstStyle/>
+          <a:p>
+            <a:pPr algn="ctr"/>
+            <a:endParaRPr lang="en-US"/>
+          </a:p>
+        </p:txBody>
+      </p:sp>
+      <p:cxnSp>
+        <p:nvCxnSpPr>
+          <p:cNvPr id="90" name="Straight Arrow Connector 89">
+            <a:extLst>
+              <a:ext uri="{FF2B5EF4-FFF2-40B4-BE49-F238E27FC236}">
+                <a16:creationId xmlns:a16="http://schemas.microsoft.com/office/drawing/2014/main" id="{175E58DC-50D5-31BE-0940-A68C665882D7}"/>
+              </a:ext>
+            </a:extLst>
+          </p:cNvPr>
+          <p:cNvCxnSpPr>
+            <a:cxnSpLocks/>
+          </p:cNvCxnSpPr>
+          <p:nvPr/>
+        </p:nvCxnSpPr>
+        <p:spPr>
+          <a:xfrm>
+            <a:off x="2300596" y="1722770"/>
+            <a:ext cx="3747" cy="95641"/>
+          </a:xfrm>
+          <a:prstGeom prst="straightConnector1">
+            <a:avLst/>
+          </a:prstGeom>
+          <a:ln>
+            <a:solidFill>
+              <a:schemeClr val="tx1"/>
+            </a:solidFill>
+            <a:tailEnd type="triangle"/>
+          </a:ln>
+        </p:spPr>
+        <p:style>
+          <a:lnRef idx="2">
+            <a:schemeClr val="accent1"/>
+          </a:lnRef>
+          <a:fillRef idx="0">
+            <a:schemeClr val="accent1"/>
+          </a:fillRef>
+          <a:effectRef idx="1">
+            <a:schemeClr val="accent1"/>
+          </a:effectRef>
+          <a:fontRef idx="minor">
+            <a:schemeClr val="tx1"/>
+          </a:fontRef>
+        </p:style>
+      </p:cxnSp>
+      <p:cxnSp>
+        <p:nvCxnSpPr>
+          <p:cNvPr id="91" name="Straight Arrow Connector 90">
+            <a:extLst>
+              <a:ext uri="{FF2B5EF4-FFF2-40B4-BE49-F238E27FC236}">
+                <a16:creationId xmlns:a16="http://schemas.microsoft.com/office/drawing/2014/main" id="{CB11D6ED-EB87-798E-E52B-31B739E2753C}"/>
+              </a:ext>
+            </a:extLst>
+          </p:cNvPr>
+          <p:cNvCxnSpPr>
+            <a:cxnSpLocks/>
+          </p:cNvCxnSpPr>
+          <p:nvPr/>
+        </p:nvCxnSpPr>
+        <p:spPr>
+          <a:xfrm flipH="1">
+            <a:off x="2097078" y="1722770"/>
+            <a:ext cx="4871" cy="96716"/>
+          </a:xfrm>
+          <a:prstGeom prst="straightConnector1">
+            <a:avLst/>
+          </a:prstGeom>
+          <a:ln>
+            <a:solidFill>
+              <a:schemeClr val="tx1"/>
+            </a:solidFill>
+            <a:tailEnd type="triangle"/>
+          </a:ln>
+        </p:spPr>
+        <p:style>
+          <a:lnRef idx="2">
+            <a:schemeClr val="accent1"/>
+          </a:lnRef>
+          <a:fillRef idx="0">
+            <a:schemeClr val="accent1"/>
+          </a:fillRef>
+          <a:effectRef idx="1">
+            <a:schemeClr val="accent1"/>
+          </a:effectRef>
+          <a:fontRef idx="minor">
+            <a:schemeClr val="tx1"/>
+          </a:fontRef>
+        </p:style>
+      </p:cxnSp>
+      <p:cxnSp>
+        <p:nvCxnSpPr>
+          <p:cNvPr id="92" name="Straight Arrow Connector 91">
+            <a:extLst>
+              <a:ext uri="{FF2B5EF4-FFF2-40B4-BE49-F238E27FC236}">
+                <a16:creationId xmlns:a16="http://schemas.microsoft.com/office/drawing/2014/main" id="{43A5227A-5C7A-D541-A9A5-2F51C49B3751}"/>
+              </a:ext>
+            </a:extLst>
+          </p:cNvPr>
+          <p:cNvCxnSpPr>
+            <a:cxnSpLocks/>
+          </p:cNvCxnSpPr>
+          <p:nvPr/>
+        </p:nvCxnSpPr>
+        <p:spPr>
+          <a:xfrm flipH="1">
+            <a:off x="2494446" y="1722770"/>
+            <a:ext cx="4871" cy="96716"/>
+          </a:xfrm>
+          <a:prstGeom prst="straightConnector1">
+            <a:avLst/>
+          </a:prstGeom>
+          <a:ln>
+            <a:solidFill>
+              <a:schemeClr val="tx1"/>
+            </a:solidFill>
+            <a:tailEnd type="triangle"/>
+          </a:ln>
+        </p:spPr>
+        <p:style>
+          <a:lnRef idx="2">
+            <a:schemeClr val="accent1"/>
+          </a:lnRef>
+          <a:fillRef idx="0">
+            <a:schemeClr val="accent1"/>
+          </a:fillRef>
+          <a:effectRef idx="1">
+            <a:schemeClr val="accent1"/>
+          </a:effectRef>
+          <a:fontRef idx="minor">
+            <a:schemeClr val="tx1"/>
+          </a:fontRef>
+        </p:style>
+      </p:cxnSp>
+      <p:sp>
+        <p:nvSpPr>
+          <p:cNvPr id="93" name="TextBox 92">
+            <a:extLst>
+              <a:ext uri="{FF2B5EF4-FFF2-40B4-BE49-F238E27FC236}">
+                <a16:creationId xmlns:a16="http://schemas.microsoft.com/office/drawing/2014/main" id="{10548A88-DDAD-A711-5155-2DBE208920EA}"/>
+              </a:ext>
+            </a:extLst>
+          </p:cNvPr>
+          <p:cNvSpPr txBox="1"/>
+          <p:nvPr/>
+        </p:nvSpPr>
+        <p:spPr>
+          <a:xfrm>
+            <a:off x="2392480" y="1756764"/>
+            <a:ext cx="213520" cy="461665"/>
+          </a:xfrm>
+          <a:prstGeom prst="rect">
+            <a:avLst/>
+          </a:prstGeom>
+          <a:noFill/>
+        </p:spPr>
+        <p:txBody>
+          <a:bodyPr wrap="none" rtlCol="0">
+            <a:spAutoFit/>
+          </a:bodyPr>
+          <a:lstStyle/>
+          <a:p>
+            <a:r>
+              <a:rPr lang="en-US" sz="800" b="1" dirty="0"/>
+              <a:t>.</a:t>
+            </a:r>
+          </a:p>
+          <a:p>
+            <a:r>
+              <a:rPr lang="en-US" sz="800" b="1" dirty="0"/>
+              <a:t>.</a:t>
+            </a:r>
+          </a:p>
+          <a:p>
+            <a:r>
+              <a:rPr lang="en-US" sz="800" b="1" dirty="0"/>
+              <a:t>.</a:t>
+            </a:r>
+          </a:p>
+        </p:txBody>
+      </p:sp>
+      <p:cxnSp>
+        <p:nvCxnSpPr>
+          <p:cNvPr id="94" name="Elbow Connector 93">
+            <a:extLst>
+              <a:ext uri="{FF2B5EF4-FFF2-40B4-BE49-F238E27FC236}">
+                <a16:creationId xmlns:a16="http://schemas.microsoft.com/office/drawing/2014/main" id="{67A9BEB6-8308-E401-D2F8-75BEAAE03233}"/>
+              </a:ext>
+            </a:extLst>
+          </p:cNvPr>
+          <p:cNvCxnSpPr>
+            <a:cxnSpLocks/>
+            <a:stCxn id="69" idx="0"/>
+            <a:endCxn id="71" idx="1"/>
+          </p:cNvCxnSpPr>
+          <p:nvPr/>
+        </p:nvCxnSpPr>
+        <p:spPr>
+          <a:xfrm rot="5400000" flipH="1" flipV="1">
+            <a:off x="1446712" y="939141"/>
+            <a:ext cx="147525" cy="141045"/>
+          </a:xfrm>
+          <a:prstGeom prst="bentConnector2">
+            <a:avLst/>
+          </a:prstGeom>
+          <a:ln>
+            <a:solidFill>
+              <a:schemeClr val="tx1"/>
+            </a:solidFill>
+            <a:tailEnd type="triangle"/>
+          </a:ln>
+        </p:spPr>
+        <p:style>
+          <a:lnRef idx="2">
+            <a:schemeClr val="accent1"/>
+          </a:lnRef>
+          <a:fillRef idx="0">
+            <a:schemeClr val="accent1"/>
+          </a:fillRef>
+          <a:effectRef idx="1">
+            <a:schemeClr val="accent1"/>
+          </a:effectRef>
+          <a:fontRef idx="minor">
+            <a:schemeClr val="tx1"/>
+          </a:fontRef>
+        </p:style>
+      </p:cxnSp>
+      <p:cxnSp>
+        <p:nvCxnSpPr>
+          <p:cNvPr id="95" name="Elbow Connector 94">
+            <a:extLst>
+              <a:ext uri="{FF2B5EF4-FFF2-40B4-BE49-F238E27FC236}">
+                <a16:creationId xmlns:a16="http://schemas.microsoft.com/office/drawing/2014/main" id="{E0D85EF5-4D16-92C4-AF9F-AB59EA6C3760}"/>
+              </a:ext>
+            </a:extLst>
+          </p:cNvPr>
+          <p:cNvCxnSpPr>
+            <a:cxnSpLocks/>
+            <a:stCxn id="69" idx="0"/>
+            <a:endCxn id="70" idx="1"/>
+          </p:cNvCxnSpPr>
+          <p:nvPr/>
+        </p:nvCxnSpPr>
+        <p:spPr>
+          <a:xfrm rot="5400000" flipH="1" flipV="1">
+            <a:off x="1353309" y="849984"/>
+            <a:ext cx="330084" cy="136798"/>
+          </a:xfrm>
+          <a:prstGeom prst="bentConnector2">
+            <a:avLst/>
+          </a:prstGeom>
+          <a:ln>
+            <a:solidFill>
+              <a:schemeClr val="tx1"/>
+            </a:solidFill>
+            <a:tailEnd type="triangle"/>
+          </a:ln>
+        </p:spPr>
+        <p:style>
+          <a:lnRef idx="2">
+            <a:schemeClr val="accent1"/>
+          </a:lnRef>
+          <a:fillRef idx="0">
+            <a:schemeClr val="accent1"/>
+          </a:fillRef>
+          <a:effectRef idx="1">
+            <a:schemeClr val="accent1"/>
+          </a:effectRef>
+          <a:fontRef idx="minor">
+            <a:schemeClr val="tx1"/>
+          </a:fontRef>
+        </p:style>
+      </p:cxnSp>
+      <p:cxnSp>
+        <p:nvCxnSpPr>
+          <p:cNvPr id="96" name="Straight Arrow Connector 95">
+            <a:extLst>
+              <a:ext uri="{FF2B5EF4-FFF2-40B4-BE49-F238E27FC236}">
+                <a16:creationId xmlns:a16="http://schemas.microsoft.com/office/drawing/2014/main" id="{14EA2A40-6D40-8120-8B31-B5E075A3C46D}"/>
+              </a:ext>
+            </a:extLst>
+          </p:cNvPr>
+          <p:cNvCxnSpPr>
+            <a:cxnSpLocks/>
+            <a:stCxn id="68" idx="0"/>
+            <a:endCxn id="69" idx="2"/>
+          </p:cNvCxnSpPr>
+          <p:nvPr/>
+        </p:nvCxnSpPr>
+        <p:spPr>
+          <a:xfrm flipH="1" flipV="1">
+            <a:off x="1449952" y="1196983"/>
+            <a:ext cx="258" cy="107426"/>
+          </a:xfrm>
+          <a:prstGeom prst="straightConnector1">
+            <a:avLst/>
+          </a:prstGeom>
+          <a:ln>
+            <a:solidFill>
+              <a:schemeClr val="tx1"/>
+            </a:solidFill>
+            <a:tailEnd type="triangle"/>
+          </a:ln>
+        </p:spPr>
+        <p:style>
+          <a:lnRef idx="2">
+            <a:schemeClr val="accent1"/>
+          </a:lnRef>
+          <a:fillRef idx="0">
+            <a:schemeClr val="accent1"/>
+          </a:fillRef>
+          <a:effectRef idx="1">
+            <a:schemeClr val="accent1"/>
+          </a:effectRef>
+          <a:fontRef idx="minor">
+            <a:schemeClr val="tx1"/>
+          </a:fontRef>
+        </p:style>
+      </p:cxnSp>
     </p:spTree>
     <p:extLst>
       <p:ext uri="{BB962C8B-B14F-4D97-AF65-F5344CB8AC3E}">

--- a/Documentation/CDCM Diagrams .pptx
+++ b/Documentation/CDCM Diagrams .pptx
@@ -5,13 +5,14 @@
     <p:sldMasterId id="2147483648" r:id="rId1"/>
   </p:sldMasterIdLst>
   <p:notesMasterIdLst>
-    <p:notesMasterId r:id="rId6"/>
+    <p:notesMasterId r:id="rId7"/>
   </p:notesMasterIdLst>
   <p:sldIdLst>
     <p:sldId id="256" r:id="rId2"/>
     <p:sldId id="258" r:id="rId3"/>
     <p:sldId id="257" r:id="rId4"/>
     <p:sldId id="259" r:id="rId5"/>
+    <p:sldId id="260" r:id="rId6"/>
   </p:sldIdLst>
   <p:sldSz cx="12192000" cy="6858000"/>
   <p:notesSz cx="6858000" cy="9144000"/>
@@ -200,7 +201,7 @@
           <a:p>
             <a:fld id="{94EF214D-1F76-F841-A2D3-D2CDEC996226}" type="datetimeFigureOut">
               <a:rPr lang="en-US" smtClean="0"/>
-              <a:t>8/26/25</a:t>
+              <a:t>8/28/25</a:t>
             </a:fld>
             <a:endParaRPr lang="en-US"/>
           </a:p>
@@ -698,7 +699,7 @@
           <a:p>
             <a:fld id="{E90F38FF-858C-0643-98FD-89636F5F9C82}" type="datetimeFigureOut">
               <a:rPr lang="en-US" smtClean="0"/>
-              <a:t>8/26/25</a:t>
+              <a:t>8/28/25</a:t>
             </a:fld>
             <a:endParaRPr lang="en-US"/>
           </a:p>
@@ -896,7 +897,7 @@
           <a:p>
             <a:fld id="{E90F38FF-858C-0643-98FD-89636F5F9C82}" type="datetimeFigureOut">
               <a:rPr lang="en-US" smtClean="0"/>
-              <a:t>8/26/25</a:t>
+              <a:t>8/28/25</a:t>
             </a:fld>
             <a:endParaRPr lang="en-US"/>
           </a:p>
@@ -1104,7 +1105,7 @@
           <a:p>
             <a:fld id="{E90F38FF-858C-0643-98FD-89636F5F9C82}" type="datetimeFigureOut">
               <a:rPr lang="en-US" smtClean="0"/>
-              <a:t>8/26/25</a:t>
+              <a:t>8/28/25</a:t>
             </a:fld>
             <a:endParaRPr lang="en-US"/>
           </a:p>
@@ -1302,7 +1303,7 @@
           <a:p>
             <a:fld id="{E90F38FF-858C-0643-98FD-89636F5F9C82}" type="datetimeFigureOut">
               <a:rPr lang="en-US" smtClean="0"/>
-              <a:t>8/26/25</a:t>
+              <a:t>8/28/25</a:t>
             </a:fld>
             <a:endParaRPr lang="en-US"/>
           </a:p>
@@ -1577,7 +1578,7 @@
           <a:p>
             <a:fld id="{E90F38FF-858C-0643-98FD-89636F5F9C82}" type="datetimeFigureOut">
               <a:rPr lang="en-US" smtClean="0"/>
-              <a:t>8/26/25</a:t>
+              <a:t>8/28/25</a:t>
             </a:fld>
             <a:endParaRPr lang="en-US"/>
           </a:p>
@@ -1842,7 +1843,7 @@
           <a:p>
             <a:fld id="{E90F38FF-858C-0643-98FD-89636F5F9C82}" type="datetimeFigureOut">
               <a:rPr lang="en-US" smtClean="0"/>
-              <a:t>8/26/25</a:t>
+              <a:t>8/28/25</a:t>
             </a:fld>
             <a:endParaRPr lang="en-US"/>
           </a:p>
@@ -2254,7 +2255,7 @@
           <a:p>
             <a:fld id="{E90F38FF-858C-0643-98FD-89636F5F9C82}" type="datetimeFigureOut">
               <a:rPr lang="en-US" smtClean="0"/>
-              <a:t>8/26/25</a:t>
+              <a:t>8/28/25</a:t>
             </a:fld>
             <a:endParaRPr lang="en-US"/>
           </a:p>
@@ -2395,7 +2396,7 @@
           <a:p>
             <a:fld id="{E90F38FF-858C-0643-98FD-89636F5F9C82}" type="datetimeFigureOut">
               <a:rPr lang="en-US" smtClean="0"/>
-              <a:t>8/26/25</a:t>
+              <a:t>8/28/25</a:t>
             </a:fld>
             <a:endParaRPr lang="en-US"/>
           </a:p>
@@ -2508,7 +2509,7 @@
           <a:p>
             <a:fld id="{E90F38FF-858C-0643-98FD-89636F5F9C82}" type="datetimeFigureOut">
               <a:rPr lang="en-US" smtClean="0"/>
-              <a:t>8/26/25</a:t>
+              <a:t>8/28/25</a:t>
             </a:fld>
             <a:endParaRPr lang="en-US"/>
           </a:p>
@@ -2819,7 +2820,7 @@
           <a:p>
             <a:fld id="{E90F38FF-858C-0643-98FD-89636F5F9C82}" type="datetimeFigureOut">
               <a:rPr lang="en-US" smtClean="0"/>
-              <a:t>8/26/25</a:t>
+              <a:t>8/28/25</a:t>
             </a:fld>
             <a:endParaRPr lang="en-US"/>
           </a:p>
@@ -3107,7 +3108,7 @@
           <a:p>
             <a:fld id="{E90F38FF-858C-0643-98FD-89636F5F9C82}" type="datetimeFigureOut">
               <a:rPr lang="en-US" smtClean="0"/>
-              <a:t>8/26/25</a:t>
+              <a:t>8/28/25</a:t>
             </a:fld>
             <a:endParaRPr lang="en-US"/>
           </a:p>
@@ -3348,7 +3349,7 @@
           <a:p>
             <a:fld id="{E90F38FF-858C-0643-98FD-89636F5F9C82}" type="datetimeFigureOut">
               <a:rPr lang="en-US" smtClean="0"/>
-              <a:t>8/26/25</a:t>
+              <a:t>8/28/25</a:t>
             </a:fld>
             <a:endParaRPr lang="en-US"/>
           </a:p>
@@ -9882,6 +9883,706 @@
     <p:extLst>
       <p:ext uri="{BB962C8B-B14F-4D97-AF65-F5344CB8AC3E}">
         <p14:creationId xmlns:p14="http://schemas.microsoft.com/office/powerpoint/2010/main" val="300857298"/>
+      </p:ext>
+    </p:extLst>
+  </p:cSld>
+  <p:clrMapOvr>
+    <a:masterClrMapping/>
+  </p:clrMapOvr>
+</p:sld>
+</file>
+
+<file path=ppt/slides/slide5.xml><?xml version="1.0" encoding="utf-8"?>
+<p:sld xmlns:a="http://schemas.openxmlformats.org/drawingml/2006/main" xmlns:r="http://schemas.openxmlformats.org/officeDocument/2006/relationships" xmlns:p="http://schemas.openxmlformats.org/presentationml/2006/main">
+  <p:cSld>
+    <p:spTree>
+      <p:nvGrpSpPr>
+        <p:cNvPr id="1" name=""/>
+        <p:cNvGrpSpPr/>
+        <p:nvPr/>
+      </p:nvGrpSpPr>
+      <p:grpSpPr>
+        <a:xfrm>
+          <a:off x="0" y="0"/>
+          <a:ext cx="0" cy="0"/>
+          <a:chOff x="0" y="0"/>
+          <a:chExt cx="0" cy="0"/>
+        </a:xfrm>
+      </p:grpSpPr>
+      <mc:AlternateContent xmlns:mc="http://schemas.openxmlformats.org/markup-compatibility/2006">
+        <mc:Choice xmlns:a14="http://schemas.microsoft.com/office/drawing/2010/main" Requires="a14">
+          <p:sp>
+            <p:nvSpPr>
+              <p:cNvPr id="5" name="Oval 4">
+                <a:extLst>
+                  <a:ext uri="{FF2B5EF4-FFF2-40B4-BE49-F238E27FC236}">
+                    <a16:creationId xmlns:a16="http://schemas.microsoft.com/office/drawing/2014/main" id="{BDC0D858-280B-85CF-0BA4-240F092DAD2C}"/>
+                  </a:ext>
+                </a:extLst>
+              </p:cNvPr>
+              <p:cNvSpPr/>
+              <p:nvPr/>
+            </p:nvSpPr>
+            <p:spPr>
+              <a:xfrm>
+                <a:off x="3105573" y="3918857"/>
+                <a:ext cx="1475014" cy="1475014"/>
+              </a:xfrm>
+              <a:prstGeom prst="ellipse">
+                <a:avLst/>
+              </a:prstGeom>
+              <a:solidFill>
+                <a:schemeClr val="bg1">
+                  <a:lumMod val="85000"/>
+                </a:schemeClr>
+              </a:solidFill>
+            </p:spPr>
+            <p:style>
+              <a:lnRef idx="1">
+                <a:schemeClr val="dk1"/>
+              </a:lnRef>
+              <a:fillRef idx="2">
+                <a:schemeClr val="dk1"/>
+              </a:fillRef>
+              <a:effectRef idx="1">
+                <a:schemeClr val="dk1"/>
+              </a:effectRef>
+              <a:fontRef idx="minor">
+                <a:schemeClr val="dk1"/>
+              </a:fontRef>
+            </p:style>
+            <p:txBody>
+              <a:bodyPr rtlCol="0" anchor="ctr"/>
+              <a:lstStyle/>
+              <a:p>
+                <a:pPr algn="ctr"/>
+                <a14:m>
+                  <m:oMathPara xmlns:m="http://schemas.openxmlformats.org/officeDocument/2006/math">
+                    <m:oMathParaPr>
+                      <m:jc m:val="centerGroup"/>
+                    </m:oMathParaPr>
+                    <m:oMath xmlns:m="http://schemas.openxmlformats.org/officeDocument/2006/math">
+                      <m:r>
+                        <a:rPr lang="en-US" b="0" i="1" smtClean="0">
+                          <a:latin typeface="Cambria Math" panose="02040503050406030204" pitchFamily="18" charset="0"/>
+                        </a:rPr>
+                        <m:t>𝑆𝑜𝑙𝑎𝑟</m:t>
+                      </m:r>
+                      <m:r>
+                        <a:rPr lang="en-US" b="0" i="1" smtClean="0">
+                          <a:latin typeface="Cambria Math" panose="02040503050406030204" pitchFamily="18" charset="0"/>
+                        </a:rPr>
+                        <m:t> </m:t>
+                      </m:r>
+                      <m:r>
+                        <a:rPr lang="en-US" b="0" i="1" smtClean="0">
+                          <a:latin typeface="Cambria Math" panose="02040503050406030204" pitchFamily="18" charset="0"/>
+                        </a:rPr>
+                        <m:t>𝑃𝑎𝑛𝑒𝑙𝑠</m:t>
+                      </m:r>
+                    </m:oMath>
+                  </m:oMathPara>
+                </a14:m>
+                <a:endParaRPr lang="en-US" dirty="0"/>
+              </a:p>
+            </p:txBody>
+          </p:sp>
+        </mc:Choice>
+        <mc:Fallback>
+          <p:sp>
+            <p:nvSpPr>
+              <p:cNvPr id="5" name="Oval 4">
+                <a:extLst>
+                  <a:ext uri="{FF2B5EF4-FFF2-40B4-BE49-F238E27FC236}">
+                    <a16:creationId xmlns:a16="http://schemas.microsoft.com/office/drawing/2014/main" id="{BDC0D858-280B-85CF-0BA4-240F092DAD2C}"/>
+                  </a:ext>
+                </a:extLst>
+              </p:cNvPr>
+              <p:cNvSpPr>
+                <a:spLocks noRot="1" noChangeAspect="1" noMove="1" noResize="1" noEditPoints="1" noAdjustHandles="1" noChangeArrowheads="1" noChangeShapeType="1" noTextEdit="1"/>
+              </p:cNvSpPr>
+              <p:nvPr/>
+            </p:nvSpPr>
+            <p:spPr>
+              <a:xfrm>
+                <a:off x="3105573" y="3918857"/>
+                <a:ext cx="1475014" cy="1475014"/>
+              </a:xfrm>
+              <a:prstGeom prst="ellipse">
+                <a:avLst/>
+              </a:prstGeom>
+              <a:blipFill>
+                <a:blip r:embed="rId2"/>
+                <a:stretch>
+                  <a:fillRect l="-847"/>
+                </a:stretch>
+              </a:blipFill>
+            </p:spPr>
+            <p:txBody>
+              <a:bodyPr/>
+              <a:lstStyle/>
+              <a:p>
+                <a:r>
+                  <a:rPr lang="en-US">
+                    <a:noFill/>
+                  </a:rPr>
+                  <a:t> </a:t>
+                </a:r>
+              </a:p>
+            </p:txBody>
+          </p:sp>
+        </mc:Fallback>
+      </mc:AlternateContent>
+      <mc:AlternateContent xmlns:mc="http://schemas.openxmlformats.org/markup-compatibility/2006">
+        <mc:Choice xmlns:a14="http://schemas.microsoft.com/office/drawing/2010/main" Requires="a14">
+          <p:sp>
+            <p:nvSpPr>
+              <p:cNvPr id="6" name="Oval 5">
+                <a:extLst>
+                  <a:ext uri="{FF2B5EF4-FFF2-40B4-BE49-F238E27FC236}">
+                    <a16:creationId xmlns:a16="http://schemas.microsoft.com/office/drawing/2014/main" id="{FADAF1AB-4631-8177-1586-019E49D01782}"/>
+                  </a:ext>
+                </a:extLst>
+              </p:cNvPr>
+              <p:cNvSpPr/>
+              <p:nvPr/>
+            </p:nvSpPr>
+            <p:spPr>
+              <a:xfrm>
+                <a:off x="5080681" y="2151101"/>
+                <a:ext cx="1475014" cy="1475014"/>
+              </a:xfrm>
+              <a:prstGeom prst="ellipse">
+                <a:avLst/>
+              </a:prstGeom>
+              <a:solidFill>
+                <a:srgbClr val="9BCCF7"/>
+              </a:solidFill>
+            </p:spPr>
+            <p:style>
+              <a:lnRef idx="1">
+                <a:schemeClr val="dk1"/>
+              </a:lnRef>
+              <a:fillRef idx="2">
+                <a:schemeClr val="dk1"/>
+              </a:fillRef>
+              <a:effectRef idx="1">
+                <a:schemeClr val="dk1"/>
+              </a:effectRef>
+              <a:fontRef idx="minor">
+                <a:schemeClr val="dk1"/>
+              </a:fontRef>
+            </p:style>
+            <p:txBody>
+              <a:bodyPr rtlCol="0" anchor="ctr"/>
+              <a:lstStyle/>
+              <a:p>
+                <a:pPr algn="ctr"/>
+                <a14:m>
+                  <m:oMathPara xmlns:m="http://schemas.openxmlformats.org/officeDocument/2006/math">
+                    <m:oMathParaPr>
+                      <m:jc m:val="centerGroup"/>
+                    </m:oMathParaPr>
+                    <m:oMath xmlns:m="http://schemas.openxmlformats.org/officeDocument/2006/math">
+                      <m:sSub>
+                        <m:sSubPr>
+                          <m:ctrlPr>
+                            <a:rPr lang="en-US" b="0" i="1" smtClean="0">
+                              <a:latin typeface="Cambria Math" panose="02040503050406030204" pitchFamily="18" charset="0"/>
+                            </a:rPr>
+                          </m:ctrlPr>
+                        </m:sSubPr>
+                        <m:e>
+                          <m:r>
+                            <a:rPr lang="en-US" b="0" i="1" smtClean="0">
+                              <a:latin typeface="Cambria Math" panose="02040503050406030204" pitchFamily="18" charset="0"/>
+                            </a:rPr>
+                            <m:t>𝐺</m:t>
+                          </m:r>
+                        </m:e>
+                        <m:sub>
+                          <m:r>
+                            <a:rPr lang="en-US" b="0" i="1" smtClean="0">
+                              <a:latin typeface="Cambria Math" panose="02040503050406030204" pitchFamily="18" charset="0"/>
+                            </a:rPr>
+                            <m:t>𝑝𝑜𝑤𝑒𝑟</m:t>
+                          </m:r>
+                        </m:sub>
+                      </m:sSub>
+                    </m:oMath>
+                  </m:oMathPara>
+                </a14:m>
+                <a:endParaRPr lang="en-US" dirty="0"/>
+              </a:p>
+            </p:txBody>
+          </p:sp>
+        </mc:Choice>
+        <mc:Fallback>
+          <p:sp>
+            <p:nvSpPr>
+              <p:cNvPr id="6" name="Oval 5">
+                <a:extLst>
+                  <a:ext uri="{FF2B5EF4-FFF2-40B4-BE49-F238E27FC236}">
+                    <a16:creationId xmlns:a16="http://schemas.microsoft.com/office/drawing/2014/main" id="{FADAF1AB-4631-8177-1586-019E49D01782}"/>
+                  </a:ext>
+                </a:extLst>
+              </p:cNvPr>
+              <p:cNvSpPr>
+                <a:spLocks noRot="1" noChangeAspect="1" noMove="1" noResize="1" noEditPoints="1" noAdjustHandles="1" noChangeArrowheads="1" noChangeShapeType="1" noTextEdit="1"/>
+              </p:cNvSpPr>
+              <p:nvPr/>
+            </p:nvSpPr>
+            <p:spPr>
+              <a:xfrm>
+                <a:off x="5080681" y="2151101"/>
+                <a:ext cx="1475014" cy="1475014"/>
+              </a:xfrm>
+              <a:prstGeom prst="ellipse">
+                <a:avLst/>
+              </a:prstGeom>
+              <a:blipFill>
+                <a:blip r:embed="rId3"/>
+                <a:stretch>
+                  <a:fillRect/>
+                </a:stretch>
+              </a:blipFill>
+            </p:spPr>
+            <p:txBody>
+              <a:bodyPr/>
+              <a:lstStyle/>
+              <a:p>
+                <a:r>
+                  <a:rPr lang="en-US">
+                    <a:noFill/>
+                  </a:rPr>
+                  <a:t> </a:t>
+                </a:r>
+              </a:p>
+            </p:txBody>
+          </p:sp>
+        </mc:Fallback>
+      </mc:AlternateContent>
+      <mc:AlternateContent xmlns:mc="http://schemas.openxmlformats.org/markup-compatibility/2006">
+        <mc:Choice xmlns:a14="http://schemas.microsoft.com/office/drawing/2010/main" Requires="a14">
+          <p:sp>
+            <p:nvSpPr>
+              <p:cNvPr id="7" name="Oval 6">
+                <a:extLst>
+                  <a:ext uri="{FF2B5EF4-FFF2-40B4-BE49-F238E27FC236}">
+                    <a16:creationId xmlns:a16="http://schemas.microsoft.com/office/drawing/2014/main" id="{4DA3B9D1-B5EA-41D3-32D9-B78B91CD2E0E}"/>
+                  </a:ext>
+                </a:extLst>
+              </p:cNvPr>
+              <p:cNvSpPr/>
+              <p:nvPr/>
+            </p:nvSpPr>
+            <p:spPr>
+              <a:xfrm>
+                <a:off x="494273" y="3940237"/>
+                <a:ext cx="1475014" cy="1475014"/>
+              </a:xfrm>
+              <a:prstGeom prst="ellipse">
+                <a:avLst/>
+              </a:prstGeom>
+              <a:solidFill>
+                <a:srgbClr val="FFC000"/>
+              </a:solidFill>
+            </p:spPr>
+            <p:style>
+              <a:lnRef idx="1">
+                <a:schemeClr val="dk1"/>
+              </a:lnRef>
+              <a:fillRef idx="2">
+                <a:schemeClr val="dk1"/>
+              </a:fillRef>
+              <a:effectRef idx="1">
+                <a:schemeClr val="dk1"/>
+              </a:effectRef>
+              <a:fontRef idx="minor">
+                <a:schemeClr val="dk1"/>
+              </a:fontRef>
+            </p:style>
+            <p:txBody>
+              <a:bodyPr rtlCol="0" anchor="ctr"/>
+              <a:lstStyle/>
+              <a:p>
+                <a:pPr algn="ctr"/>
+                <a14:m>
+                  <m:oMathPara xmlns:m="http://schemas.openxmlformats.org/officeDocument/2006/math">
+                    <m:oMathParaPr>
+                      <m:jc m:val="centerGroup"/>
+                    </m:oMathParaPr>
+                    <m:oMath xmlns:m="http://schemas.openxmlformats.org/officeDocument/2006/math">
+                      <m:sSub>
+                        <m:sSubPr>
+                          <m:ctrlPr>
+                            <a:rPr lang="en-US" b="0" i="1" smtClean="0">
+                              <a:latin typeface="Cambria Math" panose="02040503050406030204" pitchFamily="18" charset="0"/>
+                            </a:rPr>
+                          </m:ctrlPr>
+                        </m:sSubPr>
+                        <m:e>
+                          <m:r>
+                            <a:rPr lang="en-US" b="0" i="1" smtClean="0">
+                              <a:latin typeface="Cambria Math" panose="02040503050406030204" pitchFamily="18" charset="0"/>
+                            </a:rPr>
+                            <m:t>𝑆</m:t>
+                          </m:r>
+                        </m:e>
+                        <m:sub>
+                          <m:r>
+                            <a:rPr lang="en-US" b="0" i="1" smtClean="0">
+                              <a:latin typeface="Cambria Math" panose="02040503050406030204" pitchFamily="18" charset="0"/>
+                            </a:rPr>
+                            <m:t>𝑖𝑟𝑟𝑎𝑑𝑖𝑎𝑛𝑐𝑒</m:t>
+                          </m:r>
+                        </m:sub>
+                      </m:sSub>
+                    </m:oMath>
+                  </m:oMathPara>
+                </a14:m>
+                <a:endParaRPr lang="en-US" dirty="0"/>
+              </a:p>
+            </p:txBody>
+          </p:sp>
+        </mc:Choice>
+        <mc:Fallback>
+          <p:sp>
+            <p:nvSpPr>
+              <p:cNvPr id="7" name="Oval 6">
+                <a:extLst>
+                  <a:ext uri="{FF2B5EF4-FFF2-40B4-BE49-F238E27FC236}">
+                    <a16:creationId xmlns:a16="http://schemas.microsoft.com/office/drawing/2014/main" id="{4DA3B9D1-B5EA-41D3-32D9-B78B91CD2E0E}"/>
+                  </a:ext>
+                </a:extLst>
+              </p:cNvPr>
+              <p:cNvSpPr>
+                <a:spLocks noRot="1" noChangeAspect="1" noMove="1" noResize="1" noEditPoints="1" noAdjustHandles="1" noChangeArrowheads="1" noChangeShapeType="1" noTextEdit="1"/>
+              </p:cNvSpPr>
+              <p:nvPr/>
+            </p:nvSpPr>
+            <p:spPr>
+              <a:xfrm>
+                <a:off x="494273" y="3940237"/>
+                <a:ext cx="1475014" cy="1475014"/>
+              </a:xfrm>
+              <a:prstGeom prst="ellipse">
+                <a:avLst/>
+              </a:prstGeom>
+              <a:blipFill>
+                <a:blip r:embed="rId4"/>
+                <a:stretch>
+                  <a:fillRect/>
+                </a:stretch>
+              </a:blipFill>
+            </p:spPr>
+            <p:txBody>
+              <a:bodyPr/>
+              <a:lstStyle/>
+              <a:p>
+                <a:r>
+                  <a:rPr lang="en-US">
+                    <a:noFill/>
+                  </a:rPr>
+                  <a:t> </a:t>
+                </a:r>
+              </a:p>
+            </p:txBody>
+          </p:sp>
+        </mc:Fallback>
+      </mc:AlternateContent>
+      <mc:AlternateContent xmlns:mc="http://schemas.openxmlformats.org/markup-compatibility/2006">
+        <mc:Choice xmlns:a14="http://schemas.microsoft.com/office/drawing/2010/main" Requires="a14">
+          <p:sp>
+            <p:nvSpPr>
+              <p:cNvPr id="8" name="Oval 7">
+                <a:extLst>
+                  <a:ext uri="{FF2B5EF4-FFF2-40B4-BE49-F238E27FC236}">
+                    <a16:creationId xmlns:a16="http://schemas.microsoft.com/office/drawing/2014/main" id="{E4C822F2-E0A0-1449-A1CA-2E61E7551947}"/>
+                  </a:ext>
+                </a:extLst>
+              </p:cNvPr>
+              <p:cNvSpPr/>
+              <p:nvPr/>
+            </p:nvSpPr>
+            <p:spPr>
+              <a:xfrm>
+                <a:off x="4979366" y="5252217"/>
+                <a:ext cx="1475014" cy="1475014"/>
+              </a:xfrm>
+              <a:prstGeom prst="ellipse">
+                <a:avLst/>
+              </a:prstGeom>
+            </p:spPr>
+            <p:style>
+              <a:lnRef idx="2">
+                <a:schemeClr val="dk1"/>
+              </a:lnRef>
+              <a:fillRef idx="1">
+                <a:schemeClr val="lt1"/>
+              </a:fillRef>
+              <a:effectRef idx="0">
+                <a:schemeClr val="dk1"/>
+              </a:effectRef>
+              <a:fontRef idx="minor">
+                <a:schemeClr val="dk1"/>
+              </a:fontRef>
+            </p:style>
+            <p:txBody>
+              <a:bodyPr rtlCol="0" anchor="ctr"/>
+              <a:lstStyle/>
+              <a:p>
+                <a:pPr algn="ctr"/>
+                <a14:m>
+                  <m:oMathPara xmlns:m="http://schemas.openxmlformats.org/officeDocument/2006/math">
+                    <m:oMathParaPr>
+                      <m:jc m:val="centerGroup"/>
+                    </m:oMathParaPr>
+                    <m:oMath xmlns:m="http://schemas.openxmlformats.org/officeDocument/2006/math">
+                      <m:f>
+                        <m:fPr>
+                          <m:ctrlPr>
+                            <a:rPr lang="en-US" b="0" i="1" smtClean="0">
+                              <a:latin typeface="Cambria Math" panose="02040503050406030204" pitchFamily="18" charset="0"/>
+                            </a:rPr>
+                          </m:ctrlPr>
+                        </m:fPr>
+                        <m:num>
+                          <m:r>
+                            <a:rPr lang="en-US" b="0" i="1" smtClean="0">
+                              <a:latin typeface="Cambria Math" panose="02040503050406030204" pitchFamily="18" charset="0"/>
+                            </a:rPr>
+                            <m:t>𝐻𝑒𝑎𝑡𝑖𝑛𝑔</m:t>
+                          </m:r>
+                        </m:num>
+                        <m:den>
+                          <m:r>
+                            <a:rPr lang="en-US" b="0" i="1" smtClean="0">
+                              <a:latin typeface="Cambria Math" panose="02040503050406030204" pitchFamily="18" charset="0"/>
+                            </a:rPr>
+                            <m:t>𝐶𝑜𝑜𝑙𝑖𝑛𝑔</m:t>
+                          </m:r>
+                          <m:r>
+                            <a:rPr lang="en-US" b="0" i="1" smtClean="0">
+                              <a:latin typeface="Cambria Math" panose="02040503050406030204" pitchFamily="18" charset="0"/>
+                            </a:rPr>
+                            <m:t> </m:t>
+                          </m:r>
+                        </m:den>
+                      </m:f>
+                    </m:oMath>
+                  </m:oMathPara>
+                </a14:m>
+                <a:endParaRPr lang="en-US" dirty="0"/>
+              </a:p>
+            </p:txBody>
+          </p:sp>
+        </mc:Choice>
+        <mc:Fallback>
+          <p:sp>
+            <p:nvSpPr>
+              <p:cNvPr id="8" name="Oval 7">
+                <a:extLst>
+                  <a:ext uri="{FF2B5EF4-FFF2-40B4-BE49-F238E27FC236}">
+                    <a16:creationId xmlns:a16="http://schemas.microsoft.com/office/drawing/2014/main" id="{E4C822F2-E0A0-1449-A1CA-2E61E7551947}"/>
+                  </a:ext>
+                </a:extLst>
+              </p:cNvPr>
+              <p:cNvSpPr>
+                <a:spLocks noRot="1" noChangeAspect="1" noMove="1" noResize="1" noEditPoints="1" noAdjustHandles="1" noChangeArrowheads="1" noChangeShapeType="1" noTextEdit="1"/>
+              </p:cNvSpPr>
+              <p:nvPr/>
+            </p:nvSpPr>
+            <p:spPr>
+              <a:xfrm>
+                <a:off x="4979366" y="5252217"/>
+                <a:ext cx="1475014" cy="1475014"/>
+              </a:xfrm>
+              <a:prstGeom prst="ellipse">
+                <a:avLst/>
+              </a:prstGeom>
+              <a:blipFill>
+                <a:blip r:embed="rId5"/>
+                <a:stretch>
+                  <a:fillRect/>
+                </a:stretch>
+              </a:blipFill>
+            </p:spPr>
+            <p:txBody>
+              <a:bodyPr/>
+              <a:lstStyle/>
+              <a:p>
+                <a:r>
+                  <a:rPr lang="en-US">
+                    <a:noFill/>
+                  </a:rPr>
+                  <a:t> </a:t>
+                </a:r>
+              </a:p>
+            </p:txBody>
+          </p:sp>
+        </mc:Fallback>
+      </mc:AlternateContent>
+      <p:cxnSp>
+        <p:nvCxnSpPr>
+          <p:cNvPr id="9" name="Straight Arrow Connector 8">
+            <a:extLst>
+              <a:ext uri="{FF2B5EF4-FFF2-40B4-BE49-F238E27FC236}">
+                <a16:creationId xmlns:a16="http://schemas.microsoft.com/office/drawing/2014/main" id="{E933E1CC-73E4-D30B-B3BE-50A2923674DF}"/>
+              </a:ext>
+            </a:extLst>
+          </p:cNvPr>
+          <p:cNvCxnSpPr/>
+          <p:nvPr/>
+        </p:nvCxnSpPr>
+        <p:spPr>
+          <a:xfrm flipV="1">
+            <a:off x="4364576" y="3410104"/>
+            <a:ext cx="932116" cy="724764"/>
+          </a:xfrm>
+          <a:prstGeom prst="straightConnector1">
+            <a:avLst/>
+          </a:prstGeom>
+          <a:ln>
+            <a:tailEnd type="triangle"/>
+          </a:ln>
+        </p:spPr>
+        <p:style>
+          <a:lnRef idx="2">
+            <a:schemeClr val="dk1"/>
+          </a:lnRef>
+          <a:fillRef idx="0">
+            <a:schemeClr val="dk1"/>
+          </a:fillRef>
+          <a:effectRef idx="1">
+            <a:schemeClr val="dk1"/>
+          </a:effectRef>
+          <a:fontRef idx="minor">
+            <a:schemeClr val="tx1"/>
+          </a:fontRef>
+        </p:style>
+      </p:cxnSp>
+      <p:cxnSp>
+        <p:nvCxnSpPr>
+          <p:cNvPr id="11" name="Straight Arrow Connector 10">
+            <a:extLst>
+              <a:ext uri="{FF2B5EF4-FFF2-40B4-BE49-F238E27FC236}">
+                <a16:creationId xmlns:a16="http://schemas.microsoft.com/office/drawing/2014/main" id="{0910F1BD-8AF5-3304-10A3-75FC5A3631D8}"/>
+              </a:ext>
+            </a:extLst>
+          </p:cNvPr>
+          <p:cNvCxnSpPr>
+            <a:cxnSpLocks/>
+          </p:cNvCxnSpPr>
+          <p:nvPr/>
+        </p:nvCxnSpPr>
+        <p:spPr>
+          <a:xfrm flipV="1">
+            <a:off x="1753276" y="2888608"/>
+            <a:ext cx="3327405" cy="1267640"/>
+          </a:xfrm>
+          <a:prstGeom prst="straightConnector1">
+            <a:avLst/>
+          </a:prstGeom>
+          <a:ln>
+            <a:tailEnd type="triangle"/>
+          </a:ln>
+        </p:spPr>
+        <p:style>
+          <a:lnRef idx="2">
+            <a:schemeClr val="dk1"/>
+          </a:lnRef>
+          <a:fillRef idx="0">
+            <a:schemeClr val="dk1"/>
+          </a:fillRef>
+          <a:effectRef idx="1">
+            <a:schemeClr val="dk1"/>
+          </a:effectRef>
+          <a:fontRef idx="minor">
+            <a:schemeClr val="tx1"/>
+          </a:fontRef>
+        </p:style>
+      </p:cxnSp>
+      <p:cxnSp>
+        <p:nvCxnSpPr>
+          <p:cNvPr id="13" name="Straight Arrow Connector 12">
+            <a:extLst>
+              <a:ext uri="{FF2B5EF4-FFF2-40B4-BE49-F238E27FC236}">
+                <a16:creationId xmlns:a16="http://schemas.microsoft.com/office/drawing/2014/main" id="{48982866-D80C-2F19-CC37-90CE194AD870}"/>
+              </a:ext>
+            </a:extLst>
+          </p:cNvPr>
+          <p:cNvCxnSpPr>
+            <a:cxnSpLocks/>
+          </p:cNvCxnSpPr>
+          <p:nvPr/>
+        </p:nvCxnSpPr>
+        <p:spPr>
+          <a:xfrm flipV="1">
+            <a:off x="5716873" y="3626115"/>
+            <a:ext cx="101315" cy="1626102"/>
+          </a:xfrm>
+          <a:prstGeom prst="straightConnector1">
+            <a:avLst/>
+          </a:prstGeom>
+          <a:ln>
+            <a:tailEnd type="triangle"/>
+          </a:ln>
+        </p:spPr>
+        <p:style>
+          <a:lnRef idx="2">
+            <a:schemeClr val="dk1"/>
+          </a:lnRef>
+          <a:fillRef idx="0">
+            <a:schemeClr val="dk1"/>
+          </a:fillRef>
+          <a:effectRef idx="1">
+            <a:schemeClr val="dk1"/>
+          </a:effectRef>
+          <a:fontRef idx="minor">
+            <a:schemeClr val="tx1"/>
+          </a:fontRef>
+        </p:style>
+      </p:cxnSp>
+      <p:sp>
+        <p:nvSpPr>
+          <p:cNvPr id="14" name="TextBox 13">
+            <a:extLst>
+              <a:ext uri="{FF2B5EF4-FFF2-40B4-BE49-F238E27FC236}">
+                <a16:creationId xmlns:a16="http://schemas.microsoft.com/office/drawing/2014/main" id="{2258181E-F263-9D60-061F-27433A0C9266}"/>
+              </a:ext>
+            </a:extLst>
+          </p:cNvPr>
+          <p:cNvSpPr txBox="1"/>
+          <p:nvPr/>
+        </p:nvSpPr>
+        <p:spPr>
+          <a:xfrm>
+            <a:off x="870857" y="1001486"/>
+            <a:ext cx="1405834" cy="369332"/>
+          </a:xfrm>
+          <a:prstGeom prst="rect">
+            <a:avLst/>
+          </a:prstGeom>
+          <a:noFill/>
+        </p:spPr>
+        <p:txBody>
+          <a:bodyPr wrap="none" rtlCol="0">
+            <a:spAutoFit/>
+          </a:bodyPr>
+          <a:lstStyle/>
+          <a:p>
+            <a:r>
+              <a:rPr lang="en-US" dirty="0"/>
+              <a:t>Solar Power </a:t>
+            </a:r>
+          </a:p>
+        </p:txBody>
+      </p:sp>
+    </p:spTree>
+    <p:extLst>
+      <p:ext uri="{BB962C8B-B14F-4D97-AF65-F5344CB8AC3E}">
+        <p14:creationId xmlns:p14="http://schemas.microsoft.com/office/powerpoint/2010/main" val="1169359206"/>
       </p:ext>
     </p:extLst>
   </p:cSld>

--- a/Documentation/CDCM Diagrams .pptx
+++ b/Documentation/CDCM Diagrams .pptx
@@ -5,14 +5,15 @@
     <p:sldMasterId id="2147483648" r:id="rId1"/>
   </p:sldMasterIdLst>
   <p:notesMasterIdLst>
-    <p:notesMasterId r:id="rId7"/>
+    <p:notesMasterId r:id="rId8"/>
   </p:notesMasterIdLst>
   <p:sldIdLst>
     <p:sldId id="256" r:id="rId2"/>
     <p:sldId id="258" r:id="rId3"/>
-    <p:sldId id="257" r:id="rId4"/>
-    <p:sldId id="259" r:id="rId5"/>
-    <p:sldId id="260" r:id="rId6"/>
+    <p:sldId id="261" r:id="rId4"/>
+    <p:sldId id="257" r:id="rId5"/>
+    <p:sldId id="259" r:id="rId6"/>
+    <p:sldId id="260" r:id="rId7"/>
   </p:sldIdLst>
   <p:sldSz cx="12192000" cy="6858000"/>
   <p:notesSz cx="6858000" cy="9144000"/>
@@ -201,7 +202,7 @@
           <a:p>
             <a:fld id="{94EF214D-1F76-F841-A2D3-D2CDEC996226}" type="datetimeFigureOut">
               <a:rPr lang="en-US" smtClean="0"/>
-              <a:t>8/28/25</a:t>
+              <a:t>9/12/25</a:t>
             </a:fld>
             <a:endParaRPr lang="en-US"/>
           </a:p>
@@ -699,7 +700,7 @@
           <a:p>
             <a:fld id="{E90F38FF-858C-0643-98FD-89636F5F9C82}" type="datetimeFigureOut">
               <a:rPr lang="en-US" smtClean="0"/>
-              <a:t>8/28/25</a:t>
+              <a:t>9/12/25</a:t>
             </a:fld>
             <a:endParaRPr lang="en-US"/>
           </a:p>
@@ -897,7 +898,7 @@
           <a:p>
             <a:fld id="{E90F38FF-858C-0643-98FD-89636F5F9C82}" type="datetimeFigureOut">
               <a:rPr lang="en-US" smtClean="0"/>
-              <a:t>8/28/25</a:t>
+              <a:t>9/12/25</a:t>
             </a:fld>
             <a:endParaRPr lang="en-US"/>
           </a:p>
@@ -1105,7 +1106,7 @@
           <a:p>
             <a:fld id="{E90F38FF-858C-0643-98FD-89636F5F9C82}" type="datetimeFigureOut">
               <a:rPr lang="en-US" smtClean="0"/>
-              <a:t>8/28/25</a:t>
+              <a:t>9/12/25</a:t>
             </a:fld>
             <a:endParaRPr lang="en-US"/>
           </a:p>
@@ -1303,7 +1304,7 @@
           <a:p>
             <a:fld id="{E90F38FF-858C-0643-98FD-89636F5F9C82}" type="datetimeFigureOut">
               <a:rPr lang="en-US" smtClean="0"/>
-              <a:t>8/28/25</a:t>
+              <a:t>9/12/25</a:t>
             </a:fld>
             <a:endParaRPr lang="en-US"/>
           </a:p>
@@ -1578,7 +1579,7 @@
           <a:p>
             <a:fld id="{E90F38FF-858C-0643-98FD-89636F5F9C82}" type="datetimeFigureOut">
               <a:rPr lang="en-US" smtClean="0"/>
-              <a:t>8/28/25</a:t>
+              <a:t>9/12/25</a:t>
             </a:fld>
             <a:endParaRPr lang="en-US"/>
           </a:p>
@@ -1843,7 +1844,7 @@
           <a:p>
             <a:fld id="{E90F38FF-858C-0643-98FD-89636F5F9C82}" type="datetimeFigureOut">
               <a:rPr lang="en-US" smtClean="0"/>
-              <a:t>8/28/25</a:t>
+              <a:t>9/12/25</a:t>
             </a:fld>
             <a:endParaRPr lang="en-US"/>
           </a:p>
@@ -2255,7 +2256,7 @@
           <a:p>
             <a:fld id="{E90F38FF-858C-0643-98FD-89636F5F9C82}" type="datetimeFigureOut">
               <a:rPr lang="en-US" smtClean="0"/>
-              <a:t>8/28/25</a:t>
+              <a:t>9/12/25</a:t>
             </a:fld>
             <a:endParaRPr lang="en-US"/>
           </a:p>
@@ -2396,7 +2397,7 @@
           <a:p>
             <a:fld id="{E90F38FF-858C-0643-98FD-89636F5F9C82}" type="datetimeFigureOut">
               <a:rPr lang="en-US" smtClean="0"/>
-              <a:t>8/28/25</a:t>
+              <a:t>9/12/25</a:t>
             </a:fld>
             <a:endParaRPr lang="en-US"/>
           </a:p>
@@ -2509,7 +2510,7 @@
           <a:p>
             <a:fld id="{E90F38FF-858C-0643-98FD-89636F5F9C82}" type="datetimeFigureOut">
               <a:rPr lang="en-US" smtClean="0"/>
-              <a:t>8/28/25</a:t>
+              <a:t>9/12/25</a:t>
             </a:fld>
             <a:endParaRPr lang="en-US"/>
           </a:p>
@@ -2820,7 +2821,7 @@
           <a:p>
             <a:fld id="{E90F38FF-858C-0643-98FD-89636F5F9C82}" type="datetimeFigureOut">
               <a:rPr lang="en-US" smtClean="0"/>
-              <a:t>8/28/25</a:t>
+              <a:t>9/12/25</a:t>
             </a:fld>
             <a:endParaRPr lang="en-US"/>
           </a:p>
@@ -3108,7 +3109,7 @@
           <a:p>
             <a:fld id="{E90F38FF-858C-0643-98FD-89636F5F9C82}" type="datetimeFigureOut">
               <a:rPr lang="en-US" smtClean="0"/>
-              <a:t>8/28/25</a:t>
+              <a:t>9/12/25</a:t>
             </a:fld>
             <a:endParaRPr lang="en-US"/>
           </a:p>
@@ -3349,7 +3350,7 @@
           <a:p>
             <a:fld id="{E90F38FF-858C-0643-98FD-89636F5F9C82}" type="datetimeFigureOut">
               <a:rPr lang="en-US" smtClean="0"/>
-              <a:t>8/28/25</a:t>
+              <a:t>9/12/25</a:t>
             </a:fld>
             <a:endParaRPr lang="en-US"/>
           </a:p>
@@ -3780,7 +3781,7 @@
         </p:nvSpPr>
         <p:spPr>
           <a:xfrm>
-            <a:off x="239485" y="304799"/>
+            <a:off x="4669" y="-261258"/>
             <a:ext cx="3433312" cy="1015663"/>
           </a:xfrm>
           <a:prstGeom prst="rect">
@@ -3812,246 +3813,6 @@
             <a:r>
               <a:rPr lang="en-US" sz="1200" dirty="0"/>
               <a:t>Age = lifecycle progress (time-based) </a:t>
-            </a:r>
-          </a:p>
-        </p:txBody>
-      </p:sp>
-      <p:sp>
-        <p:nvSpPr>
-          <p:cNvPr id="6" name="TextBox 5">
-            <a:extLst>
-              <a:ext uri="{FF2B5EF4-FFF2-40B4-BE49-F238E27FC236}">
-                <a16:creationId xmlns:a16="http://schemas.microsoft.com/office/drawing/2014/main" id="{DAD6C461-257F-3BFE-5A11-32F3A2549551}"/>
-              </a:ext>
-            </a:extLst>
-          </p:cNvPr>
-          <p:cNvSpPr txBox="1"/>
-          <p:nvPr/>
-        </p:nvSpPr>
-        <p:spPr>
-          <a:xfrm>
-            <a:off x="446314" y="2554853"/>
-            <a:ext cx="2287229" cy="369332"/>
-          </a:xfrm>
-          <a:prstGeom prst="rect">
-            <a:avLst/>
-          </a:prstGeom>
-          <a:noFill/>
-          <a:ln>
-            <a:solidFill>
-              <a:schemeClr val="tx1"/>
-            </a:solidFill>
-          </a:ln>
-        </p:spPr>
-        <p:txBody>
-          <a:bodyPr wrap="none" rtlCol="0">
-            <a:spAutoFit/>
-          </a:bodyPr>
-          <a:lstStyle/>
-          <a:p>
-            <a:r>
-              <a:rPr lang="en-US" dirty="0"/>
-              <a:t>Health Damage Rate </a:t>
-            </a:r>
-          </a:p>
-        </p:txBody>
-      </p:sp>
-      <p:sp>
-        <p:nvSpPr>
-          <p:cNvPr id="7" name="TextBox 6">
-            <a:extLst>
-              <a:ext uri="{FF2B5EF4-FFF2-40B4-BE49-F238E27FC236}">
-                <a16:creationId xmlns:a16="http://schemas.microsoft.com/office/drawing/2014/main" id="{BAAE0173-CBDA-ED37-E453-4FCD35107969}"/>
-              </a:ext>
-            </a:extLst>
-          </p:cNvPr>
-          <p:cNvSpPr txBox="1"/>
-          <p:nvPr/>
-        </p:nvSpPr>
-        <p:spPr>
-          <a:xfrm>
-            <a:off x="446314" y="3226477"/>
-            <a:ext cx="2287229" cy="369332"/>
-          </a:xfrm>
-          <a:prstGeom prst="rect">
-            <a:avLst/>
-          </a:prstGeom>
-          <a:noFill/>
-          <a:ln>
-            <a:solidFill>
-              <a:schemeClr val="tx1"/>
-            </a:solidFill>
-          </a:ln>
-        </p:spPr>
-        <p:txBody>
-          <a:bodyPr wrap="square" rtlCol="0">
-            <a:spAutoFit/>
-          </a:bodyPr>
-          <a:lstStyle/>
-          <a:p>
-            <a:r>
-              <a:rPr lang="en-US" dirty="0"/>
-              <a:t>Aging Rate</a:t>
-            </a:r>
-          </a:p>
-        </p:txBody>
-      </p:sp>
-      <p:sp>
-        <p:nvSpPr>
-          <p:cNvPr id="8" name="TextBox 7">
-            <a:extLst>
-              <a:ext uri="{FF2B5EF4-FFF2-40B4-BE49-F238E27FC236}">
-                <a16:creationId xmlns:a16="http://schemas.microsoft.com/office/drawing/2014/main" id="{4CBB6A38-4770-9478-8363-C85F06E08023}"/>
-              </a:ext>
-            </a:extLst>
-          </p:cNvPr>
-          <p:cNvSpPr txBox="1"/>
-          <p:nvPr/>
-        </p:nvSpPr>
-        <p:spPr>
-          <a:xfrm>
-            <a:off x="446313" y="3898101"/>
-            <a:ext cx="2287229" cy="369332"/>
-          </a:xfrm>
-          <a:prstGeom prst="rect">
-            <a:avLst/>
-          </a:prstGeom>
-          <a:noFill/>
-          <a:ln>
-            <a:solidFill>
-              <a:schemeClr val="tx1"/>
-            </a:solidFill>
-          </a:ln>
-        </p:spPr>
-        <p:txBody>
-          <a:bodyPr wrap="square" rtlCol="0">
-            <a:spAutoFit/>
-          </a:bodyPr>
-          <a:lstStyle/>
-          <a:p>
-            <a:r>
-              <a:rPr lang="en-US" dirty="0"/>
-              <a:t>Impact Energy </a:t>
-            </a:r>
-          </a:p>
-        </p:txBody>
-      </p:sp>
-      <p:sp>
-        <p:nvSpPr>
-          <p:cNvPr id="9" name="TextBox 8">
-            <a:extLst>
-              <a:ext uri="{FF2B5EF4-FFF2-40B4-BE49-F238E27FC236}">
-                <a16:creationId xmlns:a16="http://schemas.microsoft.com/office/drawing/2014/main" id="{FDD8F818-D532-EC8C-32C5-52BC394D6D32}"/>
-              </a:ext>
-            </a:extLst>
-          </p:cNvPr>
-          <p:cNvSpPr txBox="1"/>
-          <p:nvPr/>
-        </p:nvSpPr>
-        <p:spPr>
-          <a:xfrm>
-            <a:off x="3672797" y="3226477"/>
-            <a:ext cx="2287229" cy="369332"/>
-          </a:xfrm>
-          <a:prstGeom prst="rect">
-            <a:avLst/>
-          </a:prstGeom>
-          <a:noFill/>
-          <a:ln>
-            <a:solidFill>
-              <a:schemeClr val="tx1"/>
-            </a:solidFill>
-          </a:ln>
-        </p:spPr>
-        <p:txBody>
-          <a:bodyPr wrap="square" rtlCol="0">
-            <a:spAutoFit/>
-          </a:bodyPr>
-          <a:lstStyle/>
-          <a:p>
-            <a:r>
-              <a:rPr lang="en-US" dirty="0"/>
-              <a:t>Aging Function </a:t>
-            </a:r>
-          </a:p>
-        </p:txBody>
-      </p:sp>
-      <p:sp>
-        <p:nvSpPr>
-          <p:cNvPr id="10" name="TextBox 9">
-            <a:extLst>
-              <a:ext uri="{FF2B5EF4-FFF2-40B4-BE49-F238E27FC236}">
-                <a16:creationId xmlns:a16="http://schemas.microsoft.com/office/drawing/2014/main" id="{CB55A89B-C7C6-3E36-44F6-D70815EDDA35}"/>
-              </a:ext>
-            </a:extLst>
-          </p:cNvPr>
-          <p:cNvSpPr txBox="1"/>
-          <p:nvPr/>
-        </p:nvSpPr>
-        <p:spPr>
-          <a:xfrm>
-            <a:off x="6601054" y="3226477"/>
-            <a:ext cx="4404403" cy="369332"/>
-          </a:xfrm>
-          <a:prstGeom prst="rect">
-            <a:avLst/>
-          </a:prstGeom>
-          <a:noFill/>
-          <a:ln>
-            <a:solidFill>
-              <a:schemeClr val="tx1"/>
-            </a:solidFill>
-          </a:ln>
-        </p:spPr>
-        <p:txBody>
-          <a:bodyPr wrap="square" rtlCol="0">
-            <a:spAutoFit/>
-          </a:bodyPr>
-          <a:lstStyle/>
-          <a:p>
-            <a:r>
-              <a:rPr lang="en-US" dirty="0"/>
-              <a:t>Age State (initialized at Nominal Age) </a:t>
-            </a:r>
-          </a:p>
-        </p:txBody>
-      </p:sp>
-      <p:sp>
-        <p:nvSpPr>
-          <p:cNvPr id="11" name="TextBox 10">
-            <a:extLst>
-              <a:ext uri="{FF2B5EF4-FFF2-40B4-BE49-F238E27FC236}">
-                <a16:creationId xmlns:a16="http://schemas.microsoft.com/office/drawing/2014/main" id="{B4D975C5-3B35-72BF-216E-795549C97391}"/>
-              </a:ext>
-            </a:extLst>
-          </p:cNvPr>
-          <p:cNvSpPr txBox="1"/>
-          <p:nvPr/>
-        </p:nvSpPr>
-        <p:spPr>
-          <a:xfrm>
-            <a:off x="3672796" y="2554853"/>
-            <a:ext cx="2287229" cy="369332"/>
-          </a:xfrm>
-          <a:prstGeom prst="rect">
-            <a:avLst/>
-          </a:prstGeom>
-          <a:noFill/>
-          <a:ln>
-            <a:solidFill>
-              <a:schemeClr val="tx1"/>
-            </a:solidFill>
-          </a:ln>
-        </p:spPr>
-        <p:txBody>
-          <a:bodyPr wrap="square" rtlCol="0">
-            <a:spAutoFit/>
-          </a:bodyPr>
-          <a:lstStyle/>
-          <a:p>
-            <a:r>
-              <a:rPr lang="en-US" dirty="0"/>
-              <a:t>HS Function </a:t>
             </a:r>
           </a:p>
         </p:txBody>
@@ -4091,127 +3852,6 @@
           </a:p>
         </p:txBody>
       </p:sp>
-      <p:sp>
-        <p:nvSpPr>
-          <p:cNvPr id="14" name="TextBox 13">
-            <a:extLst>
-              <a:ext uri="{FF2B5EF4-FFF2-40B4-BE49-F238E27FC236}">
-                <a16:creationId xmlns:a16="http://schemas.microsoft.com/office/drawing/2014/main" id="{6A57195E-9AFF-FC5B-80FE-854DD664B853}"/>
-              </a:ext>
-            </a:extLst>
-          </p:cNvPr>
-          <p:cNvSpPr txBox="1"/>
-          <p:nvPr/>
-        </p:nvSpPr>
-        <p:spPr>
-          <a:xfrm>
-            <a:off x="3672795" y="3909220"/>
-            <a:ext cx="2287229" cy="369332"/>
-          </a:xfrm>
-          <a:prstGeom prst="rect">
-            <a:avLst/>
-          </a:prstGeom>
-          <a:noFill/>
-          <a:ln>
-            <a:solidFill>
-              <a:schemeClr val="tx1"/>
-            </a:solidFill>
-          </a:ln>
-        </p:spPr>
-        <p:txBody>
-          <a:bodyPr wrap="square" rtlCol="0">
-            <a:spAutoFit/>
-          </a:bodyPr>
-          <a:lstStyle/>
-          <a:p>
-            <a:r>
-              <a:rPr lang="en-US" dirty="0"/>
-              <a:t>Impact Function </a:t>
-            </a:r>
-          </a:p>
-        </p:txBody>
-      </p:sp>
-      <p:sp>
-        <p:nvSpPr>
-          <p:cNvPr id="15" name="TextBox 14">
-            <a:extLst>
-              <a:ext uri="{FF2B5EF4-FFF2-40B4-BE49-F238E27FC236}">
-                <a16:creationId xmlns:a16="http://schemas.microsoft.com/office/drawing/2014/main" id="{5E2D9A51-D683-0600-99EE-8F3A0A35CDA7}"/>
-              </a:ext>
-            </a:extLst>
-          </p:cNvPr>
-          <p:cNvSpPr txBox="1"/>
-          <p:nvPr/>
-        </p:nvSpPr>
-        <p:spPr>
-          <a:xfrm>
-            <a:off x="6601054" y="3909220"/>
-            <a:ext cx="4404403" cy="369332"/>
-          </a:xfrm>
-          <a:prstGeom prst="rect">
-            <a:avLst/>
-          </a:prstGeom>
-          <a:noFill/>
-          <a:ln>
-            <a:solidFill>
-              <a:schemeClr val="tx1"/>
-            </a:solidFill>
-          </a:ln>
-        </p:spPr>
-        <p:txBody>
-          <a:bodyPr wrap="square" rtlCol="0">
-            <a:spAutoFit/>
-          </a:bodyPr>
-          <a:lstStyle/>
-          <a:p>
-            <a:r>
-              <a:rPr lang="en-US" dirty="0"/>
-              <a:t>Impact Based Damage </a:t>
-            </a:r>
-          </a:p>
-        </p:txBody>
-      </p:sp>
-      <p:sp>
-        <p:nvSpPr>
-          <p:cNvPr id="16" name="TextBox 15">
-            <a:extLst>
-              <a:ext uri="{FF2B5EF4-FFF2-40B4-BE49-F238E27FC236}">
-                <a16:creationId xmlns:a16="http://schemas.microsoft.com/office/drawing/2014/main" id="{84B53506-B028-D638-1B00-8CF1EC41D245}"/>
-              </a:ext>
-            </a:extLst>
-          </p:cNvPr>
-          <p:cNvSpPr txBox="1"/>
-          <p:nvPr/>
-        </p:nvSpPr>
-        <p:spPr>
-          <a:xfrm>
-            <a:off x="3672794" y="1633873"/>
-            <a:ext cx="7332663" cy="369332"/>
-          </a:xfrm>
-          <a:prstGeom prst="rect">
-            <a:avLst/>
-          </a:prstGeom>
-          <a:noFill/>
-          <a:ln>
-            <a:solidFill>
-              <a:schemeClr val="tx1"/>
-            </a:solidFill>
-          </a:ln>
-        </p:spPr>
-        <p:txBody>
-          <a:bodyPr wrap="square" rtlCol="0">
-            <a:spAutoFit/>
-          </a:bodyPr>
-          <a:lstStyle/>
-          <a:p>
-            <a:pPr algn="ctr"/>
-            <a:r>
-              <a:rPr lang="en-US" dirty="0"/>
-              <a:t>Functionality </a:t>
-            </a:r>
-          </a:p>
-        </p:txBody>
-      </p:sp>
       <p:cxnSp>
         <p:nvCxnSpPr>
           <p:cNvPr id="18" name="Straight Arrow Connector 17">
@@ -4222,15 +3862,16 @@
             </a:extLst>
           </p:cNvPr>
           <p:cNvCxnSpPr>
-            <a:stCxn id="6" idx="3"/>
-            <a:endCxn id="11" idx="1"/>
+            <a:cxnSpLocks/>
+            <a:stCxn id="33" idx="6"/>
+            <a:endCxn id="40" idx="2"/>
           </p:cNvCxnSpPr>
           <p:nvPr/>
         </p:nvCxnSpPr>
         <p:spPr>
-          <a:xfrm>
-            <a:off x="2733543" y="2739519"/>
-            <a:ext cx="939253" cy="0"/>
+          <a:xfrm flipV="1">
+            <a:off x="5136925" y="2065241"/>
+            <a:ext cx="1095051" cy="4808"/>
           </a:xfrm>
           <a:prstGeom prst="straightConnector1">
             <a:avLst/>
@@ -4241,523 +3882,19 @@
         </p:spPr>
         <p:style>
           <a:lnRef idx="2">
-            <a:schemeClr val="accent1"/>
+            <a:schemeClr val="dk1"/>
           </a:lnRef>
           <a:fillRef idx="0">
-            <a:schemeClr val="accent1"/>
+            <a:schemeClr val="dk1"/>
           </a:fillRef>
           <a:effectRef idx="1">
-            <a:schemeClr val="accent1"/>
+            <a:schemeClr val="dk1"/>
           </a:effectRef>
           <a:fontRef idx="minor">
             <a:schemeClr val="tx1"/>
           </a:fontRef>
         </p:style>
       </p:cxnSp>
-      <p:cxnSp>
-        <p:nvCxnSpPr>
-          <p:cNvPr id="19" name="Straight Arrow Connector 18">
-            <a:extLst>
-              <a:ext uri="{FF2B5EF4-FFF2-40B4-BE49-F238E27FC236}">
-                <a16:creationId xmlns:a16="http://schemas.microsoft.com/office/drawing/2014/main" id="{9984A899-B0CF-F9C9-9CE4-D1F0444DB8B3}"/>
-              </a:ext>
-            </a:extLst>
-          </p:cNvPr>
-          <p:cNvCxnSpPr>
-            <a:cxnSpLocks/>
-            <a:stCxn id="7" idx="3"/>
-            <a:endCxn id="9" idx="1"/>
-          </p:cNvCxnSpPr>
-          <p:nvPr/>
-        </p:nvCxnSpPr>
-        <p:spPr>
-          <a:xfrm>
-            <a:off x="2733543" y="3411143"/>
-            <a:ext cx="939254" cy="0"/>
-          </a:xfrm>
-          <a:prstGeom prst="straightConnector1">
-            <a:avLst/>
-          </a:prstGeom>
-          <a:ln>
-            <a:tailEnd type="triangle"/>
-          </a:ln>
-        </p:spPr>
-        <p:style>
-          <a:lnRef idx="2">
-            <a:schemeClr val="accent1"/>
-          </a:lnRef>
-          <a:fillRef idx="0">
-            <a:schemeClr val="accent1"/>
-          </a:fillRef>
-          <a:effectRef idx="1">
-            <a:schemeClr val="accent1"/>
-          </a:effectRef>
-          <a:fontRef idx="minor">
-            <a:schemeClr val="tx1"/>
-          </a:fontRef>
-        </p:style>
-      </p:cxnSp>
-      <p:cxnSp>
-        <p:nvCxnSpPr>
-          <p:cNvPr id="20" name="Straight Arrow Connector 19">
-            <a:extLst>
-              <a:ext uri="{FF2B5EF4-FFF2-40B4-BE49-F238E27FC236}">
-                <a16:creationId xmlns:a16="http://schemas.microsoft.com/office/drawing/2014/main" id="{272D5CD8-AABE-7BBE-5D3B-CD0E674472DF}"/>
-              </a:ext>
-            </a:extLst>
-          </p:cNvPr>
-          <p:cNvCxnSpPr/>
-          <p:nvPr/>
-        </p:nvCxnSpPr>
-        <p:spPr>
-          <a:xfrm>
-            <a:off x="2733541" y="4103914"/>
-            <a:ext cx="939253" cy="0"/>
-          </a:xfrm>
-          <a:prstGeom prst="straightConnector1">
-            <a:avLst/>
-          </a:prstGeom>
-          <a:ln>
-            <a:tailEnd type="triangle"/>
-          </a:ln>
-        </p:spPr>
-        <p:style>
-          <a:lnRef idx="2">
-            <a:schemeClr val="accent1"/>
-          </a:lnRef>
-          <a:fillRef idx="0">
-            <a:schemeClr val="accent1"/>
-          </a:fillRef>
-          <a:effectRef idx="1">
-            <a:schemeClr val="accent1"/>
-          </a:effectRef>
-          <a:fontRef idx="minor">
-            <a:schemeClr val="tx1"/>
-          </a:fontRef>
-        </p:style>
-      </p:cxnSp>
-      <p:cxnSp>
-        <p:nvCxnSpPr>
-          <p:cNvPr id="21" name="Straight Arrow Connector 20">
-            <a:extLst>
-              <a:ext uri="{FF2B5EF4-FFF2-40B4-BE49-F238E27FC236}">
-                <a16:creationId xmlns:a16="http://schemas.microsoft.com/office/drawing/2014/main" id="{1F008D47-F883-3026-E4A8-E7F37F23A3C8}"/>
-              </a:ext>
-            </a:extLst>
-          </p:cNvPr>
-          <p:cNvCxnSpPr>
-            <a:cxnSpLocks/>
-            <a:endCxn id="15" idx="1"/>
-          </p:cNvCxnSpPr>
-          <p:nvPr/>
-        </p:nvCxnSpPr>
-        <p:spPr>
-          <a:xfrm>
-            <a:off x="5960024" y="4082142"/>
-            <a:ext cx="641030" cy="11744"/>
-          </a:xfrm>
-          <a:prstGeom prst="straightConnector1">
-            <a:avLst/>
-          </a:prstGeom>
-          <a:ln>
-            <a:tailEnd type="triangle"/>
-          </a:ln>
-        </p:spPr>
-        <p:style>
-          <a:lnRef idx="2">
-            <a:schemeClr val="accent1"/>
-          </a:lnRef>
-          <a:fillRef idx="0">
-            <a:schemeClr val="accent1"/>
-          </a:fillRef>
-          <a:effectRef idx="1">
-            <a:schemeClr val="accent1"/>
-          </a:effectRef>
-          <a:fontRef idx="minor">
-            <a:schemeClr val="tx1"/>
-          </a:fontRef>
-        </p:style>
-      </p:cxnSp>
-      <p:cxnSp>
-        <p:nvCxnSpPr>
-          <p:cNvPr id="23" name="Straight Arrow Connector 22">
-            <a:extLst>
-              <a:ext uri="{FF2B5EF4-FFF2-40B4-BE49-F238E27FC236}">
-                <a16:creationId xmlns:a16="http://schemas.microsoft.com/office/drawing/2014/main" id="{CC4C9949-8F88-709F-617C-C97DE8874557}"/>
-              </a:ext>
-            </a:extLst>
-          </p:cNvPr>
-          <p:cNvCxnSpPr>
-            <a:cxnSpLocks/>
-          </p:cNvCxnSpPr>
-          <p:nvPr/>
-        </p:nvCxnSpPr>
-        <p:spPr>
-          <a:xfrm>
-            <a:off x="5960024" y="3417256"/>
-            <a:ext cx="641030" cy="11744"/>
-          </a:xfrm>
-          <a:prstGeom prst="straightConnector1">
-            <a:avLst/>
-          </a:prstGeom>
-          <a:ln>
-            <a:tailEnd type="triangle"/>
-          </a:ln>
-        </p:spPr>
-        <p:style>
-          <a:lnRef idx="2">
-            <a:schemeClr val="accent1"/>
-          </a:lnRef>
-          <a:fillRef idx="0">
-            <a:schemeClr val="accent1"/>
-          </a:fillRef>
-          <a:effectRef idx="1">
-            <a:schemeClr val="accent1"/>
-          </a:effectRef>
-          <a:fontRef idx="minor">
-            <a:schemeClr val="tx1"/>
-          </a:fontRef>
-        </p:style>
-      </p:cxnSp>
-      <p:cxnSp>
-        <p:nvCxnSpPr>
-          <p:cNvPr id="24" name="Straight Arrow Connector 23">
-            <a:extLst>
-              <a:ext uri="{FF2B5EF4-FFF2-40B4-BE49-F238E27FC236}">
-                <a16:creationId xmlns:a16="http://schemas.microsoft.com/office/drawing/2014/main" id="{53DB56ED-CDB8-ED1E-0411-A5138EF7F9E9}"/>
-              </a:ext>
-            </a:extLst>
-          </p:cNvPr>
-          <p:cNvCxnSpPr>
-            <a:cxnSpLocks/>
-          </p:cNvCxnSpPr>
-          <p:nvPr/>
-        </p:nvCxnSpPr>
-        <p:spPr>
-          <a:xfrm>
-            <a:off x="5960024" y="2733497"/>
-            <a:ext cx="641030" cy="11744"/>
-          </a:xfrm>
-          <a:prstGeom prst="straightConnector1">
-            <a:avLst/>
-          </a:prstGeom>
-          <a:ln>
-            <a:tailEnd type="triangle"/>
-          </a:ln>
-        </p:spPr>
-        <p:style>
-          <a:lnRef idx="2">
-            <a:schemeClr val="accent1"/>
-          </a:lnRef>
-          <a:fillRef idx="0">
-            <a:schemeClr val="accent1"/>
-          </a:fillRef>
-          <a:effectRef idx="1">
-            <a:schemeClr val="accent1"/>
-          </a:effectRef>
-          <a:fontRef idx="minor">
-            <a:schemeClr val="tx1"/>
-          </a:fontRef>
-        </p:style>
-      </p:cxnSp>
-      <p:sp>
-        <p:nvSpPr>
-          <p:cNvPr id="29" name="TextBox 28">
-            <a:extLst>
-              <a:ext uri="{FF2B5EF4-FFF2-40B4-BE49-F238E27FC236}">
-                <a16:creationId xmlns:a16="http://schemas.microsoft.com/office/drawing/2014/main" id="{1CDB0CC3-3C2A-4828-D1C7-30C4A11C4FD1}"/>
-              </a:ext>
-            </a:extLst>
-          </p:cNvPr>
-          <p:cNvSpPr txBox="1"/>
-          <p:nvPr/>
-        </p:nvSpPr>
-        <p:spPr>
-          <a:xfrm>
-            <a:off x="2797446" y="4967407"/>
-            <a:ext cx="811441" cy="369332"/>
-          </a:xfrm>
-          <a:prstGeom prst="rect">
-            <a:avLst/>
-          </a:prstGeom>
-          <a:noFill/>
-          <a:ln>
-            <a:solidFill>
-              <a:schemeClr val="tx1"/>
-            </a:solidFill>
-          </a:ln>
-        </p:spPr>
-        <p:txBody>
-          <a:bodyPr wrap="none" rtlCol="0">
-            <a:spAutoFit/>
-          </a:bodyPr>
-          <a:lstStyle/>
-          <a:p>
-            <a:r>
-              <a:rPr lang="en-US" dirty="0"/>
-              <a:t>Clock </a:t>
-            </a:r>
-          </a:p>
-        </p:txBody>
-      </p:sp>
-      <p:cxnSp>
-        <p:nvCxnSpPr>
-          <p:cNvPr id="31" name="Elbow Connector 30">
-            <a:extLst>
-              <a:ext uri="{FF2B5EF4-FFF2-40B4-BE49-F238E27FC236}">
-                <a16:creationId xmlns:a16="http://schemas.microsoft.com/office/drawing/2014/main" id="{A50721FA-0451-DC4D-13EA-F1AF6A233DF5}"/>
-              </a:ext>
-            </a:extLst>
-          </p:cNvPr>
-          <p:cNvCxnSpPr>
-            <a:stCxn id="29" idx="0"/>
-            <a:endCxn id="11" idx="1"/>
-          </p:cNvCxnSpPr>
-          <p:nvPr/>
-        </p:nvCxnSpPr>
-        <p:spPr>
-          <a:xfrm rot="5400000" flipH="1" flipV="1">
-            <a:off x="2324037" y="3618649"/>
-            <a:ext cx="2227888" cy="469629"/>
-          </a:xfrm>
-          <a:prstGeom prst="bentConnector2">
-            <a:avLst/>
-          </a:prstGeom>
-          <a:ln>
-            <a:tailEnd type="triangle"/>
-          </a:ln>
-        </p:spPr>
-        <p:style>
-          <a:lnRef idx="1">
-            <a:schemeClr val="accent6"/>
-          </a:lnRef>
-          <a:fillRef idx="0">
-            <a:schemeClr val="accent6"/>
-          </a:fillRef>
-          <a:effectRef idx="0">
-            <a:schemeClr val="accent6"/>
-          </a:effectRef>
-          <a:fontRef idx="minor">
-            <a:schemeClr val="tx1"/>
-          </a:fontRef>
-        </p:style>
-      </p:cxnSp>
-      <p:cxnSp>
-        <p:nvCxnSpPr>
-          <p:cNvPr id="32" name="Elbow Connector 31">
-            <a:extLst>
-              <a:ext uri="{FF2B5EF4-FFF2-40B4-BE49-F238E27FC236}">
-                <a16:creationId xmlns:a16="http://schemas.microsoft.com/office/drawing/2014/main" id="{6E58E938-A244-7AAD-B40B-DE2EE0BAB21A}"/>
-              </a:ext>
-            </a:extLst>
-          </p:cNvPr>
-          <p:cNvCxnSpPr>
-            <a:cxnSpLocks/>
-            <a:stCxn id="29" idx="0"/>
-            <a:endCxn id="9" idx="1"/>
-          </p:cNvCxnSpPr>
-          <p:nvPr/>
-        </p:nvCxnSpPr>
-        <p:spPr>
-          <a:xfrm rot="5400000" flipH="1" flipV="1">
-            <a:off x="2659850" y="3954460"/>
-            <a:ext cx="1556264" cy="469630"/>
-          </a:xfrm>
-          <a:prstGeom prst="bentConnector2">
-            <a:avLst/>
-          </a:prstGeom>
-          <a:ln>
-            <a:tailEnd type="triangle"/>
-          </a:ln>
-        </p:spPr>
-        <p:style>
-          <a:lnRef idx="1">
-            <a:schemeClr val="accent6"/>
-          </a:lnRef>
-          <a:fillRef idx="0">
-            <a:schemeClr val="accent6"/>
-          </a:fillRef>
-          <a:effectRef idx="0">
-            <a:schemeClr val="accent6"/>
-          </a:effectRef>
-          <a:fontRef idx="minor">
-            <a:schemeClr val="tx1"/>
-          </a:fontRef>
-        </p:style>
-      </p:cxnSp>
-      <p:cxnSp>
-        <p:nvCxnSpPr>
-          <p:cNvPr id="39" name="Elbow Connector 38">
-            <a:extLst>
-              <a:ext uri="{FF2B5EF4-FFF2-40B4-BE49-F238E27FC236}">
-                <a16:creationId xmlns:a16="http://schemas.microsoft.com/office/drawing/2014/main" id="{7ECEA970-DFFF-A90E-DA9A-52EB82AC603C}"/>
-              </a:ext>
-            </a:extLst>
-          </p:cNvPr>
-          <p:cNvCxnSpPr>
-            <a:stCxn id="13" idx="3"/>
-            <a:endCxn id="15" idx="3"/>
-          </p:cNvCxnSpPr>
-          <p:nvPr/>
-        </p:nvCxnSpPr>
-        <p:spPr>
-          <a:xfrm>
-            <a:off x="11005457" y="2739519"/>
-            <a:ext cx="12700" cy="1354367"/>
-          </a:xfrm>
-          <a:prstGeom prst="bentConnector3">
-            <a:avLst>
-              <a:gd name="adj1" fmla="val 1800000"/>
-            </a:avLst>
-          </a:prstGeom>
-          <a:ln>
-            <a:headEnd type="triangle"/>
-            <a:tailEnd type="triangle"/>
-          </a:ln>
-        </p:spPr>
-        <p:style>
-          <a:lnRef idx="2">
-            <a:schemeClr val="accent1"/>
-          </a:lnRef>
-          <a:fillRef idx="0">
-            <a:schemeClr val="accent1"/>
-          </a:fillRef>
-          <a:effectRef idx="1">
-            <a:schemeClr val="accent1"/>
-          </a:effectRef>
-          <a:fontRef idx="minor">
-            <a:schemeClr val="tx1"/>
-          </a:fontRef>
-        </p:style>
-      </p:cxnSp>
-      <p:cxnSp>
-        <p:nvCxnSpPr>
-          <p:cNvPr id="41" name="Elbow Connector 40">
-            <a:extLst>
-              <a:ext uri="{FF2B5EF4-FFF2-40B4-BE49-F238E27FC236}">
-                <a16:creationId xmlns:a16="http://schemas.microsoft.com/office/drawing/2014/main" id="{2DE66A6B-529A-A998-A887-B2FE92C9989F}"/>
-              </a:ext>
-            </a:extLst>
-          </p:cNvPr>
-          <p:cNvCxnSpPr>
-            <a:stCxn id="13" idx="0"/>
-            <a:endCxn id="16" idx="2"/>
-          </p:cNvCxnSpPr>
-          <p:nvPr/>
-        </p:nvCxnSpPr>
-        <p:spPr>
-          <a:xfrm rot="16200000" flipV="1">
-            <a:off x="7795367" y="1546964"/>
-            <a:ext cx="551648" cy="1464130"/>
-          </a:xfrm>
-          <a:prstGeom prst="bentConnector3">
-            <a:avLst/>
-          </a:prstGeom>
-          <a:ln>
-            <a:tailEnd type="triangle"/>
-          </a:ln>
-        </p:spPr>
-        <p:style>
-          <a:lnRef idx="2">
-            <a:schemeClr val="accent1"/>
-          </a:lnRef>
-          <a:fillRef idx="0">
-            <a:schemeClr val="accent1"/>
-          </a:fillRef>
-          <a:effectRef idx="1">
-            <a:schemeClr val="accent1"/>
-          </a:effectRef>
-          <a:fontRef idx="minor">
-            <a:schemeClr val="tx1"/>
-          </a:fontRef>
-        </p:style>
-      </p:cxnSp>
-      <p:cxnSp>
-        <p:nvCxnSpPr>
-          <p:cNvPr id="43" name="Elbow Connector 42">
-            <a:extLst>
-              <a:ext uri="{FF2B5EF4-FFF2-40B4-BE49-F238E27FC236}">
-                <a16:creationId xmlns:a16="http://schemas.microsoft.com/office/drawing/2014/main" id="{D2E1AED2-074F-B2F2-625F-84CD2DCB9445}"/>
-              </a:ext>
-            </a:extLst>
-          </p:cNvPr>
-          <p:cNvCxnSpPr>
-            <a:stCxn id="10" idx="0"/>
-            <a:endCxn id="16" idx="2"/>
-          </p:cNvCxnSpPr>
-          <p:nvPr/>
-        </p:nvCxnSpPr>
-        <p:spPr>
-          <a:xfrm rot="16200000" flipV="1">
-            <a:off x="7459555" y="1882776"/>
-            <a:ext cx="1223272" cy="1464130"/>
-          </a:xfrm>
-          <a:prstGeom prst="bentConnector3">
-            <a:avLst>
-              <a:gd name="adj1" fmla="val 9955"/>
-            </a:avLst>
-          </a:prstGeom>
-          <a:ln>
-            <a:tailEnd type="triangle"/>
-          </a:ln>
-        </p:spPr>
-        <p:style>
-          <a:lnRef idx="2">
-            <a:schemeClr val="accent1"/>
-          </a:lnRef>
-          <a:fillRef idx="0">
-            <a:schemeClr val="accent1"/>
-          </a:fillRef>
-          <a:effectRef idx="1">
-            <a:schemeClr val="accent1"/>
-          </a:effectRef>
-          <a:fontRef idx="minor">
-            <a:schemeClr val="tx1"/>
-          </a:fontRef>
-        </p:style>
-      </p:cxnSp>
-      <p:sp>
-        <p:nvSpPr>
-          <p:cNvPr id="13" name="TextBox 12">
-            <a:extLst>
-              <a:ext uri="{FF2B5EF4-FFF2-40B4-BE49-F238E27FC236}">
-                <a16:creationId xmlns:a16="http://schemas.microsoft.com/office/drawing/2014/main" id="{1EB4CD91-45B4-C343-DB3D-FD2AE75C248E}"/>
-              </a:ext>
-            </a:extLst>
-          </p:cNvPr>
-          <p:cNvSpPr txBox="1"/>
-          <p:nvPr/>
-        </p:nvSpPr>
-        <p:spPr>
-          <a:xfrm>
-            <a:off x="6601054" y="2554853"/>
-            <a:ext cx="4404403" cy="369332"/>
-          </a:xfrm>
-          <a:prstGeom prst="rect">
-            <a:avLst/>
-          </a:prstGeom>
-          <a:solidFill>
-            <a:schemeClr val="bg1"/>
-          </a:solidFill>
-          <a:ln>
-            <a:solidFill>
-              <a:schemeClr val="tx1"/>
-            </a:solidFill>
-          </a:ln>
-        </p:spPr>
-        <p:txBody>
-          <a:bodyPr wrap="square" rtlCol="0">
-            <a:spAutoFit/>
-          </a:bodyPr>
-          <a:lstStyle/>
-          <a:p>
-            <a:r>
-              <a:rPr lang="en-US" dirty="0"/>
-              <a:t>HS Function (initialized at Nominal Health) </a:t>
-            </a:r>
-          </a:p>
-        </p:txBody>
-      </p:sp>
       <p:sp>
         <p:nvSpPr>
           <p:cNvPr id="2" name="TextBox 1">
@@ -4793,6 +3930,1517 @@
           </a:p>
         </p:txBody>
       </p:sp>
+      <mc:AlternateContent xmlns:mc="http://schemas.openxmlformats.org/markup-compatibility/2006">
+        <mc:Choice xmlns:a14="http://schemas.microsoft.com/office/drawing/2010/main" Requires="a14">
+          <p:sp>
+            <p:nvSpPr>
+              <p:cNvPr id="33" name="Oval 32">
+                <a:extLst>
+                  <a:ext uri="{FF2B5EF4-FFF2-40B4-BE49-F238E27FC236}">
+                    <a16:creationId xmlns:a16="http://schemas.microsoft.com/office/drawing/2014/main" id="{9D6FD13B-FC47-6D7B-4AD0-600A6DFF6402}"/>
+                  </a:ext>
+                </a:extLst>
+              </p:cNvPr>
+              <p:cNvSpPr/>
+              <p:nvPr/>
+            </p:nvSpPr>
+            <p:spPr>
+              <a:xfrm>
+                <a:off x="3661911" y="1332542"/>
+                <a:ext cx="1475014" cy="1475014"/>
+              </a:xfrm>
+              <a:prstGeom prst="ellipse">
+                <a:avLst/>
+              </a:prstGeom>
+              <a:solidFill>
+                <a:srgbClr val="FFC000"/>
+              </a:solidFill>
+            </p:spPr>
+            <p:style>
+              <a:lnRef idx="1">
+                <a:schemeClr val="dk1"/>
+              </a:lnRef>
+              <a:fillRef idx="2">
+                <a:schemeClr val="dk1"/>
+              </a:fillRef>
+              <a:effectRef idx="1">
+                <a:schemeClr val="dk1"/>
+              </a:effectRef>
+              <a:fontRef idx="minor">
+                <a:schemeClr val="dk1"/>
+              </a:fontRef>
+            </p:style>
+            <p:txBody>
+              <a:bodyPr rtlCol="0" anchor="ctr"/>
+              <a:lstStyle/>
+              <a:p>
+                <a:pPr algn="ctr"/>
+                <a14:m>
+                  <m:oMathPara xmlns:m="http://schemas.openxmlformats.org/officeDocument/2006/math">
+                    <m:oMathParaPr>
+                      <m:jc m:val="centerGroup"/>
+                    </m:oMathParaPr>
+                    <m:oMath xmlns:m="http://schemas.openxmlformats.org/officeDocument/2006/math">
+                      <m:sSub>
+                        <m:sSubPr>
+                          <m:ctrlPr>
+                            <a:rPr lang="en-US" i="1" smtClean="0">
+                              <a:latin typeface="Cambria Math" panose="02040503050406030204" pitchFamily="18" charset="0"/>
+                            </a:rPr>
+                          </m:ctrlPr>
+                        </m:sSubPr>
+                        <m:e>
+                          <m:r>
+                            <a:rPr lang="en-US" i="1">
+                              <a:latin typeface="Cambria Math" panose="02040503050406030204" pitchFamily="18" charset="0"/>
+                            </a:rPr>
+                            <m:t>𝑟</m:t>
+                          </m:r>
+                        </m:e>
+                        <m:sub>
+                          <m:r>
+                            <a:rPr lang="en-US" b="0" i="1" smtClean="0">
+                              <a:latin typeface="Cambria Math" panose="02040503050406030204" pitchFamily="18" charset="0"/>
+                            </a:rPr>
+                            <m:t>𝑑𝑎𝑚𝑎𝑔𝑒</m:t>
+                          </m:r>
+                        </m:sub>
+                      </m:sSub>
+                    </m:oMath>
+                  </m:oMathPara>
+                </a14:m>
+                <a:endParaRPr lang="en-US" dirty="0"/>
+              </a:p>
+            </p:txBody>
+          </p:sp>
+        </mc:Choice>
+        <mc:Fallback>
+          <p:sp>
+            <p:nvSpPr>
+              <p:cNvPr id="33" name="Oval 32">
+                <a:extLst>
+                  <a:ext uri="{FF2B5EF4-FFF2-40B4-BE49-F238E27FC236}">
+                    <a16:creationId xmlns:a16="http://schemas.microsoft.com/office/drawing/2014/main" id="{9D6FD13B-FC47-6D7B-4AD0-600A6DFF6402}"/>
+                  </a:ext>
+                </a:extLst>
+              </p:cNvPr>
+              <p:cNvSpPr>
+                <a:spLocks noRot="1" noChangeAspect="1" noMove="1" noResize="1" noEditPoints="1" noAdjustHandles="1" noChangeArrowheads="1" noChangeShapeType="1" noTextEdit="1"/>
+              </p:cNvSpPr>
+              <p:nvPr/>
+            </p:nvSpPr>
+            <p:spPr>
+              <a:xfrm>
+                <a:off x="3661911" y="1332542"/>
+                <a:ext cx="1475014" cy="1475014"/>
+              </a:xfrm>
+              <a:prstGeom prst="ellipse">
+                <a:avLst/>
+              </a:prstGeom>
+              <a:blipFill>
+                <a:blip r:embed="rId2"/>
+                <a:stretch>
+                  <a:fillRect/>
+                </a:stretch>
+              </a:blipFill>
+            </p:spPr>
+            <p:txBody>
+              <a:bodyPr/>
+              <a:lstStyle/>
+              <a:p>
+                <a:r>
+                  <a:rPr lang="en-US">
+                    <a:noFill/>
+                  </a:rPr>
+                  <a:t> </a:t>
+                </a:r>
+              </a:p>
+            </p:txBody>
+          </p:sp>
+        </mc:Fallback>
+      </mc:AlternateContent>
+      <mc:AlternateContent xmlns:mc="http://schemas.openxmlformats.org/markup-compatibility/2006">
+        <mc:Choice xmlns:a14="http://schemas.microsoft.com/office/drawing/2010/main" Requires="a14">
+          <p:sp>
+            <p:nvSpPr>
+              <p:cNvPr id="34" name="Oval 33">
+                <a:extLst>
+                  <a:ext uri="{FF2B5EF4-FFF2-40B4-BE49-F238E27FC236}">
+                    <a16:creationId xmlns:a16="http://schemas.microsoft.com/office/drawing/2014/main" id="{AC6AECF2-6EFA-203A-EA5C-062499A9EB6E}"/>
+                  </a:ext>
+                </a:extLst>
+              </p:cNvPr>
+              <p:cNvSpPr/>
+              <p:nvPr/>
+            </p:nvSpPr>
+            <p:spPr>
+              <a:xfrm>
+                <a:off x="3660096" y="2952983"/>
+                <a:ext cx="1475014" cy="1475014"/>
+              </a:xfrm>
+              <a:prstGeom prst="ellipse">
+                <a:avLst/>
+              </a:prstGeom>
+              <a:solidFill>
+                <a:srgbClr val="FFC000"/>
+              </a:solidFill>
+            </p:spPr>
+            <p:style>
+              <a:lnRef idx="1">
+                <a:schemeClr val="dk1"/>
+              </a:lnRef>
+              <a:fillRef idx="2">
+                <a:schemeClr val="dk1"/>
+              </a:fillRef>
+              <a:effectRef idx="1">
+                <a:schemeClr val="dk1"/>
+              </a:effectRef>
+              <a:fontRef idx="minor">
+                <a:schemeClr val="dk1"/>
+              </a:fontRef>
+            </p:style>
+            <p:txBody>
+              <a:bodyPr rtlCol="0" anchor="ctr"/>
+              <a:lstStyle/>
+              <a:p>
+                <a:pPr algn="ctr"/>
+                <a14:m>
+                  <m:oMathPara xmlns:m="http://schemas.openxmlformats.org/officeDocument/2006/math">
+                    <m:oMathParaPr>
+                      <m:jc m:val="centerGroup"/>
+                    </m:oMathParaPr>
+                    <m:oMath xmlns:m="http://schemas.openxmlformats.org/officeDocument/2006/math">
+                      <m:sSub>
+                        <m:sSubPr>
+                          <m:ctrlPr>
+                            <a:rPr lang="en-US" b="0" i="1" smtClean="0">
+                              <a:latin typeface="Cambria Math" panose="02040503050406030204" pitchFamily="18" charset="0"/>
+                            </a:rPr>
+                          </m:ctrlPr>
+                        </m:sSubPr>
+                        <m:e>
+                          <m:r>
+                            <a:rPr lang="en-US" b="0" i="1" smtClean="0">
+                              <a:latin typeface="Cambria Math" panose="02040503050406030204" pitchFamily="18" charset="0"/>
+                            </a:rPr>
+                            <m:t>𝑟</m:t>
+                          </m:r>
+                        </m:e>
+                        <m:sub>
+                          <m:r>
+                            <a:rPr lang="en-US" b="0" i="1" smtClean="0">
+                              <a:latin typeface="Cambria Math" panose="02040503050406030204" pitchFamily="18" charset="0"/>
+                            </a:rPr>
+                            <m:t>𝑎𝑔𝑒</m:t>
+                          </m:r>
+                        </m:sub>
+                      </m:sSub>
+                    </m:oMath>
+                  </m:oMathPara>
+                </a14:m>
+                <a:endParaRPr lang="en-US" dirty="0"/>
+              </a:p>
+            </p:txBody>
+          </p:sp>
+        </mc:Choice>
+        <mc:Fallback>
+          <p:sp>
+            <p:nvSpPr>
+              <p:cNvPr id="34" name="Oval 33">
+                <a:extLst>
+                  <a:ext uri="{FF2B5EF4-FFF2-40B4-BE49-F238E27FC236}">
+                    <a16:creationId xmlns:a16="http://schemas.microsoft.com/office/drawing/2014/main" id="{AC6AECF2-6EFA-203A-EA5C-062499A9EB6E}"/>
+                  </a:ext>
+                </a:extLst>
+              </p:cNvPr>
+              <p:cNvSpPr>
+                <a:spLocks noRot="1" noChangeAspect="1" noMove="1" noResize="1" noEditPoints="1" noAdjustHandles="1" noChangeArrowheads="1" noChangeShapeType="1" noTextEdit="1"/>
+              </p:cNvSpPr>
+              <p:nvPr/>
+            </p:nvSpPr>
+            <p:spPr>
+              <a:xfrm>
+                <a:off x="3660096" y="2952983"/>
+                <a:ext cx="1475014" cy="1475014"/>
+              </a:xfrm>
+              <a:prstGeom prst="ellipse">
+                <a:avLst/>
+              </a:prstGeom>
+              <a:blipFill>
+                <a:blip r:embed="rId3"/>
+                <a:stretch>
+                  <a:fillRect/>
+                </a:stretch>
+              </a:blipFill>
+            </p:spPr>
+            <p:txBody>
+              <a:bodyPr/>
+              <a:lstStyle/>
+              <a:p>
+                <a:r>
+                  <a:rPr lang="en-US">
+                    <a:noFill/>
+                  </a:rPr>
+                  <a:t> </a:t>
+                </a:r>
+              </a:p>
+            </p:txBody>
+          </p:sp>
+        </mc:Fallback>
+      </mc:AlternateContent>
+      <mc:AlternateContent xmlns:mc="http://schemas.openxmlformats.org/markup-compatibility/2006">
+        <mc:Choice xmlns:a14="http://schemas.microsoft.com/office/drawing/2010/main" Requires="a14">
+          <p:sp>
+            <p:nvSpPr>
+              <p:cNvPr id="35" name="Oval 34">
+                <a:extLst>
+                  <a:ext uri="{FF2B5EF4-FFF2-40B4-BE49-F238E27FC236}">
+                    <a16:creationId xmlns:a16="http://schemas.microsoft.com/office/drawing/2014/main" id="{62D5FAC4-F7FC-A625-8990-C94A76190128}"/>
+                  </a:ext>
+                </a:extLst>
+              </p:cNvPr>
+              <p:cNvSpPr/>
+              <p:nvPr/>
+            </p:nvSpPr>
+            <p:spPr>
+              <a:xfrm>
+                <a:off x="3659869" y="4636066"/>
+                <a:ext cx="1475014" cy="1475014"/>
+              </a:xfrm>
+              <a:prstGeom prst="ellipse">
+                <a:avLst/>
+              </a:prstGeom>
+              <a:solidFill>
+                <a:srgbClr val="FFC000"/>
+              </a:solidFill>
+            </p:spPr>
+            <p:style>
+              <a:lnRef idx="1">
+                <a:schemeClr val="dk1"/>
+              </a:lnRef>
+              <a:fillRef idx="2">
+                <a:schemeClr val="dk1"/>
+              </a:fillRef>
+              <a:effectRef idx="1">
+                <a:schemeClr val="dk1"/>
+              </a:effectRef>
+              <a:fontRef idx="minor">
+                <a:schemeClr val="dk1"/>
+              </a:fontRef>
+            </p:style>
+            <p:txBody>
+              <a:bodyPr rtlCol="0" anchor="ctr"/>
+              <a:lstStyle/>
+              <a:p>
+                <a:pPr algn="ctr"/>
+                <a14:m>
+                  <m:oMathPara xmlns:m="http://schemas.openxmlformats.org/officeDocument/2006/math">
+                    <m:oMathParaPr>
+                      <m:jc m:val="centerGroup"/>
+                    </m:oMathParaPr>
+                    <m:oMath xmlns:m="http://schemas.openxmlformats.org/officeDocument/2006/math">
+                      <m:sSub>
+                        <m:sSubPr>
+                          <m:ctrlPr>
+                            <a:rPr lang="en-US" b="0" i="1" smtClean="0">
+                              <a:latin typeface="Cambria Math" panose="02040503050406030204" pitchFamily="18" charset="0"/>
+                            </a:rPr>
+                          </m:ctrlPr>
+                        </m:sSubPr>
+                        <m:e>
+                          <m:r>
+                            <a:rPr lang="en-US" b="0" i="1" smtClean="0">
+                              <a:latin typeface="Cambria Math" panose="02040503050406030204" pitchFamily="18" charset="0"/>
+                            </a:rPr>
+                            <m:t>𝐸</m:t>
+                          </m:r>
+                        </m:e>
+                        <m:sub>
+                          <m:r>
+                            <a:rPr lang="en-US" b="0" i="1" smtClean="0">
+                              <a:latin typeface="Cambria Math" panose="02040503050406030204" pitchFamily="18" charset="0"/>
+                            </a:rPr>
+                            <m:t>𝑑</m:t>
+                          </m:r>
+                        </m:sub>
+                      </m:sSub>
+                    </m:oMath>
+                  </m:oMathPara>
+                </a14:m>
+                <a:endParaRPr lang="en-US" dirty="0"/>
+              </a:p>
+            </p:txBody>
+          </p:sp>
+        </mc:Choice>
+        <mc:Fallback>
+          <p:sp>
+            <p:nvSpPr>
+              <p:cNvPr id="35" name="Oval 34">
+                <a:extLst>
+                  <a:ext uri="{FF2B5EF4-FFF2-40B4-BE49-F238E27FC236}">
+                    <a16:creationId xmlns:a16="http://schemas.microsoft.com/office/drawing/2014/main" id="{62D5FAC4-F7FC-A625-8990-C94A76190128}"/>
+                  </a:ext>
+                </a:extLst>
+              </p:cNvPr>
+              <p:cNvSpPr>
+                <a:spLocks noRot="1" noChangeAspect="1" noMove="1" noResize="1" noEditPoints="1" noAdjustHandles="1" noChangeArrowheads="1" noChangeShapeType="1" noTextEdit="1"/>
+              </p:cNvSpPr>
+              <p:nvPr/>
+            </p:nvSpPr>
+            <p:spPr>
+              <a:xfrm>
+                <a:off x="3659869" y="4636066"/>
+                <a:ext cx="1475014" cy="1475014"/>
+              </a:xfrm>
+              <a:prstGeom prst="ellipse">
+                <a:avLst/>
+              </a:prstGeom>
+              <a:blipFill>
+                <a:blip r:embed="rId4"/>
+                <a:stretch>
+                  <a:fillRect/>
+                </a:stretch>
+              </a:blipFill>
+            </p:spPr>
+            <p:txBody>
+              <a:bodyPr/>
+              <a:lstStyle/>
+              <a:p>
+                <a:r>
+                  <a:rPr lang="en-US">
+                    <a:noFill/>
+                  </a:rPr>
+                  <a:t> </a:t>
+                </a:r>
+              </a:p>
+            </p:txBody>
+          </p:sp>
+        </mc:Fallback>
+      </mc:AlternateContent>
+      <mc:AlternateContent xmlns:mc="http://schemas.openxmlformats.org/markup-compatibility/2006">
+        <mc:Choice xmlns:a14="http://schemas.microsoft.com/office/drawing/2010/main" Requires="a14">
+          <p:sp>
+            <p:nvSpPr>
+              <p:cNvPr id="36" name="Oval 35">
+                <a:extLst>
+                  <a:ext uri="{FF2B5EF4-FFF2-40B4-BE49-F238E27FC236}">
+                    <a16:creationId xmlns:a16="http://schemas.microsoft.com/office/drawing/2014/main" id="{57DCED2D-FB71-F11F-61D9-C817F3F6D3D0}"/>
+                  </a:ext>
+                </a:extLst>
+              </p:cNvPr>
+              <p:cNvSpPr/>
+              <p:nvPr/>
+            </p:nvSpPr>
+            <p:spPr>
+              <a:xfrm>
+                <a:off x="8754021" y="1327734"/>
+                <a:ext cx="1475014" cy="1475014"/>
+              </a:xfrm>
+              <a:prstGeom prst="ellipse">
+                <a:avLst/>
+              </a:prstGeom>
+              <a:solidFill>
+                <a:srgbClr val="FFC000"/>
+              </a:solidFill>
+            </p:spPr>
+            <p:style>
+              <a:lnRef idx="1">
+                <a:schemeClr val="dk1"/>
+              </a:lnRef>
+              <a:fillRef idx="2">
+                <a:schemeClr val="dk1"/>
+              </a:fillRef>
+              <a:effectRef idx="1">
+                <a:schemeClr val="dk1"/>
+              </a:effectRef>
+              <a:fontRef idx="minor">
+                <a:schemeClr val="dk1"/>
+              </a:fontRef>
+            </p:style>
+            <p:txBody>
+              <a:bodyPr rtlCol="0" anchor="ctr"/>
+              <a:lstStyle/>
+              <a:p>
+                <a:pPr algn="ctr"/>
+                <a14:m>
+                  <m:oMathPara xmlns:m="http://schemas.openxmlformats.org/officeDocument/2006/math">
+                    <m:oMathParaPr>
+                      <m:jc m:val="centerGroup"/>
+                    </m:oMathParaPr>
+                    <m:oMath xmlns:m="http://schemas.openxmlformats.org/officeDocument/2006/math">
+                      <m:r>
+                        <a:rPr lang="en-US" i="1" smtClean="0">
+                          <a:latin typeface="Cambria Math" panose="02040503050406030204" pitchFamily="18" charset="0"/>
+                        </a:rPr>
+                        <m:t>𝐻</m:t>
+                      </m:r>
+                    </m:oMath>
+                  </m:oMathPara>
+                </a14:m>
+                <a:endParaRPr lang="en-US" dirty="0"/>
+              </a:p>
+            </p:txBody>
+          </p:sp>
+        </mc:Choice>
+        <mc:Fallback>
+          <p:sp>
+            <p:nvSpPr>
+              <p:cNvPr id="36" name="Oval 35">
+                <a:extLst>
+                  <a:ext uri="{FF2B5EF4-FFF2-40B4-BE49-F238E27FC236}">
+                    <a16:creationId xmlns:a16="http://schemas.microsoft.com/office/drawing/2014/main" id="{57DCED2D-FB71-F11F-61D9-C817F3F6D3D0}"/>
+                  </a:ext>
+                </a:extLst>
+              </p:cNvPr>
+              <p:cNvSpPr>
+                <a:spLocks noRot="1" noChangeAspect="1" noMove="1" noResize="1" noEditPoints="1" noAdjustHandles="1" noChangeArrowheads="1" noChangeShapeType="1" noTextEdit="1"/>
+              </p:cNvSpPr>
+              <p:nvPr/>
+            </p:nvSpPr>
+            <p:spPr>
+              <a:xfrm>
+                <a:off x="8754021" y="1327734"/>
+                <a:ext cx="1475014" cy="1475014"/>
+              </a:xfrm>
+              <a:prstGeom prst="ellipse">
+                <a:avLst/>
+              </a:prstGeom>
+              <a:blipFill>
+                <a:blip r:embed="rId5"/>
+                <a:stretch>
+                  <a:fillRect/>
+                </a:stretch>
+              </a:blipFill>
+            </p:spPr>
+            <p:txBody>
+              <a:bodyPr/>
+              <a:lstStyle/>
+              <a:p>
+                <a:r>
+                  <a:rPr lang="en-US">
+                    <a:noFill/>
+                  </a:rPr>
+                  <a:t> </a:t>
+                </a:r>
+              </a:p>
+            </p:txBody>
+          </p:sp>
+        </mc:Fallback>
+      </mc:AlternateContent>
+      <mc:AlternateContent xmlns:mc="http://schemas.openxmlformats.org/markup-compatibility/2006">
+        <mc:Choice xmlns:a14="http://schemas.microsoft.com/office/drawing/2010/main" Requires="a14">
+          <p:sp>
+            <p:nvSpPr>
+              <p:cNvPr id="37" name="Oval 36">
+                <a:extLst>
+                  <a:ext uri="{FF2B5EF4-FFF2-40B4-BE49-F238E27FC236}">
+                    <a16:creationId xmlns:a16="http://schemas.microsoft.com/office/drawing/2014/main" id="{8528A657-871B-FE56-40D1-D9D858B01785}"/>
+                  </a:ext>
+                </a:extLst>
+              </p:cNvPr>
+              <p:cNvSpPr/>
+              <p:nvPr/>
+            </p:nvSpPr>
+            <p:spPr>
+              <a:xfrm>
+                <a:off x="8791951" y="2952983"/>
+                <a:ext cx="1475014" cy="1475014"/>
+              </a:xfrm>
+              <a:prstGeom prst="ellipse">
+                <a:avLst/>
+              </a:prstGeom>
+              <a:solidFill>
+                <a:srgbClr val="FFC000"/>
+              </a:solidFill>
+            </p:spPr>
+            <p:style>
+              <a:lnRef idx="1">
+                <a:schemeClr val="dk1"/>
+              </a:lnRef>
+              <a:fillRef idx="2">
+                <a:schemeClr val="dk1"/>
+              </a:fillRef>
+              <a:effectRef idx="1">
+                <a:schemeClr val="dk1"/>
+              </a:effectRef>
+              <a:fontRef idx="minor">
+                <a:schemeClr val="dk1"/>
+              </a:fontRef>
+            </p:style>
+            <p:txBody>
+              <a:bodyPr rtlCol="0" anchor="ctr"/>
+              <a:lstStyle/>
+              <a:p>
+                <a:pPr algn="ctr"/>
+                <a14:m>
+                  <m:oMathPara xmlns:m="http://schemas.openxmlformats.org/officeDocument/2006/math">
+                    <m:oMathParaPr>
+                      <m:jc m:val="centerGroup"/>
+                    </m:oMathParaPr>
+                    <m:oMath xmlns:m="http://schemas.openxmlformats.org/officeDocument/2006/math">
+                      <m:r>
+                        <a:rPr lang="en-US" b="0" i="1" smtClean="0">
+                          <a:latin typeface="Cambria Math" panose="02040503050406030204" pitchFamily="18" charset="0"/>
+                        </a:rPr>
+                        <m:t>𝐴</m:t>
+                      </m:r>
+                    </m:oMath>
+                  </m:oMathPara>
+                </a14:m>
+                <a:endParaRPr lang="en-US" dirty="0"/>
+              </a:p>
+            </p:txBody>
+          </p:sp>
+        </mc:Choice>
+        <mc:Fallback>
+          <p:sp>
+            <p:nvSpPr>
+              <p:cNvPr id="37" name="Oval 36">
+                <a:extLst>
+                  <a:ext uri="{FF2B5EF4-FFF2-40B4-BE49-F238E27FC236}">
+                    <a16:creationId xmlns:a16="http://schemas.microsoft.com/office/drawing/2014/main" id="{8528A657-871B-FE56-40D1-D9D858B01785}"/>
+                  </a:ext>
+                </a:extLst>
+              </p:cNvPr>
+              <p:cNvSpPr>
+                <a:spLocks noRot="1" noChangeAspect="1" noMove="1" noResize="1" noEditPoints="1" noAdjustHandles="1" noChangeArrowheads="1" noChangeShapeType="1" noTextEdit="1"/>
+              </p:cNvSpPr>
+              <p:nvPr/>
+            </p:nvSpPr>
+            <p:spPr>
+              <a:xfrm>
+                <a:off x="8791951" y="2952983"/>
+                <a:ext cx="1475014" cy="1475014"/>
+              </a:xfrm>
+              <a:prstGeom prst="ellipse">
+                <a:avLst/>
+              </a:prstGeom>
+              <a:blipFill>
+                <a:blip r:embed="rId6"/>
+                <a:stretch>
+                  <a:fillRect/>
+                </a:stretch>
+              </a:blipFill>
+            </p:spPr>
+            <p:txBody>
+              <a:bodyPr/>
+              <a:lstStyle/>
+              <a:p>
+                <a:r>
+                  <a:rPr lang="en-US">
+                    <a:noFill/>
+                  </a:rPr>
+                  <a:t> </a:t>
+                </a:r>
+              </a:p>
+            </p:txBody>
+          </p:sp>
+        </mc:Fallback>
+      </mc:AlternateContent>
+      <mc:AlternateContent xmlns:mc="http://schemas.openxmlformats.org/markup-compatibility/2006">
+        <mc:Choice xmlns:a14="http://schemas.microsoft.com/office/drawing/2010/main" Requires="a14">
+          <p:sp>
+            <p:nvSpPr>
+              <p:cNvPr id="38" name="Oval 37">
+                <a:extLst>
+                  <a:ext uri="{FF2B5EF4-FFF2-40B4-BE49-F238E27FC236}">
+                    <a16:creationId xmlns:a16="http://schemas.microsoft.com/office/drawing/2014/main" id="{63B04B3E-E4D8-CE0A-25F7-EF395CA133E7}"/>
+                  </a:ext>
+                </a:extLst>
+              </p:cNvPr>
+              <p:cNvSpPr/>
+              <p:nvPr/>
+            </p:nvSpPr>
+            <p:spPr>
+              <a:xfrm>
+                <a:off x="8754021" y="4631258"/>
+                <a:ext cx="1475014" cy="1475014"/>
+              </a:xfrm>
+              <a:prstGeom prst="ellipse">
+                <a:avLst/>
+              </a:prstGeom>
+              <a:solidFill>
+                <a:srgbClr val="FFC000"/>
+              </a:solidFill>
+            </p:spPr>
+            <p:style>
+              <a:lnRef idx="1">
+                <a:schemeClr val="dk1"/>
+              </a:lnRef>
+              <a:fillRef idx="2">
+                <a:schemeClr val="dk1"/>
+              </a:fillRef>
+              <a:effectRef idx="1">
+                <a:schemeClr val="dk1"/>
+              </a:effectRef>
+              <a:fontRef idx="minor">
+                <a:schemeClr val="dk1"/>
+              </a:fontRef>
+            </p:style>
+            <p:txBody>
+              <a:bodyPr rtlCol="0" anchor="ctr"/>
+              <a:lstStyle/>
+              <a:p>
+                <a:pPr algn="ctr"/>
+                <a14:m>
+                  <m:oMathPara xmlns:m="http://schemas.openxmlformats.org/officeDocument/2006/math">
+                    <m:oMathParaPr>
+                      <m:jc m:val="centerGroup"/>
+                    </m:oMathParaPr>
+                    <m:oMath xmlns:m="http://schemas.openxmlformats.org/officeDocument/2006/math">
+                      <m:r>
+                        <a:rPr lang="en-US" b="0" i="1" smtClean="0">
+                          <a:latin typeface="Cambria Math" panose="02040503050406030204" pitchFamily="18" charset="0"/>
+                        </a:rPr>
+                        <m:t>𝐷</m:t>
+                      </m:r>
+                    </m:oMath>
+                  </m:oMathPara>
+                </a14:m>
+                <a:endParaRPr lang="en-US" dirty="0"/>
+              </a:p>
+            </p:txBody>
+          </p:sp>
+        </mc:Choice>
+        <mc:Fallback>
+          <p:sp>
+            <p:nvSpPr>
+              <p:cNvPr id="38" name="Oval 37">
+                <a:extLst>
+                  <a:ext uri="{FF2B5EF4-FFF2-40B4-BE49-F238E27FC236}">
+                    <a16:creationId xmlns:a16="http://schemas.microsoft.com/office/drawing/2014/main" id="{63B04B3E-E4D8-CE0A-25F7-EF395CA133E7}"/>
+                  </a:ext>
+                </a:extLst>
+              </p:cNvPr>
+              <p:cNvSpPr>
+                <a:spLocks noRot="1" noChangeAspect="1" noMove="1" noResize="1" noEditPoints="1" noAdjustHandles="1" noChangeArrowheads="1" noChangeShapeType="1" noTextEdit="1"/>
+              </p:cNvSpPr>
+              <p:nvPr/>
+            </p:nvSpPr>
+            <p:spPr>
+              <a:xfrm>
+                <a:off x="8754021" y="4631258"/>
+                <a:ext cx="1475014" cy="1475014"/>
+              </a:xfrm>
+              <a:prstGeom prst="ellipse">
+                <a:avLst/>
+              </a:prstGeom>
+              <a:blipFill>
+                <a:blip r:embed="rId7"/>
+                <a:stretch>
+                  <a:fillRect/>
+                </a:stretch>
+              </a:blipFill>
+            </p:spPr>
+            <p:txBody>
+              <a:bodyPr/>
+              <a:lstStyle/>
+              <a:p>
+                <a:r>
+                  <a:rPr lang="en-US">
+                    <a:noFill/>
+                  </a:rPr>
+                  <a:t> </a:t>
+                </a:r>
+              </a:p>
+            </p:txBody>
+          </p:sp>
+        </mc:Fallback>
+      </mc:AlternateContent>
+      <mc:AlternateContent xmlns:mc="http://schemas.openxmlformats.org/markup-compatibility/2006">
+        <mc:Choice xmlns:a14="http://schemas.microsoft.com/office/drawing/2010/main" Requires="a14">
+          <p:sp>
+            <p:nvSpPr>
+              <p:cNvPr id="40" name="Oval 39">
+                <a:extLst>
+                  <a:ext uri="{FF2B5EF4-FFF2-40B4-BE49-F238E27FC236}">
+                    <a16:creationId xmlns:a16="http://schemas.microsoft.com/office/drawing/2014/main" id="{6FFC62BE-DE62-942C-7BC5-32C0C7E8DD80}"/>
+                  </a:ext>
+                </a:extLst>
+              </p:cNvPr>
+              <p:cNvSpPr/>
+              <p:nvPr/>
+            </p:nvSpPr>
+            <p:spPr>
+              <a:xfrm>
+                <a:off x="6231976" y="1327734"/>
+                <a:ext cx="1475014" cy="1475014"/>
+              </a:xfrm>
+              <a:prstGeom prst="ellipse">
+                <a:avLst/>
+              </a:prstGeom>
+              <a:solidFill>
+                <a:schemeClr val="tx2">
+                  <a:lumMod val="25000"/>
+                  <a:lumOff val="75000"/>
+                </a:schemeClr>
+              </a:solidFill>
+            </p:spPr>
+            <p:style>
+              <a:lnRef idx="1">
+                <a:schemeClr val="dk1"/>
+              </a:lnRef>
+              <a:fillRef idx="2">
+                <a:schemeClr val="dk1"/>
+              </a:fillRef>
+              <a:effectRef idx="1">
+                <a:schemeClr val="dk1"/>
+              </a:effectRef>
+              <a:fontRef idx="minor">
+                <a:schemeClr val="dk1"/>
+              </a:fontRef>
+            </p:style>
+            <p:txBody>
+              <a:bodyPr rtlCol="0" anchor="ctr"/>
+              <a:lstStyle/>
+              <a:p>
+                <a:pPr algn="ctr"/>
+                <a14:m>
+                  <m:oMathPara xmlns:m="http://schemas.openxmlformats.org/officeDocument/2006/math">
+                    <m:oMathParaPr>
+                      <m:jc m:val="centerGroup"/>
+                    </m:oMathParaPr>
+                    <m:oMath xmlns:m="http://schemas.openxmlformats.org/officeDocument/2006/math">
+                      <m:r>
+                        <a:rPr lang="en-US" i="1" smtClean="0">
+                          <a:latin typeface="Cambria Math" panose="02040503050406030204" pitchFamily="18" charset="0"/>
+                        </a:rPr>
+                        <m:t>𝐻</m:t>
+                      </m:r>
+                    </m:oMath>
+                  </m:oMathPara>
+                </a14:m>
+                <a:endParaRPr lang="en-US" dirty="0"/>
+              </a:p>
+            </p:txBody>
+          </p:sp>
+        </mc:Choice>
+        <mc:Fallback>
+          <p:sp>
+            <p:nvSpPr>
+              <p:cNvPr id="40" name="Oval 39">
+                <a:extLst>
+                  <a:ext uri="{FF2B5EF4-FFF2-40B4-BE49-F238E27FC236}">
+                    <a16:creationId xmlns:a16="http://schemas.microsoft.com/office/drawing/2014/main" id="{6FFC62BE-DE62-942C-7BC5-32C0C7E8DD80}"/>
+                  </a:ext>
+                </a:extLst>
+              </p:cNvPr>
+              <p:cNvSpPr>
+                <a:spLocks noRot="1" noChangeAspect="1" noMove="1" noResize="1" noEditPoints="1" noAdjustHandles="1" noChangeArrowheads="1" noChangeShapeType="1" noTextEdit="1"/>
+              </p:cNvSpPr>
+              <p:nvPr/>
+            </p:nvSpPr>
+            <p:spPr>
+              <a:xfrm>
+                <a:off x="6231976" y="1327734"/>
+                <a:ext cx="1475014" cy="1475014"/>
+              </a:xfrm>
+              <a:prstGeom prst="ellipse">
+                <a:avLst/>
+              </a:prstGeom>
+              <a:blipFill>
+                <a:blip r:embed="rId8"/>
+                <a:stretch>
+                  <a:fillRect/>
+                </a:stretch>
+              </a:blipFill>
+            </p:spPr>
+            <p:txBody>
+              <a:bodyPr/>
+              <a:lstStyle/>
+              <a:p>
+                <a:r>
+                  <a:rPr lang="en-US">
+                    <a:noFill/>
+                  </a:rPr>
+                  <a:t> </a:t>
+                </a:r>
+              </a:p>
+            </p:txBody>
+          </p:sp>
+        </mc:Fallback>
+      </mc:AlternateContent>
+      <mc:AlternateContent xmlns:mc="http://schemas.openxmlformats.org/markup-compatibility/2006">
+        <mc:Choice xmlns:a14="http://schemas.microsoft.com/office/drawing/2010/main" Requires="a14">
+          <p:sp>
+            <p:nvSpPr>
+              <p:cNvPr id="42" name="Oval 41">
+                <a:extLst>
+                  <a:ext uri="{FF2B5EF4-FFF2-40B4-BE49-F238E27FC236}">
+                    <a16:creationId xmlns:a16="http://schemas.microsoft.com/office/drawing/2014/main" id="{ACF3485C-460A-2D88-0461-7BFED067C473}"/>
+                  </a:ext>
+                </a:extLst>
+              </p:cNvPr>
+              <p:cNvSpPr/>
+              <p:nvPr/>
+            </p:nvSpPr>
+            <p:spPr>
+              <a:xfrm>
+                <a:off x="6231976" y="2982408"/>
+                <a:ext cx="1475014" cy="1475014"/>
+              </a:xfrm>
+              <a:prstGeom prst="ellipse">
+                <a:avLst/>
+              </a:prstGeom>
+              <a:solidFill>
+                <a:schemeClr val="tx2">
+                  <a:lumMod val="25000"/>
+                  <a:lumOff val="75000"/>
+                </a:schemeClr>
+              </a:solidFill>
+            </p:spPr>
+            <p:style>
+              <a:lnRef idx="1">
+                <a:schemeClr val="dk1"/>
+              </a:lnRef>
+              <a:fillRef idx="2">
+                <a:schemeClr val="dk1"/>
+              </a:fillRef>
+              <a:effectRef idx="1">
+                <a:schemeClr val="dk1"/>
+              </a:effectRef>
+              <a:fontRef idx="minor">
+                <a:schemeClr val="dk1"/>
+              </a:fontRef>
+            </p:style>
+            <p:txBody>
+              <a:bodyPr rtlCol="0" anchor="ctr"/>
+              <a:lstStyle/>
+              <a:p>
+                <a:pPr algn="ctr"/>
+                <a14:m>
+                  <m:oMathPara xmlns:m="http://schemas.openxmlformats.org/officeDocument/2006/math">
+                    <m:oMathParaPr>
+                      <m:jc m:val="centerGroup"/>
+                    </m:oMathParaPr>
+                    <m:oMath xmlns:m="http://schemas.openxmlformats.org/officeDocument/2006/math">
+                      <m:r>
+                        <a:rPr lang="en-US" b="0" i="1" smtClean="0">
+                          <a:latin typeface="Cambria Math" panose="02040503050406030204" pitchFamily="18" charset="0"/>
+                        </a:rPr>
+                        <m:t>𝐴</m:t>
+                      </m:r>
+                    </m:oMath>
+                  </m:oMathPara>
+                </a14:m>
+                <a:endParaRPr lang="en-US" dirty="0"/>
+              </a:p>
+            </p:txBody>
+          </p:sp>
+        </mc:Choice>
+        <mc:Fallback>
+          <p:sp>
+            <p:nvSpPr>
+              <p:cNvPr id="42" name="Oval 41">
+                <a:extLst>
+                  <a:ext uri="{FF2B5EF4-FFF2-40B4-BE49-F238E27FC236}">
+                    <a16:creationId xmlns:a16="http://schemas.microsoft.com/office/drawing/2014/main" id="{ACF3485C-460A-2D88-0461-7BFED067C473}"/>
+                  </a:ext>
+                </a:extLst>
+              </p:cNvPr>
+              <p:cNvSpPr>
+                <a:spLocks noRot="1" noChangeAspect="1" noMove="1" noResize="1" noEditPoints="1" noAdjustHandles="1" noChangeArrowheads="1" noChangeShapeType="1" noTextEdit="1"/>
+              </p:cNvSpPr>
+              <p:nvPr/>
+            </p:nvSpPr>
+            <p:spPr>
+              <a:xfrm>
+                <a:off x="6231976" y="2982408"/>
+                <a:ext cx="1475014" cy="1475014"/>
+              </a:xfrm>
+              <a:prstGeom prst="ellipse">
+                <a:avLst/>
+              </a:prstGeom>
+              <a:blipFill>
+                <a:blip r:embed="rId9"/>
+                <a:stretch>
+                  <a:fillRect/>
+                </a:stretch>
+              </a:blipFill>
+            </p:spPr>
+            <p:txBody>
+              <a:bodyPr/>
+              <a:lstStyle/>
+              <a:p>
+                <a:r>
+                  <a:rPr lang="en-US">
+                    <a:noFill/>
+                  </a:rPr>
+                  <a:t> </a:t>
+                </a:r>
+              </a:p>
+            </p:txBody>
+          </p:sp>
+        </mc:Fallback>
+      </mc:AlternateContent>
+      <mc:AlternateContent xmlns:mc="http://schemas.openxmlformats.org/markup-compatibility/2006">
+        <mc:Choice xmlns:a14="http://schemas.microsoft.com/office/drawing/2010/main" Requires="a14">
+          <p:sp>
+            <p:nvSpPr>
+              <p:cNvPr id="44" name="Oval 43">
+                <a:extLst>
+                  <a:ext uri="{FF2B5EF4-FFF2-40B4-BE49-F238E27FC236}">
+                    <a16:creationId xmlns:a16="http://schemas.microsoft.com/office/drawing/2014/main" id="{9F79F270-8C5E-6FD1-15F7-50CF410D5DAC}"/>
+                  </a:ext>
+                </a:extLst>
+              </p:cNvPr>
+              <p:cNvSpPr/>
+              <p:nvPr/>
+            </p:nvSpPr>
+            <p:spPr>
+              <a:xfrm>
+                <a:off x="6231973" y="4636066"/>
+                <a:ext cx="1475014" cy="1475014"/>
+              </a:xfrm>
+              <a:prstGeom prst="ellipse">
+                <a:avLst/>
+              </a:prstGeom>
+              <a:solidFill>
+                <a:schemeClr val="tx2">
+                  <a:lumMod val="25000"/>
+                  <a:lumOff val="75000"/>
+                </a:schemeClr>
+              </a:solidFill>
+            </p:spPr>
+            <p:style>
+              <a:lnRef idx="1">
+                <a:schemeClr val="dk1"/>
+              </a:lnRef>
+              <a:fillRef idx="2">
+                <a:schemeClr val="dk1"/>
+              </a:fillRef>
+              <a:effectRef idx="1">
+                <a:schemeClr val="dk1"/>
+              </a:effectRef>
+              <a:fontRef idx="minor">
+                <a:schemeClr val="dk1"/>
+              </a:fontRef>
+            </p:style>
+            <p:txBody>
+              <a:bodyPr rtlCol="0" anchor="ctr"/>
+              <a:lstStyle/>
+              <a:p>
+                <a:pPr algn="ctr"/>
+                <a14:m>
+                  <m:oMathPara xmlns:m="http://schemas.openxmlformats.org/officeDocument/2006/math">
+                    <m:oMathParaPr>
+                      <m:jc m:val="centerGroup"/>
+                    </m:oMathParaPr>
+                    <m:oMath xmlns:m="http://schemas.openxmlformats.org/officeDocument/2006/math">
+                      <m:r>
+                        <a:rPr lang="en-US" b="0" i="1" smtClean="0">
+                          <a:latin typeface="Cambria Math" panose="02040503050406030204" pitchFamily="18" charset="0"/>
+                        </a:rPr>
+                        <m:t>𝐷</m:t>
+                      </m:r>
+                    </m:oMath>
+                  </m:oMathPara>
+                </a14:m>
+                <a:endParaRPr lang="en-US" dirty="0"/>
+              </a:p>
+            </p:txBody>
+          </p:sp>
+        </mc:Choice>
+        <mc:Fallback>
+          <p:sp>
+            <p:nvSpPr>
+              <p:cNvPr id="44" name="Oval 43">
+                <a:extLst>
+                  <a:ext uri="{FF2B5EF4-FFF2-40B4-BE49-F238E27FC236}">
+                    <a16:creationId xmlns:a16="http://schemas.microsoft.com/office/drawing/2014/main" id="{9F79F270-8C5E-6FD1-15F7-50CF410D5DAC}"/>
+                  </a:ext>
+                </a:extLst>
+              </p:cNvPr>
+              <p:cNvSpPr>
+                <a:spLocks noRot="1" noChangeAspect="1" noMove="1" noResize="1" noEditPoints="1" noAdjustHandles="1" noChangeArrowheads="1" noChangeShapeType="1" noTextEdit="1"/>
+              </p:cNvSpPr>
+              <p:nvPr/>
+            </p:nvSpPr>
+            <p:spPr>
+              <a:xfrm>
+                <a:off x="6231973" y="4636066"/>
+                <a:ext cx="1475014" cy="1475014"/>
+              </a:xfrm>
+              <a:prstGeom prst="ellipse">
+                <a:avLst/>
+              </a:prstGeom>
+              <a:blipFill>
+                <a:blip r:embed="rId10"/>
+                <a:stretch>
+                  <a:fillRect/>
+                </a:stretch>
+              </a:blipFill>
+            </p:spPr>
+            <p:txBody>
+              <a:bodyPr/>
+              <a:lstStyle/>
+              <a:p>
+                <a:r>
+                  <a:rPr lang="en-US">
+                    <a:noFill/>
+                  </a:rPr>
+                  <a:t> </a:t>
+                </a:r>
+              </a:p>
+            </p:txBody>
+          </p:sp>
+        </mc:Fallback>
+      </mc:AlternateContent>
+      <mc:AlternateContent xmlns:mc="http://schemas.openxmlformats.org/markup-compatibility/2006">
+        <mc:Choice xmlns:a14="http://schemas.microsoft.com/office/drawing/2010/main" Requires="a14">
+          <p:sp>
+            <p:nvSpPr>
+              <p:cNvPr id="45" name="Oval 44">
+                <a:extLst>
+                  <a:ext uri="{FF2B5EF4-FFF2-40B4-BE49-F238E27FC236}">
+                    <a16:creationId xmlns:a16="http://schemas.microsoft.com/office/drawing/2014/main" id="{8AC24CC7-7BA2-ADFD-AF3D-E208FAA07DA2}"/>
+                  </a:ext>
+                </a:extLst>
+              </p:cNvPr>
+              <p:cNvSpPr/>
+              <p:nvPr/>
+            </p:nvSpPr>
+            <p:spPr>
+              <a:xfrm>
+                <a:off x="8754021" y="-578648"/>
+                <a:ext cx="1475014" cy="1475014"/>
+              </a:xfrm>
+              <a:prstGeom prst="ellipse">
+                <a:avLst/>
+              </a:prstGeom>
+              <a:solidFill>
+                <a:schemeClr val="tx2">
+                  <a:lumMod val="25000"/>
+                  <a:lumOff val="75000"/>
+                </a:schemeClr>
+              </a:solidFill>
+            </p:spPr>
+            <p:style>
+              <a:lnRef idx="1">
+                <a:schemeClr val="dk1"/>
+              </a:lnRef>
+              <a:fillRef idx="2">
+                <a:schemeClr val="dk1"/>
+              </a:fillRef>
+              <a:effectRef idx="1">
+                <a:schemeClr val="dk1"/>
+              </a:effectRef>
+              <a:fontRef idx="minor">
+                <a:schemeClr val="dk1"/>
+              </a:fontRef>
+            </p:style>
+            <p:txBody>
+              <a:bodyPr rtlCol="0" anchor="ctr"/>
+              <a:lstStyle/>
+              <a:p>
+                <a:pPr algn="ctr"/>
+                <a14:m>
+                  <m:oMathPara xmlns:m="http://schemas.openxmlformats.org/officeDocument/2006/math">
+                    <m:oMathParaPr>
+                      <m:jc m:val="centerGroup"/>
+                    </m:oMathParaPr>
+                    <m:oMath xmlns:m="http://schemas.openxmlformats.org/officeDocument/2006/math">
+                      <m:r>
+                        <a:rPr lang="en-US" b="0" i="1" smtClean="0">
+                          <a:latin typeface="Cambria Math" panose="02040503050406030204" pitchFamily="18" charset="0"/>
+                        </a:rPr>
+                        <m:t>𝐹</m:t>
+                      </m:r>
+                    </m:oMath>
+                  </m:oMathPara>
+                </a14:m>
+                <a:endParaRPr lang="en-US" dirty="0"/>
+              </a:p>
+            </p:txBody>
+          </p:sp>
+        </mc:Choice>
+        <mc:Fallback>
+          <p:sp>
+            <p:nvSpPr>
+              <p:cNvPr id="45" name="Oval 44">
+                <a:extLst>
+                  <a:ext uri="{FF2B5EF4-FFF2-40B4-BE49-F238E27FC236}">
+                    <a16:creationId xmlns:a16="http://schemas.microsoft.com/office/drawing/2014/main" id="{8AC24CC7-7BA2-ADFD-AF3D-E208FAA07DA2}"/>
+                  </a:ext>
+                </a:extLst>
+              </p:cNvPr>
+              <p:cNvSpPr>
+                <a:spLocks noRot="1" noChangeAspect="1" noMove="1" noResize="1" noEditPoints="1" noAdjustHandles="1" noChangeArrowheads="1" noChangeShapeType="1" noTextEdit="1"/>
+              </p:cNvSpPr>
+              <p:nvPr/>
+            </p:nvSpPr>
+            <p:spPr>
+              <a:xfrm>
+                <a:off x="8754021" y="-578648"/>
+                <a:ext cx="1475014" cy="1475014"/>
+              </a:xfrm>
+              <a:prstGeom prst="ellipse">
+                <a:avLst/>
+              </a:prstGeom>
+              <a:blipFill>
+                <a:blip r:embed="rId11"/>
+                <a:stretch>
+                  <a:fillRect/>
+                </a:stretch>
+              </a:blipFill>
+            </p:spPr>
+            <p:txBody>
+              <a:bodyPr/>
+              <a:lstStyle/>
+              <a:p>
+                <a:r>
+                  <a:rPr lang="en-US">
+                    <a:noFill/>
+                  </a:rPr>
+                  <a:t> </a:t>
+                </a:r>
+              </a:p>
+            </p:txBody>
+          </p:sp>
+        </mc:Fallback>
+      </mc:AlternateContent>
+      <p:cxnSp>
+        <p:nvCxnSpPr>
+          <p:cNvPr id="48" name="Straight Arrow Connector 47">
+            <a:extLst>
+              <a:ext uri="{FF2B5EF4-FFF2-40B4-BE49-F238E27FC236}">
+                <a16:creationId xmlns:a16="http://schemas.microsoft.com/office/drawing/2014/main" id="{3EF78350-8150-55A2-228E-5085F504CF9F}"/>
+              </a:ext>
+            </a:extLst>
+          </p:cNvPr>
+          <p:cNvCxnSpPr>
+            <a:cxnSpLocks/>
+            <a:stCxn id="40" idx="6"/>
+            <a:endCxn id="36" idx="2"/>
+          </p:cNvCxnSpPr>
+          <p:nvPr/>
+        </p:nvCxnSpPr>
+        <p:spPr>
+          <a:xfrm>
+            <a:off x="7706990" y="2065241"/>
+            <a:ext cx="1047031" cy="0"/>
+          </a:xfrm>
+          <a:prstGeom prst="straightConnector1">
+            <a:avLst/>
+          </a:prstGeom>
+          <a:ln>
+            <a:tailEnd type="triangle"/>
+          </a:ln>
+        </p:spPr>
+        <p:style>
+          <a:lnRef idx="2">
+            <a:schemeClr val="dk1"/>
+          </a:lnRef>
+          <a:fillRef idx="0">
+            <a:schemeClr val="dk1"/>
+          </a:fillRef>
+          <a:effectRef idx="1">
+            <a:schemeClr val="dk1"/>
+          </a:effectRef>
+          <a:fontRef idx="minor">
+            <a:schemeClr val="tx1"/>
+          </a:fontRef>
+        </p:style>
+      </p:cxnSp>
+      <p:cxnSp>
+        <p:nvCxnSpPr>
+          <p:cNvPr id="52" name="Straight Arrow Connector 51">
+            <a:extLst>
+              <a:ext uri="{FF2B5EF4-FFF2-40B4-BE49-F238E27FC236}">
+                <a16:creationId xmlns:a16="http://schemas.microsoft.com/office/drawing/2014/main" id="{B2995230-4DF2-FE9A-85A3-8E11E54846C2}"/>
+              </a:ext>
+            </a:extLst>
+          </p:cNvPr>
+          <p:cNvCxnSpPr>
+            <a:cxnSpLocks/>
+          </p:cNvCxnSpPr>
+          <p:nvPr/>
+        </p:nvCxnSpPr>
+        <p:spPr>
+          <a:xfrm flipV="1">
+            <a:off x="5147015" y="3717003"/>
+            <a:ext cx="1095051" cy="4808"/>
+          </a:xfrm>
+          <a:prstGeom prst="straightConnector1">
+            <a:avLst/>
+          </a:prstGeom>
+          <a:ln>
+            <a:tailEnd type="triangle"/>
+          </a:ln>
+        </p:spPr>
+        <p:style>
+          <a:lnRef idx="2">
+            <a:schemeClr val="dk1"/>
+          </a:lnRef>
+          <a:fillRef idx="0">
+            <a:schemeClr val="dk1"/>
+          </a:fillRef>
+          <a:effectRef idx="1">
+            <a:schemeClr val="dk1"/>
+          </a:effectRef>
+          <a:fontRef idx="minor">
+            <a:schemeClr val="tx1"/>
+          </a:fontRef>
+        </p:style>
+      </p:cxnSp>
+      <p:cxnSp>
+        <p:nvCxnSpPr>
+          <p:cNvPr id="53" name="Straight Arrow Connector 52">
+            <a:extLst>
+              <a:ext uri="{FF2B5EF4-FFF2-40B4-BE49-F238E27FC236}">
+                <a16:creationId xmlns:a16="http://schemas.microsoft.com/office/drawing/2014/main" id="{900429A5-03DB-FD04-2DBC-E48E71BD43AB}"/>
+              </a:ext>
+            </a:extLst>
+          </p:cNvPr>
+          <p:cNvCxnSpPr>
+            <a:cxnSpLocks/>
+            <a:stCxn id="42" idx="6"/>
+            <a:endCxn id="37" idx="2"/>
+          </p:cNvCxnSpPr>
+          <p:nvPr/>
+        </p:nvCxnSpPr>
+        <p:spPr>
+          <a:xfrm flipV="1">
+            <a:off x="7706990" y="3690490"/>
+            <a:ext cx="1084961" cy="29425"/>
+          </a:xfrm>
+          <a:prstGeom prst="straightConnector1">
+            <a:avLst/>
+          </a:prstGeom>
+          <a:ln>
+            <a:tailEnd type="triangle"/>
+          </a:ln>
+        </p:spPr>
+        <p:style>
+          <a:lnRef idx="2">
+            <a:schemeClr val="dk1"/>
+          </a:lnRef>
+          <a:fillRef idx="0">
+            <a:schemeClr val="dk1"/>
+          </a:fillRef>
+          <a:effectRef idx="1">
+            <a:schemeClr val="dk1"/>
+          </a:effectRef>
+          <a:fontRef idx="minor">
+            <a:schemeClr val="tx1"/>
+          </a:fontRef>
+        </p:style>
+      </p:cxnSp>
+      <p:cxnSp>
+        <p:nvCxnSpPr>
+          <p:cNvPr id="54" name="Straight Arrow Connector 53">
+            <a:extLst>
+              <a:ext uri="{FF2B5EF4-FFF2-40B4-BE49-F238E27FC236}">
+                <a16:creationId xmlns:a16="http://schemas.microsoft.com/office/drawing/2014/main" id="{19C5E3A8-9FA3-3D43-0EEC-0B96843420D9}"/>
+              </a:ext>
+            </a:extLst>
+          </p:cNvPr>
+          <p:cNvCxnSpPr>
+            <a:cxnSpLocks/>
+          </p:cNvCxnSpPr>
+          <p:nvPr/>
+        </p:nvCxnSpPr>
+        <p:spPr>
+          <a:xfrm flipV="1">
+            <a:off x="5147015" y="5368765"/>
+            <a:ext cx="1095051" cy="4808"/>
+          </a:xfrm>
+          <a:prstGeom prst="straightConnector1">
+            <a:avLst/>
+          </a:prstGeom>
+          <a:ln>
+            <a:tailEnd type="triangle"/>
+          </a:ln>
+        </p:spPr>
+        <p:style>
+          <a:lnRef idx="2">
+            <a:schemeClr val="dk1"/>
+          </a:lnRef>
+          <a:fillRef idx="0">
+            <a:schemeClr val="dk1"/>
+          </a:fillRef>
+          <a:effectRef idx="1">
+            <a:schemeClr val="dk1"/>
+          </a:effectRef>
+          <a:fontRef idx="minor">
+            <a:schemeClr val="tx1"/>
+          </a:fontRef>
+        </p:style>
+      </p:cxnSp>
+      <p:cxnSp>
+        <p:nvCxnSpPr>
+          <p:cNvPr id="55" name="Straight Arrow Connector 54">
+            <a:extLst>
+              <a:ext uri="{FF2B5EF4-FFF2-40B4-BE49-F238E27FC236}">
+                <a16:creationId xmlns:a16="http://schemas.microsoft.com/office/drawing/2014/main" id="{47921434-169C-4E3F-F2C6-248DE03601EA}"/>
+              </a:ext>
+            </a:extLst>
+          </p:cNvPr>
+          <p:cNvCxnSpPr>
+            <a:cxnSpLocks/>
+          </p:cNvCxnSpPr>
+          <p:nvPr/>
+        </p:nvCxnSpPr>
+        <p:spPr>
+          <a:xfrm>
+            <a:off x="7717080" y="5368765"/>
+            <a:ext cx="1047031" cy="0"/>
+          </a:xfrm>
+          <a:prstGeom prst="straightConnector1">
+            <a:avLst/>
+          </a:prstGeom>
+          <a:ln>
+            <a:tailEnd type="triangle"/>
+          </a:ln>
+        </p:spPr>
+        <p:style>
+          <a:lnRef idx="2">
+            <a:schemeClr val="dk1"/>
+          </a:lnRef>
+          <a:fillRef idx="0">
+            <a:schemeClr val="dk1"/>
+          </a:fillRef>
+          <a:effectRef idx="1">
+            <a:schemeClr val="dk1"/>
+          </a:effectRef>
+          <a:fontRef idx="minor">
+            <a:schemeClr val="tx1"/>
+          </a:fontRef>
+        </p:style>
+      </p:cxnSp>
+      <p:cxnSp>
+        <p:nvCxnSpPr>
+          <p:cNvPr id="57" name="Elbow Connector 56">
+            <a:extLst>
+              <a:ext uri="{FF2B5EF4-FFF2-40B4-BE49-F238E27FC236}">
+                <a16:creationId xmlns:a16="http://schemas.microsoft.com/office/drawing/2014/main" id="{CDC557B8-8756-08F4-2153-80A71E727221}"/>
+              </a:ext>
+            </a:extLst>
+          </p:cNvPr>
+          <p:cNvCxnSpPr>
+            <a:stCxn id="38" idx="6"/>
+            <a:endCxn id="36" idx="6"/>
+          </p:cNvCxnSpPr>
+          <p:nvPr/>
+        </p:nvCxnSpPr>
+        <p:spPr>
+          <a:xfrm flipV="1">
+            <a:off x="10229035" y="2065241"/>
+            <a:ext cx="12700" cy="3303524"/>
+          </a:xfrm>
+          <a:prstGeom prst="bentConnector3">
+            <a:avLst>
+              <a:gd name="adj1" fmla="val 1800000"/>
+            </a:avLst>
+          </a:prstGeom>
+          <a:ln>
+            <a:tailEnd type="triangle"/>
+          </a:ln>
+        </p:spPr>
+        <p:style>
+          <a:lnRef idx="2">
+            <a:schemeClr val="dk1"/>
+          </a:lnRef>
+          <a:fillRef idx="0">
+            <a:schemeClr val="dk1"/>
+          </a:fillRef>
+          <a:effectRef idx="1">
+            <a:schemeClr val="dk1"/>
+          </a:effectRef>
+          <a:fontRef idx="minor">
+            <a:schemeClr val="tx1"/>
+          </a:fontRef>
+        </p:style>
+      </p:cxnSp>
+      <p:cxnSp>
+        <p:nvCxnSpPr>
+          <p:cNvPr id="63" name="Elbow Connector 62">
+            <a:extLst>
+              <a:ext uri="{FF2B5EF4-FFF2-40B4-BE49-F238E27FC236}">
+                <a16:creationId xmlns:a16="http://schemas.microsoft.com/office/drawing/2014/main" id="{51A7887E-7009-4C30-1B88-16FDE510B653}"/>
+              </a:ext>
+            </a:extLst>
+          </p:cNvPr>
+          <p:cNvCxnSpPr>
+            <a:cxnSpLocks/>
+            <a:stCxn id="37" idx="1"/>
+            <a:endCxn id="45" idx="2"/>
+          </p:cNvCxnSpPr>
+          <p:nvPr/>
+        </p:nvCxnSpPr>
+        <p:spPr>
+          <a:xfrm rot="16200000" flipV="1">
+            <a:off x="7375925" y="1536956"/>
+            <a:ext cx="3010135" cy="253941"/>
+          </a:xfrm>
+          <a:prstGeom prst="bentConnector4">
+            <a:avLst>
+              <a:gd name="adj1" fmla="val -555"/>
+              <a:gd name="adj2" fmla="val 190021"/>
+            </a:avLst>
+          </a:prstGeom>
+          <a:ln>
+            <a:tailEnd type="triangle"/>
+          </a:ln>
+        </p:spPr>
+        <p:style>
+          <a:lnRef idx="2">
+            <a:schemeClr val="dk1"/>
+          </a:lnRef>
+          <a:fillRef idx="0">
+            <a:schemeClr val="dk1"/>
+          </a:fillRef>
+          <a:effectRef idx="1">
+            <a:schemeClr val="dk1"/>
+          </a:effectRef>
+          <a:fontRef idx="minor">
+            <a:schemeClr val="tx1"/>
+          </a:fontRef>
+        </p:style>
+      </p:cxnSp>
+      <p:cxnSp>
+        <p:nvCxnSpPr>
+          <p:cNvPr id="67" name="Straight Arrow Connector 66">
+            <a:extLst>
+              <a:ext uri="{FF2B5EF4-FFF2-40B4-BE49-F238E27FC236}">
+                <a16:creationId xmlns:a16="http://schemas.microsoft.com/office/drawing/2014/main" id="{106DC916-5F9A-68AA-89A3-28698C941839}"/>
+              </a:ext>
+            </a:extLst>
+          </p:cNvPr>
+          <p:cNvCxnSpPr>
+            <a:cxnSpLocks/>
+            <a:stCxn id="36" idx="0"/>
+            <a:endCxn id="45" idx="4"/>
+          </p:cNvCxnSpPr>
+          <p:nvPr/>
+        </p:nvCxnSpPr>
+        <p:spPr>
+          <a:xfrm flipV="1">
+            <a:off x="9491528" y="896366"/>
+            <a:ext cx="0" cy="431368"/>
+          </a:xfrm>
+          <a:prstGeom prst="straightConnector1">
+            <a:avLst/>
+          </a:prstGeom>
+          <a:ln>
+            <a:tailEnd type="triangle"/>
+          </a:ln>
+        </p:spPr>
+        <p:style>
+          <a:lnRef idx="2">
+            <a:schemeClr val="dk1"/>
+          </a:lnRef>
+          <a:fillRef idx="0">
+            <a:schemeClr val="dk1"/>
+          </a:fillRef>
+          <a:effectRef idx="1">
+            <a:schemeClr val="dk1"/>
+          </a:effectRef>
+          <a:fontRef idx="minor">
+            <a:schemeClr val="tx1"/>
+          </a:fontRef>
+        </p:style>
+      </p:cxnSp>
     </p:spTree>
     <p:extLst>
       <p:ext uri="{BB962C8B-B14F-4D97-AF65-F5344CB8AC3E}">
@@ -5490,14 +6138,14 @@
           <a:chExt cx="0" cy="0"/>
         </a:xfrm>
       </p:grpSpPr>
-      <mc:AlternateContent xmlns:mc="http://schemas.openxmlformats.org/markup-compatibility/2006" xmlns:a14="http://schemas.microsoft.com/office/drawing/2010/main">
-        <mc:Choice Requires="a14">
+      <mc:AlternateContent xmlns:mc="http://schemas.openxmlformats.org/markup-compatibility/2006">
+        <mc:Choice xmlns:a14="http://schemas.microsoft.com/office/drawing/2010/main" Requires="a14">
           <p:sp>
             <p:nvSpPr>
-              <p:cNvPr id="5" name="Oval 4">
+              <p:cNvPr id="4" name="Oval 3">
                 <a:extLst>
                   <a:ext uri="{FF2B5EF4-FFF2-40B4-BE49-F238E27FC236}">
-                    <a16:creationId xmlns:a16="http://schemas.microsoft.com/office/drawing/2014/main" id="{56B47806-8DD3-D6EF-52BC-51985F431706}"/>
+                    <a16:creationId xmlns:a16="http://schemas.microsoft.com/office/drawing/2014/main" id="{95000478-F9D1-E5CB-D74D-AEC11603B299}"/>
                   </a:ext>
                 </a:extLst>
               </p:cNvPr>
@@ -5506,7 +6154,7 @@
             </p:nvSpPr>
             <p:spPr>
               <a:xfrm>
-                <a:off x="7059735" y="3918857"/>
+                <a:off x="2815992" y="2574612"/>
                 <a:ext cx="1475014" cy="1475014"/>
               </a:xfrm>
               <a:prstGeom prst="ellipse">
@@ -5557,13 +6205,13 @@
             </p:txBody>
           </p:sp>
         </mc:Choice>
-        <mc:Fallback xmlns="">
+        <mc:Fallback>
           <p:sp>
             <p:nvSpPr>
-              <p:cNvPr id="5" name="Oval 4">
+              <p:cNvPr id="4" name="Oval 3">
                 <a:extLst>
                   <a:ext uri="{FF2B5EF4-FFF2-40B4-BE49-F238E27FC236}">
-                    <a16:creationId xmlns:a16="http://schemas.microsoft.com/office/drawing/2014/main" id="{56B47806-8DD3-D6EF-52BC-51985F431706}"/>
+                    <a16:creationId xmlns:a16="http://schemas.microsoft.com/office/drawing/2014/main" id="{95000478-F9D1-E5CB-D74D-AEC11603B299}"/>
                   </a:ext>
                 </a:extLst>
               </p:cNvPr>
@@ -5574,7 +6222,7 @@
             </p:nvSpPr>
             <p:spPr>
               <a:xfrm>
-                <a:off x="7059735" y="3918857"/>
+                <a:off x="2815992" y="2574612"/>
                 <a:ext cx="1475014" cy="1475014"/>
               </a:xfrm>
               <a:prstGeom prst="ellipse">
@@ -5602,14 +6250,14 @@
           </p:sp>
         </mc:Fallback>
       </mc:AlternateContent>
-      <mc:AlternateContent xmlns:mc="http://schemas.openxmlformats.org/markup-compatibility/2006" xmlns:a14="http://schemas.microsoft.com/office/drawing/2010/main">
-        <mc:Choice Requires="a14">
+      <mc:AlternateContent xmlns:mc="http://schemas.openxmlformats.org/markup-compatibility/2006">
+        <mc:Choice xmlns:a14="http://schemas.microsoft.com/office/drawing/2010/main" Requires="a14">
           <p:sp>
             <p:nvSpPr>
-              <p:cNvPr id="6" name="Oval 5">
+              <p:cNvPr id="5" name="Oval 4">
                 <a:extLst>
                   <a:ext uri="{FF2B5EF4-FFF2-40B4-BE49-F238E27FC236}">
-                    <a16:creationId xmlns:a16="http://schemas.microsoft.com/office/drawing/2014/main" id="{C602610C-48C6-9A7F-6764-3DF54170D940}"/>
+                    <a16:creationId xmlns:a16="http://schemas.microsoft.com/office/drawing/2014/main" id="{DB922CAF-F079-BDF9-25A1-5363135FD07A}"/>
                   </a:ext>
                 </a:extLst>
               </p:cNvPr>
@@ -5618,7 +6266,7 @@
             </p:nvSpPr>
             <p:spPr>
               <a:xfrm>
-                <a:off x="9034843" y="2151101"/>
+                <a:off x="4791100" y="806856"/>
                 <a:ext cx="1475014" cy="1475014"/>
               </a:xfrm>
               <a:prstGeom prst="ellipse">
@@ -5711,13 +6359,13 @@
             </p:txBody>
           </p:sp>
         </mc:Choice>
-        <mc:Fallback xmlns="">
+        <mc:Fallback>
           <p:sp>
             <p:nvSpPr>
-              <p:cNvPr id="6" name="Oval 5">
+              <p:cNvPr id="5" name="Oval 4">
                 <a:extLst>
                   <a:ext uri="{FF2B5EF4-FFF2-40B4-BE49-F238E27FC236}">
-                    <a16:creationId xmlns:a16="http://schemas.microsoft.com/office/drawing/2014/main" id="{C602610C-48C6-9A7F-6764-3DF54170D940}"/>
+                    <a16:creationId xmlns:a16="http://schemas.microsoft.com/office/drawing/2014/main" id="{DB922CAF-F079-BDF9-25A1-5363135FD07A}"/>
                   </a:ext>
                 </a:extLst>
               </p:cNvPr>
@@ -5728,7 +6376,7 @@
             </p:nvSpPr>
             <p:spPr>
               <a:xfrm>
-                <a:off x="9034843" y="2151101"/>
+                <a:off x="4791100" y="806856"/>
                 <a:ext cx="1475014" cy="1475014"/>
               </a:xfrm>
               <a:prstGeom prst="ellipse">
@@ -5756,14 +6404,14 @@
           </p:sp>
         </mc:Fallback>
       </mc:AlternateContent>
-      <mc:AlternateContent xmlns:mc="http://schemas.openxmlformats.org/markup-compatibility/2006" xmlns:a14="http://schemas.microsoft.com/office/drawing/2010/main">
-        <mc:Choice Requires="a14">
+      <mc:AlternateContent xmlns:mc="http://schemas.openxmlformats.org/markup-compatibility/2006">
+        <mc:Choice xmlns:a14="http://schemas.microsoft.com/office/drawing/2010/main" Requires="a14">
           <p:sp>
             <p:nvSpPr>
-              <p:cNvPr id="7" name="Oval 6">
+              <p:cNvPr id="6" name="Oval 5">
                 <a:extLst>
                   <a:ext uri="{FF2B5EF4-FFF2-40B4-BE49-F238E27FC236}">
-                    <a16:creationId xmlns:a16="http://schemas.microsoft.com/office/drawing/2014/main" id="{8B9EF884-8B3D-F4A9-6A30-CAC5D0667234}"/>
+                    <a16:creationId xmlns:a16="http://schemas.microsoft.com/office/drawing/2014/main" id="{39AA798A-A19D-F3F2-A313-49DB5249194C}"/>
                   </a:ext>
                 </a:extLst>
               </p:cNvPr>
@@ -5772,7 +6420,7 @@
             </p:nvSpPr>
             <p:spPr>
               <a:xfrm>
-                <a:off x="4448435" y="3940237"/>
+                <a:off x="204692" y="2595992"/>
                 <a:ext cx="1475014" cy="1475014"/>
               </a:xfrm>
               <a:prstGeom prst="ellipse">
@@ -5840,13 +6488,13 @@
             </p:txBody>
           </p:sp>
         </mc:Choice>
-        <mc:Fallback xmlns="">
+        <mc:Fallback>
           <p:sp>
             <p:nvSpPr>
-              <p:cNvPr id="7" name="Oval 6">
+              <p:cNvPr id="6" name="Oval 5">
                 <a:extLst>
                   <a:ext uri="{FF2B5EF4-FFF2-40B4-BE49-F238E27FC236}">
-                    <a16:creationId xmlns:a16="http://schemas.microsoft.com/office/drawing/2014/main" id="{8B9EF884-8B3D-F4A9-6A30-CAC5D0667234}"/>
+                    <a16:creationId xmlns:a16="http://schemas.microsoft.com/office/drawing/2014/main" id="{39AA798A-A19D-F3F2-A313-49DB5249194C}"/>
                   </a:ext>
                 </a:extLst>
               </p:cNvPr>
@@ -5857,7 +6505,7 @@
             </p:nvSpPr>
             <p:spPr>
               <a:xfrm>
-                <a:off x="4448435" y="3940237"/>
+                <a:off x="204692" y="2595992"/>
                 <a:ext cx="1475014" cy="1475014"/>
               </a:xfrm>
               <a:prstGeom prst="ellipse">
@@ -5885,14 +6533,14 @@
           </p:sp>
         </mc:Fallback>
       </mc:AlternateContent>
-      <mc:AlternateContent xmlns:mc="http://schemas.openxmlformats.org/markup-compatibility/2006" xmlns:a14="http://schemas.microsoft.com/office/drawing/2010/main">
-        <mc:Choice Requires="a14">
+      <mc:AlternateContent xmlns:mc="http://schemas.openxmlformats.org/markup-compatibility/2006">
+        <mc:Choice xmlns:a14="http://schemas.microsoft.com/office/drawing/2010/main" Requires="a14">
           <p:sp>
             <p:nvSpPr>
-              <p:cNvPr id="8" name="Oval 7">
+              <p:cNvPr id="7" name="Oval 6">
                 <a:extLst>
                   <a:ext uri="{FF2B5EF4-FFF2-40B4-BE49-F238E27FC236}">
-                    <a16:creationId xmlns:a16="http://schemas.microsoft.com/office/drawing/2014/main" id="{BC029B68-B306-4DBE-1369-750AA06186EC}"/>
+                    <a16:creationId xmlns:a16="http://schemas.microsoft.com/office/drawing/2014/main" id="{DD73E4B9-8E8A-552C-34A1-4080D908C90E}"/>
                   </a:ext>
                 </a:extLst>
               </p:cNvPr>
@@ -5901,7 +6549,7 @@
             </p:nvSpPr>
             <p:spPr>
               <a:xfrm>
-                <a:off x="8933528" y="5252217"/>
+                <a:off x="4689785" y="3907972"/>
                 <a:ext cx="1475014" cy="1475014"/>
               </a:xfrm>
               <a:prstGeom prst="ellipse">
@@ -5969,13 +6617,13 @@
             </p:txBody>
           </p:sp>
         </mc:Choice>
-        <mc:Fallback xmlns="">
+        <mc:Fallback>
           <p:sp>
             <p:nvSpPr>
-              <p:cNvPr id="8" name="Oval 7">
+              <p:cNvPr id="7" name="Oval 6">
                 <a:extLst>
                   <a:ext uri="{FF2B5EF4-FFF2-40B4-BE49-F238E27FC236}">
-                    <a16:creationId xmlns:a16="http://schemas.microsoft.com/office/drawing/2014/main" id="{BC029B68-B306-4DBE-1369-750AA06186EC}"/>
+                    <a16:creationId xmlns:a16="http://schemas.microsoft.com/office/drawing/2014/main" id="{DD73E4B9-8E8A-552C-34A1-4080D908C90E}"/>
                   </a:ext>
                 </a:extLst>
               </p:cNvPr>
@@ -5986,7 +6634,7 @@
             </p:nvSpPr>
             <p:spPr>
               <a:xfrm>
-                <a:off x="8933528" y="5252217"/>
+                <a:off x="4689785" y="3907972"/>
                 <a:ext cx="1475014" cy="1475014"/>
               </a:xfrm>
               <a:prstGeom prst="ellipse">
@@ -6019,7 +6667,7 @@
           <p:cNvPr id="9" name="Straight Arrow Connector 8">
             <a:extLst>
               <a:ext uri="{FF2B5EF4-FFF2-40B4-BE49-F238E27FC236}">
-                <a16:creationId xmlns:a16="http://schemas.microsoft.com/office/drawing/2014/main" id="{83599C2D-7487-F199-EC96-17CF6E322C91}"/>
+                <a16:creationId xmlns:a16="http://schemas.microsoft.com/office/drawing/2014/main" id="{71003235-96CE-A80D-CEE7-535F902F946B}"/>
               </a:ext>
             </a:extLst>
           </p:cNvPr>
@@ -6028,7 +6676,917 @@
         </p:nvCxnSpPr>
         <p:spPr>
           <a:xfrm flipV="1">
-            <a:off x="8318738" y="3410104"/>
+            <a:off x="4074995" y="2065859"/>
+            <a:ext cx="932116" cy="724764"/>
+          </a:xfrm>
+          <a:prstGeom prst="straightConnector1">
+            <a:avLst/>
+          </a:prstGeom>
+          <a:ln w="38100">
+            <a:tailEnd type="triangle"/>
+          </a:ln>
+        </p:spPr>
+        <p:style>
+          <a:lnRef idx="2">
+            <a:schemeClr val="dk1"/>
+          </a:lnRef>
+          <a:fillRef idx="0">
+            <a:schemeClr val="dk1"/>
+          </a:fillRef>
+          <a:effectRef idx="1">
+            <a:schemeClr val="dk1"/>
+          </a:effectRef>
+          <a:fontRef idx="minor">
+            <a:schemeClr val="tx1"/>
+          </a:fontRef>
+        </p:style>
+      </p:cxnSp>
+      <p:cxnSp>
+        <p:nvCxnSpPr>
+          <p:cNvPr id="10" name="Straight Arrow Connector 9">
+            <a:extLst>
+              <a:ext uri="{FF2B5EF4-FFF2-40B4-BE49-F238E27FC236}">
+                <a16:creationId xmlns:a16="http://schemas.microsoft.com/office/drawing/2014/main" id="{D9538D4C-6F9E-9749-3A13-D7CBD057C5FD}"/>
+              </a:ext>
+            </a:extLst>
+          </p:cNvPr>
+          <p:cNvCxnSpPr>
+            <a:cxnSpLocks/>
+          </p:cNvCxnSpPr>
+          <p:nvPr/>
+        </p:nvCxnSpPr>
+        <p:spPr>
+          <a:xfrm flipH="1">
+            <a:off x="1679706" y="3312119"/>
+            <a:ext cx="1136286" cy="21380"/>
+          </a:xfrm>
+          <a:prstGeom prst="straightConnector1">
+            <a:avLst/>
+          </a:prstGeom>
+          <a:ln w="38100">
+            <a:tailEnd type="triangle"/>
+          </a:ln>
+        </p:spPr>
+        <p:style>
+          <a:lnRef idx="2">
+            <a:schemeClr val="dk1"/>
+          </a:lnRef>
+          <a:fillRef idx="0">
+            <a:schemeClr val="dk1"/>
+          </a:fillRef>
+          <a:effectRef idx="1">
+            <a:schemeClr val="dk1"/>
+          </a:effectRef>
+          <a:fontRef idx="minor">
+            <a:schemeClr val="tx1"/>
+          </a:fontRef>
+        </p:style>
+      </p:cxnSp>
+      <p:cxnSp>
+        <p:nvCxnSpPr>
+          <p:cNvPr id="11" name="Straight Arrow Connector 10">
+            <a:extLst>
+              <a:ext uri="{FF2B5EF4-FFF2-40B4-BE49-F238E27FC236}">
+                <a16:creationId xmlns:a16="http://schemas.microsoft.com/office/drawing/2014/main" id="{E54663D1-9C5F-5BD8-0A7A-71A942BADEB7}"/>
+              </a:ext>
+            </a:extLst>
+          </p:cNvPr>
+          <p:cNvCxnSpPr>
+            <a:cxnSpLocks/>
+          </p:cNvCxnSpPr>
+          <p:nvPr/>
+        </p:nvCxnSpPr>
+        <p:spPr>
+          <a:xfrm flipV="1">
+            <a:off x="1463695" y="1544363"/>
+            <a:ext cx="3327405" cy="1267640"/>
+          </a:xfrm>
+          <a:prstGeom prst="straightConnector1">
+            <a:avLst/>
+          </a:prstGeom>
+          <a:ln w="38100">
+            <a:tailEnd type="triangle"/>
+          </a:ln>
+        </p:spPr>
+        <p:style>
+          <a:lnRef idx="2">
+            <a:schemeClr val="dk1"/>
+          </a:lnRef>
+          <a:fillRef idx="0">
+            <a:schemeClr val="dk1"/>
+          </a:fillRef>
+          <a:effectRef idx="1">
+            <a:schemeClr val="dk1"/>
+          </a:effectRef>
+          <a:fontRef idx="minor">
+            <a:schemeClr val="tx1"/>
+          </a:fontRef>
+        </p:style>
+      </p:cxnSp>
+      <p:cxnSp>
+        <p:nvCxnSpPr>
+          <p:cNvPr id="12" name="Straight Arrow Connector 11">
+            <a:extLst>
+              <a:ext uri="{FF2B5EF4-FFF2-40B4-BE49-F238E27FC236}">
+                <a16:creationId xmlns:a16="http://schemas.microsoft.com/office/drawing/2014/main" id="{D4CF18EC-03C1-6B1F-AB72-0861228B3279}"/>
+              </a:ext>
+            </a:extLst>
+          </p:cNvPr>
+          <p:cNvCxnSpPr>
+            <a:cxnSpLocks/>
+          </p:cNvCxnSpPr>
+          <p:nvPr/>
+        </p:nvCxnSpPr>
+        <p:spPr>
+          <a:xfrm>
+            <a:off x="4074995" y="3833615"/>
+            <a:ext cx="830801" cy="290368"/>
+          </a:xfrm>
+          <a:prstGeom prst="straightConnector1">
+            <a:avLst/>
+          </a:prstGeom>
+          <a:ln w="38100">
+            <a:tailEnd type="triangle"/>
+          </a:ln>
+        </p:spPr>
+        <p:style>
+          <a:lnRef idx="2">
+            <a:schemeClr val="dk1"/>
+          </a:lnRef>
+          <a:fillRef idx="0">
+            <a:schemeClr val="dk1"/>
+          </a:fillRef>
+          <a:effectRef idx="1">
+            <a:schemeClr val="dk1"/>
+          </a:effectRef>
+          <a:fontRef idx="minor">
+            <a:schemeClr val="tx1"/>
+          </a:fontRef>
+        </p:style>
+      </p:cxnSp>
+      <p:cxnSp>
+        <p:nvCxnSpPr>
+          <p:cNvPr id="13" name="Straight Arrow Connector 12">
+            <a:extLst>
+              <a:ext uri="{FF2B5EF4-FFF2-40B4-BE49-F238E27FC236}">
+                <a16:creationId xmlns:a16="http://schemas.microsoft.com/office/drawing/2014/main" id="{99D4224E-F6CA-A1A6-BDB7-50851BA0DBBB}"/>
+              </a:ext>
+            </a:extLst>
+          </p:cNvPr>
+          <p:cNvCxnSpPr>
+            <a:cxnSpLocks/>
+          </p:cNvCxnSpPr>
+          <p:nvPr/>
+        </p:nvCxnSpPr>
+        <p:spPr>
+          <a:xfrm flipV="1">
+            <a:off x="5427292" y="2281870"/>
+            <a:ext cx="101315" cy="1626102"/>
+          </a:xfrm>
+          <a:prstGeom prst="straightConnector1">
+            <a:avLst/>
+          </a:prstGeom>
+          <a:ln w="38100">
+            <a:tailEnd type="triangle"/>
+          </a:ln>
+        </p:spPr>
+        <p:style>
+          <a:lnRef idx="2">
+            <a:schemeClr val="dk1"/>
+          </a:lnRef>
+          <a:fillRef idx="0">
+            <a:schemeClr val="dk1"/>
+          </a:fillRef>
+          <a:effectRef idx="1">
+            <a:schemeClr val="dk1"/>
+          </a:effectRef>
+          <a:fontRef idx="minor">
+            <a:schemeClr val="tx1"/>
+          </a:fontRef>
+        </p:style>
+      </p:cxnSp>
+      <mc:AlternateContent xmlns:mc="http://schemas.openxmlformats.org/markup-compatibility/2006">
+        <mc:Choice xmlns:a14="http://schemas.microsoft.com/office/drawing/2010/main" Requires="a14">
+          <p:sp>
+            <p:nvSpPr>
+              <p:cNvPr id="14" name="Oval 13">
+                <a:extLst>
+                  <a:ext uri="{FF2B5EF4-FFF2-40B4-BE49-F238E27FC236}">
+                    <a16:creationId xmlns:a16="http://schemas.microsoft.com/office/drawing/2014/main" id="{A46EBAA3-535D-681E-77CA-625E7F942B45}"/>
+                  </a:ext>
+                </a:extLst>
+              </p:cNvPr>
+              <p:cNvSpPr/>
+              <p:nvPr/>
+            </p:nvSpPr>
+            <p:spPr>
+              <a:xfrm>
+                <a:off x="1110820" y="67941"/>
+                <a:ext cx="1475014" cy="1475014"/>
+              </a:xfrm>
+              <a:prstGeom prst="ellipse">
+                <a:avLst/>
+              </a:prstGeom>
+              <a:solidFill>
+                <a:srgbClr val="FFC000"/>
+              </a:solidFill>
+            </p:spPr>
+            <p:style>
+              <a:lnRef idx="1">
+                <a:schemeClr val="dk1"/>
+              </a:lnRef>
+              <a:fillRef idx="2">
+                <a:schemeClr val="dk1"/>
+              </a:fillRef>
+              <a:effectRef idx="1">
+                <a:schemeClr val="dk1"/>
+              </a:effectRef>
+              <a:fontRef idx="minor">
+                <a:schemeClr val="dk1"/>
+              </a:fontRef>
+            </p:style>
+            <p:txBody>
+              <a:bodyPr rtlCol="0" anchor="ctr"/>
+              <a:lstStyle/>
+              <a:p>
+                <a:pPr algn="ctr"/>
+                <a14:m>
+                  <m:oMathPara xmlns:m="http://schemas.openxmlformats.org/officeDocument/2006/math">
+                    <m:oMathParaPr>
+                      <m:jc m:val="centerGroup"/>
+                    </m:oMathParaPr>
+                    <m:oMath xmlns:m="http://schemas.openxmlformats.org/officeDocument/2006/math">
+                      <m:r>
+                        <a:rPr lang="en-US" b="0" i="1" smtClean="0">
+                          <a:latin typeface="Cambria Math" panose="02040503050406030204" pitchFamily="18" charset="0"/>
+                        </a:rPr>
+                        <m:t>𝑆𝑡𝑎𝑡𝑢𝑠</m:t>
+                      </m:r>
+                    </m:oMath>
+                  </m:oMathPara>
+                </a14:m>
+                <a:endParaRPr lang="en-US" dirty="0"/>
+              </a:p>
+            </p:txBody>
+          </p:sp>
+        </mc:Choice>
+        <mc:Fallback>
+          <p:sp>
+            <p:nvSpPr>
+              <p:cNvPr id="14" name="Oval 13">
+                <a:extLst>
+                  <a:ext uri="{FF2B5EF4-FFF2-40B4-BE49-F238E27FC236}">
+                    <a16:creationId xmlns:a16="http://schemas.microsoft.com/office/drawing/2014/main" id="{A46EBAA3-535D-681E-77CA-625E7F942B45}"/>
+                  </a:ext>
+                </a:extLst>
+              </p:cNvPr>
+              <p:cNvSpPr>
+                <a:spLocks noRot="1" noChangeAspect="1" noMove="1" noResize="1" noEditPoints="1" noAdjustHandles="1" noChangeArrowheads="1" noChangeShapeType="1" noTextEdit="1"/>
+              </p:cNvSpPr>
+              <p:nvPr/>
+            </p:nvSpPr>
+            <p:spPr>
+              <a:xfrm>
+                <a:off x="1110820" y="67941"/>
+                <a:ext cx="1475014" cy="1475014"/>
+              </a:xfrm>
+              <a:prstGeom prst="ellipse">
+                <a:avLst/>
+              </a:prstGeom>
+              <a:blipFill>
+                <a:blip r:embed="rId6"/>
+                <a:stretch>
+                  <a:fillRect/>
+                </a:stretch>
+              </a:blipFill>
+            </p:spPr>
+            <p:txBody>
+              <a:bodyPr/>
+              <a:lstStyle/>
+              <a:p>
+                <a:r>
+                  <a:rPr lang="en-US">
+                    <a:noFill/>
+                  </a:rPr>
+                  <a:t> </a:t>
+                </a:r>
+              </a:p>
+            </p:txBody>
+          </p:sp>
+        </mc:Fallback>
+      </mc:AlternateContent>
+      <p:cxnSp>
+        <p:nvCxnSpPr>
+          <p:cNvPr id="15" name="Straight Arrow Connector 14">
+            <a:extLst>
+              <a:ext uri="{FF2B5EF4-FFF2-40B4-BE49-F238E27FC236}">
+                <a16:creationId xmlns:a16="http://schemas.microsoft.com/office/drawing/2014/main" id="{AEF27C45-5278-5DBF-4CF8-38E2504AD02F}"/>
+              </a:ext>
+            </a:extLst>
+          </p:cNvPr>
+          <p:cNvCxnSpPr>
+            <a:cxnSpLocks/>
+            <a:stCxn id="14" idx="6"/>
+            <a:endCxn id="5" idx="1"/>
+          </p:cNvCxnSpPr>
+          <p:nvPr/>
+        </p:nvCxnSpPr>
+        <p:spPr>
+          <a:xfrm>
+            <a:off x="2585834" y="805448"/>
+            <a:ext cx="2421277" cy="217419"/>
+          </a:xfrm>
+          <a:prstGeom prst="straightConnector1">
+            <a:avLst/>
+          </a:prstGeom>
+          <a:ln w="38100">
+            <a:tailEnd type="triangle"/>
+          </a:ln>
+        </p:spPr>
+        <p:style>
+          <a:lnRef idx="2">
+            <a:schemeClr val="dk1"/>
+          </a:lnRef>
+          <a:fillRef idx="0">
+            <a:schemeClr val="dk1"/>
+          </a:fillRef>
+          <a:effectRef idx="1">
+            <a:schemeClr val="dk1"/>
+          </a:effectRef>
+          <a:fontRef idx="minor">
+            <a:schemeClr val="tx1"/>
+          </a:fontRef>
+        </p:style>
+      </p:cxnSp>
+    </p:spTree>
+    <p:extLst>
+      <p:ext uri="{BB962C8B-B14F-4D97-AF65-F5344CB8AC3E}">
+        <p14:creationId xmlns:p14="http://schemas.microsoft.com/office/powerpoint/2010/main" val="2088084078"/>
+      </p:ext>
+    </p:extLst>
+  </p:cSld>
+  <p:clrMapOvr>
+    <a:masterClrMapping/>
+  </p:clrMapOvr>
+</p:sld>
+</file>
+
+<file path=ppt/slides/slide4.xml><?xml version="1.0" encoding="utf-8"?>
+<p:sld xmlns:a="http://schemas.openxmlformats.org/drawingml/2006/main" xmlns:r="http://schemas.openxmlformats.org/officeDocument/2006/relationships" xmlns:p="http://schemas.openxmlformats.org/presentationml/2006/main">
+  <p:cSld>
+    <p:spTree>
+      <p:nvGrpSpPr>
+        <p:cNvPr id="1" name=""/>
+        <p:cNvGrpSpPr/>
+        <p:nvPr/>
+      </p:nvGrpSpPr>
+      <p:grpSpPr>
+        <a:xfrm>
+          <a:off x="0" y="0"/>
+          <a:ext cx="0" cy="0"/>
+          <a:chOff x="0" y="0"/>
+          <a:chExt cx="0" cy="0"/>
+        </a:xfrm>
+      </p:grpSpPr>
+      <mc:AlternateContent xmlns:mc="http://schemas.openxmlformats.org/markup-compatibility/2006">
+        <mc:Choice xmlns:a14="http://schemas.microsoft.com/office/drawing/2010/main" Requires="a14">
+          <p:sp>
+            <p:nvSpPr>
+              <p:cNvPr id="5" name="Oval 4">
+                <a:extLst>
+                  <a:ext uri="{FF2B5EF4-FFF2-40B4-BE49-F238E27FC236}">
+                    <a16:creationId xmlns:a16="http://schemas.microsoft.com/office/drawing/2014/main" id="{56B47806-8DD3-D6EF-52BC-51985F431706}"/>
+                  </a:ext>
+                </a:extLst>
+              </p:cNvPr>
+              <p:cNvSpPr/>
+              <p:nvPr/>
+            </p:nvSpPr>
+            <p:spPr>
+              <a:xfrm>
+                <a:off x="2815992" y="2574612"/>
+                <a:ext cx="1475014" cy="1475014"/>
+              </a:xfrm>
+              <a:prstGeom prst="ellipse">
+                <a:avLst/>
+              </a:prstGeom>
+              <a:solidFill>
+                <a:schemeClr val="bg1">
+                  <a:lumMod val="85000"/>
+                </a:schemeClr>
+              </a:solidFill>
+            </p:spPr>
+            <p:style>
+              <a:lnRef idx="1">
+                <a:schemeClr val="dk1"/>
+              </a:lnRef>
+              <a:fillRef idx="2">
+                <a:schemeClr val="dk1"/>
+              </a:fillRef>
+              <a:effectRef idx="1">
+                <a:schemeClr val="dk1"/>
+              </a:effectRef>
+              <a:fontRef idx="minor">
+                <a:schemeClr val="dk1"/>
+              </a:fontRef>
+            </p:style>
+            <p:txBody>
+              <a:bodyPr rtlCol="0" anchor="ctr"/>
+              <a:lstStyle/>
+              <a:p>
+                <a:pPr algn="ctr"/>
+                <a14:m>
+                  <m:oMathPara xmlns:m="http://schemas.openxmlformats.org/officeDocument/2006/math">
+                    <m:oMathParaPr>
+                      <m:jc m:val="centerGroup"/>
+                    </m:oMathParaPr>
+                    <m:oMath xmlns:m="http://schemas.openxmlformats.org/officeDocument/2006/math">
+                      <m:r>
+                        <a:rPr lang="en-US" b="0" i="1" smtClean="0">
+                          <a:latin typeface="Cambria Math" panose="02040503050406030204" pitchFamily="18" charset="0"/>
+                        </a:rPr>
+                        <m:t>𝐵𝑎𝑡𝑡𝑒𝑟𝑦</m:t>
+                      </m:r>
+                    </m:oMath>
+                  </m:oMathPara>
+                </a14:m>
+                <a:endParaRPr lang="en-US" dirty="0"/>
+              </a:p>
+            </p:txBody>
+          </p:sp>
+        </mc:Choice>
+        <mc:Fallback>
+          <p:sp>
+            <p:nvSpPr>
+              <p:cNvPr id="5" name="Oval 4">
+                <a:extLst>
+                  <a:ext uri="{FF2B5EF4-FFF2-40B4-BE49-F238E27FC236}">
+                    <a16:creationId xmlns:a16="http://schemas.microsoft.com/office/drawing/2014/main" id="{56B47806-8DD3-D6EF-52BC-51985F431706}"/>
+                  </a:ext>
+                </a:extLst>
+              </p:cNvPr>
+              <p:cNvSpPr>
+                <a:spLocks noRot="1" noChangeAspect="1" noMove="1" noResize="1" noEditPoints="1" noAdjustHandles="1" noChangeArrowheads="1" noChangeShapeType="1" noTextEdit="1"/>
+              </p:cNvSpPr>
+              <p:nvPr/>
+            </p:nvSpPr>
+            <p:spPr>
+              <a:xfrm>
+                <a:off x="2815992" y="2574612"/>
+                <a:ext cx="1475014" cy="1475014"/>
+              </a:xfrm>
+              <a:prstGeom prst="ellipse">
+                <a:avLst/>
+              </a:prstGeom>
+              <a:blipFill>
+                <a:blip r:embed="rId2"/>
+                <a:stretch>
+                  <a:fillRect/>
+                </a:stretch>
+              </a:blipFill>
+            </p:spPr>
+            <p:txBody>
+              <a:bodyPr/>
+              <a:lstStyle/>
+              <a:p>
+                <a:r>
+                  <a:rPr lang="en-US">
+                    <a:noFill/>
+                  </a:rPr>
+                  <a:t> </a:t>
+                </a:r>
+              </a:p>
+            </p:txBody>
+          </p:sp>
+        </mc:Fallback>
+      </mc:AlternateContent>
+      <mc:AlternateContent xmlns:mc="http://schemas.openxmlformats.org/markup-compatibility/2006">
+        <mc:Choice xmlns:a14="http://schemas.microsoft.com/office/drawing/2010/main" Requires="a14">
+          <p:sp>
+            <p:nvSpPr>
+              <p:cNvPr id="6" name="Oval 5">
+                <a:extLst>
+                  <a:ext uri="{FF2B5EF4-FFF2-40B4-BE49-F238E27FC236}">
+                    <a16:creationId xmlns:a16="http://schemas.microsoft.com/office/drawing/2014/main" id="{C602610C-48C6-9A7F-6764-3DF54170D940}"/>
+                  </a:ext>
+                </a:extLst>
+              </p:cNvPr>
+              <p:cNvSpPr/>
+              <p:nvPr/>
+            </p:nvSpPr>
+            <p:spPr>
+              <a:xfrm>
+                <a:off x="4791100" y="806856"/>
+                <a:ext cx="1475014" cy="1475014"/>
+              </a:xfrm>
+              <a:prstGeom prst="ellipse">
+                <a:avLst/>
+              </a:prstGeom>
+              <a:solidFill>
+                <a:srgbClr val="9BCCF7"/>
+              </a:solidFill>
+            </p:spPr>
+            <p:style>
+              <a:lnRef idx="1">
+                <a:schemeClr val="dk1"/>
+              </a:lnRef>
+              <a:fillRef idx="2">
+                <a:schemeClr val="dk1"/>
+              </a:fillRef>
+              <a:effectRef idx="1">
+                <a:schemeClr val="dk1"/>
+              </a:effectRef>
+              <a:fontRef idx="minor">
+                <a:schemeClr val="dk1"/>
+              </a:fontRef>
+            </p:style>
+            <p:txBody>
+              <a:bodyPr rtlCol="0" anchor="ctr"/>
+              <a:lstStyle/>
+              <a:p>
+                <a:pPr algn="ctr"/>
+                <a14:m>
+                  <m:oMathPara xmlns:m="http://schemas.openxmlformats.org/officeDocument/2006/math">
+                    <m:oMathParaPr>
+                      <m:jc m:val="centerGroup"/>
+                    </m:oMathParaPr>
+                    <m:oMath xmlns:m="http://schemas.openxmlformats.org/officeDocument/2006/math">
+                      <m:sSub>
+                        <m:sSubPr>
+                          <m:ctrlPr>
+                            <a:rPr lang="en-US" b="0" i="1" smtClean="0">
+                              <a:latin typeface="Cambria Math" panose="02040503050406030204" pitchFamily="18" charset="0"/>
+                            </a:rPr>
+                          </m:ctrlPr>
+                        </m:sSubPr>
+                        <m:e>
+                          <m:r>
+                            <a:rPr lang="en-US" b="0" i="1" smtClean="0">
+                              <a:latin typeface="Cambria Math" panose="02040503050406030204" pitchFamily="18" charset="0"/>
+                            </a:rPr>
+                            <m:t>𝐹</m:t>
+                          </m:r>
+                        </m:e>
+                        <m:sub>
+                          <m:eqArr>
+                            <m:eqArrPr>
+                              <m:ctrlPr>
+                                <a:rPr lang="en-US" b="0" i="1" smtClean="0">
+                                  <a:latin typeface="Cambria Math" panose="02040503050406030204" pitchFamily="18" charset="0"/>
+                                </a:rPr>
+                              </m:ctrlPr>
+                            </m:eqArrPr>
+                            <m:e>
+                              <m:r>
+                                <a:rPr lang="en-US" b="0" i="1" smtClean="0">
+                                  <a:latin typeface="Cambria Math" panose="02040503050406030204" pitchFamily="18" charset="0"/>
+                                </a:rPr>
+                                <m:t>𝑝𝑟𝑜𝑣𝑖𝑑𝑒𝑠</m:t>
+                              </m:r>
+                              <m:r>
+                                <a:rPr lang="en-US" b="0" i="1" smtClean="0">
+                                  <a:latin typeface="Cambria Math" panose="02040503050406030204" pitchFamily="18" charset="0"/>
+                                </a:rPr>
+                                <m:t> </m:t>
+                              </m:r>
+                            </m:e>
+                            <m:e>
+                              <m:r>
+                                <a:rPr lang="en-US" b="0" i="1" smtClean="0">
+                                  <a:latin typeface="Cambria Math" panose="02040503050406030204" pitchFamily="18" charset="0"/>
+                                </a:rPr>
+                                <m:t>𝑐h𝑎𝑟𝑔𝑒</m:t>
+                              </m:r>
+                            </m:e>
+                          </m:eqArr>
+                        </m:sub>
+                      </m:sSub>
+                    </m:oMath>
+                  </m:oMathPara>
+                </a14:m>
+                <a:endParaRPr lang="en-US" dirty="0"/>
+              </a:p>
+            </p:txBody>
+          </p:sp>
+        </mc:Choice>
+        <mc:Fallback>
+          <p:sp>
+            <p:nvSpPr>
+              <p:cNvPr id="6" name="Oval 5">
+                <a:extLst>
+                  <a:ext uri="{FF2B5EF4-FFF2-40B4-BE49-F238E27FC236}">
+                    <a16:creationId xmlns:a16="http://schemas.microsoft.com/office/drawing/2014/main" id="{C602610C-48C6-9A7F-6764-3DF54170D940}"/>
+                  </a:ext>
+                </a:extLst>
+              </p:cNvPr>
+              <p:cNvSpPr>
+                <a:spLocks noRot="1" noChangeAspect="1" noMove="1" noResize="1" noEditPoints="1" noAdjustHandles="1" noChangeArrowheads="1" noChangeShapeType="1" noTextEdit="1"/>
+              </p:cNvSpPr>
+              <p:nvPr/>
+            </p:nvSpPr>
+            <p:spPr>
+              <a:xfrm>
+                <a:off x="4791100" y="806856"/>
+                <a:ext cx="1475014" cy="1475014"/>
+              </a:xfrm>
+              <a:prstGeom prst="ellipse">
+                <a:avLst/>
+              </a:prstGeom>
+              <a:blipFill>
+                <a:blip r:embed="rId3"/>
+                <a:stretch>
+                  <a:fillRect/>
+                </a:stretch>
+              </a:blipFill>
+            </p:spPr>
+            <p:txBody>
+              <a:bodyPr/>
+              <a:lstStyle/>
+              <a:p>
+                <a:r>
+                  <a:rPr lang="en-US">
+                    <a:noFill/>
+                  </a:rPr>
+                  <a:t> </a:t>
+                </a:r>
+              </a:p>
+            </p:txBody>
+          </p:sp>
+        </mc:Fallback>
+      </mc:AlternateContent>
+      <mc:AlternateContent xmlns:mc="http://schemas.openxmlformats.org/markup-compatibility/2006">
+        <mc:Choice xmlns:a14="http://schemas.microsoft.com/office/drawing/2010/main" Requires="a14">
+          <p:sp>
+            <p:nvSpPr>
+              <p:cNvPr id="7" name="Oval 6">
+                <a:extLst>
+                  <a:ext uri="{FF2B5EF4-FFF2-40B4-BE49-F238E27FC236}">
+                    <a16:creationId xmlns:a16="http://schemas.microsoft.com/office/drawing/2014/main" id="{8B9EF884-8B3D-F4A9-6A30-CAC5D0667234}"/>
+                  </a:ext>
+                </a:extLst>
+              </p:cNvPr>
+              <p:cNvSpPr/>
+              <p:nvPr/>
+            </p:nvSpPr>
+            <p:spPr>
+              <a:xfrm>
+                <a:off x="204692" y="2595992"/>
+                <a:ext cx="1475014" cy="1475014"/>
+              </a:xfrm>
+              <a:prstGeom prst="ellipse">
+                <a:avLst/>
+              </a:prstGeom>
+              <a:solidFill>
+                <a:srgbClr val="FFC000"/>
+              </a:solidFill>
+            </p:spPr>
+            <p:style>
+              <a:lnRef idx="1">
+                <a:schemeClr val="dk1"/>
+              </a:lnRef>
+              <a:fillRef idx="2">
+                <a:schemeClr val="dk1"/>
+              </a:fillRef>
+              <a:effectRef idx="1">
+                <a:schemeClr val="dk1"/>
+              </a:effectRef>
+              <a:fontRef idx="minor">
+                <a:schemeClr val="dk1"/>
+              </a:fontRef>
+            </p:style>
+            <p:txBody>
+              <a:bodyPr rtlCol="0" anchor="ctr"/>
+              <a:lstStyle/>
+              <a:p>
+                <a:pPr algn="ctr"/>
+                <a14:m>
+                  <m:oMathPara xmlns:m="http://schemas.openxmlformats.org/officeDocument/2006/math">
+                    <m:oMathParaPr>
+                      <m:jc m:val="centerGroup"/>
+                    </m:oMathParaPr>
+                    <m:oMath xmlns:m="http://schemas.openxmlformats.org/officeDocument/2006/math">
+                      <m:sSub>
+                        <m:sSubPr>
+                          <m:ctrlPr>
+                            <a:rPr lang="en-US" b="0" i="1" smtClean="0">
+                              <a:latin typeface="Cambria Math" panose="02040503050406030204" pitchFamily="18" charset="0"/>
+                            </a:rPr>
+                          </m:ctrlPr>
+                        </m:sSubPr>
+                        <m:e>
+                          <m:r>
+                            <a:rPr lang="en-US" b="0" i="1" smtClean="0">
+                              <a:latin typeface="Cambria Math" panose="02040503050406030204" pitchFamily="18" charset="0"/>
+                            </a:rPr>
+                            <m:t>𝐻</m:t>
+                          </m:r>
+                        </m:e>
+                        <m:sub>
+                          <m:r>
+                            <a:rPr lang="en-US" b="0" i="1" smtClean="0">
+                              <a:latin typeface="Cambria Math" panose="02040503050406030204" pitchFamily="18" charset="0"/>
+                            </a:rPr>
+                            <m:t>𝑏𝑎𝑡𝑡𝑒𝑟𝑦</m:t>
+                          </m:r>
+                        </m:sub>
+                      </m:sSub>
+                    </m:oMath>
+                  </m:oMathPara>
+                </a14:m>
+                <a:endParaRPr lang="en-US" dirty="0"/>
+              </a:p>
+            </p:txBody>
+          </p:sp>
+        </mc:Choice>
+        <mc:Fallback>
+          <p:sp>
+            <p:nvSpPr>
+              <p:cNvPr id="7" name="Oval 6">
+                <a:extLst>
+                  <a:ext uri="{FF2B5EF4-FFF2-40B4-BE49-F238E27FC236}">
+                    <a16:creationId xmlns:a16="http://schemas.microsoft.com/office/drawing/2014/main" id="{8B9EF884-8B3D-F4A9-6A30-CAC5D0667234}"/>
+                  </a:ext>
+                </a:extLst>
+              </p:cNvPr>
+              <p:cNvSpPr>
+                <a:spLocks noRot="1" noChangeAspect="1" noMove="1" noResize="1" noEditPoints="1" noAdjustHandles="1" noChangeArrowheads="1" noChangeShapeType="1" noTextEdit="1"/>
+              </p:cNvSpPr>
+              <p:nvPr/>
+            </p:nvSpPr>
+            <p:spPr>
+              <a:xfrm>
+                <a:off x="204692" y="2595992"/>
+                <a:ext cx="1475014" cy="1475014"/>
+              </a:xfrm>
+              <a:prstGeom prst="ellipse">
+                <a:avLst/>
+              </a:prstGeom>
+              <a:blipFill>
+                <a:blip r:embed="rId4"/>
+                <a:stretch>
+                  <a:fillRect/>
+                </a:stretch>
+              </a:blipFill>
+            </p:spPr>
+            <p:txBody>
+              <a:bodyPr/>
+              <a:lstStyle/>
+              <a:p>
+                <a:r>
+                  <a:rPr lang="en-US">
+                    <a:noFill/>
+                  </a:rPr>
+                  <a:t> </a:t>
+                </a:r>
+              </a:p>
+            </p:txBody>
+          </p:sp>
+        </mc:Fallback>
+      </mc:AlternateContent>
+      <mc:AlternateContent xmlns:mc="http://schemas.openxmlformats.org/markup-compatibility/2006">
+        <mc:Choice xmlns:a14="http://schemas.microsoft.com/office/drawing/2010/main" Requires="a14">
+          <p:sp>
+            <p:nvSpPr>
+              <p:cNvPr id="8" name="Oval 7">
+                <a:extLst>
+                  <a:ext uri="{FF2B5EF4-FFF2-40B4-BE49-F238E27FC236}">
+                    <a16:creationId xmlns:a16="http://schemas.microsoft.com/office/drawing/2014/main" id="{BC029B68-B306-4DBE-1369-750AA06186EC}"/>
+                  </a:ext>
+                </a:extLst>
+              </p:cNvPr>
+              <p:cNvSpPr/>
+              <p:nvPr/>
+            </p:nvSpPr>
+            <p:spPr>
+              <a:xfrm>
+                <a:off x="4689785" y="3907972"/>
+                <a:ext cx="1475014" cy="1475014"/>
+              </a:xfrm>
+              <a:prstGeom prst="ellipse">
+                <a:avLst/>
+              </a:prstGeom>
+              <a:solidFill>
+                <a:srgbClr val="FFC000"/>
+              </a:solidFill>
+            </p:spPr>
+            <p:style>
+              <a:lnRef idx="1">
+                <a:schemeClr val="dk1"/>
+              </a:lnRef>
+              <a:fillRef idx="2">
+                <a:schemeClr val="dk1"/>
+              </a:fillRef>
+              <a:effectRef idx="1">
+                <a:schemeClr val="dk1"/>
+              </a:effectRef>
+              <a:fontRef idx="minor">
+                <a:schemeClr val="dk1"/>
+              </a:fontRef>
+            </p:style>
+            <p:txBody>
+              <a:bodyPr rtlCol="0" anchor="ctr"/>
+              <a:lstStyle/>
+              <a:p>
+                <a:pPr algn="ctr"/>
+                <a14:m>
+                  <m:oMathPara xmlns:m="http://schemas.openxmlformats.org/officeDocument/2006/math">
+                    <m:oMathParaPr>
+                      <m:jc m:val="centerGroup"/>
+                    </m:oMathParaPr>
+                    <m:oMath xmlns:m="http://schemas.openxmlformats.org/officeDocument/2006/math">
+                      <m:sSub>
+                        <m:sSubPr>
+                          <m:ctrlPr>
+                            <a:rPr lang="en-US" b="0" i="1" smtClean="0">
+                              <a:latin typeface="Cambria Math" panose="02040503050406030204" pitchFamily="18" charset="0"/>
+                            </a:rPr>
+                          </m:ctrlPr>
+                        </m:sSubPr>
+                        <m:e>
+                          <m:r>
+                            <a:rPr lang="en-US" b="0" i="1" smtClean="0">
+                              <a:latin typeface="Cambria Math" panose="02040503050406030204" pitchFamily="18" charset="0"/>
+                            </a:rPr>
+                            <m:t>𝐶</m:t>
+                          </m:r>
+                        </m:e>
+                        <m:sub>
+                          <m:r>
+                            <a:rPr lang="en-US" b="0" i="1" smtClean="0">
+                              <a:latin typeface="Cambria Math" panose="02040503050406030204" pitchFamily="18" charset="0"/>
+                            </a:rPr>
+                            <m:t>𝑏𝑎𝑡𝑡𝑒𝑟𝑦</m:t>
+                          </m:r>
+                        </m:sub>
+                      </m:sSub>
+                    </m:oMath>
+                  </m:oMathPara>
+                </a14:m>
+                <a:endParaRPr lang="en-US" dirty="0"/>
+              </a:p>
+            </p:txBody>
+          </p:sp>
+        </mc:Choice>
+        <mc:Fallback>
+          <p:sp>
+            <p:nvSpPr>
+              <p:cNvPr id="8" name="Oval 7">
+                <a:extLst>
+                  <a:ext uri="{FF2B5EF4-FFF2-40B4-BE49-F238E27FC236}">
+                    <a16:creationId xmlns:a16="http://schemas.microsoft.com/office/drawing/2014/main" id="{BC029B68-B306-4DBE-1369-750AA06186EC}"/>
+                  </a:ext>
+                </a:extLst>
+              </p:cNvPr>
+              <p:cNvSpPr>
+                <a:spLocks noRot="1" noChangeAspect="1" noMove="1" noResize="1" noEditPoints="1" noAdjustHandles="1" noChangeArrowheads="1" noChangeShapeType="1" noTextEdit="1"/>
+              </p:cNvSpPr>
+              <p:nvPr/>
+            </p:nvSpPr>
+            <p:spPr>
+              <a:xfrm>
+                <a:off x="4689785" y="3907972"/>
+                <a:ext cx="1475014" cy="1475014"/>
+              </a:xfrm>
+              <a:prstGeom prst="ellipse">
+                <a:avLst/>
+              </a:prstGeom>
+              <a:blipFill>
+                <a:blip r:embed="rId5"/>
+                <a:stretch>
+                  <a:fillRect/>
+                </a:stretch>
+              </a:blipFill>
+            </p:spPr>
+            <p:txBody>
+              <a:bodyPr/>
+              <a:lstStyle/>
+              <a:p>
+                <a:r>
+                  <a:rPr lang="en-US">
+                    <a:noFill/>
+                  </a:rPr>
+                  <a:t> </a:t>
+                </a:r>
+              </a:p>
+            </p:txBody>
+          </p:sp>
+        </mc:Fallback>
+      </mc:AlternateContent>
+      <p:cxnSp>
+        <p:nvCxnSpPr>
+          <p:cNvPr id="9" name="Straight Arrow Connector 8">
+            <a:extLst>
+              <a:ext uri="{FF2B5EF4-FFF2-40B4-BE49-F238E27FC236}">
+                <a16:creationId xmlns:a16="http://schemas.microsoft.com/office/drawing/2014/main" id="{83599C2D-7487-F199-EC96-17CF6E322C91}"/>
+              </a:ext>
+            </a:extLst>
+          </p:cNvPr>
+          <p:cNvCxnSpPr/>
+          <p:nvPr/>
+        </p:nvCxnSpPr>
+        <p:spPr>
+          <a:xfrm flipV="1">
+            <a:off x="4074995" y="2065859"/>
             <a:ext cx="932116" cy="724764"/>
           </a:xfrm>
           <a:prstGeom prst="straightConnector1">
@@ -6069,7 +7627,7 @@
         </p:nvCxnSpPr>
         <p:spPr>
           <a:xfrm flipH="1">
-            <a:off x="5923449" y="4656364"/>
+            <a:off x="1679706" y="3312119"/>
             <a:ext cx="1136286" cy="21380"/>
           </a:xfrm>
           <a:prstGeom prst="straightConnector1">
@@ -6110,7 +7668,7 @@
         </p:nvCxnSpPr>
         <p:spPr>
           <a:xfrm flipV="1">
-            <a:off x="5707438" y="2888608"/>
+            <a:off x="1463695" y="1544363"/>
             <a:ext cx="3327405" cy="1267640"/>
           </a:xfrm>
           <a:prstGeom prst="straightConnector1">
@@ -6151,7 +7709,7 @@
         </p:nvCxnSpPr>
         <p:spPr>
           <a:xfrm>
-            <a:off x="8318738" y="5177860"/>
+            <a:off x="4074995" y="3833615"/>
             <a:ext cx="830801" cy="290368"/>
           </a:xfrm>
           <a:prstGeom prst="straightConnector1">
@@ -6192,7 +7750,7 @@
         </p:nvCxnSpPr>
         <p:spPr>
           <a:xfrm flipV="1">
-            <a:off x="9671035" y="3626115"/>
+            <a:off x="5427292" y="2281870"/>
             <a:ext cx="101315" cy="1626102"/>
           </a:xfrm>
           <a:prstGeom prst="straightConnector1">
@@ -6247,46 +7805,692 @@
           <a:p>
             <a:r>
               <a:rPr lang="en-US" dirty="0"/>
-              <a:t>8/11</a:t>
+              <a:t>9/12</a:t>
             </a:r>
           </a:p>
         </p:txBody>
       </p:sp>
-      <p:sp>
-        <p:nvSpPr>
-          <p:cNvPr id="2" name="TextBox 1">
-            <a:extLst>
-              <a:ext uri="{FF2B5EF4-FFF2-40B4-BE49-F238E27FC236}">
-                <a16:creationId xmlns:a16="http://schemas.microsoft.com/office/drawing/2014/main" id="{6F81E029-D0A5-3A9B-53FC-D9CCB023D9CD}"/>
-              </a:ext>
-            </a:extLst>
-          </p:cNvPr>
-          <p:cNvSpPr txBox="1"/>
+      <mc:AlternateContent xmlns:mc="http://schemas.openxmlformats.org/markup-compatibility/2006">
+        <mc:Choice xmlns:a14="http://schemas.microsoft.com/office/drawing/2010/main" Requires="a14">
+          <p:sp>
+            <p:nvSpPr>
+              <p:cNvPr id="3" name="Oval 2">
+                <a:extLst>
+                  <a:ext uri="{FF2B5EF4-FFF2-40B4-BE49-F238E27FC236}">
+                    <a16:creationId xmlns:a16="http://schemas.microsoft.com/office/drawing/2014/main" id="{CA80A870-FC59-6786-6F9A-584B72ACB926}"/>
+                  </a:ext>
+                </a:extLst>
+              </p:cNvPr>
+              <p:cNvSpPr/>
+              <p:nvPr/>
+            </p:nvSpPr>
+            <p:spPr>
+              <a:xfrm>
+                <a:off x="9245813" y="2281870"/>
+                <a:ext cx="1475014" cy="1475014"/>
+              </a:xfrm>
+              <a:prstGeom prst="ellipse">
+                <a:avLst/>
+              </a:prstGeom>
+              <a:solidFill>
+                <a:schemeClr val="bg1">
+                  <a:lumMod val="85000"/>
+                </a:schemeClr>
+              </a:solidFill>
+            </p:spPr>
+            <p:style>
+              <a:lnRef idx="1">
+                <a:schemeClr val="dk1"/>
+              </a:lnRef>
+              <a:fillRef idx="2">
+                <a:schemeClr val="dk1"/>
+              </a:fillRef>
+              <a:effectRef idx="1">
+                <a:schemeClr val="dk1"/>
+              </a:effectRef>
+              <a:fontRef idx="minor">
+                <a:schemeClr val="dk1"/>
+              </a:fontRef>
+            </p:style>
+            <p:txBody>
+              <a:bodyPr rtlCol="0" anchor="ctr"/>
+              <a:lstStyle/>
+              <a:p>
+                <a:pPr algn="ctr"/>
+                <a14:m>
+                  <m:oMathPara xmlns:m="http://schemas.openxmlformats.org/officeDocument/2006/math">
+                    <m:oMathParaPr>
+                      <m:jc m:val="centerGroup"/>
+                    </m:oMathParaPr>
+                    <m:oMath xmlns:m="http://schemas.openxmlformats.org/officeDocument/2006/math">
+                      <m:r>
+                        <a:rPr lang="en-US" b="0" i="1" smtClean="0">
+                          <a:latin typeface="Cambria Math" panose="02040503050406030204" pitchFamily="18" charset="0"/>
+                        </a:rPr>
+                        <m:t>𝐵𝐶𝐷𝑈</m:t>
+                      </m:r>
+                    </m:oMath>
+                  </m:oMathPara>
+                </a14:m>
+                <a:endParaRPr lang="en-US" dirty="0"/>
+              </a:p>
+            </p:txBody>
+          </p:sp>
+        </mc:Choice>
+        <mc:Fallback>
+          <p:sp>
+            <p:nvSpPr>
+              <p:cNvPr id="3" name="Oval 2">
+                <a:extLst>
+                  <a:ext uri="{FF2B5EF4-FFF2-40B4-BE49-F238E27FC236}">
+                    <a16:creationId xmlns:a16="http://schemas.microsoft.com/office/drawing/2014/main" id="{CA80A870-FC59-6786-6F9A-584B72ACB926}"/>
+                  </a:ext>
+                </a:extLst>
+              </p:cNvPr>
+              <p:cNvSpPr>
+                <a:spLocks noRot="1" noChangeAspect="1" noMove="1" noResize="1" noEditPoints="1" noAdjustHandles="1" noChangeArrowheads="1" noChangeShapeType="1" noTextEdit="1"/>
+              </p:cNvSpPr>
+              <p:nvPr/>
+            </p:nvSpPr>
+            <p:spPr>
+              <a:xfrm>
+                <a:off x="9245813" y="2281870"/>
+                <a:ext cx="1475014" cy="1475014"/>
+              </a:xfrm>
+              <a:prstGeom prst="ellipse">
+                <a:avLst/>
+              </a:prstGeom>
+              <a:blipFill>
+                <a:blip r:embed="rId6"/>
+                <a:stretch>
+                  <a:fillRect/>
+                </a:stretch>
+              </a:blipFill>
+            </p:spPr>
+            <p:txBody>
+              <a:bodyPr/>
+              <a:lstStyle/>
+              <a:p>
+                <a:r>
+                  <a:rPr lang="en-US">
+                    <a:noFill/>
+                  </a:rPr>
+                  <a:t> </a:t>
+                </a:r>
+              </a:p>
+            </p:txBody>
+          </p:sp>
+        </mc:Fallback>
+      </mc:AlternateContent>
+      <mc:AlternateContent xmlns:mc="http://schemas.openxmlformats.org/markup-compatibility/2006">
+        <mc:Choice xmlns:a14="http://schemas.microsoft.com/office/drawing/2010/main" Requires="a14">
+          <p:sp>
+            <p:nvSpPr>
+              <p:cNvPr id="4" name="Oval 3">
+                <a:extLst>
+                  <a:ext uri="{FF2B5EF4-FFF2-40B4-BE49-F238E27FC236}">
+                    <a16:creationId xmlns:a16="http://schemas.microsoft.com/office/drawing/2014/main" id="{19F10C0D-7CB2-8CE8-1F23-D2FAFB981907}"/>
+                  </a:ext>
+                </a:extLst>
+              </p:cNvPr>
+              <p:cNvSpPr/>
+              <p:nvPr/>
+            </p:nvSpPr>
+            <p:spPr>
+              <a:xfrm>
+                <a:off x="9245813" y="438103"/>
+                <a:ext cx="1475014" cy="1475014"/>
+              </a:xfrm>
+              <a:prstGeom prst="ellipse">
+                <a:avLst/>
+              </a:prstGeom>
+              <a:solidFill>
+                <a:srgbClr val="FFC000"/>
+              </a:solidFill>
+            </p:spPr>
+            <p:style>
+              <a:lnRef idx="1">
+                <a:schemeClr val="dk1"/>
+              </a:lnRef>
+              <a:fillRef idx="2">
+                <a:schemeClr val="dk1"/>
+              </a:fillRef>
+              <a:effectRef idx="1">
+                <a:schemeClr val="dk1"/>
+              </a:effectRef>
+              <a:fontRef idx="minor">
+                <a:schemeClr val="dk1"/>
+              </a:fontRef>
+            </p:style>
+            <p:txBody>
+              <a:bodyPr rtlCol="0" anchor="ctr"/>
+              <a:lstStyle/>
+              <a:p>
+                <a:pPr algn="ctr"/>
+                <a14:m>
+                  <m:oMathPara xmlns:m="http://schemas.openxmlformats.org/officeDocument/2006/math">
+                    <m:oMathParaPr>
+                      <m:jc m:val="centerGroup"/>
+                    </m:oMathParaPr>
+                    <m:oMath xmlns:m="http://schemas.openxmlformats.org/officeDocument/2006/math">
+                      <m:sSub>
+                        <m:sSubPr>
+                          <m:ctrlPr>
+                            <a:rPr lang="en-US" b="0" i="1" smtClean="0">
+                              <a:latin typeface="Cambria Math" panose="02040503050406030204" pitchFamily="18" charset="0"/>
+                            </a:rPr>
+                          </m:ctrlPr>
+                        </m:sSubPr>
+                        <m:e>
+                          <m:r>
+                            <a:rPr lang="en-US" b="0" i="1" smtClean="0">
+                              <a:latin typeface="Cambria Math" panose="02040503050406030204" pitchFamily="18" charset="0"/>
+                            </a:rPr>
+                            <m:t>𝐻</m:t>
+                          </m:r>
+                        </m:e>
+                        <m:sub>
+                          <m:r>
+                            <a:rPr lang="en-US" b="0" i="1" smtClean="0">
+                              <a:latin typeface="Cambria Math" panose="02040503050406030204" pitchFamily="18" charset="0"/>
+                            </a:rPr>
+                            <m:t>𝐵𝐶𝐷𝑈</m:t>
+                          </m:r>
+                          <m:r>
+                            <a:rPr lang="en-US" b="0" i="1" smtClean="0">
+                              <a:latin typeface="Cambria Math" panose="02040503050406030204" pitchFamily="18" charset="0"/>
+                            </a:rPr>
+                            <m:t> </m:t>
+                          </m:r>
+                        </m:sub>
+                      </m:sSub>
+                    </m:oMath>
+                  </m:oMathPara>
+                </a14:m>
+                <a:endParaRPr lang="en-US" dirty="0"/>
+              </a:p>
+            </p:txBody>
+          </p:sp>
+        </mc:Choice>
+        <mc:Fallback>
+          <p:sp>
+            <p:nvSpPr>
+              <p:cNvPr id="4" name="Oval 3">
+                <a:extLst>
+                  <a:ext uri="{FF2B5EF4-FFF2-40B4-BE49-F238E27FC236}">
+                    <a16:creationId xmlns:a16="http://schemas.microsoft.com/office/drawing/2014/main" id="{19F10C0D-7CB2-8CE8-1F23-D2FAFB981907}"/>
+                  </a:ext>
+                </a:extLst>
+              </p:cNvPr>
+              <p:cNvSpPr>
+                <a:spLocks noRot="1" noChangeAspect="1" noMove="1" noResize="1" noEditPoints="1" noAdjustHandles="1" noChangeArrowheads="1" noChangeShapeType="1" noTextEdit="1"/>
+              </p:cNvSpPr>
+              <p:nvPr/>
+            </p:nvSpPr>
+            <p:spPr>
+              <a:xfrm>
+                <a:off x="9245813" y="438103"/>
+                <a:ext cx="1475014" cy="1475014"/>
+              </a:xfrm>
+              <a:prstGeom prst="ellipse">
+                <a:avLst/>
+              </a:prstGeom>
+              <a:blipFill>
+                <a:blip r:embed="rId7"/>
+                <a:stretch>
+                  <a:fillRect/>
+                </a:stretch>
+              </a:blipFill>
+            </p:spPr>
+            <p:txBody>
+              <a:bodyPr/>
+              <a:lstStyle/>
+              <a:p>
+                <a:r>
+                  <a:rPr lang="en-US">
+                    <a:noFill/>
+                  </a:rPr>
+                  <a:t> </a:t>
+                </a:r>
+              </a:p>
+            </p:txBody>
+          </p:sp>
+        </mc:Fallback>
+      </mc:AlternateContent>
+      <p:cxnSp>
+        <p:nvCxnSpPr>
+          <p:cNvPr id="20" name="Straight Arrow Connector 19">
+            <a:extLst>
+              <a:ext uri="{FF2B5EF4-FFF2-40B4-BE49-F238E27FC236}">
+                <a16:creationId xmlns:a16="http://schemas.microsoft.com/office/drawing/2014/main" id="{A2CE73F0-465B-22B9-D9BD-500C544A2FB2}"/>
+              </a:ext>
+            </a:extLst>
+          </p:cNvPr>
+          <p:cNvCxnSpPr>
+            <a:cxnSpLocks/>
+            <a:stCxn id="3" idx="0"/>
+          </p:cNvCxnSpPr>
           <p:nvPr/>
-        </p:nvSpPr>
+        </p:nvCxnSpPr>
+        <p:spPr>
+          <a:xfrm flipV="1">
+            <a:off x="9983320" y="1913318"/>
+            <a:ext cx="0" cy="368552"/>
+          </a:xfrm>
+          <a:prstGeom prst="straightConnector1">
+            <a:avLst/>
+          </a:prstGeom>
+          <a:ln>
+            <a:tailEnd type="triangle"/>
+          </a:ln>
+        </p:spPr>
+        <p:style>
+          <a:lnRef idx="2">
+            <a:schemeClr val="dk1"/>
+          </a:lnRef>
+          <a:fillRef idx="0">
+            <a:schemeClr val="dk1"/>
+          </a:fillRef>
+          <a:effectRef idx="1">
+            <a:schemeClr val="dk1"/>
+          </a:effectRef>
+          <a:fontRef idx="minor">
+            <a:schemeClr val="tx1"/>
+          </a:fontRef>
+        </p:style>
+      </p:cxnSp>
+      <mc:AlternateContent xmlns:mc="http://schemas.openxmlformats.org/markup-compatibility/2006">
+        <mc:Choice xmlns:a14="http://schemas.microsoft.com/office/drawing/2010/main" Requires="a14">
+          <p:sp>
+            <p:nvSpPr>
+              <p:cNvPr id="24" name="Oval 23">
+                <a:extLst>
+                  <a:ext uri="{FF2B5EF4-FFF2-40B4-BE49-F238E27FC236}">
+                    <a16:creationId xmlns:a16="http://schemas.microsoft.com/office/drawing/2014/main" id="{0E02795E-207B-DC74-4DD2-C2F5D9A8558F}"/>
+                  </a:ext>
+                </a:extLst>
+              </p:cNvPr>
+              <p:cNvSpPr/>
+              <p:nvPr/>
+            </p:nvSpPr>
+            <p:spPr>
+              <a:xfrm>
+                <a:off x="1110820" y="67941"/>
+                <a:ext cx="1475014" cy="1475014"/>
+              </a:xfrm>
+              <a:prstGeom prst="ellipse">
+                <a:avLst/>
+              </a:prstGeom>
+              <a:solidFill>
+                <a:srgbClr val="FFC000"/>
+              </a:solidFill>
+            </p:spPr>
+            <p:style>
+              <a:lnRef idx="1">
+                <a:schemeClr val="dk1"/>
+              </a:lnRef>
+              <a:fillRef idx="2">
+                <a:schemeClr val="dk1"/>
+              </a:fillRef>
+              <a:effectRef idx="1">
+                <a:schemeClr val="dk1"/>
+              </a:effectRef>
+              <a:fontRef idx="minor">
+                <a:schemeClr val="dk1"/>
+              </a:fontRef>
+            </p:style>
+            <p:txBody>
+              <a:bodyPr rtlCol="0" anchor="ctr"/>
+              <a:lstStyle/>
+              <a:p>
+                <a:pPr algn="ctr"/>
+                <a14:m>
+                  <m:oMathPara xmlns:m="http://schemas.openxmlformats.org/officeDocument/2006/math">
+                    <m:oMathParaPr>
+                      <m:jc m:val="centerGroup"/>
+                    </m:oMathParaPr>
+                    <m:oMath xmlns:m="http://schemas.openxmlformats.org/officeDocument/2006/math">
+                      <m:r>
+                        <a:rPr lang="en-US" b="0" i="1" smtClean="0">
+                          <a:latin typeface="Cambria Math" panose="02040503050406030204" pitchFamily="18" charset="0"/>
+                        </a:rPr>
+                        <m:t>𝑆𝑡𝑎𝑡𝑢𝑠</m:t>
+                      </m:r>
+                    </m:oMath>
+                  </m:oMathPara>
+                </a14:m>
+                <a:endParaRPr lang="en-US" dirty="0"/>
+              </a:p>
+            </p:txBody>
+          </p:sp>
+        </mc:Choice>
+        <mc:Fallback>
+          <p:sp>
+            <p:nvSpPr>
+              <p:cNvPr id="24" name="Oval 23">
+                <a:extLst>
+                  <a:ext uri="{FF2B5EF4-FFF2-40B4-BE49-F238E27FC236}">
+                    <a16:creationId xmlns:a16="http://schemas.microsoft.com/office/drawing/2014/main" id="{0E02795E-207B-DC74-4DD2-C2F5D9A8558F}"/>
+                  </a:ext>
+                </a:extLst>
+              </p:cNvPr>
+              <p:cNvSpPr>
+                <a:spLocks noRot="1" noChangeAspect="1" noMove="1" noResize="1" noEditPoints="1" noAdjustHandles="1" noChangeArrowheads="1" noChangeShapeType="1" noTextEdit="1"/>
+              </p:cNvSpPr>
+              <p:nvPr/>
+            </p:nvSpPr>
+            <p:spPr>
+              <a:xfrm>
+                <a:off x="1110820" y="67941"/>
+                <a:ext cx="1475014" cy="1475014"/>
+              </a:xfrm>
+              <a:prstGeom prst="ellipse">
+                <a:avLst/>
+              </a:prstGeom>
+              <a:blipFill>
+                <a:blip r:embed="rId8"/>
+                <a:stretch>
+                  <a:fillRect/>
+                </a:stretch>
+              </a:blipFill>
+            </p:spPr>
+            <p:txBody>
+              <a:bodyPr/>
+              <a:lstStyle/>
+              <a:p>
+                <a:r>
+                  <a:rPr lang="en-US">
+                    <a:noFill/>
+                  </a:rPr>
+                  <a:t> </a:t>
+                </a:r>
+              </a:p>
+            </p:txBody>
+          </p:sp>
+        </mc:Fallback>
+      </mc:AlternateContent>
+      <p:cxnSp>
+        <p:nvCxnSpPr>
+          <p:cNvPr id="25" name="Straight Arrow Connector 24">
+            <a:extLst>
+              <a:ext uri="{FF2B5EF4-FFF2-40B4-BE49-F238E27FC236}">
+                <a16:creationId xmlns:a16="http://schemas.microsoft.com/office/drawing/2014/main" id="{D06981A6-54DE-0F35-E9FD-22358C90B6C2}"/>
+              </a:ext>
+            </a:extLst>
+          </p:cNvPr>
+          <p:cNvCxnSpPr>
+            <a:cxnSpLocks/>
+            <a:stCxn id="24" idx="6"/>
+          </p:cNvCxnSpPr>
+          <p:nvPr/>
+        </p:nvCxnSpPr>
         <p:spPr>
           <a:xfrm>
-            <a:off x="870857" y="1001486"/>
-            <a:ext cx="1015278" cy="369332"/>
+            <a:off x="2585834" y="805448"/>
+            <a:ext cx="2421277" cy="217419"/>
           </a:xfrm>
-          <a:prstGeom prst="rect">
+          <a:prstGeom prst="straightConnector1">
             <a:avLst/>
           </a:prstGeom>
-          <a:noFill/>
+          <a:ln w="38100">
+            <a:tailEnd type="triangle"/>
+          </a:ln>
         </p:spPr>
-        <p:txBody>
-          <a:bodyPr wrap="none" rtlCol="0">
-            <a:spAutoFit/>
-          </a:bodyPr>
-          <a:lstStyle/>
-          <a:p>
-            <a:r>
-              <a:rPr lang="en-US" dirty="0"/>
-              <a:t>Battery! </a:t>
-            </a:r>
-          </a:p>
-        </p:txBody>
-      </p:sp>
+        <p:style>
+          <a:lnRef idx="2">
+            <a:schemeClr val="dk1"/>
+          </a:lnRef>
+          <a:fillRef idx="0">
+            <a:schemeClr val="dk1"/>
+          </a:fillRef>
+          <a:effectRef idx="1">
+            <a:schemeClr val="dk1"/>
+          </a:effectRef>
+          <a:fontRef idx="minor">
+            <a:schemeClr val="tx1"/>
+          </a:fontRef>
+        </p:style>
+      </p:cxnSp>
+      <mc:AlternateContent xmlns:mc="http://schemas.openxmlformats.org/markup-compatibility/2006">
+        <mc:Choice xmlns:a14="http://schemas.microsoft.com/office/drawing/2010/main" Requires="a14">
+          <p:sp>
+            <p:nvSpPr>
+              <p:cNvPr id="34" name="Oval 33">
+                <a:extLst>
+                  <a:ext uri="{FF2B5EF4-FFF2-40B4-BE49-F238E27FC236}">
+                    <a16:creationId xmlns:a16="http://schemas.microsoft.com/office/drawing/2014/main" id="{B665E5FE-49FF-ECB8-4D3A-56A02CE55A94}"/>
+                  </a:ext>
+                </a:extLst>
+              </p:cNvPr>
+              <p:cNvSpPr/>
+              <p:nvPr/>
+            </p:nvSpPr>
+            <p:spPr>
+              <a:xfrm>
+                <a:off x="7018457" y="3241292"/>
+                <a:ext cx="1475014" cy="1475014"/>
+              </a:xfrm>
+              <a:prstGeom prst="ellipse">
+                <a:avLst/>
+              </a:prstGeom>
+              <a:solidFill>
+                <a:srgbClr val="9BCCF7"/>
+              </a:solidFill>
+            </p:spPr>
+            <p:style>
+              <a:lnRef idx="1">
+                <a:schemeClr val="dk1"/>
+              </a:lnRef>
+              <a:fillRef idx="2">
+                <a:schemeClr val="dk1"/>
+              </a:fillRef>
+              <a:effectRef idx="1">
+                <a:schemeClr val="dk1"/>
+              </a:effectRef>
+              <a:fontRef idx="minor">
+                <a:schemeClr val="dk1"/>
+              </a:fontRef>
+            </p:style>
+            <p:txBody>
+              <a:bodyPr rtlCol="0" anchor="ctr"/>
+              <a:lstStyle/>
+              <a:p>
+                <a:pPr algn="ctr"/>
+                <a14:m>
+                  <m:oMathPara xmlns:m="http://schemas.openxmlformats.org/officeDocument/2006/math">
+                    <m:oMathParaPr>
+                      <m:jc m:val="centerGroup"/>
+                    </m:oMathParaPr>
+                    <m:oMath xmlns:m="http://schemas.openxmlformats.org/officeDocument/2006/math">
+                      <m:sSub>
+                        <m:sSubPr>
+                          <m:ctrlPr>
+                            <a:rPr lang="en-US" b="0" i="1" smtClean="0">
+                              <a:latin typeface="Cambria Math" panose="02040503050406030204" pitchFamily="18" charset="0"/>
+                            </a:rPr>
+                          </m:ctrlPr>
+                        </m:sSubPr>
+                        <m:e>
+                          <m:r>
+                            <a:rPr lang="en-US" b="0" i="1" smtClean="0">
+                              <a:latin typeface="Cambria Math" panose="02040503050406030204" pitchFamily="18" charset="0"/>
+                            </a:rPr>
+                            <m:t>𝐹</m:t>
+                          </m:r>
+                        </m:e>
+                        <m:sub>
+                          <m:eqArr>
+                            <m:eqArrPr>
+                              <m:ctrlPr>
+                                <a:rPr lang="en-US" b="0" i="1" smtClean="0">
+                                  <a:latin typeface="Cambria Math" panose="02040503050406030204" pitchFamily="18" charset="0"/>
+                                </a:rPr>
+                              </m:ctrlPr>
+                            </m:eqArrPr>
+                            <m:e>
+                              <m:r>
+                                <a:rPr lang="en-US" b="0" i="1" smtClean="0">
+                                  <a:latin typeface="Cambria Math" panose="02040503050406030204" pitchFamily="18" charset="0"/>
+                                </a:rPr>
+                                <m:t>𝑟𝑒𝑔𝑢𝑙𝑎𝑡𝑒𝑠</m:t>
+                              </m:r>
+                              <m:r>
+                                <a:rPr lang="en-US" b="0" i="1" smtClean="0">
+                                  <a:latin typeface="Cambria Math" panose="02040503050406030204" pitchFamily="18" charset="0"/>
+                                </a:rPr>
+                                <m:t> </m:t>
+                              </m:r>
+                            </m:e>
+                            <m:e>
+                              <m:r>
+                                <a:rPr lang="en-US" b="0" i="1" smtClean="0">
+                                  <a:latin typeface="Cambria Math" panose="02040503050406030204" pitchFamily="18" charset="0"/>
+                                </a:rPr>
+                                <m:t>𝑐h𝑎𝑟𝑔𝑒</m:t>
+                              </m:r>
+                            </m:e>
+                          </m:eqArr>
+                        </m:sub>
+                      </m:sSub>
+                    </m:oMath>
+                  </m:oMathPara>
+                </a14:m>
+                <a:endParaRPr lang="en-US" dirty="0"/>
+              </a:p>
+            </p:txBody>
+          </p:sp>
+        </mc:Choice>
+        <mc:Fallback>
+          <p:sp>
+            <p:nvSpPr>
+              <p:cNvPr id="34" name="Oval 33">
+                <a:extLst>
+                  <a:ext uri="{FF2B5EF4-FFF2-40B4-BE49-F238E27FC236}">
+                    <a16:creationId xmlns:a16="http://schemas.microsoft.com/office/drawing/2014/main" id="{B665E5FE-49FF-ECB8-4D3A-56A02CE55A94}"/>
+                  </a:ext>
+                </a:extLst>
+              </p:cNvPr>
+              <p:cNvSpPr>
+                <a:spLocks noRot="1" noChangeAspect="1" noMove="1" noResize="1" noEditPoints="1" noAdjustHandles="1" noChangeArrowheads="1" noChangeShapeType="1" noTextEdit="1"/>
+              </p:cNvSpPr>
+              <p:nvPr/>
+            </p:nvSpPr>
+            <p:spPr>
+              <a:xfrm>
+                <a:off x="7018457" y="3241292"/>
+                <a:ext cx="1475014" cy="1475014"/>
+              </a:xfrm>
+              <a:prstGeom prst="ellipse">
+                <a:avLst/>
+              </a:prstGeom>
+              <a:blipFill>
+                <a:blip r:embed="rId9"/>
+                <a:stretch>
+                  <a:fillRect/>
+                </a:stretch>
+              </a:blipFill>
+            </p:spPr>
+            <p:txBody>
+              <a:bodyPr/>
+              <a:lstStyle/>
+              <a:p>
+                <a:r>
+                  <a:rPr lang="en-US">
+                    <a:noFill/>
+                  </a:rPr>
+                  <a:t> </a:t>
+                </a:r>
+              </a:p>
+            </p:txBody>
+          </p:sp>
+        </mc:Fallback>
+      </mc:AlternateContent>
+      <p:cxnSp>
+        <p:nvCxnSpPr>
+          <p:cNvPr id="36" name="Straight Arrow Connector 35">
+            <a:extLst>
+              <a:ext uri="{FF2B5EF4-FFF2-40B4-BE49-F238E27FC236}">
+                <a16:creationId xmlns:a16="http://schemas.microsoft.com/office/drawing/2014/main" id="{D25AF298-D86A-9F2D-4B12-A9696DE9AE03}"/>
+              </a:ext>
+            </a:extLst>
+          </p:cNvPr>
+          <p:cNvCxnSpPr>
+            <a:cxnSpLocks/>
+            <a:stCxn id="3" idx="3"/>
+            <a:endCxn id="34" idx="6"/>
+          </p:cNvCxnSpPr>
+          <p:nvPr/>
+        </p:nvCxnSpPr>
+        <p:spPr>
+          <a:xfrm flipH="1">
+            <a:off x="8493471" y="3540873"/>
+            <a:ext cx="968353" cy="437926"/>
+          </a:xfrm>
+          <a:prstGeom prst="straightConnector1">
+            <a:avLst/>
+          </a:prstGeom>
+          <a:ln>
+            <a:tailEnd type="triangle"/>
+          </a:ln>
+        </p:spPr>
+        <p:style>
+          <a:lnRef idx="2">
+            <a:schemeClr val="dk1"/>
+          </a:lnRef>
+          <a:fillRef idx="0">
+            <a:schemeClr val="dk1"/>
+          </a:fillRef>
+          <a:effectRef idx="1">
+            <a:schemeClr val="dk1"/>
+          </a:effectRef>
+          <a:fontRef idx="minor">
+            <a:schemeClr val="tx1"/>
+          </a:fontRef>
+        </p:style>
+      </p:cxnSp>
+      <p:cxnSp>
+        <p:nvCxnSpPr>
+          <p:cNvPr id="39" name="Straight Arrow Connector 38">
+            <a:extLst>
+              <a:ext uri="{FF2B5EF4-FFF2-40B4-BE49-F238E27FC236}">
+                <a16:creationId xmlns:a16="http://schemas.microsoft.com/office/drawing/2014/main" id="{CEFE9B0A-0D66-1F17-BFAC-B5DE2D356300}"/>
+              </a:ext>
+            </a:extLst>
+          </p:cNvPr>
+          <p:cNvCxnSpPr>
+            <a:cxnSpLocks/>
+            <a:stCxn id="34" idx="3"/>
+            <a:endCxn id="8" idx="6"/>
+          </p:cNvCxnSpPr>
+          <p:nvPr/>
+        </p:nvCxnSpPr>
+        <p:spPr>
+          <a:xfrm flipH="1">
+            <a:off x="6164799" y="4500295"/>
+            <a:ext cx="1069669" cy="145184"/>
+          </a:xfrm>
+          <a:prstGeom prst="straightConnector1">
+            <a:avLst/>
+          </a:prstGeom>
+          <a:ln>
+            <a:tailEnd type="triangle"/>
+          </a:ln>
+        </p:spPr>
+        <p:style>
+          <a:lnRef idx="2">
+            <a:schemeClr val="dk1"/>
+          </a:lnRef>
+          <a:fillRef idx="0">
+            <a:schemeClr val="dk1"/>
+          </a:fillRef>
+          <a:effectRef idx="1">
+            <a:schemeClr val="dk1"/>
+          </a:effectRef>
+          <a:fontRef idx="minor">
+            <a:schemeClr val="tx1"/>
+          </a:fontRef>
+        </p:style>
+      </p:cxnSp>
     </p:spTree>
     <p:extLst>
       <p:ext uri="{BB962C8B-B14F-4D97-AF65-F5344CB8AC3E}">
@@ -6300,7 +8504,7 @@
 </p:sld>
 </file>
 
-<file path=ppt/slides/slide4.xml><?xml version="1.0" encoding="utf-8"?>
+<file path=ppt/slides/slide5.xml><?xml version="1.0" encoding="utf-8"?>
 <p:sld xmlns:a="http://schemas.openxmlformats.org/drawingml/2006/main" xmlns:r="http://schemas.openxmlformats.org/officeDocument/2006/relationships" xmlns:p="http://schemas.openxmlformats.org/presentationml/2006/main">
   <p:cSld>
     <p:spTree>
@@ -9892,7 +12096,7 @@
 </p:sld>
 </file>
 
-<file path=ppt/slides/slide5.xml><?xml version="1.0" encoding="utf-8"?>
+<file path=ppt/slides/slide6.xml><?xml version="1.0" encoding="utf-8"?>
 <p:sld xmlns:a="http://schemas.openxmlformats.org/drawingml/2006/main" xmlns:r="http://schemas.openxmlformats.org/officeDocument/2006/relationships" xmlns:p="http://schemas.openxmlformats.org/presentationml/2006/main">
   <p:cSld>
     <p:spTree>
@@ -9925,7 +12129,7 @@
             </p:nvSpPr>
             <p:spPr>
               <a:xfrm>
-                <a:off x="3105573" y="3918857"/>
+                <a:off x="4932021" y="4815618"/>
                 <a:ext cx="1475014" cy="1475014"/>
               </a:xfrm>
               <a:prstGeom prst="ellipse">
@@ -10005,7 +12209,7 @@
             </p:nvSpPr>
             <p:spPr>
               <a:xfrm>
-                <a:off x="3105573" y="3918857"/>
+                <a:off x="4932021" y="4815618"/>
                 <a:ext cx="1475014" cy="1475014"/>
               </a:xfrm>
               <a:prstGeom prst="ellipse">
@@ -10033,8 +12237,8 @@
           </p:sp>
         </mc:Fallback>
       </mc:AlternateContent>
-      <mc:AlternateContent xmlns:mc="http://schemas.openxmlformats.org/markup-compatibility/2006">
-        <mc:Choice xmlns:a14="http://schemas.microsoft.com/office/drawing/2010/main" Requires="a14">
+      <mc:AlternateContent xmlns:mc="http://schemas.openxmlformats.org/markup-compatibility/2006" xmlns:a14="http://schemas.microsoft.com/office/drawing/2010/main">
+        <mc:Choice Requires="a14">
           <p:sp>
             <p:nvSpPr>
               <p:cNvPr id="6" name="Oval 5">
@@ -10117,7 +12321,7 @@
             </p:txBody>
           </p:sp>
         </mc:Choice>
-        <mc:Fallback>
+        <mc:Fallback xmlns="">
           <p:sp>
             <p:nvSpPr>
               <p:cNvPr id="6" name="Oval 5">
@@ -10178,7 +12382,7 @@
             </p:nvSpPr>
             <p:spPr>
               <a:xfrm>
-                <a:off x="494273" y="3940237"/>
+                <a:off x="554343" y="2108325"/>
                 <a:ext cx="1475014" cy="1475014"/>
               </a:xfrm>
               <a:prstGeom prst="ellipse">
@@ -10263,7 +12467,7 @@
             </p:nvSpPr>
             <p:spPr>
               <a:xfrm>
-                <a:off x="494273" y="3940237"/>
+                <a:off x="554343" y="2108325"/>
                 <a:ext cx="1475014" cy="1475014"/>
               </a:xfrm>
               <a:prstGeom prst="ellipse">
@@ -10307,7 +12511,7 @@
             </p:nvSpPr>
             <p:spPr>
               <a:xfrm>
-                <a:off x="4979366" y="5252217"/>
+                <a:off x="3457007" y="602832"/>
                 <a:ext cx="1475014" cy="1475014"/>
               </a:xfrm>
               <a:prstGeom prst="ellipse">
@@ -10339,41 +12543,70 @@
                       <m:jc m:val="centerGroup"/>
                     </m:oMathParaPr>
                     <m:oMath xmlns:m="http://schemas.openxmlformats.org/officeDocument/2006/math">
-                      <m:f>
-                        <m:fPr>
-                          <m:ctrlPr>
-                            <a:rPr lang="en-US" b="0" i="1" smtClean="0">
-                              <a:latin typeface="Cambria Math" panose="02040503050406030204" pitchFamily="18" charset="0"/>
-                            </a:rPr>
-                          </m:ctrlPr>
-                        </m:fPr>
-                        <m:num>
-                          <m:r>
-                            <a:rPr lang="en-US" b="0" i="1" smtClean="0">
-                              <a:latin typeface="Cambria Math" panose="02040503050406030204" pitchFamily="18" charset="0"/>
-                            </a:rPr>
-                            <m:t>𝐻𝑒𝑎𝑡𝑖𝑛𝑔</m:t>
-                          </m:r>
-                        </m:num>
-                        <m:den>
-                          <m:r>
-                            <a:rPr lang="en-US" b="0" i="1" smtClean="0">
-                              <a:latin typeface="Cambria Math" panose="02040503050406030204" pitchFamily="18" charset="0"/>
-                            </a:rPr>
-                            <m:t>𝐶𝑜𝑜𝑙𝑖𝑛𝑔</m:t>
-                          </m:r>
-                          <m:r>
-                            <a:rPr lang="en-US" b="0" i="1" smtClean="0">
-                              <a:latin typeface="Cambria Math" panose="02040503050406030204" pitchFamily="18" charset="0"/>
-                            </a:rPr>
-                            <m:t> </m:t>
-                          </m:r>
-                        </m:den>
-                      </m:f>
+                      <m:r>
+                        <a:rPr lang="en-US" b="0" i="1" smtClean="0">
+                          <a:latin typeface="Cambria Math" panose="02040503050406030204" pitchFamily="18" charset="0"/>
+                        </a:rPr>
+                        <m:t>𝑇h𝑒𝑟𝑚𝑎𝑙</m:t>
+                      </m:r>
+                      <m:r>
+                        <a:rPr lang="en-US" b="0" i="1" smtClean="0">
+                          <a:latin typeface="Cambria Math" panose="02040503050406030204" pitchFamily="18" charset="0"/>
+                        </a:rPr>
+                        <m:t> </m:t>
+                      </m:r>
                     </m:oMath>
                   </m:oMathPara>
                 </a14:m>
-                <a:endParaRPr lang="en-US" dirty="0"/>
+                <a:endParaRPr lang="en-US" b="0" i="1" dirty="0">
+                  <a:latin typeface="Cambria Math" panose="02040503050406030204" pitchFamily="18" charset="0"/>
+                </a:endParaRPr>
+              </a:p>
+              <a:p>
+                <a:pPr algn="ctr"/>
+                <a14:m>
+                  <m:oMathPara xmlns:m="http://schemas.openxmlformats.org/officeDocument/2006/math">
+                    <m:oMathParaPr>
+                      <m:jc m:val="centerGroup"/>
+                    </m:oMathParaPr>
+                    <m:oMath xmlns:m="http://schemas.openxmlformats.org/officeDocument/2006/math">
+                      <m:r>
+                        <a:rPr lang="en-US" b="0" i="1" smtClean="0">
+                          <a:latin typeface="Cambria Math" panose="02040503050406030204" pitchFamily="18" charset="0"/>
+                        </a:rPr>
+                        <m:t>𝐶𝑜𝑛𝑡𝑟𝑜𝑙</m:t>
+                      </m:r>
+                      <m:r>
+                        <a:rPr lang="en-US" b="0" i="1" smtClean="0">
+                          <a:latin typeface="Cambria Math" panose="02040503050406030204" pitchFamily="18" charset="0"/>
+                        </a:rPr>
+                        <m:t> </m:t>
+                      </m:r>
+                    </m:oMath>
+                  </m:oMathPara>
+                </a14:m>
+                <a:endParaRPr lang="en-US" b="0" i="1" dirty="0">
+                  <a:latin typeface="Cambria Math" panose="02040503050406030204" pitchFamily="18" charset="0"/>
+                </a:endParaRPr>
+              </a:p>
+              <a:p>
+                <a:pPr algn="ctr"/>
+                <a14:m>
+                  <m:oMathPara xmlns:m="http://schemas.openxmlformats.org/officeDocument/2006/math">
+                    <m:oMathParaPr>
+                      <m:jc m:val="centerGroup"/>
+                    </m:oMathParaPr>
+                    <m:oMath xmlns:m="http://schemas.openxmlformats.org/officeDocument/2006/math">
+                      <m:r>
+                        <a:rPr lang="en-US" b="0" i="1" smtClean="0">
+                          <a:latin typeface="Cambria Math" panose="02040503050406030204" pitchFamily="18" charset="0"/>
+                        </a:rPr>
+                        <m:t>𝑆𝑦𝑠𝑡𝑒𝑚𝑠</m:t>
+                      </m:r>
+                    </m:oMath>
+                  </m:oMathPara>
+                </a14:m>
+                <a:endParaRPr lang="en-US" b="0" dirty="0"/>
               </a:p>
             </p:txBody>
           </p:sp>
@@ -10395,7 +12628,7 @@
             </p:nvSpPr>
             <p:spPr>
               <a:xfrm>
-                <a:off x="4979366" y="5252217"/>
+                <a:off x="3457007" y="602832"/>
                 <a:ext cx="1475014" cy="1475014"/>
               </a:xfrm>
               <a:prstGeom prst="ellipse">
@@ -10432,13 +12665,17 @@
               </a:ext>
             </a:extLst>
           </p:cNvPr>
-          <p:cNvCxnSpPr/>
+          <p:cNvCxnSpPr>
+            <a:cxnSpLocks/>
+            <a:stCxn id="4" idx="7"/>
+            <a:endCxn id="6" idx="3"/>
+          </p:cNvCxnSpPr>
           <p:nvPr/>
         </p:nvCxnSpPr>
         <p:spPr>
           <a:xfrm flipV="1">
-            <a:off x="4364576" y="3410104"/>
-            <a:ext cx="932116" cy="724764"/>
+            <a:off x="3605667" y="3410104"/>
+            <a:ext cx="1691025" cy="884018"/>
           </a:xfrm>
           <a:prstGeom prst="straightConnector1">
             <a:avLst/>
@@ -10473,54 +12710,14 @@
           </p:cNvPr>
           <p:cNvCxnSpPr>
             <a:cxnSpLocks/>
+            <a:stCxn id="7" idx="6"/>
           </p:cNvCxnSpPr>
           <p:nvPr/>
         </p:nvCxnSpPr>
         <p:spPr>
-          <a:xfrm flipV="1">
-            <a:off x="1753276" y="2888608"/>
-            <a:ext cx="3327405" cy="1267640"/>
-          </a:xfrm>
-          <a:prstGeom prst="straightConnector1">
-            <a:avLst/>
-          </a:prstGeom>
-          <a:ln>
-            <a:tailEnd type="triangle"/>
-          </a:ln>
-        </p:spPr>
-        <p:style>
-          <a:lnRef idx="2">
-            <a:schemeClr val="dk1"/>
-          </a:lnRef>
-          <a:fillRef idx="0">
-            <a:schemeClr val="dk1"/>
-          </a:fillRef>
-          <a:effectRef idx="1">
-            <a:schemeClr val="dk1"/>
-          </a:effectRef>
-          <a:fontRef idx="minor">
-            <a:schemeClr val="tx1"/>
-          </a:fontRef>
-        </p:style>
-      </p:cxnSp>
-      <p:cxnSp>
-        <p:nvCxnSpPr>
-          <p:cNvPr id="13" name="Straight Arrow Connector 12">
-            <a:extLst>
-              <a:ext uri="{FF2B5EF4-FFF2-40B4-BE49-F238E27FC236}">
-                <a16:creationId xmlns:a16="http://schemas.microsoft.com/office/drawing/2014/main" id="{48982866-D80C-2F19-CC37-90CE194AD870}"/>
-              </a:ext>
-            </a:extLst>
-          </p:cNvPr>
-          <p:cNvCxnSpPr>
-            <a:cxnSpLocks/>
-          </p:cNvCxnSpPr>
-          <p:nvPr/>
-        </p:nvCxnSpPr>
-        <p:spPr>
-          <a:xfrm flipV="1">
-            <a:off x="5716873" y="3626115"/>
-            <a:ext cx="101315" cy="1626102"/>
+          <a:xfrm>
+            <a:off x="2029357" y="2845832"/>
+            <a:ext cx="3051324" cy="42776"/>
           </a:xfrm>
           <a:prstGeom prst="straightConnector1">
             <a:avLst/>
@@ -10558,7 +12755,7 @@
         </p:nvSpPr>
         <p:spPr>
           <a:xfrm>
-            <a:off x="870857" y="1001486"/>
+            <a:off x="-851491" y="202239"/>
             <a:ext cx="1405834" cy="369332"/>
           </a:xfrm>
           <a:prstGeom prst="rect">
@@ -10579,6 +12776,307 @@
           </a:p>
         </p:txBody>
       </p:sp>
+      <mc:AlternateContent xmlns:mc="http://schemas.openxmlformats.org/markup-compatibility/2006">
+        <mc:Choice xmlns:a14="http://schemas.microsoft.com/office/drawing/2010/main" Requires="a14">
+          <p:sp>
+            <p:nvSpPr>
+              <p:cNvPr id="4" name="Oval 3">
+                <a:extLst>
+                  <a:ext uri="{FF2B5EF4-FFF2-40B4-BE49-F238E27FC236}">
+                    <a16:creationId xmlns:a16="http://schemas.microsoft.com/office/drawing/2014/main" id="{5A755602-2DE5-B33F-7382-183396F7C0AF}"/>
+                  </a:ext>
+                </a:extLst>
+              </p:cNvPr>
+              <p:cNvSpPr/>
+              <p:nvPr/>
+            </p:nvSpPr>
+            <p:spPr>
+              <a:xfrm>
+                <a:off x="2346664" y="4078111"/>
+                <a:ext cx="1475014" cy="1475014"/>
+              </a:xfrm>
+              <a:prstGeom prst="ellipse">
+                <a:avLst/>
+              </a:prstGeom>
+              <a:solidFill>
+                <a:srgbClr val="FFC000"/>
+              </a:solidFill>
+            </p:spPr>
+            <p:style>
+              <a:lnRef idx="1">
+                <a:schemeClr val="dk1"/>
+              </a:lnRef>
+              <a:fillRef idx="2">
+                <a:schemeClr val="dk1"/>
+              </a:fillRef>
+              <a:effectRef idx="1">
+                <a:schemeClr val="dk1"/>
+              </a:effectRef>
+              <a:fontRef idx="minor">
+                <a:schemeClr val="dk1"/>
+              </a:fontRef>
+            </p:style>
+            <p:txBody>
+              <a:bodyPr rtlCol="0" anchor="ctr"/>
+              <a:lstStyle/>
+              <a:p>
+                <a:pPr algn="ctr"/>
+                <a14:m>
+                  <m:oMathPara xmlns:m="http://schemas.openxmlformats.org/officeDocument/2006/math">
+                    <m:oMathParaPr>
+                      <m:jc m:val="centerGroup"/>
+                    </m:oMathParaPr>
+                    <m:oMath xmlns:m="http://schemas.openxmlformats.org/officeDocument/2006/math">
+                      <m:sSub>
+                        <m:sSubPr>
+                          <m:ctrlPr>
+                            <a:rPr lang="en-US" b="0" i="1" smtClean="0">
+                              <a:latin typeface="Cambria Math" panose="02040503050406030204" pitchFamily="18" charset="0"/>
+                            </a:rPr>
+                          </m:ctrlPr>
+                        </m:sSubPr>
+                        <m:e>
+                          <m:r>
+                            <a:rPr lang="en-US" b="0" i="1" smtClean="0">
+                              <a:latin typeface="Cambria Math" panose="02040503050406030204" pitchFamily="18" charset="0"/>
+                            </a:rPr>
+                            <m:t>𝐻</m:t>
+                          </m:r>
+                        </m:e>
+                        <m:sub>
+                          <m:r>
+                            <a:rPr lang="en-US" b="0" i="1" smtClean="0">
+                              <a:latin typeface="Cambria Math" panose="02040503050406030204" pitchFamily="18" charset="0"/>
+                            </a:rPr>
+                            <m:t>𝑏𝑎𝑡𝑡𝑒𝑟𝑦</m:t>
+                          </m:r>
+                        </m:sub>
+                      </m:sSub>
+                    </m:oMath>
+                  </m:oMathPara>
+                </a14:m>
+                <a:endParaRPr lang="en-US" dirty="0"/>
+              </a:p>
+            </p:txBody>
+          </p:sp>
+        </mc:Choice>
+        <mc:Fallback>
+          <p:sp>
+            <p:nvSpPr>
+              <p:cNvPr id="4" name="Oval 3">
+                <a:extLst>
+                  <a:ext uri="{FF2B5EF4-FFF2-40B4-BE49-F238E27FC236}">
+                    <a16:creationId xmlns:a16="http://schemas.microsoft.com/office/drawing/2014/main" id="{5A755602-2DE5-B33F-7382-183396F7C0AF}"/>
+                  </a:ext>
+                </a:extLst>
+              </p:cNvPr>
+              <p:cNvSpPr>
+                <a:spLocks noRot="1" noChangeAspect="1" noMove="1" noResize="1" noEditPoints="1" noAdjustHandles="1" noChangeArrowheads="1" noChangeShapeType="1" noTextEdit="1"/>
+              </p:cNvSpPr>
+              <p:nvPr/>
+            </p:nvSpPr>
+            <p:spPr>
+              <a:xfrm>
+                <a:off x="2346664" y="4078111"/>
+                <a:ext cx="1475014" cy="1475014"/>
+              </a:xfrm>
+              <a:prstGeom prst="ellipse">
+                <a:avLst/>
+              </a:prstGeom>
+              <a:blipFill>
+                <a:blip r:embed="rId6"/>
+                <a:stretch>
+                  <a:fillRect/>
+                </a:stretch>
+              </a:blipFill>
+            </p:spPr>
+            <p:txBody>
+              <a:bodyPr/>
+              <a:lstStyle/>
+              <a:p>
+                <a:r>
+                  <a:rPr lang="en-US">
+                    <a:noFill/>
+                  </a:rPr>
+                  <a:t> </a:t>
+                </a:r>
+              </a:p>
+            </p:txBody>
+          </p:sp>
+        </mc:Fallback>
+      </mc:AlternateContent>
+      <p:cxnSp>
+        <p:nvCxnSpPr>
+          <p:cNvPr id="18" name="Straight Arrow Connector 17">
+            <a:extLst>
+              <a:ext uri="{FF2B5EF4-FFF2-40B4-BE49-F238E27FC236}">
+                <a16:creationId xmlns:a16="http://schemas.microsoft.com/office/drawing/2014/main" id="{594ADEB2-A2C3-2D48-40B5-FEC61DA511F3}"/>
+              </a:ext>
+            </a:extLst>
+          </p:cNvPr>
+          <p:cNvCxnSpPr>
+            <a:cxnSpLocks/>
+            <a:stCxn id="8" idx="3"/>
+            <a:endCxn id="4" idx="0"/>
+          </p:cNvCxnSpPr>
+          <p:nvPr/>
+        </p:nvCxnSpPr>
+        <p:spPr>
+          <a:xfrm flipH="1">
+            <a:off x="3084171" y="1861835"/>
+            <a:ext cx="588847" cy="2216276"/>
+          </a:xfrm>
+          <a:prstGeom prst="straightConnector1">
+            <a:avLst/>
+          </a:prstGeom>
+          <a:ln>
+            <a:tailEnd type="triangle"/>
+          </a:ln>
+        </p:spPr>
+        <p:style>
+          <a:lnRef idx="2">
+            <a:schemeClr val="dk1"/>
+          </a:lnRef>
+          <a:fillRef idx="0">
+            <a:schemeClr val="dk1"/>
+          </a:fillRef>
+          <a:effectRef idx="1">
+            <a:schemeClr val="dk1"/>
+          </a:effectRef>
+          <a:fontRef idx="minor">
+            <a:schemeClr val="tx1"/>
+          </a:fontRef>
+        </p:style>
+      </p:cxnSp>
+      <p:cxnSp>
+        <p:nvCxnSpPr>
+          <p:cNvPr id="22" name="Straight Arrow Connector 21">
+            <a:extLst>
+              <a:ext uri="{FF2B5EF4-FFF2-40B4-BE49-F238E27FC236}">
+                <a16:creationId xmlns:a16="http://schemas.microsoft.com/office/drawing/2014/main" id="{61EB20D1-739B-94AA-2FAE-F37519427827}"/>
+              </a:ext>
+            </a:extLst>
+          </p:cNvPr>
+          <p:cNvCxnSpPr>
+            <a:cxnSpLocks/>
+            <a:stCxn id="8" idx="6"/>
+            <a:endCxn id="6" idx="0"/>
+          </p:cNvCxnSpPr>
+          <p:nvPr/>
+        </p:nvCxnSpPr>
+        <p:spPr>
+          <a:xfrm>
+            <a:off x="4932021" y="1340339"/>
+            <a:ext cx="886167" cy="810762"/>
+          </a:xfrm>
+          <a:prstGeom prst="straightConnector1">
+            <a:avLst/>
+          </a:prstGeom>
+          <a:ln>
+            <a:tailEnd type="triangle"/>
+          </a:ln>
+        </p:spPr>
+        <p:style>
+          <a:lnRef idx="2">
+            <a:schemeClr val="dk1"/>
+          </a:lnRef>
+          <a:fillRef idx="0">
+            <a:schemeClr val="dk1"/>
+          </a:fillRef>
+          <a:effectRef idx="1">
+            <a:schemeClr val="dk1"/>
+          </a:effectRef>
+          <a:fontRef idx="minor">
+            <a:schemeClr val="tx1"/>
+          </a:fontRef>
+        </p:style>
+      </p:cxnSp>
+      <p:cxnSp>
+        <p:nvCxnSpPr>
+          <p:cNvPr id="25" name="Straight Arrow Connector 24">
+            <a:extLst>
+              <a:ext uri="{FF2B5EF4-FFF2-40B4-BE49-F238E27FC236}">
+                <a16:creationId xmlns:a16="http://schemas.microsoft.com/office/drawing/2014/main" id="{E40F7B87-3B18-8971-C931-7BE0894649B4}"/>
+              </a:ext>
+            </a:extLst>
+          </p:cNvPr>
+          <p:cNvCxnSpPr>
+            <a:cxnSpLocks/>
+            <a:stCxn id="5" idx="2"/>
+            <a:endCxn id="4" idx="5"/>
+          </p:cNvCxnSpPr>
+          <p:nvPr/>
+        </p:nvCxnSpPr>
+        <p:spPr>
+          <a:xfrm flipH="1" flipV="1">
+            <a:off x="3605667" y="5337114"/>
+            <a:ext cx="1326354" cy="216011"/>
+          </a:xfrm>
+          <a:prstGeom prst="straightConnector1">
+            <a:avLst/>
+          </a:prstGeom>
+          <a:ln>
+            <a:tailEnd type="triangle"/>
+          </a:ln>
+        </p:spPr>
+        <p:style>
+          <a:lnRef idx="2">
+            <a:schemeClr val="dk1"/>
+          </a:lnRef>
+          <a:fillRef idx="0">
+            <a:schemeClr val="dk1"/>
+          </a:fillRef>
+          <a:effectRef idx="1">
+            <a:schemeClr val="dk1"/>
+          </a:effectRef>
+          <a:fontRef idx="minor">
+            <a:schemeClr val="tx1"/>
+          </a:fontRef>
+        </p:style>
+      </p:cxnSp>
+      <p:cxnSp>
+        <p:nvCxnSpPr>
+          <p:cNvPr id="28" name="Straight Arrow Connector 27">
+            <a:extLst>
+              <a:ext uri="{FF2B5EF4-FFF2-40B4-BE49-F238E27FC236}">
+                <a16:creationId xmlns:a16="http://schemas.microsoft.com/office/drawing/2014/main" id="{A96ED5D9-6294-3E96-4846-06C337C8F16C}"/>
+              </a:ext>
+            </a:extLst>
+          </p:cNvPr>
+          <p:cNvCxnSpPr>
+            <a:cxnSpLocks/>
+            <a:stCxn id="5" idx="0"/>
+            <a:endCxn id="6" idx="4"/>
+          </p:cNvCxnSpPr>
+          <p:nvPr/>
+        </p:nvCxnSpPr>
+        <p:spPr>
+          <a:xfrm flipV="1">
+            <a:off x="5669528" y="3626115"/>
+            <a:ext cx="148660" cy="1189503"/>
+          </a:xfrm>
+          <a:prstGeom prst="straightConnector1">
+            <a:avLst/>
+          </a:prstGeom>
+          <a:ln>
+            <a:tailEnd type="triangle"/>
+          </a:ln>
+        </p:spPr>
+        <p:style>
+          <a:lnRef idx="2">
+            <a:schemeClr val="dk1"/>
+          </a:lnRef>
+          <a:fillRef idx="0">
+            <a:schemeClr val="dk1"/>
+          </a:fillRef>
+          <a:effectRef idx="1">
+            <a:schemeClr val="dk1"/>
+          </a:effectRef>
+          <a:fontRef idx="minor">
+            <a:schemeClr val="tx1"/>
+          </a:fontRef>
+        </p:style>
+      </p:cxnSp>
     </p:spTree>
     <p:extLst>
       <p:ext uri="{BB962C8B-B14F-4D97-AF65-F5344CB8AC3E}">
